--- a/proposal.pptx
+++ b/proposal.pptx
@@ -3093,7 +3093,7 @@
     <p:bg>
       <p:bgPr>
         <a:solidFill>
-          <a:srgbClr val="F8FAFD"/>
+          <a:srgbClr val="F8FAF8"/>
         </a:solidFill>
         <a:effectLst/>
       </p:bgPr>
@@ -3107,44 +3107,37 @@
       <p:grpSpPr/>
       <p:sp>
         <p:nvSpPr>
-          <p:cNvPr id="2" name="Rectangle 1"/>
-          <p:cNvSpPr/>
-          <p:nvPr/>
-        </p:nvSpPr>
-        <p:spPr>
-          <a:xfrm>
-            <a:off x="0" y="0"/>
-            <a:ext cx="12191695" cy="91440"/>
-          </a:xfrm>
-          <a:prstGeom prst="rect">
-            <a:avLst/>
-          </a:prstGeom>
-          <a:solidFill>
-            <a:srgbClr val="1F5FD1"/>
-          </a:solidFill>
-          <a:ln>
-            <a:noFill/>
-          </a:ln>
-        </p:spPr>
-        <p:style>
-          <a:lnRef idx="1">
-            <a:schemeClr val="accent1"/>
-          </a:lnRef>
-          <a:fillRef idx="3">
-            <a:schemeClr val="accent1"/>
-          </a:fillRef>
-          <a:effectRef idx="2">
-            <a:schemeClr val="accent1"/>
-          </a:effectRef>
-          <a:fontRef idx="minor">
-            <a:schemeClr val="lt1"/>
-          </a:fontRef>
-        </p:style>
-        <p:txBody>
-          <a:bodyPr rtlCol="0" anchor="ctr"/>
-          <a:lstStyle/>
-          <a:p>
-            <a:pPr algn="ctr"/>
+          <p:cNvPr id="2" name="TextBox 1"/>
+          <p:cNvSpPr txBox="1"/>
+          <p:nvPr/>
+        </p:nvSpPr>
+        <p:spPr>
+          <a:xfrm>
+            <a:off x="594360" y="320040"/>
+            <a:ext cx="10972800" cy="457200"/>
+          </a:xfrm>
+          <a:prstGeom prst="rect">
+            <a:avLst/>
+          </a:prstGeom>
+          <a:noFill/>
+        </p:spPr>
+        <p:txBody>
+          <a:bodyPr wrap="square">
+            <a:spAutoFit/>
+          </a:bodyPr>
+          <a:lstStyle/>
+          <a:p>
+            <a:pPr>
+              <a:defRPr sz="1200" b="1">
+                <a:solidFill>
+                  <a:srgbClr val="167663"/>
+                </a:solidFill>
+                <a:latin typeface="Yu Gothic"/>
+              </a:defRPr>
+            </a:pPr>
+            <a:r>
+              <a:t>IKS / FIELD DX × CONSTRUCTION NETWORK</a:t>
+            </a:r>
           </a:p>
         </p:txBody>
       </p:sp>
@@ -3156,33 +3149,30 @@
         </p:nvSpPr>
         <p:spPr>
           <a:xfrm>
-            <a:off x="594360" y="320040"/>
-            <a:ext cx="10972800" cy="320040"/>
-          </a:xfrm>
-          <a:prstGeom prst="rect">
-            <a:avLst/>
-          </a:prstGeom>
-          <a:noFill/>
-        </p:spPr>
-        <p:txBody>
-          <a:bodyPr wrap="square">
-            <a:spAutoFit/>
-          </a:bodyPr>
-          <a:lstStyle/>
-          <a:p>
-            <a:pPr>
-              <a:spcAft>
-                <a:spcPts val="800"/>
-              </a:spcAft>
-              <a:defRPr sz="1200" b="1">
-                <a:solidFill>
-                  <a:srgbClr val="1F5FD1"/>
-                </a:solidFill>
-                <a:latin typeface="Yu Gothic"/>
-              </a:defRPr>
-            </a:pPr>
-            <a:r>
-              <a:t>IKS  /  FIELD DX &amp; CONSTRUCTION NETWORK</a:t>
+            <a:off x="594360" y="914400"/>
+            <a:ext cx="10972800" cy="1143000"/>
+          </a:xfrm>
+          <a:prstGeom prst="rect">
+            <a:avLst/>
+          </a:prstGeom>
+          <a:noFill/>
+        </p:spPr>
+        <p:txBody>
+          <a:bodyPr wrap="square">
+            <a:spAutoFit/>
+          </a:bodyPr>
+          <a:lstStyle/>
+          <a:p>
+            <a:pPr>
+              <a:defRPr sz="2700" b="1">
+                <a:solidFill>
+                  <a:srgbClr val="152D39"/>
+                </a:solidFill>
+                <a:latin typeface="Yu Gothic"/>
+              </a:defRPr>
+            </a:pPr>
+            <a:r>
+              <a:t>距離を、取引の障壁にしない。</a:t>
             </a:r>
           </a:p>
         </p:txBody>
@@ -3195,33 +3185,30 @@
         </p:nvSpPr>
         <p:spPr>
           <a:xfrm>
-            <a:off x="594360" y="868680"/>
-            <a:ext cx="10972800" cy="960120"/>
-          </a:xfrm>
-          <a:prstGeom prst="rect">
-            <a:avLst/>
-          </a:prstGeom>
-          <a:noFill/>
-        </p:spPr>
-        <p:txBody>
-          <a:bodyPr wrap="square">
-            <a:spAutoFit/>
-          </a:bodyPr>
-          <a:lstStyle/>
-          <a:p>
-            <a:pPr>
-              <a:spcAft>
-                <a:spcPts val="800"/>
-              </a:spcAft>
-              <a:defRPr sz="2900" b="1">
-                <a:solidFill>
-                  <a:srgbClr val="13213D"/>
-                </a:solidFill>
-                <a:latin typeface="Yu Gothic"/>
-              </a:defRPr>
-            </a:pPr>
-            <a:r>
-              <a:t>現場の距離を、ビジネスの限界にしない。</a:t>
+            <a:off x="594360" y="2103120"/>
+            <a:ext cx="10972800" cy="548640"/>
+          </a:xfrm>
+          <a:prstGeom prst="rect">
+            <a:avLst/>
+          </a:prstGeom>
+          <a:noFill/>
+        </p:spPr>
+        <p:txBody>
+          <a:bodyPr wrap="square">
+            <a:spAutoFit/>
+          </a:bodyPr>
+          <a:lstStyle/>
+          <a:p>
+            <a:pPr>
+              <a:defRPr sz="1800" b="1">
+                <a:solidFill>
+                  <a:srgbClr val="167663"/>
+                </a:solidFill>
+                <a:latin typeface="Yu Gothic"/>
+              </a:defRPr>
+            </a:pPr>
+            <a:r>
+              <a:t>IKS｜現場DX × 全国施工ネットワーク構想</a:t>
             </a:r>
           </a:p>
         </p:txBody>
@@ -3234,33 +3221,30 @@
         </p:nvSpPr>
         <p:spPr>
           <a:xfrm>
-            <a:off x="594360" y="1847088"/>
-            <a:ext cx="10972800" cy="548640"/>
-          </a:xfrm>
-          <a:prstGeom prst="rect">
-            <a:avLst/>
-          </a:prstGeom>
-          <a:noFill/>
-        </p:spPr>
-        <p:txBody>
-          <a:bodyPr wrap="square">
-            <a:spAutoFit/>
-          </a:bodyPr>
-          <a:lstStyle/>
-          <a:p>
-            <a:pPr>
-              <a:spcAft>
-                <a:spcPts val="800"/>
-              </a:spcAft>
-              <a:defRPr sz="1900" b="1">
-                <a:solidFill>
-                  <a:srgbClr val="1F5FD1"/>
-                </a:solidFill>
-                <a:latin typeface="Yu Gothic"/>
-              </a:defRPr>
-            </a:pPr>
-            <a:r>
-              <a:t>現場DX × 地域の施工ネットワーク</a:t>
+            <a:off x="731520" y="2852928"/>
+            <a:ext cx="10789920" cy="749808"/>
+          </a:xfrm>
+          <a:prstGeom prst="rect">
+            <a:avLst/>
+          </a:prstGeom>
+          <a:noFill/>
+        </p:spPr>
+        <p:txBody>
+          <a:bodyPr wrap="square">
+            <a:spAutoFit/>
+          </a:bodyPr>
+          <a:lstStyle/>
+          <a:p>
+            <a:pPr>
+              <a:defRPr sz="1800" b="0">
+                <a:solidFill>
+                  <a:srgbClr val="152D39"/>
+                </a:solidFill>
+                <a:latin typeface="Yu Gothic"/>
+              </a:defRPr>
+            </a:pPr>
+            <a:r>
+              <a:t>• 遠いから現場に行けない。時間とコストがかかる。対応できる人材が限られる。こうした建設業界の当たり前を変えたい。</a:t>
             </a:r>
           </a:p>
         </p:txBody>
@@ -3273,33 +3257,30 @@
         </p:nvSpPr>
         <p:spPr>
           <a:xfrm>
-            <a:off x="731520" y="2651760"/>
-            <a:ext cx="10789920" cy="694944"/>
-          </a:xfrm>
-          <a:prstGeom prst="rect">
-            <a:avLst/>
-          </a:prstGeom>
-          <a:noFill/>
-        </p:spPr>
-        <p:txBody>
-          <a:bodyPr wrap="square">
-            <a:spAutoFit/>
-          </a:bodyPr>
-          <a:lstStyle/>
-          <a:p>
-            <a:pPr>
-              <a:spcAft>
-                <a:spcPts val="800"/>
-              </a:spcAft>
-              <a:defRPr sz="1900" b="0">
-                <a:solidFill>
-                  <a:srgbClr val="13213D"/>
-                </a:solidFill>
-                <a:latin typeface="Yu Gothic"/>
-              </a:defRPr>
-            </a:pPr>
-            <a:r>
-              <a:t>• 建設業の現場調査・施工・管理を、共通のデジタル基盤でつなぐ事業構想。</a:t>
+            <a:off x="731520" y="3657600"/>
+            <a:ext cx="10789920" cy="749808"/>
+          </a:xfrm>
+          <a:prstGeom prst="rect">
+            <a:avLst/>
+          </a:prstGeom>
+          <a:noFill/>
+        </p:spPr>
+        <p:txBody>
+          <a:bodyPr wrap="square">
+            <a:spAutoFit/>
+          </a:bodyPr>
+          <a:lstStyle/>
+          <a:p>
+            <a:pPr>
+              <a:defRPr sz="1800" b="0">
+                <a:solidFill>
+                  <a:srgbClr val="152D39"/>
+                </a:solidFill>
+                <a:latin typeface="Yu Gothic"/>
+              </a:defRPr>
+            </a:pPr>
+            <a:r>
+              <a:t>• 現場調査、施工、管理をデジタルでつなぎ、全国の企業と地域の施工会社が連携できる仕組みを目指す。</a:t>
             </a:r>
           </a:p>
         </p:txBody>
@@ -3312,33 +3293,30 @@
         </p:nvSpPr>
         <p:spPr>
           <a:xfrm>
-            <a:off x="731520" y="3401568"/>
-            <a:ext cx="10789920" cy="694944"/>
-          </a:xfrm>
-          <a:prstGeom prst="rect">
-            <a:avLst/>
-          </a:prstGeom>
-          <a:noFill/>
-        </p:spPr>
-        <p:txBody>
-          <a:bodyPr wrap="square">
-            <a:spAutoFit/>
-          </a:bodyPr>
-          <a:lstStyle/>
-          <a:p>
-            <a:pPr>
-              <a:spcAft>
-                <a:spcPts val="800"/>
-              </a:spcAft>
-              <a:defRPr sz="1900" b="0">
-                <a:solidFill>
-                  <a:srgbClr val="13213D"/>
-                </a:solidFill>
-                <a:latin typeface="Yu Gothic"/>
-              </a:defRPr>
-            </a:pPr>
-            <a:r>
-              <a:t>• 企業が遠方の案件にも対応できる環境を、地域の協力会社と共につくる。</a:t>
+            <a:off x="594360" y="5806440"/>
+            <a:ext cx="10789920" cy="594360"/>
+          </a:xfrm>
+          <a:prstGeom prst="rect">
+            <a:avLst/>
+          </a:prstGeom>
+          <a:noFill/>
+        </p:spPr>
+        <p:txBody>
+          <a:bodyPr wrap="square">
+            <a:spAutoFit/>
+          </a:bodyPr>
+          <a:lstStyle/>
+          <a:p>
+            <a:pPr>
+              <a:defRPr sz="1100" b="0">
+                <a:solidFill>
+                  <a:srgbClr val="62727B"/>
+                </a:solidFill>
+                <a:latin typeface="Yu Gothic"/>
+              </a:defRPr>
+            </a:pPr>
+            <a:r>
+              <a:t>全国対応が完成していることを示すものではなく、実証を通じて段階的に構築する事業構想。</a:t>
             </a:r>
           </a:p>
         </p:txBody>
@@ -3351,105 +3329,24 @@
         </p:nvSpPr>
         <p:spPr>
           <a:xfrm>
-            <a:off x="731520" y="4151376"/>
-            <a:ext cx="10789920" cy="694944"/>
-          </a:xfrm>
-          <a:prstGeom prst="rect">
-            <a:avLst/>
-          </a:prstGeom>
-          <a:noFill/>
-        </p:spPr>
-        <p:txBody>
-          <a:bodyPr wrap="square">
-            <a:spAutoFit/>
-          </a:bodyPr>
-          <a:lstStyle/>
-          <a:p>
-            <a:pPr>
-              <a:spcAft>
-                <a:spcPts val="800"/>
-              </a:spcAft>
-              <a:defRPr sz="1900" b="0">
-                <a:solidFill>
-                  <a:srgbClr val="13213D"/>
-                </a:solidFill>
-                <a:latin typeface="Yu Gothic"/>
-              </a:defRPr>
-            </a:pPr>
-            <a:r>
-              <a:t>• IKS｜企業向け提案資料・構想段階</a:t>
-            </a:r>
-          </a:p>
-        </p:txBody>
-      </p:sp>
-      <p:sp>
-        <p:nvSpPr>
-          <p:cNvPr id="9" name="TextBox 8"/>
-          <p:cNvSpPr txBox="1"/>
-          <p:nvPr/>
-        </p:nvSpPr>
-        <p:spPr>
-          <a:xfrm>
-            <a:off x="594360" y="6062472"/>
-            <a:ext cx="10789920" cy="502920"/>
-          </a:xfrm>
-          <a:prstGeom prst="rect">
-            <a:avLst/>
-          </a:prstGeom>
-          <a:noFill/>
-        </p:spPr>
-        <p:txBody>
-          <a:bodyPr wrap="square">
-            <a:spAutoFit/>
-          </a:bodyPr>
-          <a:lstStyle/>
-          <a:p>
-            <a:pPr>
-              <a:spcAft>
-                <a:spcPts val="800"/>
-              </a:spcAft>
-              <a:defRPr sz="1100" b="0">
-                <a:solidFill>
-                  <a:srgbClr val="506074"/>
-                </a:solidFill>
-                <a:latin typeface="Yu Gothic"/>
-              </a:defRPr>
-            </a:pPr>
-            <a:r>
-              <a:t>構想段階｜実証により品質・費用対効果を確認します。</a:t>
-            </a:r>
-          </a:p>
-        </p:txBody>
-      </p:sp>
-      <p:sp>
-        <p:nvSpPr>
-          <p:cNvPr id="10" name="TextBox 9"/>
-          <p:cNvSpPr txBox="1"/>
-          <p:nvPr/>
-        </p:nvSpPr>
-        <p:spPr>
-          <a:xfrm>
-            <a:off x="11064240" y="6455664"/>
-            <a:ext cx="548640" cy="228600"/>
-          </a:xfrm>
-          <a:prstGeom prst="rect">
-            <a:avLst/>
-          </a:prstGeom>
-          <a:noFill/>
-        </p:spPr>
-        <p:txBody>
-          <a:bodyPr wrap="square">
-            <a:spAutoFit/>
-          </a:bodyPr>
-          <a:lstStyle/>
-          <a:p>
-            <a:pPr>
-              <a:spcAft>
-                <a:spcPts val="800"/>
-              </a:spcAft>
+            <a:off x="11018520" y="6446520"/>
+            <a:ext cx="594360" cy="274320"/>
+          </a:xfrm>
+          <a:prstGeom prst="rect">
+            <a:avLst/>
+          </a:prstGeom>
+          <a:noFill/>
+        </p:spPr>
+        <p:txBody>
+          <a:bodyPr wrap="square">
+            <a:spAutoFit/>
+          </a:bodyPr>
+          <a:lstStyle/>
+          <a:p>
+            <a:pPr>
               <a:defRPr sz="1000" b="0">
                 <a:solidFill>
-                  <a:srgbClr val="506074"/>
+                  <a:srgbClr val="62727B"/>
                 </a:solidFill>
                 <a:latin typeface="Yu Gothic"/>
               </a:defRPr>
@@ -3474,7 +3371,7 @@
     <p:bg>
       <p:bgPr>
         <a:solidFill>
-          <a:srgbClr val="F8FAFD"/>
+          <a:srgbClr val="F8FAF8"/>
         </a:solidFill>
         <a:effectLst/>
       </p:bgPr>
@@ -3488,44 +3385,37 @@
       <p:grpSpPr/>
       <p:sp>
         <p:nvSpPr>
-          <p:cNvPr id="2" name="Rectangle 1"/>
-          <p:cNvSpPr/>
-          <p:nvPr/>
-        </p:nvSpPr>
-        <p:spPr>
-          <a:xfrm>
-            <a:off x="0" y="0"/>
-            <a:ext cx="12191695" cy="91440"/>
-          </a:xfrm>
-          <a:prstGeom prst="rect">
-            <a:avLst/>
-          </a:prstGeom>
-          <a:solidFill>
-            <a:srgbClr val="1F5FD1"/>
-          </a:solidFill>
-          <a:ln>
-            <a:noFill/>
-          </a:ln>
-        </p:spPr>
-        <p:style>
-          <a:lnRef idx="1">
-            <a:schemeClr val="accent1"/>
-          </a:lnRef>
-          <a:fillRef idx="3">
-            <a:schemeClr val="accent1"/>
-          </a:fillRef>
-          <a:effectRef idx="2">
-            <a:schemeClr val="accent1"/>
-          </a:effectRef>
-          <a:fontRef idx="minor">
-            <a:schemeClr val="lt1"/>
-          </a:fontRef>
-        </p:style>
-        <p:txBody>
-          <a:bodyPr rtlCol="0" anchor="ctr"/>
-          <a:lstStyle/>
-          <a:p>
-            <a:pPr algn="ctr"/>
+          <p:cNvPr id="2" name="TextBox 1"/>
+          <p:cNvSpPr txBox="1"/>
+          <p:nvPr/>
+        </p:nvSpPr>
+        <p:spPr>
+          <a:xfrm>
+            <a:off x="594360" y="320040"/>
+            <a:ext cx="10972800" cy="457200"/>
+          </a:xfrm>
+          <a:prstGeom prst="rect">
+            <a:avLst/>
+          </a:prstGeom>
+          <a:noFill/>
+        </p:spPr>
+        <p:txBody>
+          <a:bodyPr wrap="square">
+            <a:spAutoFit/>
+          </a:bodyPr>
+          <a:lstStyle/>
+          <a:p>
+            <a:pPr>
+              <a:defRPr sz="1200" b="1">
+                <a:solidFill>
+                  <a:srgbClr val="167663"/>
+                </a:solidFill>
+                <a:latin typeface="Yu Gothic"/>
+              </a:defRPr>
+            </a:pPr>
+            <a:r>
+              <a:t>IKS / FIELD DX × CONSTRUCTION NETWORK</a:t>
+            </a:r>
           </a:p>
         </p:txBody>
       </p:sp>
@@ -3537,33 +3427,30 @@
         </p:nvSpPr>
         <p:spPr>
           <a:xfrm>
-            <a:off x="594360" y="320040"/>
-            <a:ext cx="10972800" cy="320040"/>
-          </a:xfrm>
-          <a:prstGeom prst="rect">
-            <a:avLst/>
-          </a:prstGeom>
-          <a:noFill/>
-        </p:spPr>
-        <p:txBody>
-          <a:bodyPr wrap="square">
-            <a:spAutoFit/>
-          </a:bodyPr>
-          <a:lstStyle/>
-          <a:p>
-            <a:pPr>
-              <a:spcAft>
-                <a:spcPts val="800"/>
-              </a:spcAft>
-              <a:defRPr sz="1200" b="1">
-                <a:solidFill>
-                  <a:srgbClr val="1F5FD1"/>
-                </a:solidFill>
-                <a:latin typeface="Yu Gothic"/>
-              </a:defRPr>
-            </a:pPr>
-            <a:r>
-              <a:t>IKS  /  FIELD DX &amp; CONSTRUCTION NETWORK</a:t>
+            <a:off x="594360" y="914400"/>
+            <a:ext cx="10972800" cy="1143000"/>
+          </a:xfrm>
+          <a:prstGeom prst="rect">
+            <a:avLst/>
+          </a:prstGeom>
+          <a:noFill/>
+        </p:spPr>
+        <p:txBody>
+          <a:bodyPr wrap="square">
+            <a:spAutoFit/>
+          </a:bodyPr>
+          <a:lstStyle/>
+          <a:p>
+            <a:pPr>
+              <a:defRPr sz="2700" b="1">
+                <a:solidFill>
+                  <a:srgbClr val="152D39"/>
+                </a:solidFill>
+                <a:latin typeface="Yu Gothic"/>
+              </a:defRPr>
+            </a:pPr>
+            <a:r>
+              <a:t>09｜新しい取引の形を、共につくりませんか。</a:t>
             </a:r>
           </a:p>
         </p:txBody>
@@ -3576,33 +3463,30 @@
         </p:nvSpPr>
         <p:spPr>
           <a:xfrm>
-            <a:off x="594360" y="868680"/>
-            <a:ext cx="10972800" cy="960120"/>
-          </a:xfrm>
-          <a:prstGeom prst="rect">
-            <a:avLst/>
-          </a:prstGeom>
-          <a:noFill/>
-        </p:spPr>
-        <p:txBody>
-          <a:bodyPr wrap="square">
-            <a:spAutoFit/>
-          </a:bodyPr>
-          <a:lstStyle/>
-          <a:p>
-            <a:pPr>
-              <a:spcAft>
-                <a:spcPts val="800"/>
-              </a:spcAft>
-              <a:defRPr sz="2900" b="1">
-                <a:solidFill>
-                  <a:srgbClr val="13213D"/>
-                </a:solidFill>
-                <a:latin typeface="Yu Gothic"/>
-              </a:defRPr>
-            </a:pPr>
-            <a:r>
-              <a:t>09｜まず一つの現場で、共に確かめませんか。</a:t>
+            <a:off x="594360" y="2103120"/>
+            <a:ext cx="10972800" cy="548640"/>
+          </a:xfrm>
+          <a:prstGeom prst="rect">
+            <a:avLst/>
+          </a:prstGeom>
+          <a:noFill/>
+        </p:spPr>
+        <p:txBody>
+          <a:bodyPr wrap="square">
+            <a:spAutoFit/>
+          </a:bodyPr>
+          <a:lstStyle/>
+          <a:p>
+            <a:pPr>
+              <a:defRPr sz="1800" b="1">
+                <a:solidFill>
+                  <a:srgbClr val="167663"/>
+                </a:solidFill>
+                <a:latin typeface="Yu Gothic"/>
+              </a:defRPr>
+            </a:pPr>
+            <a:r>
+              <a:t>メーカー・商社・施工会社・技術者の皆さまへ</a:t>
             </a:r>
           </a:p>
         </p:txBody>
@@ -3615,33 +3499,30 @@
         </p:nvSpPr>
         <p:spPr>
           <a:xfrm>
-            <a:off x="594360" y="1847088"/>
-            <a:ext cx="10972800" cy="548640"/>
-          </a:xfrm>
-          <a:prstGeom prst="rect">
-            <a:avLst/>
-          </a:prstGeom>
-          <a:noFill/>
-        </p:spPr>
-        <p:txBody>
-          <a:bodyPr wrap="square">
-            <a:spAutoFit/>
-          </a:bodyPr>
-          <a:lstStyle/>
-          <a:p>
-            <a:pPr>
-              <a:spcAft>
-                <a:spcPts val="800"/>
-              </a:spcAft>
-              <a:defRPr sz="1900" b="1">
-                <a:solidFill>
-                  <a:srgbClr val="1F5FD1"/>
-                </a:solidFill>
-                <a:latin typeface="Yu Gothic"/>
-              </a:defRPr>
-            </a:pPr>
-            <a:r>
-              <a:t>実証協力のお願い</a:t>
+            <a:off x="731520" y="2852928"/>
+            <a:ext cx="10789920" cy="749808"/>
+          </a:xfrm>
+          <a:prstGeom prst="rect">
+            <a:avLst/>
+          </a:prstGeom>
+          <a:noFill/>
+        </p:spPr>
+        <p:txBody>
+          <a:bodyPr wrap="square">
+            <a:spAutoFit/>
+          </a:bodyPr>
+          <a:lstStyle/>
+          <a:p>
+            <a:pPr>
+              <a:defRPr sz="1800" b="0">
+                <a:solidFill>
+                  <a:srgbClr val="152D39"/>
+                </a:solidFill>
+                <a:latin typeface="Yu Gothic"/>
+              </a:defRPr>
+            </a:pPr>
+            <a:r>
+              <a:t>• 一社だけで完成する構想ではない。各社の経験と強みをつなぎ、仕事に地域の限界をつくらない未来へ。</a:t>
             </a:r>
           </a:p>
         </p:txBody>
@@ -3654,33 +3535,30 @@
         </p:nvSpPr>
         <p:spPr>
           <a:xfrm>
-            <a:off x="731520" y="2651760"/>
-            <a:ext cx="10789920" cy="694944"/>
-          </a:xfrm>
-          <a:prstGeom prst="rect">
-            <a:avLst/>
-          </a:prstGeom>
-          <a:noFill/>
-        </p:spPr>
-        <p:txBody>
-          <a:bodyPr wrap="square">
-            <a:spAutoFit/>
-          </a:bodyPr>
-          <a:lstStyle/>
-          <a:p>
-            <a:pPr>
-              <a:spcAft>
-                <a:spcPts val="800"/>
-              </a:spcAft>
-              <a:defRPr sz="1900" b="0">
-                <a:solidFill>
-                  <a:srgbClr val="13213D"/>
-                </a:solidFill>
-                <a:latin typeface="Yu Gothic"/>
-              </a:defRPr>
-            </a:pPr>
-            <a:r>
-              <a:t>• 対象候補：大阪から福岡へ、詳しい担当者が現場調査に出張している業務。</a:t>
+            <a:off x="731520" y="3657600"/>
+            <a:ext cx="10789920" cy="749808"/>
+          </a:xfrm>
+          <a:prstGeom prst="rect">
+            <a:avLst/>
+          </a:prstGeom>
+          <a:noFill/>
+        </p:spPr>
+        <p:txBody>
+          <a:bodyPr wrap="square">
+            <a:spAutoFit/>
+          </a:bodyPr>
+          <a:lstStyle/>
+          <a:p>
+            <a:pPr>
+              <a:defRPr sz="1800" b="0">
+                <a:solidFill>
+                  <a:srgbClr val="152D39"/>
+                </a:solidFill>
+                <a:latin typeface="Yu Gothic"/>
+              </a:defRPr>
+            </a:pPr>
+            <a:r>
+              <a:t>• 実証への協力：対象案件の選定、調査手順・帳票の共有、実費・工数の確認、現地・遠隔担当者の選定。</a:t>
             </a:r>
           </a:p>
         </p:txBody>
@@ -3693,33 +3571,30 @@
         </p:nvSpPr>
         <p:spPr>
           <a:xfrm>
-            <a:off x="731520" y="3401568"/>
-            <a:ext cx="10789920" cy="694944"/>
-          </a:xfrm>
-          <a:prstGeom prst="rect">
-            <a:avLst/>
-          </a:prstGeom>
-          <a:noFill/>
-        </p:spPr>
-        <p:txBody>
-          <a:bodyPr wrap="square">
-            <a:spAutoFit/>
-          </a:bodyPr>
-          <a:lstStyle/>
-          <a:p>
-            <a:pPr>
-              <a:spcAft>
-                <a:spcPts val="800"/>
-              </a:spcAft>
-              <a:defRPr sz="1900" b="0">
-                <a:solidFill>
-                  <a:srgbClr val="13213D"/>
-                </a:solidFill>
-                <a:latin typeface="Yu Gothic"/>
-              </a:defRPr>
-            </a:pPr>
-            <a:r>
-              <a:t>• ご協力いただきたいこと：調査手順・帳票の共有、実費と工数の確認、対象案件の選定。</a:t>
+            <a:off x="731520" y="4462272"/>
+            <a:ext cx="10789920" cy="749808"/>
+          </a:xfrm>
+          <a:prstGeom prst="rect">
+            <a:avLst/>
+          </a:prstGeom>
+          <a:noFill/>
+        </p:spPr>
+        <p:txBody>
+          <a:bodyPr wrap="square">
+            <a:spAutoFit/>
+          </a:bodyPr>
+          <a:lstStyle/>
+          <a:p>
+            <a:pPr>
+              <a:defRPr sz="1800" b="0">
+                <a:solidFill>
+                  <a:srgbClr val="152D39"/>
+                </a:solidFill>
+                <a:latin typeface="Yu Gothic"/>
+              </a:defRPr>
+            </a:pPr>
+            <a:r>
+              <a:t>• 共同で決めること：責任分担、実証期間、費用負担、情報の取り扱い。</a:t>
             </a:r>
           </a:p>
         </p:txBody>
@@ -3732,33 +3607,30 @@
         </p:nvSpPr>
         <p:spPr>
           <a:xfrm>
-            <a:off x="731520" y="4151376"/>
-            <a:ext cx="10789920" cy="694944"/>
-          </a:xfrm>
-          <a:prstGeom prst="rect">
-            <a:avLst/>
-          </a:prstGeom>
-          <a:noFill/>
-        </p:spPr>
-        <p:txBody>
-          <a:bodyPr wrap="square">
-            <a:spAutoFit/>
-          </a:bodyPr>
-          <a:lstStyle/>
-          <a:p>
-            <a:pPr>
-              <a:spcAft>
-                <a:spcPts val="800"/>
-              </a:spcAft>
-              <a:defRPr sz="1900" b="0">
-                <a:solidFill>
-                  <a:srgbClr val="13213D"/>
-                </a:solidFill>
-                <a:latin typeface="Yu Gothic"/>
-              </a:defRPr>
-            </a:pPr>
-            <a:r>
-              <a:t>• 共同で決めること：現地担当者、遠隔確認者、責任分担、実証期間、費用、情報の取り扱い。</a:t>
+            <a:off x="594360" y="5806440"/>
+            <a:ext cx="10789920" cy="594360"/>
+          </a:xfrm>
+          <a:prstGeom prst="rect">
+            <a:avLst/>
+          </a:prstGeom>
+          <a:noFill/>
+        </p:spPr>
+        <p:txBody>
+          <a:bodyPr wrap="square">
+            <a:spAutoFit/>
+          </a:bodyPr>
+          <a:lstStyle/>
+          <a:p>
+            <a:pPr>
+              <a:defRPr sz="1100" b="0">
+                <a:solidFill>
+                  <a:srgbClr val="62727B"/>
+                </a:solidFill>
+                <a:latin typeface="Yu Gothic"/>
+              </a:defRPr>
+            </a:pPr>
+            <a:r>
+              <a:t>お問い合わせ窓口は準備中。連絡先の確定後に掲載。</a:t>
             </a:r>
           </a:p>
         </p:txBody>
@@ -3771,105 +3643,24 @@
         </p:nvSpPr>
         <p:spPr>
           <a:xfrm>
-            <a:off x="731520" y="4901184"/>
-            <a:ext cx="10789920" cy="694944"/>
-          </a:xfrm>
-          <a:prstGeom prst="rect">
-            <a:avLst/>
-          </a:prstGeom>
-          <a:noFill/>
-        </p:spPr>
-        <p:txBody>
-          <a:bodyPr wrap="square">
-            <a:spAutoFit/>
-          </a:bodyPr>
-          <a:lstStyle/>
-          <a:p>
-            <a:pPr>
-              <a:spcAft>
-                <a:spcPts val="800"/>
-              </a:spcAft>
-              <a:defRPr sz="1900" b="0">
-                <a:solidFill>
-                  <a:srgbClr val="13213D"/>
-                </a:solidFill>
-                <a:latin typeface="Yu Gothic"/>
-              </a:defRPr>
-            </a:pPr>
-            <a:r>
-              <a:t>• IKSが提案する役割：調査手順の整理、デジタル基盤の設計、記録・評価方法の整備。</a:t>
-            </a:r>
-          </a:p>
-        </p:txBody>
-      </p:sp>
-      <p:sp>
-        <p:nvSpPr>
-          <p:cNvPr id="10" name="TextBox 9"/>
-          <p:cNvSpPr txBox="1"/>
-          <p:nvPr/>
-        </p:nvSpPr>
-        <p:spPr>
-          <a:xfrm>
-            <a:off x="594360" y="6062472"/>
-            <a:ext cx="10789920" cy="502920"/>
-          </a:xfrm>
-          <a:prstGeom prst="rect">
-            <a:avLst/>
-          </a:prstGeom>
-          <a:noFill/>
-        </p:spPr>
-        <p:txBody>
-          <a:bodyPr wrap="square">
-            <a:spAutoFit/>
-          </a:bodyPr>
-          <a:lstStyle/>
-          <a:p>
-            <a:pPr>
-              <a:spcAft>
-                <a:spcPts val="800"/>
-              </a:spcAft>
-              <a:defRPr sz="1100" b="0">
-                <a:solidFill>
-                  <a:srgbClr val="506074"/>
-                </a:solidFill>
-                <a:latin typeface="Yu Gothic"/>
-              </a:defRPr>
-            </a:pPr>
-            <a:r>
-              <a:t>連絡先：［正式名称・担当者・メール・電話・URLを確定後に記載］</a:t>
-            </a:r>
-          </a:p>
-        </p:txBody>
-      </p:sp>
-      <p:sp>
-        <p:nvSpPr>
-          <p:cNvPr id="11" name="TextBox 10"/>
-          <p:cNvSpPr txBox="1"/>
-          <p:nvPr/>
-        </p:nvSpPr>
-        <p:spPr>
-          <a:xfrm>
-            <a:off x="11064240" y="6455664"/>
-            <a:ext cx="548640" cy="228600"/>
-          </a:xfrm>
-          <a:prstGeom prst="rect">
-            <a:avLst/>
-          </a:prstGeom>
-          <a:noFill/>
-        </p:spPr>
-        <p:txBody>
-          <a:bodyPr wrap="square">
-            <a:spAutoFit/>
-          </a:bodyPr>
-          <a:lstStyle/>
-          <a:p>
-            <a:pPr>
-              <a:spcAft>
-                <a:spcPts val="800"/>
-              </a:spcAft>
+            <a:off x="11018520" y="6446520"/>
+            <a:ext cx="594360" cy="274320"/>
+          </a:xfrm>
+          <a:prstGeom prst="rect">
+            <a:avLst/>
+          </a:prstGeom>
+          <a:noFill/>
+        </p:spPr>
+        <p:txBody>
+          <a:bodyPr wrap="square">
+            <a:spAutoFit/>
+          </a:bodyPr>
+          <a:lstStyle/>
+          <a:p>
+            <a:pPr>
               <a:defRPr sz="1000" b="0">
                 <a:solidFill>
-                  <a:srgbClr val="506074"/>
+                  <a:srgbClr val="62727B"/>
                 </a:solidFill>
                 <a:latin typeface="Yu Gothic"/>
               </a:defRPr>
@@ -3894,7 +3685,7 @@
     <p:bg>
       <p:bgPr>
         <a:solidFill>
-          <a:srgbClr val="F8FAFD"/>
+          <a:srgbClr val="F8FAF8"/>
         </a:solidFill>
         <a:effectLst/>
       </p:bgPr>
@@ -3908,44 +3699,37 @@
       <p:grpSpPr/>
       <p:sp>
         <p:nvSpPr>
-          <p:cNvPr id="2" name="Rectangle 1"/>
-          <p:cNvSpPr/>
-          <p:nvPr/>
-        </p:nvSpPr>
-        <p:spPr>
-          <a:xfrm>
-            <a:off x="0" y="0"/>
-            <a:ext cx="12191695" cy="91440"/>
-          </a:xfrm>
-          <a:prstGeom prst="rect">
-            <a:avLst/>
-          </a:prstGeom>
-          <a:solidFill>
-            <a:srgbClr val="1F5FD1"/>
-          </a:solidFill>
-          <a:ln>
-            <a:noFill/>
-          </a:ln>
-        </p:spPr>
-        <p:style>
-          <a:lnRef idx="1">
-            <a:schemeClr val="accent1"/>
-          </a:lnRef>
-          <a:fillRef idx="3">
-            <a:schemeClr val="accent1"/>
-          </a:fillRef>
-          <a:effectRef idx="2">
-            <a:schemeClr val="accent1"/>
-          </a:effectRef>
-          <a:fontRef idx="minor">
-            <a:schemeClr val="lt1"/>
-          </a:fontRef>
-        </p:style>
-        <p:txBody>
-          <a:bodyPr rtlCol="0" anchor="ctr"/>
-          <a:lstStyle/>
-          <a:p>
-            <a:pPr algn="ctr"/>
+          <p:cNvPr id="2" name="TextBox 1"/>
+          <p:cNvSpPr txBox="1"/>
+          <p:nvPr/>
+        </p:nvSpPr>
+        <p:spPr>
+          <a:xfrm>
+            <a:off x="594360" y="320040"/>
+            <a:ext cx="10972800" cy="457200"/>
+          </a:xfrm>
+          <a:prstGeom prst="rect">
+            <a:avLst/>
+          </a:prstGeom>
+          <a:noFill/>
+        </p:spPr>
+        <p:txBody>
+          <a:bodyPr wrap="square">
+            <a:spAutoFit/>
+          </a:bodyPr>
+          <a:lstStyle/>
+          <a:p>
+            <a:pPr>
+              <a:defRPr sz="1200" b="1">
+                <a:solidFill>
+                  <a:srgbClr val="167663"/>
+                </a:solidFill>
+                <a:latin typeface="Yu Gothic"/>
+              </a:defRPr>
+            </a:pPr>
+            <a:r>
+              <a:t>IKS / FIELD DX × CONSTRUCTION NETWORK</a:t>
+            </a:r>
           </a:p>
         </p:txBody>
       </p:sp>
@@ -3957,33 +3741,30 @@
         </p:nvSpPr>
         <p:spPr>
           <a:xfrm>
-            <a:off x="594360" y="320040"/>
-            <a:ext cx="10972800" cy="320040"/>
-          </a:xfrm>
-          <a:prstGeom prst="rect">
-            <a:avLst/>
-          </a:prstGeom>
-          <a:noFill/>
-        </p:spPr>
-        <p:txBody>
-          <a:bodyPr wrap="square">
-            <a:spAutoFit/>
-          </a:bodyPr>
-          <a:lstStyle/>
-          <a:p>
-            <a:pPr>
-              <a:spcAft>
-                <a:spcPts val="800"/>
-              </a:spcAft>
-              <a:defRPr sz="1200" b="1">
-                <a:solidFill>
-                  <a:srgbClr val="1F5FD1"/>
-                </a:solidFill>
-                <a:latin typeface="Yu Gothic"/>
-              </a:defRPr>
-            </a:pPr>
-            <a:r>
-              <a:t>IKS  /  FIELD DX &amp; CONSTRUCTION NETWORK</a:t>
+            <a:off x="594360" y="914400"/>
+            <a:ext cx="10972800" cy="1143000"/>
+          </a:xfrm>
+          <a:prstGeom prst="rect">
+            <a:avLst/>
+          </a:prstGeom>
+          <a:noFill/>
+        </p:spPr>
+        <p:txBody>
+          <a:bodyPr wrap="square">
+            <a:spAutoFit/>
+          </a:bodyPr>
+          <a:lstStyle/>
+          <a:p>
+            <a:pPr>
+              <a:defRPr sz="2700" b="1">
+                <a:solidFill>
+                  <a:srgbClr val="152D39"/>
+                </a:solidFill>
+                <a:latin typeface="Yu Gothic"/>
+              </a:defRPr>
+            </a:pPr>
+            <a:r>
+              <a:t>01｜人が減る時代に、仕事の可能性を広げる。</a:t>
             </a:r>
           </a:p>
         </p:txBody>
@@ -3996,33 +3777,30 @@
         </p:nvSpPr>
         <p:spPr>
           <a:xfrm>
-            <a:off x="594360" y="868680"/>
-            <a:ext cx="10972800" cy="960120"/>
-          </a:xfrm>
-          <a:prstGeom prst="rect">
-            <a:avLst/>
-          </a:prstGeom>
-          <a:noFill/>
-        </p:spPr>
-        <p:txBody>
-          <a:bodyPr wrap="square">
-            <a:spAutoFit/>
-          </a:bodyPr>
-          <a:lstStyle/>
-          <a:p>
-            <a:pPr>
-              <a:spcAft>
-                <a:spcPts val="800"/>
-              </a:spcAft>
-              <a:defRPr sz="2900" b="1">
-                <a:solidFill>
-                  <a:srgbClr val="13213D"/>
-                </a:solidFill>
-                <a:latin typeface="Yu Gothic"/>
-              </a:defRPr>
-            </a:pPr>
-            <a:r>
-              <a:t>01｜なぜ今、この仕組みが必要なのか</a:t>
+            <a:off x="594360" y="2103120"/>
+            <a:ext cx="10972800" cy="548640"/>
+          </a:xfrm>
+          <a:prstGeom prst="rect">
+            <a:avLst/>
+          </a:prstGeom>
+          <a:noFill/>
+        </p:spPr>
+        <p:txBody>
+          <a:bodyPr wrap="square">
+            <a:spAutoFit/>
+          </a:bodyPr>
+          <a:lstStyle/>
+          <a:p>
+            <a:pPr>
+              <a:defRPr sz="1800" b="1">
+                <a:solidFill>
+                  <a:srgbClr val="167663"/>
+                </a:solidFill>
+                <a:latin typeface="Yu Gothic"/>
+              </a:defRPr>
+            </a:pPr>
+            <a:r>
+              <a:t>移動しなくても、情報と仕事がつながる仕組みへ</a:t>
             </a:r>
           </a:p>
         </p:txBody>
@@ -4035,33 +3813,30 @@
         </p:nvSpPr>
         <p:spPr>
           <a:xfrm>
-            <a:off x="594360" y="1847088"/>
-            <a:ext cx="10972800" cy="548640"/>
-          </a:xfrm>
-          <a:prstGeom prst="rect">
-            <a:avLst/>
-          </a:prstGeom>
-          <a:noFill/>
-        </p:spPr>
-        <p:txBody>
-          <a:bodyPr wrap="square">
-            <a:spAutoFit/>
-          </a:bodyPr>
-          <a:lstStyle/>
-          <a:p>
-            <a:pPr>
-              <a:spcAft>
-                <a:spcPts val="800"/>
-              </a:spcAft>
-              <a:defRPr sz="1900" b="1">
-                <a:solidFill>
-                  <a:srgbClr val="1F5FD1"/>
-                </a:solidFill>
-                <a:latin typeface="Yu Gothic"/>
-              </a:defRPr>
-            </a:pPr>
-            <a:r>
-              <a:t>限られた人材を、移動よりも判断と現場対応に活かす</a:t>
+            <a:off x="731520" y="2852928"/>
+            <a:ext cx="10789920" cy="749808"/>
+          </a:xfrm>
+          <a:prstGeom prst="rect">
+            <a:avLst/>
+          </a:prstGeom>
+          <a:noFill/>
+        </p:spPr>
+        <p:txBody>
+          <a:bodyPr wrap="square">
+            <a:spAutoFit/>
+          </a:bodyPr>
+          <a:lstStyle/>
+          <a:p>
+            <a:pPr>
+              <a:defRPr sz="1800" b="0">
+                <a:solidFill>
+                  <a:srgbClr val="152D39"/>
+                </a:solidFill>
+                <a:latin typeface="Yu Gothic"/>
+              </a:defRPr>
+            </a:pPr>
+            <a:r>
+              <a:t>• 建設業就業者：1997年685万人 → 2024年477万人。約208万人減、約30％減（計算値30.4％）。</a:t>
             </a:r>
           </a:p>
         </p:txBody>
@@ -4074,33 +3849,30 @@
         </p:nvSpPr>
         <p:spPr>
           <a:xfrm>
-            <a:off x="731520" y="2651760"/>
-            <a:ext cx="10789920" cy="694944"/>
-          </a:xfrm>
-          <a:prstGeom prst="rect">
-            <a:avLst/>
-          </a:prstGeom>
-          <a:noFill/>
-        </p:spPr>
-        <p:txBody>
-          <a:bodyPr wrap="square">
-            <a:spAutoFit/>
-          </a:bodyPr>
-          <a:lstStyle/>
-          <a:p>
-            <a:pPr>
-              <a:spcAft>
-                <a:spcPts val="800"/>
-              </a:spcAft>
-              <a:defRPr sz="1900" b="0">
-                <a:solidFill>
-                  <a:srgbClr val="13213D"/>
-                </a:solidFill>
-                <a:latin typeface="Yu Gothic"/>
-              </a:defRPr>
-            </a:pPr>
-            <a:r>
-              <a:t>• 建設業就業者：1997年685万人 → 2024年477万人。208万人減、約30.4％減。</a:t>
+            <a:off x="731520" y="3657600"/>
+            <a:ext cx="10789920" cy="749808"/>
+          </a:xfrm>
+          <a:prstGeom prst="rect">
+            <a:avLst/>
+          </a:prstGeom>
+          <a:noFill/>
+        </p:spPr>
+        <p:txBody>
+          <a:bodyPr wrap="square">
+            <a:spAutoFit/>
+          </a:bodyPr>
+          <a:lstStyle/>
+          <a:p>
+            <a:pPr>
+              <a:defRPr sz="1800" b="0">
+                <a:solidFill>
+                  <a:srgbClr val="152D39"/>
+                </a:solidFill>
+                <a:latin typeface="Yu Gothic"/>
+              </a:defRPr>
+            </a:pPr>
+            <a:r>
+              <a:t>• 限られた人材で仕事に対応するために、知識・技術を地域を越えて活かす。</a:t>
             </a:r>
           </a:p>
         </p:txBody>
@@ -4113,33 +3885,30 @@
         </p:nvSpPr>
         <p:spPr>
           <a:xfrm>
-            <a:off x="731520" y="3401568"/>
-            <a:ext cx="10789920" cy="694944"/>
-          </a:xfrm>
-          <a:prstGeom prst="rect">
-            <a:avLst/>
-          </a:prstGeom>
-          <a:noFill/>
-        </p:spPr>
-        <p:txBody>
-          <a:bodyPr wrap="square">
-            <a:spAutoFit/>
-          </a:bodyPr>
-          <a:lstStyle/>
-          <a:p>
-            <a:pPr>
-              <a:spcAft>
-                <a:spcPts val="800"/>
-              </a:spcAft>
-              <a:defRPr sz="1900" b="0">
-                <a:solidFill>
-                  <a:srgbClr val="13213D"/>
-                </a:solidFill>
-                <a:latin typeface="Yu Gothic"/>
-              </a:defRPr>
-            </a:pPr>
-            <a:r>
-              <a:t>• 2024年の年齢構成：55歳以上36.7％、29歳以下11.7％。</a:t>
+            <a:off x="731520" y="4462272"/>
+            <a:ext cx="10789920" cy="749808"/>
+          </a:xfrm>
+          <a:prstGeom prst="rect">
+            <a:avLst/>
+          </a:prstGeom>
+          <a:noFill/>
+        </p:spPr>
+        <p:txBody>
+          <a:bodyPr wrap="square">
+            <a:spAutoFit/>
+          </a:bodyPr>
+          <a:lstStyle/>
+          <a:p>
+            <a:pPr>
+              <a:defRPr sz="1800" b="0">
+                <a:solidFill>
+                  <a:srgbClr val="152D39"/>
+                </a:solidFill>
+                <a:latin typeface="Yu Gothic"/>
+              </a:defRPr>
+            </a:pPr>
+            <a:r>
+              <a:t>• 単なる業務効率化に留めず、遠方の取引にも対応できる環境を目指す。</a:t>
             </a:r>
           </a:p>
         </p:txBody>
@@ -4152,33 +3921,30 @@
         </p:nvSpPr>
         <p:spPr>
           <a:xfrm>
-            <a:off x="731520" y="4151376"/>
-            <a:ext cx="10789920" cy="694944"/>
-          </a:xfrm>
-          <a:prstGeom prst="rect">
-            <a:avLst/>
-          </a:prstGeom>
-          <a:noFill/>
-        </p:spPr>
-        <p:txBody>
-          <a:bodyPr wrap="square">
-            <a:spAutoFit/>
-          </a:bodyPr>
-          <a:lstStyle/>
-          <a:p>
-            <a:pPr>
-              <a:spcAft>
-                <a:spcPts val="800"/>
-              </a:spcAft>
-              <a:defRPr sz="1900" b="0">
-                <a:solidFill>
-                  <a:srgbClr val="13213D"/>
-                </a:solidFill>
-                <a:latin typeface="Yu Gothic"/>
-              </a:defRPr>
-            </a:pPr>
-            <a:r>
-              <a:t>• 人材の減少・高齢化に対し、経験者の知識を複数の現場で使える仕組みが必要。</a:t>
+            <a:off x="594360" y="5806440"/>
+            <a:ext cx="10789920" cy="594360"/>
+          </a:xfrm>
+          <a:prstGeom prst="rect">
+            <a:avLst/>
+          </a:prstGeom>
+          <a:noFill/>
+        </p:spPr>
+        <p:txBody>
+          <a:bodyPr wrap="square">
+            <a:spAutoFit/>
+          </a:bodyPr>
+          <a:lstStyle/>
+          <a:p>
+            <a:pPr>
+              <a:defRPr sz="1100" b="0">
+                <a:solidFill>
+                  <a:srgbClr val="62727B"/>
+                </a:solidFill>
+                <a:latin typeface="Yu Gothic"/>
+              </a:defRPr>
+            </a:pPr>
+            <a:r>
+              <a:t>参考値・原資料照合前：総務省「労働力調査」に基づく国土交通省資料を出典とする提供情報。数値は概数。2024年値であり最新値とは断定しない。</a:t>
             </a:r>
           </a:p>
         </p:txBody>
@@ -4191,66 +3957,24 @@
         </p:nvSpPr>
         <p:spPr>
           <a:xfrm>
-            <a:off x="594360" y="6062472"/>
-            <a:ext cx="10789920" cy="502920"/>
-          </a:xfrm>
-          <a:prstGeom prst="rect">
-            <a:avLst/>
-          </a:prstGeom>
-          <a:noFill/>
-        </p:spPr>
-        <p:txBody>
-          <a:bodyPr wrap="square">
-            <a:spAutoFit/>
-          </a:bodyPr>
-          <a:lstStyle/>
-          <a:p>
-            <a:pPr>
-              <a:spcAft>
-                <a:spcPts val="800"/>
-              </a:spcAft>
-              <a:defRPr sz="1100" b="0">
-                <a:solidFill>
-                  <a:srgbClr val="506074"/>
-                </a:solidFill>
-                <a:latin typeface="Yu Gothic"/>
-              </a:defRPr>
-            </a:pPr>
-            <a:r>
-              <a:t>出典：ご提示の国土交通省資料（総務省「労働力調査」等）。原資料の表題・URL・頁は配布前に照合。2024年値であり最新値とは断定しない。</a:t>
-            </a:r>
-          </a:p>
-        </p:txBody>
-      </p:sp>
-      <p:sp>
-        <p:nvSpPr>
-          <p:cNvPr id="10" name="TextBox 9"/>
-          <p:cNvSpPr txBox="1"/>
-          <p:nvPr/>
-        </p:nvSpPr>
-        <p:spPr>
-          <a:xfrm>
-            <a:off x="11064240" y="6455664"/>
-            <a:ext cx="548640" cy="228600"/>
-          </a:xfrm>
-          <a:prstGeom prst="rect">
-            <a:avLst/>
-          </a:prstGeom>
-          <a:noFill/>
-        </p:spPr>
-        <p:txBody>
-          <a:bodyPr wrap="square">
-            <a:spAutoFit/>
-          </a:bodyPr>
-          <a:lstStyle/>
-          <a:p>
-            <a:pPr>
-              <a:spcAft>
-                <a:spcPts val="800"/>
-              </a:spcAft>
+            <a:off x="11018520" y="6446520"/>
+            <a:ext cx="594360" cy="274320"/>
+          </a:xfrm>
+          <a:prstGeom prst="rect">
+            <a:avLst/>
+          </a:prstGeom>
+          <a:noFill/>
+        </p:spPr>
+        <p:txBody>
+          <a:bodyPr wrap="square">
+            <a:spAutoFit/>
+          </a:bodyPr>
+          <a:lstStyle/>
+          <a:p>
+            <a:pPr>
               <a:defRPr sz="1000" b="0">
                 <a:solidFill>
-                  <a:srgbClr val="506074"/>
+                  <a:srgbClr val="62727B"/>
                 </a:solidFill>
                 <a:latin typeface="Yu Gothic"/>
               </a:defRPr>
@@ -4275,7 +3999,7 @@
     <p:bg>
       <p:bgPr>
         <a:solidFill>
-          <a:srgbClr val="F8FAFD"/>
+          <a:srgbClr val="F8FAF8"/>
         </a:solidFill>
         <a:effectLst/>
       </p:bgPr>
@@ -4289,44 +4013,37 @@
       <p:grpSpPr/>
       <p:sp>
         <p:nvSpPr>
-          <p:cNvPr id="2" name="Rectangle 1"/>
-          <p:cNvSpPr/>
-          <p:nvPr/>
-        </p:nvSpPr>
-        <p:spPr>
-          <a:xfrm>
-            <a:off x="0" y="0"/>
-            <a:ext cx="12191695" cy="91440"/>
-          </a:xfrm>
-          <a:prstGeom prst="rect">
-            <a:avLst/>
-          </a:prstGeom>
-          <a:solidFill>
-            <a:srgbClr val="1F5FD1"/>
-          </a:solidFill>
-          <a:ln>
-            <a:noFill/>
-          </a:ln>
-        </p:spPr>
-        <p:style>
-          <a:lnRef idx="1">
-            <a:schemeClr val="accent1"/>
-          </a:lnRef>
-          <a:fillRef idx="3">
-            <a:schemeClr val="accent1"/>
-          </a:fillRef>
-          <a:effectRef idx="2">
-            <a:schemeClr val="accent1"/>
-          </a:effectRef>
-          <a:fontRef idx="minor">
-            <a:schemeClr val="lt1"/>
-          </a:fontRef>
-        </p:style>
-        <p:txBody>
-          <a:bodyPr rtlCol="0" anchor="ctr"/>
-          <a:lstStyle/>
-          <a:p>
-            <a:pPr algn="ctr"/>
+          <p:cNvPr id="2" name="TextBox 1"/>
+          <p:cNvSpPr txBox="1"/>
+          <p:nvPr/>
+        </p:nvSpPr>
+        <p:spPr>
+          <a:xfrm>
+            <a:off x="594360" y="320040"/>
+            <a:ext cx="10972800" cy="457200"/>
+          </a:xfrm>
+          <a:prstGeom prst="rect">
+            <a:avLst/>
+          </a:prstGeom>
+          <a:noFill/>
+        </p:spPr>
+        <p:txBody>
+          <a:bodyPr wrap="square">
+            <a:spAutoFit/>
+          </a:bodyPr>
+          <a:lstStyle/>
+          <a:p>
+            <a:pPr>
+              <a:defRPr sz="1200" b="1">
+                <a:solidFill>
+                  <a:srgbClr val="167663"/>
+                </a:solidFill>
+                <a:latin typeface="Yu Gothic"/>
+              </a:defRPr>
+            </a:pPr>
+            <a:r>
+              <a:t>IKS / FIELD DX × CONSTRUCTION NETWORK</a:t>
+            </a:r>
           </a:p>
         </p:txBody>
       </p:sp>
@@ -4338,33 +4055,30 @@
         </p:nvSpPr>
         <p:spPr>
           <a:xfrm>
-            <a:off x="594360" y="320040"/>
-            <a:ext cx="10972800" cy="320040"/>
-          </a:xfrm>
-          <a:prstGeom prst="rect">
-            <a:avLst/>
-          </a:prstGeom>
-          <a:noFill/>
-        </p:spPr>
-        <p:txBody>
-          <a:bodyPr wrap="square">
-            <a:spAutoFit/>
-          </a:bodyPr>
-          <a:lstStyle/>
-          <a:p>
-            <a:pPr>
-              <a:spcAft>
-                <a:spcPts val="800"/>
-              </a:spcAft>
-              <a:defRPr sz="1200" b="1">
-                <a:solidFill>
-                  <a:srgbClr val="1F5FD1"/>
-                </a:solidFill>
-                <a:latin typeface="Yu Gothic"/>
-              </a:defRPr>
-            </a:pPr>
-            <a:r>
-              <a:t>IKS  /  FIELD DX &amp; CONSTRUCTION NETWORK</a:t>
+            <a:off x="594360" y="914400"/>
+            <a:ext cx="10972800" cy="1143000"/>
+          </a:xfrm>
+          <a:prstGeom prst="rect">
+            <a:avLst/>
+          </a:prstGeom>
+          <a:noFill/>
+        </p:spPr>
+        <p:txBody>
+          <a:bodyPr wrap="square">
+            <a:spAutoFit/>
+          </a:bodyPr>
+          <a:lstStyle/>
+          <a:p>
+            <a:pPr>
+              <a:defRPr sz="2700" b="1">
+                <a:solidFill>
+                  <a:srgbClr val="152D39"/>
+                </a:solidFill>
+                <a:latin typeface="Yu Gothic"/>
+              </a:defRPr>
+            </a:pPr>
+            <a:r>
+              <a:t>02｜距離が遠い。それだけで、取引を諦めていないか。</a:t>
             </a:r>
           </a:p>
         </p:txBody>
@@ -4377,33 +4091,30 @@
         </p:nvSpPr>
         <p:spPr>
           <a:xfrm>
-            <a:off x="594360" y="868680"/>
-            <a:ext cx="10972800" cy="960120"/>
-          </a:xfrm>
-          <a:prstGeom prst="rect">
-            <a:avLst/>
-          </a:prstGeom>
-          <a:noFill/>
-        </p:spPr>
-        <p:txBody>
-          <a:bodyPr wrap="square">
-            <a:spAutoFit/>
-          </a:bodyPr>
-          <a:lstStyle/>
-          <a:p>
-            <a:pPr>
-              <a:spcAft>
-                <a:spcPts val="800"/>
-              </a:spcAft>
-              <a:defRPr sz="2900" b="1">
-                <a:solidFill>
-                  <a:srgbClr val="13213D"/>
-                </a:solidFill>
-                <a:latin typeface="Yu Gothic"/>
-              </a:defRPr>
-            </a:pPr>
-            <a:r>
-              <a:t>02｜拠点はある。それでも、大阪から出張する。</a:t>
+            <a:off x="594360" y="2103120"/>
+            <a:ext cx="10972800" cy="548640"/>
+          </a:xfrm>
+          <a:prstGeom prst="rect">
+            <a:avLst/>
+          </a:prstGeom>
+          <a:noFill/>
+        </p:spPr>
+        <p:txBody>
+          <a:bodyPr wrap="square">
+            <a:spAutoFit/>
+          </a:bodyPr>
+          <a:lstStyle/>
+          <a:p>
+            <a:pPr>
+              <a:defRPr sz="1800" b="1">
+                <a:solidFill>
+                  <a:srgbClr val="167663"/>
+                </a:solidFill>
+                <a:latin typeface="Yu Gothic"/>
+              </a:defRPr>
+            </a:pPr>
+            <a:r>
+              <a:t>距離が生む、費用と時間と機会の制約</a:t>
             </a:r>
           </a:p>
         </p:txBody>
@@ -4416,33 +4127,30 @@
         </p:nvSpPr>
         <p:spPr>
           <a:xfrm>
-            <a:off x="594360" y="1847088"/>
-            <a:ext cx="10972800" cy="548640"/>
-          </a:xfrm>
-          <a:prstGeom prst="rect">
-            <a:avLst/>
-          </a:prstGeom>
-          <a:noFill/>
-        </p:spPr>
-        <p:txBody>
-          <a:bodyPr wrap="square">
-            <a:spAutoFit/>
-          </a:bodyPr>
-          <a:lstStyle/>
-          <a:p>
-            <a:pPr>
-              <a:spcAft>
-                <a:spcPts val="800"/>
-              </a:spcAft>
-              <a:defRPr sz="1900" b="1">
-                <a:solidFill>
-                  <a:srgbClr val="1F5FD1"/>
-                </a:solidFill>
-                <a:latin typeface="Yu Gothic"/>
-              </a:defRPr>
-            </a:pPr>
-            <a:r>
-              <a:t>T社の状況から見える、地域対応の課題</a:t>
+            <a:off x="731520" y="2852928"/>
+            <a:ext cx="10789920" cy="749808"/>
+          </a:xfrm>
+          <a:prstGeom prst="rect">
+            <a:avLst/>
+          </a:prstGeom>
+          <a:noFill/>
+        </p:spPr>
+        <p:txBody>
+          <a:bodyPr wrap="square">
+            <a:spAutoFit/>
+          </a:bodyPr>
+          <a:lstStyle/>
+          <a:p>
+            <a:pPr>
+              <a:defRPr sz="1800" b="0">
+                <a:solidFill>
+                  <a:srgbClr val="152D39"/>
+                </a:solidFill>
+                <a:latin typeface="Yu Gothic"/>
+              </a:defRPr>
+            </a:pPr>
+            <a:r>
+              <a:t>• 大阪の企業が福岡の案件に対応する際、現場調査、打ち合わせ、施工確認のために何度も現地へ足を運ぶ場合がある。</a:t>
             </a:r>
           </a:p>
         </p:txBody>
@@ -4455,33 +4163,30 @@
         </p:nvSpPr>
         <p:spPr>
           <a:xfrm>
-            <a:off x="731520" y="2651760"/>
-            <a:ext cx="10789920" cy="694944"/>
-          </a:xfrm>
-          <a:prstGeom prst="rect">
-            <a:avLst/>
-          </a:prstGeom>
-          <a:noFill/>
-        </p:spPr>
-        <p:txBody>
-          <a:bodyPr wrap="square">
-            <a:spAutoFit/>
-          </a:bodyPr>
-          <a:lstStyle/>
-          <a:p>
-            <a:pPr>
-              <a:spcAft>
-                <a:spcPts val="800"/>
-              </a:spcAft>
-              <a:defRPr sz="1900" b="0">
-                <a:solidFill>
-                  <a:srgbClr val="13213D"/>
-                </a:solidFill>
-                <a:latin typeface="Yu Gothic"/>
-              </a:defRPr>
-            </a:pPr>
-            <a:r>
-              <a:t>• T社には関西・福岡・東京・名古屋などに拠点がある。</a:t>
+            <a:off x="731520" y="3657600"/>
+            <a:ext cx="10789920" cy="749808"/>
+          </a:xfrm>
+          <a:prstGeom prst="rect">
+            <a:avLst/>
+          </a:prstGeom>
+          <a:noFill/>
+        </p:spPr>
+        <p:txBody>
+          <a:bodyPr wrap="square">
+            <a:spAutoFit/>
+          </a:bodyPr>
+          <a:lstStyle/>
+          <a:p>
+            <a:pPr>
+              <a:defRPr sz="1800" b="0">
+                <a:solidFill>
+                  <a:srgbClr val="152D39"/>
+                </a:solidFill>
+                <a:latin typeface="Yu Gothic"/>
+              </a:defRPr>
+            </a:pPr>
+            <a:r>
+              <a:t>• 移動費だけでなく、移動時間や担当者の拘束が対応できる案件数を制約する。</a:t>
             </a:r>
           </a:p>
         </p:txBody>
@@ -4494,33 +4199,30 @@
         </p:nvSpPr>
         <p:spPr>
           <a:xfrm>
-            <a:off x="731520" y="3401568"/>
-            <a:ext cx="10789920" cy="694944"/>
-          </a:xfrm>
-          <a:prstGeom prst="rect">
-            <a:avLst/>
-          </a:prstGeom>
-          <a:noFill/>
-        </p:spPr>
-        <p:txBody>
-          <a:bodyPr wrap="square">
-            <a:spAutoFit/>
-          </a:bodyPr>
-          <a:lstStyle/>
-          <a:p>
-            <a:pPr>
-              <a:spcAft>
-                <a:spcPts val="800"/>
-              </a:spcAft>
-              <a:defRPr sz="1900" b="0">
-                <a:solidFill>
-                  <a:srgbClr val="13213D"/>
-                </a:solidFill>
-                <a:latin typeface="Yu Gothic"/>
-              </a:defRPr>
-            </a:pPr>
-            <a:r>
-              <a:t>• 現地に工事内容を把握・判断できる担当者がいない場合、大阪から出張して対応することがある。</a:t>
+            <a:off x="731520" y="4462272"/>
+            <a:ext cx="10789920" cy="749808"/>
+          </a:xfrm>
+          <a:prstGeom prst="rect">
+            <a:avLst/>
+          </a:prstGeom>
+          <a:noFill/>
+        </p:spPr>
+        <p:txBody>
+          <a:bodyPr wrap="square">
+            <a:spAutoFit/>
+          </a:bodyPr>
+          <a:lstStyle/>
+          <a:p>
+            <a:pPr>
+              <a:defRPr sz="1800" b="0">
+                <a:solidFill>
+                  <a:srgbClr val="152D39"/>
+                </a:solidFill>
+                <a:latin typeface="Yu Gothic"/>
+              </a:defRPr>
+            </a:pPr>
+            <a:r>
+              <a:t>• 現地対応の体制がないために、営業範囲や受注機会を広げにくい可能性がある。</a:t>
             </a:r>
           </a:p>
         </p:txBody>
@@ -4533,33 +4235,30 @@
         </p:nvSpPr>
         <p:spPr>
           <a:xfrm>
-            <a:off x="731520" y="4151376"/>
-            <a:ext cx="10789920" cy="694944"/>
-          </a:xfrm>
-          <a:prstGeom prst="rect">
-            <a:avLst/>
-          </a:prstGeom>
-          <a:noFill/>
-        </p:spPr>
-        <p:txBody>
-          <a:bodyPr wrap="square">
-            <a:spAutoFit/>
-          </a:bodyPr>
-          <a:lstStyle/>
-          <a:p>
-            <a:pPr>
-              <a:spcAft>
-                <a:spcPts val="800"/>
-              </a:spcAft>
-              <a:defRPr sz="1900" b="0">
-                <a:solidFill>
-                  <a:srgbClr val="13213D"/>
-                </a:solidFill>
-                <a:latin typeface="Yu Gothic"/>
-              </a:defRPr>
-            </a:pPr>
-            <a:r>
-              <a:t>• 課題① 交通費などの経費　② 移動による拘束時間　③ 遠方案件への対応の制約。</a:t>
+            <a:off x="594360" y="5806440"/>
+            <a:ext cx="10789920" cy="594360"/>
+          </a:xfrm>
+          <a:prstGeom prst="rect">
+            <a:avLst/>
+          </a:prstGeom>
+          <a:noFill/>
+        </p:spPr>
+        <p:txBody>
+          <a:bodyPr wrap="square">
+            <a:spAutoFit/>
+          </a:bodyPr>
+          <a:lstStyle/>
+          <a:p>
+            <a:pPr>
+              <a:defRPr sz="1100" b="0">
+                <a:solidFill>
+                  <a:srgbClr val="62727B"/>
+                </a:solidFill>
+                <a:latin typeface="Yu Gothic"/>
+              </a:defRPr>
+            </a:pPr>
+            <a:r>
+              <a:t>説明用の想定例。特定企業の失注実績や実測効果を示すものではない。</a:t>
             </a:r>
           </a:p>
         </p:txBody>
@@ -4572,105 +4271,24 @@
         </p:nvSpPr>
         <p:spPr>
           <a:xfrm>
-            <a:off x="731520" y="4901184"/>
-            <a:ext cx="10789920" cy="694944"/>
-          </a:xfrm>
-          <a:prstGeom prst="rect">
-            <a:avLst/>
-          </a:prstGeom>
-          <a:noFill/>
-        </p:spPr>
-        <p:txBody>
-          <a:bodyPr wrap="square">
-            <a:spAutoFit/>
-          </a:bodyPr>
-          <a:lstStyle/>
-          <a:p>
-            <a:pPr>
-              <a:spcAft>
-                <a:spcPts val="800"/>
-              </a:spcAft>
-              <a:defRPr sz="1900" b="0">
-                <a:solidFill>
-                  <a:srgbClr val="13213D"/>
-                </a:solidFill>
-                <a:latin typeface="Yu Gothic"/>
-              </a:defRPr>
-            </a:pPr>
-            <a:r>
-              <a:t>• 営業機会への影響は仮説。出張頻度、失注件数、実費は未確認。T社の事例掲載は許可・範囲を確認。</a:t>
-            </a:r>
-          </a:p>
-        </p:txBody>
-      </p:sp>
-      <p:sp>
-        <p:nvSpPr>
-          <p:cNvPr id="10" name="TextBox 9"/>
-          <p:cNvSpPr txBox="1"/>
-          <p:nvPr/>
-        </p:nvSpPr>
-        <p:spPr>
-          <a:xfrm>
-            <a:off x="594360" y="6062472"/>
-            <a:ext cx="10789920" cy="502920"/>
-          </a:xfrm>
-          <a:prstGeom prst="rect">
-            <a:avLst/>
-          </a:prstGeom>
-          <a:noFill/>
-        </p:spPr>
-        <p:txBody>
-          <a:bodyPr wrap="square">
-            <a:spAutoFit/>
-          </a:bodyPr>
-          <a:lstStyle/>
-          <a:p>
-            <a:pPr>
-              <a:spcAft>
-                <a:spcPts val="800"/>
-              </a:spcAft>
-              <a:defRPr sz="1100" b="0">
-                <a:solidFill>
-                  <a:srgbClr val="506074"/>
-                </a:solidFill>
-                <a:latin typeface="Yu Gothic"/>
-              </a:defRPr>
-            </a:pPr>
-            <a:r>
-              <a:t>構想段階｜実証により品質・費用対効果を確認します。</a:t>
-            </a:r>
-          </a:p>
-        </p:txBody>
-      </p:sp>
-      <p:sp>
-        <p:nvSpPr>
-          <p:cNvPr id="11" name="TextBox 10"/>
-          <p:cNvSpPr txBox="1"/>
-          <p:nvPr/>
-        </p:nvSpPr>
-        <p:spPr>
-          <a:xfrm>
-            <a:off x="11064240" y="6455664"/>
-            <a:ext cx="548640" cy="228600"/>
-          </a:xfrm>
-          <a:prstGeom prst="rect">
-            <a:avLst/>
-          </a:prstGeom>
-          <a:noFill/>
-        </p:spPr>
-        <p:txBody>
-          <a:bodyPr wrap="square">
-            <a:spAutoFit/>
-          </a:bodyPr>
-          <a:lstStyle/>
-          <a:p>
-            <a:pPr>
-              <a:spcAft>
-                <a:spcPts val="800"/>
-              </a:spcAft>
+            <a:off x="11018520" y="6446520"/>
+            <a:ext cx="594360" cy="274320"/>
+          </a:xfrm>
+          <a:prstGeom prst="rect">
+            <a:avLst/>
+          </a:prstGeom>
+          <a:noFill/>
+        </p:spPr>
+        <p:txBody>
+          <a:bodyPr wrap="square">
+            <a:spAutoFit/>
+          </a:bodyPr>
+          <a:lstStyle/>
+          <a:p>
+            <a:pPr>
               <a:defRPr sz="1000" b="0">
                 <a:solidFill>
-                  <a:srgbClr val="506074"/>
+                  <a:srgbClr val="62727B"/>
                 </a:solidFill>
                 <a:latin typeface="Yu Gothic"/>
               </a:defRPr>
@@ -4695,7 +4313,7 @@
     <p:bg>
       <p:bgPr>
         <a:solidFill>
-          <a:srgbClr val="F8FAFD"/>
+          <a:srgbClr val="F8FAF8"/>
         </a:solidFill>
         <a:effectLst/>
       </p:bgPr>
@@ -4709,44 +4327,37 @@
       <p:grpSpPr/>
       <p:sp>
         <p:nvSpPr>
-          <p:cNvPr id="2" name="Rectangle 1"/>
-          <p:cNvSpPr/>
-          <p:nvPr/>
-        </p:nvSpPr>
-        <p:spPr>
-          <a:xfrm>
-            <a:off x="0" y="0"/>
-            <a:ext cx="12191695" cy="91440"/>
-          </a:xfrm>
-          <a:prstGeom prst="rect">
-            <a:avLst/>
-          </a:prstGeom>
-          <a:solidFill>
-            <a:srgbClr val="1F5FD1"/>
-          </a:solidFill>
-          <a:ln>
-            <a:noFill/>
-          </a:ln>
-        </p:spPr>
-        <p:style>
-          <a:lnRef idx="1">
-            <a:schemeClr val="accent1"/>
-          </a:lnRef>
-          <a:fillRef idx="3">
-            <a:schemeClr val="accent1"/>
-          </a:fillRef>
-          <a:effectRef idx="2">
-            <a:schemeClr val="accent1"/>
-          </a:effectRef>
-          <a:fontRef idx="minor">
-            <a:schemeClr val="lt1"/>
-          </a:fontRef>
-        </p:style>
-        <p:txBody>
-          <a:bodyPr rtlCol="0" anchor="ctr"/>
-          <a:lstStyle/>
-          <a:p>
-            <a:pPr algn="ctr"/>
+          <p:cNvPr id="2" name="TextBox 1"/>
+          <p:cNvSpPr txBox="1"/>
+          <p:nvPr/>
+        </p:nvSpPr>
+        <p:spPr>
+          <a:xfrm>
+            <a:off x="594360" y="320040"/>
+            <a:ext cx="10972800" cy="457200"/>
+          </a:xfrm>
+          <a:prstGeom prst="rect">
+            <a:avLst/>
+          </a:prstGeom>
+          <a:noFill/>
+        </p:spPr>
+        <p:txBody>
+          <a:bodyPr wrap="square">
+            <a:spAutoFit/>
+          </a:bodyPr>
+          <a:lstStyle/>
+          <a:p>
+            <a:pPr>
+              <a:defRPr sz="1200" b="1">
+                <a:solidFill>
+                  <a:srgbClr val="167663"/>
+                </a:solidFill>
+                <a:latin typeface="Yu Gothic"/>
+              </a:defRPr>
+            </a:pPr>
+            <a:r>
+              <a:t>IKS / FIELD DX × CONSTRUCTION NETWORK</a:t>
+            </a:r>
           </a:p>
         </p:txBody>
       </p:sp>
@@ -4758,33 +4369,30 @@
         </p:nvSpPr>
         <p:spPr>
           <a:xfrm>
-            <a:off x="594360" y="320040"/>
-            <a:ext cx="10972800" cy="320040"/>
-          </a:xfrm>
-          <a:prstGeom prst="rect">
-            <a:avLst/>
-          </a:prstGeom>
-          <a:noFill/>
-        </p:spPr>
-        <p:txBody>
-          <a:bodyPr wrap="square">
-            <a:spAutoFit/>
-          </a:bodyPr>
-          <a:lstStyle/>
-          <a:p>
-            <a:pPr>
-              <a:spcAft>
-                <a:spcPts val="800"/>
-              </a:spcAft>
-              <a:defRPr sz="1200" b="1">
-                <a:solidFill>
-                  <a:srgbClr val="1F5FD1"/>
-                </a:solidFill>
-                <a:latin typeface="Yu Gothic"/>
-              </a:defRPr>
-            </a:pPr>
-            <a:r>
-              <a:t>IKS  /  FIELD DX &amp; CONSTRUCTION NETWORK</a:t>
+            <a:off x="594360" y="914400"/>
+            <a:ext cx="10972800" cy="1143000"/>
+          </a:xfrm>
+          <a:prstGeom prst="rect">
+            <a:avLst/>
+          </a:prstGeom>
+          <a:noFill/>
+        </p:spPr>
+        <p:txBody>
+          <a:bodyPr wrap="square">
+            <a:spAutoFit/>
+          </a:bodyPr>
+          <a:lstStyle/>
+          <a:p>
+            <a:pPr>
+              <a:defRPr sz="2700" b="1">
+                <a:solidFill>
+                  <a:srgbClr val="152D39"/>
+                </a:solidFill>
+                <a:latin typeface="Yu Gothic"/>
+              </a:defRPr>
+            </a:pPr>
+            <a:r>
+              <a:t>03｜出張1回の負担を、費用と時間で見る。</a:t>
             </a:r>
           </a:p>
         </p:txBody>
@@ -4797,33 +4405,30 @@
         </p:nvSpPr>
         <p:spPr>
           <a:xfrm>
-            <a:off x="594360" y="868680"/>
-            <a:ext cx="10972800" cy="960120"/>
-          </a:xfrm>
-          <a:prstGeom prst="rect">
-            <a:avLst/>
-          </a:prstGeom>
-          <a:noFill/>
-        </p:spPr>
-        <p:txBody>
-          <a:bodyPr wrap="square">
-            <a:spAutoFit/>
-          </a:bodyPr>
-          <a:lstStyle/>
-          <a:p>
-            <a:pPr>
-              <a:spcAft>
-                <a:spcPts val="800"/>
-              </a:spcAft>
-              <a:defRPr sz="2900" b="1">
-                <a:solidFill>
-                  <a:srgbClr val="13213D"/>
-                </a:solidFill>
-                <a:latin typeface="Yu Gothic"/>
-              </a:defRPr>
-            </a:pPr>
-            <a:r>
-              <a:t>03｜出張1回の負担を、費用と時間で見る</a:t>
+            <a:off x="594360" y="2103120"/>
+            <a:ext cx="10972800" cy="548640"/>
+          </a:xfrm>
+          <a:prstGeom prst="rect">
+            <a:avLst/>
+          </a:prstGeom>
+          <a:noFill/>
+        </p:spPr>
+        <p:txBody>
+          <a:bodyPr wrap="square">
+            <a:spAutoFit/>
+          </a:bodyPr>
+          <a:lstStyle/>
+          <a:p>
+            <a:pPr>
+              <a:defRPr sz="1800" b="1">
+                <a:solidFill>
+                  <a:srgbClr val="167663"/>
+                </a:solidFill>
+                <a:latin typeface="Yu Gothic"/>
+              </a:defRPr>
+            </a:pPr>
+            <a:r>
+              <a:t>大阪―福岡／新幹線・日帰り・1名の仮定</a:t>
             </a:r>
           </a:p>
         </p:txBody>
@@ -4836,33 +4441,30 @@
         </p:nvSpPr>
         <p:spPr>
           <a:xfrm>
-            <a:off x="594360" y="1847088"/>
-            <a:ext cx="10972800" cy="548640"/>
-          </a:xfrm>
-          <a:prstGeom prst="rect">
-            <a:avLst/>
-          </a:prstGeom>
-          <a:noFill/>
-        </p:spPr>
-        <p:txBody>
-          <a:bodyPr wrap="square">
-            <a:spAutoFit/>
-          </a:bodyPr>
-          <a:lstStyle/>
-          <a:p>
-            <a:pPr>
-              <a:spcAft>
-                <a:spcPts val="800"/>
-              </a:spcAft>
-              <a:defRPr sz="1900" b="1">
-                <a:solidFill>
-                  <a:srgbClr val="1F5FD1"/>
-                </a:solidFill>
-                <a:latin typeface="Yu Gothic"/>
-              </a:defRPr>
-            </a:pPr>
-            <a:r>
-              <a:t>大阪―福岡／新幹線・日帰り・1名の仮定</a:t>
+            <a:off x="731520" y="2852928"/>
+            <a:ext cx="10789920" cy="749808"/>
+          </a:xfrm>
+          <a:prstGeom prst="rect">
+            <a:avLst/>
+          </a:prstGeom>
+          <a:noFill/>
+        </p:spPr>
+        <p:txBody>
+          <a:bodyPr wrap="square">
+            <a:spAutoFit/>
+          </a:bodyPr>
+          <a:lstStyle/>
+          <a:p>
+            <a:pPr>
+              <a:defRPr sz="1800" b="0">
+                <a:solidFill>
+                  <a:srgbClr val="152D39"/>
+                </a:solidFill>
+                <a:latin typeface="Yu Gothic"/>
+              </a:defRPr>
+            </a:pPr>
+            <a:r>
+              <a:t>• 新幹線往復30,000円 ＋ 現地交通費5,000円 ＝ 直接経費35,000円／回。</a:t>
             </a:r>
           </a:p>
         </p:txBody>
@@ -4875,33 +4477,30 @@
         </p:nvSpPr>
         <p:spPr>
           <a:xfrm>
-            <a:off x="731520" y="2651760"/>
-            <a:ext cx="10789920" cy="694944"/>
-          </a:xfrm>
-          <a:prstGeom prst="rect">
-            <a:avLst/>
-          </a:prstGeom>
-          <a:noFill/>
-        </p:spPr>
-        <p:txBody>
-          <a:bodyPr wrap="square">
-            <a:spAutoFit/>
-          </a:bodyPr>
-          <a:lstStyle/>
-          <a:p>
-            <a:pPr>
-              <a:spcAft>
-                <a:spcPts val="800"/>
-              </a:spcAft>
-              <a:defRPr sz="1900" b="0">
-                <a:solidFill>
-                  <a:srgbClr val="13213D"/>
-                </a:solidFill>
-                <a:latin typeface="Yu Gothic"/>
-              </a:defRPr>
-            </a:pPr>
-            <a:r>
-              <a:t>• 往復交通費30,000円 ＋ 現地交通費5,000円 ＝ 直接経費35,000円／回。</a:t>
+            <a:off x="731520" y="3657600"/>
+            <a:ext cx="10789920" cy="749808"/>
+          </a:xfrm>
+          <a:prstGeom prst="rect">
+            <a:avLst/>
+          </a:prstGeom>
+          <a:noFill/>
+        </p:spPr>
+        <p:txBody>
+          <a:bodyPr wrap="square">
+            <a:spAutoFit/>
+          </a:bodyPr>
+          <a:lstStyle/>
+          <a:p>
+            <a:pPr>
+              <a:defRPr sz="1800" b="0">
+                <a:solidFill>
+                  <a:srgbClr val="152D39"/>
+                </a:solidFill>
+                <a:latin typeface="Yu Gothic"/>
+              </a:defRPr>
+            </a:pPr>
+            <a:r>
+              <a:t>• 人件費相当30,000円／日を含めた総コスト相当：65,000円／回。</a:t>
             </a:r>
           </a:p>
         </p:txBody>
@@ -4914,33 +4513,30 @@
         </p:nvSpPr>
         <p:spPr>
           <a:xfrm>
-            <a:off x="731520" y="3401568"/>
-            <a:ext cx="10789920" cy="694944"/>
-          </a:xfrm>
-          <a:prstGeom prst="rect">
-            <a:avLst/>
-          </a:prstGeom>
-          <a:noFill/>
-        </p:spPr>
-        <p:txBody>
-          <a:bodyPr wrap="square">
-            <a:spAutoFit/>
-          </a:bodyPr>
-          <a:lstStyle/>
-          <a:p>
-            <a:pPr>
-              <a:spcAft>
-                <a:spcPts val="800"/>
-              </a:spcAft>
-              <a:defRPr sz="1900" b="0">
-                <a:solidFill>
-                  <a:srgbClr val="13213D"/>
-                </a:solidFill>
-                <a:latin typeface="Yu Gothic"/>
-              </a:defRPr>
-            </a:pPr>
-            <a:r>
-              <a:t>• 担当者の人件費相当30,000円／日を含めると、総コスト相当65,000円／回。</a:t>
+            <a:off x="731520" y="4462272"/>
+            <a:ext cx="10789920" cy="749808"/>
+          </a:xfrm>
+          <a:prstGeom prst="rect">
+            <a:avLst/>
+          </a:prstGeom>
+          <a:noFill/>
+        </p:spPr>
+        <p:txBody>
+          <a:bodyPr wrap="square">
+            <a:spAutoFit/>
+          </a:bodyPr>
+          <a:lstStyle/>
+          <a:p>
+            <a:pPr>
+              <a:defRPr sz="1800" b="0">
+                <a:solidFill>
+                  <a:srgbClr val="152D39"/>
+                </a:solidFill>
+                <a:latin typeface="Yu Gothic"/>
+              </a:defRPr>
+            </a:pPr>
+            <a:r>
+              <a:t>• 月10回：直接経費35万円／総コスト相当65万円。年間120回：420万円／780万円。</a:t>
             </a:r>
           </a:p>
         </p:txBody>
@@ -4953,33 +4549,30 @@
         </p:nvSpPr>
         <p:spPr>
           <a:xfrm>
-            <a:off x="731520" y="4151376"/>
-            <a:ext cx="10789920" cy="694944"/>
-          </a:xfrm>
-          <a:prstGeom prst="rect">
-            <a:avLst/>
-          </a:prstGeom>
-          <a:noFill/>
-        </p:spPr>
-        <p:txBody>
-          <a:bodyPr wrap="square">
-            <a:spAutoFit/>
-          </a:bodyPr>
-          <a:lstStyle/>
-          <a:p>
-            <a:pPr>
-              <a:spcAft>
-                <a:spcPts val="800"/>
-              </a:spcAft>
-              <a:defRPr sz="1900" b="0">
-                <a:solidFill>
-                  <a:srgbClr val="13213D"/>
-                </a:solidFill>
-                <a:latin typeface="Yu Gothic"/>
-              </a:defRPr>
-            </a:pPr>
-            <a:r>
-              <a:t>• 月10回：直接経費35万円／総コスト相当65万円。年間120回：420万円／780万円。</a:t>
+            <a:off x="594360" y="5806440"/>
+            <a:ext cx="10789920" cy="594360"/>
+          </a:xfrm>
+          <a:prstGeom prst="rect">
+            <a:avLst/>
+          </a:prstGeom>
+          <a:noFill/>
+        </p:spPr>
+        <p:txBody>
+          <a:bodyPr wrap="square">
+            <a:spAutoFit/>
+          </a:bodyPr>
+          <a:lstStyle/>
+          <a:p>
+            <a:pPr>
+              <a:defRPr sz="1100" b="0">
+                <a:solidFill>
+                  <a:srgbClr val="62727B"/>
+                </a:solidFill>
+                <a:latin typeface="Yu Gothic"/>
+              </a:defRPr>
+            </a:pPr>
+            <a:r>
+              <a:t>仮定による試算。実際の交通費・人件費ではない。人件費相当は追加の現金支出ではなく、全額が削減できることを示さない。現地作業を含む1日分に移動時間を二重計上しない。</a:t>
             </a:r>
           </a:p>
         </p:txBody>
@@ -4992,66 +4585,24 @@
         </p:nvSpPr>
         <p:spPr>
           <a:xfrm>
-            <a:off x="594360" y="6062472"/>
-            <a:ext cx="10789920" cy="502920"/>
-          </a:xfrm>
-          <a:prstGeom prst="rect">
-            <a:avLst/>
-          </a:prstGeom>
-          <a:noFill/>
-        </p:spPr>
-        <p:txBody>
-          <a:bodyPr wrap="square">
-            <a:spAutoFit/>
-          </a:bodyPr>
-          <a:lstStyle/>
-          <a:p>
-            <a:pPr>
-              <a:spcAft>
-                <a:spcPts val="800"/>
-              </a:spcAft>
-              <a:defRPr sz="1100" b="0">
-                <a:solidFill>
-                  <a:srgbClr val="506074"/>
-                </a:solidFill>
-                <a:latin typeface="Yu Gothic"/>
-              </a:defRPr>
-            </a:pPr>
-            <a:r>
-              <a:t>説明用の仮定で、T社の実費・運賃見積りではない。1日分の人件費相当に移動時間をさらに加算しない。固定給与が同額減るとは限らず、現地調査自体の作業時間も含む。</a:t>
-            </a:r>
-          </a:p>
-        </p:txBody>
-      </p:sp>
-      <p:sp>
-        <p:nvSpPr>
-          <p:cNvPr id="10" name="TextBox 9"/>
-          <p:cNvSpPr txBox="1"/>
-          <p:nvPr/>
-        </p:nvSpPr>
-        <p:spPr>
-          <a:xfrm>
-            <a:off x="11064240" y="6455664"/>
-            <a:ext cx="548640" cy="228600"/>
-          </a:xfrm>
-          <a:prstGeom prst="rect">
-            <a:avLst/>
-          </a:prstGeom>
-          <a:noFill/>
-        </p:spPr>
-        <p:txBody>
-          <a:bodyPr wrap="square">
-            <a:spAutoFit/>
-          </a:bodyPr>
-          <a:lstStyle/>
-          <a:p>
-            <a:pPr>
-              <a:spcAft>
-                <a:spcPts val="800"/>
-              </a:spcAft>
+            <a:off x="11018520" y="6446520"/>
+            <a:ext cx="594360" cy="274320"/>
+          </a:xfrm>
+          <a:prstGeom prst="rect">
+            <a:avLst/>
+          </a:prstGeom>
+          <a:noFill/>
+        </p:spPr>
+        <p:txBody>
+          <a:bodyPr wrap="square">
+            <a:spAutoFit/>
+          </a:bodyPr>
+          <a:lstStyle/>
+          <a:p>
+            <a:pPr>
               <a:defRPr sz="1000" b="0">
                 <a:solidFill>
-                  <a:srgbClr val="506074"/>
+                  <a:srgbClr val="62727B"/>
                 </a:solidFill>
                 <a:latin typeface="Yu Gothic"/>
               </a:defRPr>
@@ -5076,7 +4627,7 @@
     <p:bg>
       <p:bgPr>
         <a:solidFill>
-          <a:srgbClr val="F8FAFD"/>
+          <a:srgbClr val="F8FAF8"/>
         </a:solidFill>
         <a:effectLst/>
       </p:bgPr>
@@ -5090,44 +4641,37 @@
       <p:grpSpPr/>
       <p:sp>
         <p:nvSpPr>
-          <p:cNvPr id="2" name="Rectangle 1"/>
-          <p:cNvSpPr/>
-          <p:nvPr/>
-        </p:nvSpPr>
-        <p:spPr>
-          <a:xfrm>
-            <a:off x="0" y="0"/>
-            <a:ext cx="12191695" cy="91440"/>
-          </a:xfrm>
-          <a:prstGeom prst="rect">
-            <a:avLst/>
-          </a:prstGeom>
-          <a:solidFill>
-            <a:srgbClr val="1F5FD1"/>
-          </a:solidFill>
-          <a:ln>
-            <a:noFill/>
-          </a:ln>
-        </p:spPr>
-        <p:style>
-          <a:lnRef idx="1">
-            <a:schemeClr val="accent1"/>
-          </a:lnRef>
-          <a:fillRef idx="3">
-            <a:schemeClr val="accent1"/>
-          </a:fillRef>
-          <a:effectRef idx="2">
-            <a:schemeClr val="accent1"/>
-          </a:effectRef>
-          <a:fontRef idx="minor">
-            <a:schemeClr val="lt1"/>
-          </a:fontRef>
-        </p:style>
-        <p:txBody>
-          <a:bodyPr rtlCol="0" anchor="ctr"/>
-          <a:lstStyle/>
-          <a:p>
-            <a:pPr algn="ctr"/>
+          <p:cNvPr id="2" name="TextBox 1"/>
+          <p:cNvSpPr txBox="1"/>
+          <p:nvPr/>
+        </p:nvSpPr>
+        <p:spPr>
+          <a:xfrm>
+            <a:off x="594360" y="320040"/>
+            <a:ext cx="10972800" cy="457200"/>
+          </a:xfrm>
+          <a:prstGeom prst="rect">
+            <a:avLst/>
+          </a:prstGeom>
+          <a:noFill/>
+        </p:spPr>
+        <p:txBody>
+          <a:bodyPr wrap="square">
+            <a:spAutoFit/>
+          </a:bodyPr>
+          <a:lstStyle/>
+          <a:p>
+            <a:pPr>
+              <a:defRPr sz="1200" b="1">
+                <a:solidFill>
+                  <a:srgbClr val="167663"/>
+                </a:solidFill>
+                <a:latin typeface="Yu Gothic"/>
+              </a:defRPr>
+            </a:pPr>
+            <a:r>
+              <a:t>IKS / FIELD DX × CONSTRUCTION NETWORK</a:t>
+            </a:r>
           </a:p>
         </p:txBody>
       </p:sp>
@@ -5139,33 +4683,30 @@
         </p:nvSpPr>
         <p:spPr>
           <a:xfrm>
-            <a:off x="594360" y="320040"/>
-            <a:ext cx="10972800" cy="320040"/>
-          </a:xfrm>
-          <a:prstGeom prst="rect">
-            <a:avLst/>
-          </a:prstGeom>
-          <a:noFill/>
-        </p:spPr>
-        <p:txBody>
-          <a:bodyPr wrap="square">
-            <a:spAutoFit/>
-          </a:bodyPr>
-          <a:lstStyle/>
-          <a:p>
-            <a:pPr>
-              <a:spcAft>
-                <a:spcPts val="800"/>
-              </a:spcAft>
-              <a:defRPr sz="1200" b="1">
-                <a:solidFill>
-                  <a:srgbClr val="1F5FD1"/>
-                </a:solidFill>
-                <a:latin typeface="Yu Gothic"/>
-              </a:defRPr>
-            </a:pPr>
-            <a:r>
-              <a:t>IKS  /  FIELD DX &amp; CONSTRUCTION NETWORK</a:t>
+            <a:off x="594360" y="914400"/>
+            <a:ext cx="10972800" cy="1143000"/>
+          </a:xfrm>
+          <a:prstGeom prst="rect">
+            <a:avLst/>
+          </a:prstGeom>
+          <a:noFill/>
+        </p:spPr>
+        <p:txBody>
+          <a:bodyPr wrap="square">
+            <a:spAutoFit/>
+          </a:bodyPr>
+          <a:lstStyle/>
+          <a:p>
+            <a:pPr>
+              <a:defRPr sz="2700" b="1">
+                <a:solidFill>
+                  <a:srgbClr val="152D39"/>
+                </a:solidFill>
+                <a:latin typeface="Yu Gothic"/>
+              </a:defRPr>
+            </a:pPr>
+            <a:r>
+              <a:t>04｜全国の現場をつなぎ、仕事の可能性を広げる。</a:t>
             </a:r>
           </a:p>
         </p:txBody>
@@ -5178,33 +4719,30 @@
         </p:nvSpPr>
         <p:spPr>
           <a:xfrm>
-            <a:off x="594360" y="868680"/>
-            <a:ext cx="10972800" cy="960120"/>
-          </a:xfrm>
-          <a:prstGeom prst="rect">
-            <a:avLst/>
-          </a:prstGeom>
-          <a:noFill/>
-        </p:spPr>
-        <p:txBody>
-          <a:bodyPr wrap="square">
-            <a:spAutoFit/>
-          </a:bodyPr>
-          <a:lstStyle/>
-          <a:p>
-            <a:pPr>
-              <a:spcAft>
-                <a:spcPts val="800"/>
-              </a:spcAft>
-              <a:defRPr sz="2900" b="1">
-                <a:solidFill>
-                  <a:srgbClr val="13213D"/>
-                </a:solidFill>
-                <a:latin typeface="Yu Gothic"/>
-              </a:defRPr>
-            </a:pPr>
-            <a:r>
-              <a:t>04｜現場DXと施工ネットワークを組み合わせる</a:t>
+            <a:off x="594360" y="2103120"/>
+            <a:ext cx="10972800" cy="548640"/>
+          </a:xfrm>
+          <a:prstGeom prst="rect">
+            <a:avLst/>
+          </a:prstGeom>
+          <a:noFill/>
+        </p:spPr>
+        <p:txBody>
+          <a:bodyPr wrap="square">
+            <a:spAutoFit/>
+          </a:bodyPr>
+          <a:lstStyle/>
+          <a:p>
+            <a:pPr>
+              <a:defRPr sz="1800" b="1">
+                <a:solidFill>
+                  <a:srgbClr val="167663"/>
+                </a:solidFill>
+                <a:latin typeface="Yu Gothic"/>
+              </a:defRPr>
+            </a:pPr>
+            <a:r>
+              <a:t>OUR VISION｜「遠いから対応できない」を「仕事につながる」へ</a:t>
             </a:r>
           </a:p>
         </p:txBody>
@@ -5217,33 +4755,30 @@
         </p:nvSpPr>
         <p:spPr>
           <a:xfrm>
-            <a:off x="594360" y="1847088"/>
-            <a:ext cx="10972800" cy="548640"/>
-          </a:xfrm>
-          <a:prstGeom prst="rect">
-            <a:avLst/>
-          </a:prstGeom>
-          <a:noFill/>
-        </p:spPr>
-        <p:txBody>
-          <a:bodyPr wrap="square">
-            <a:spAutoFit/>
-          </a:bodyPr>
-          <a:lstStyle/>
-          <a:p>
-            <a:pPr>
-              <a:spcAft>
-                <a:spcPts val="800"/>
-              </a:spcAft>
-              <a:defRPr sz="1900" b="1">
-                <a:solidFill>
-                  <a:srgbClr val="1F5FD1"/>
-                </a:solidFill>
-                <a:latin typeface="Yu Gothic"/>
-              </a:defRPr>
-            </a:pPr>
-            <a:r>
-              <a:t>企業・地域の対応者・遠隔の経験者を、同じ基盤でつなぐ</a:t>
+            <a:off x="731520" y="2852928"/>
+            <a:ext cx="10789920" cy="749808"/>
+          </a:xfrm>
+          <a:prstGeom prst="rect">
+            <a:avLst/>
+          </a:prstGeom>
+          <a:noFill/>
+        </p:spPr>
+        <p:txBody>
+          <a:bodyPr wrap="square">
+            <a:spAutoFit/>
+          </a:bodyPr>
+          <a:lstStyle/>
+          <a:p>
+            <a:pPr>
+              <a:defRPr sz="1800" b="0">
+                <a:solidFill>
+                  <a:srgbClr val="152D39"/>
+                </a:solidFill>
+                <a:latin typeface="Yu Gothic"/>
+              </a:defRPr>
+            </a:pPr>
+            <a:r>
+              <a:t>• 企業が、これまで対応が難しかった地域にも事業を展開できる環境。</a:t>
             </a:r>
           </a:p>
         </p:txBody>
@@ -5256,33 +4791,30 @@
         </p:nvSpPr>
         <p:spPr>
           <a:xfrm>
-            <a:off x="731520" y="2651760"/>
-            <a:ext cx="10789920" cy="694944"/>
-          </a:xfrm>
-          <a:prstGeom prst="rect">
-            <a:avLst/>
-          </a:prstGeom>
-          <a:noFill/>
-        </p:spPr>
-        <p:txBody>
-          <a:bodyPr wrap="square">
-            <a:spAutoFit/>
-          </a:bodyPr>
-          <a:lstStyle/>
-          <a:p>
-            <a:pPr>
-              <a:spcAft>
-                <a:spcPts val="800"/>
-              </a:spcAft>
-              <a:defRPr sz="1900" b="0">
-                <a:solidFill>
-                  <a:srgbClr val="13213D"/>
-                </a:solidFill>
-                <a:latin typeface="Yu Gothic"/>
-              </a:defRPr>
-            </a:pPr>
-            <a:r>
-              <a:t>• メーカー・商社・施工会社 → 共通基盤に現場調査・施工の依頼と案件情報を登録。</a:t>
+            <a:off x="731520" y="3657600"/>
+            <a:ext cx="10789920" cy="749808"/>
+          </a:xfrm>
+          <a:prstGeom prst="rect">
+            <a:avLst/>
+          </a:prstGeom>
+          <a:noFill/>
+        </p:spPr>
+        <p:txBody>
+          <a:bodyPr wrap="square">
+            <a:spAutoFit/>
+          </a:bodyPr>
+          <a:lstStyle/>
+          <a:p>
+            <a:pPr>
+              <a:defRPr sz="1800" b="0">
+                <a:solidFill>
+                  <a:srgbClr val="152D39"/>
+                </a:solidFill>
+                <a:latin typeface="Yu Gothic"/>
+              </a:defRPr>
+            </a:pPr>
+            <a:r>
+              <a:t>• 地域の施工会社が、全国の企業から新たな仕事を受けられる環境。</a:t>
             </a:r>
           </a:p>
         </p:txBody>
@@ -5295,33 +4827,30 @@
         </p:nvSpPr>
         <p:spPr>
           <a:xfrm>
-            <a:off x="731520" y="3401568"/>
-            <a:ext cx="10789920" cy="694944"/>
-          </a:xfrm>
-          <a:prstGeom prst="rect">
-            <a:avLst/>
-          </a:prstGeom>
-          <a:noFill/>
-        </p:spPr>
-        <p:txBody>
-          <a:bodyPr wrap="square">
-            <a:spAutoFit/>
-          </a:bodyPr>
-          <a:lstStyle/>
-          <a:p>
-            <a:pPr>
-              <a:spcAft>
-                <a:spcPts val="800"/>
-              </a:spcAft>
-              <a:defRPr sz="1900" b="0">
-                <a:solidFill>
-                  <a:srgbClr val="13213D"/>
-                </a:solidFill>
-                <a:latin typeface="Yu Gothic"/>
-              </a:defRPr>
-            </a:pPr>
-            <a:r>
-              <a:t>• 地域の協力会社 → 共通の調査項目・撮影方法に沿って現地情報を記録。</a:t>
+            <a:off x="731520" y="4462272"/>
+            <a:ext cx="10789920" cy="749808"/>
+          </a:xfrm>
+          <a:prstGeom prst="rect">
+            <a:avLst/>
+          </a:prstGeom>
+          <a:noFill/>
+        </p:spPr>
+        <p:txBody>
+          <a:bodyPr wrap="square">
+            <a:spAutoFit/>
+          </a:bodyPr>
+          <a:lstStyle/>
+          <a:p>
+            <a:pPr>
+              <a:defRPr sz="1800" b="0">
+                <a:solidFill>
+                  <a:srgbClr val="152D39"/>
+                </a:solidFill>
+                <a:latin typeface="Yu Gothic"/>
+              </a:defRPr>
+            </a:pPr>
+            <a:r>
+              <a:t>• 大阪の企業が北海道の現場を受注する。福岡の施工会社が東京のメーカーと仕事をする。</a:t>
             </a:r>
           </a:p>
         </p:txBody>
@@ -5334,33 +4863,30 @@
         </p:nvSpPr>
         <p:spPr>
           <a:xfrm>
-            <a:off x="731520" y="4151376"/>
-            <a:ext cx="10789920" cy="694944"/>
-          </a:xfrm>
-          <a:prstGeom prst="rect">
-            <a:avLst/>
-          </a:prstGeom>
-          <a:noFill/>
-        </p:spPr>
-        <p:txBody>
-          <a:bodyPr wrap="square">
-            <a:spAutoFit/>
-          </a:bodyPr>
-          <a:lstStyle/>
-          <a:p>
-            <a:pPr>
-              <a:spcAft>
-                <a:spcPts val="800"/>
-              </a:spcAft>
-              <a:defRPr sz="1900" b="0">
-                <a:solidFill>
-                  <a:srgbClr val="13213D"/>
-                </a:solidFill>
-                <a:latin typeface="Yu Gothic"/>
-              </a:defRPr>
-            </a:pPr>
-            <a:r>
-              <a:t>• 詳しい担当者 → 遠隔で確認・判断し、不足情報の追加や必要な現地対応を指示。</a:t>
+            <a:off x="594360" y="5806440"/>
+            <a:ext cx="10789920" cy="594360"/>
+          </a:xfrm>
+          <a:prstGeom prst="rect">
+            <a:avLst/>
+          </a:prstGeom>
+          <a:noFill/>
+        </p:spPr>
+        <p:txBody>
+          <a:bodyPr wrap="square">
+            <a:spAutoFit/>
+          </a:bodyPr>
+          <a:lstStyle/>
+          <a:p>
+            <a:pPr>
+              <a:defRPr sz="1100" b="0">
+                <a:solidFill>
+                  <a:srgbClr val="62727B"/>
+                </a:solidFill>
+                <a:latin typeface="Yu Gothic"/>
+              </a:defRPr>
+            </a:pPr>
+            <a:r>
+              <a:t>将来イメージであり、記載地域での対応実績ではない。紹介だけでなく情報共有・業務標準化・品質管理を一体化する構想。</a:t>
             </a:r>
           </a:p>
         </p:txBody>
@@ -5373,105 +4899,24 @@
         </p:nvSpPr>
         <p:spPr>
           <a:xfrm>
-            <a:off x="731520" y="4901184"/>
-            <a:ext cx="10789920" cy="694944"/>
-          </a:xfrm>
-          <a:prstGeom prst="rect">
-            <a:avLst/>
-          </a:prstGeom>
-          <a:noFill/>
-        </p:spPr>
-        <p:txBody>
-          <a:bodyPr wrap="square">
-            <a:spAutoFit/>
-          </a:bodyPr>
-          <a:lstStyle/>
-          <a:p>
-            <a:pPr>
-              <a:spcAft>
-                <a:spcPts val="800"/>
-              </a:spcAft>
-              <a:defRPr sz="1900" b="0">
-                <a:solidFill>
-                  <a:srgbClr val="13213D"/>
-                </a:solidFill>
-                <a:latin typeface="Yu Gothic"/>
-              </a:defRPr>
-            </a:pPr>
-            <a:r>
-              <a:t>• 共通基盤 → 調査、写真、安全書類、報告、工程、施工履歴を案件ごとに管理。</a:t>
-            </a:r>
-          </a:p>
-        </p:txBody>
-      </p:sp>
-      <p:sp>
-        <p:nvSpPr>
-          <p:cNvPr id="10" name="TextBox 9"/>
-          <p:cNvSpPr txBox="1"/>
-          <p:nvPr/>
-        </p:nvSpPr>
-        <p:spPr>
-          <a:xfrm>
-            <a:off x="594360" y="6062472"/>
-            <a:ext cx="10789920" cy="502920"/>
-          </a:xfrm>
-          <a:prstGeom prst="rect">
-            <a:avLst/>
-          </a:prstGeom>
-          <a:noFill/>
-        </p:spPr>
-        <p:txBody>
-          <a:bodyPr wrap="square">
-            <a:spAutoFit/>
-          </a:bodyPr>
-          <a:lstStyle/>
-          <a:p>
-            <a:pPr>
-              <a:spcAft>
-                <a:spcPts val="800"/>
-              </a:spcAft>
-              <a:defRPr sz="1100" b="0">
-                <a:solidFill>
-                  <a:srgbClr val="506074"/>
-                </a:solidFill>
-                <a:latin typeface="Yu Gothic"/>
-              </a:defRPr>
-            </a:pPr>
-            <a:r>
-              <a:t>構想上の役割分担。全国ネットワークや記載機能が整備済みであることを示すものではない。</a:t>
-            </a:r>
-          </a:p>
-        </p:txBody>
-      </p:sp>
-      <p:sp>
-        <p:nvSpPr>
-          <p:cNvPr id="11" name="TextBox 10"/>
-          <p:cNvSpPr txBox="1"/>
-          <p:nvPr/>
-        </p:nvSpPr>
-        <p:spPr>
-          <a:xfrm>
-            <a:off x="11064240" y="6455664"/>
-            <a:ext cx="548640" cy="228600"/>
-          </a:xfrm>
-          <a:prstGeom prst="rect">
-            <a:avLst/>
-          </a:prstGeom>
-          <a:noFill/>
-        </p:spPr>
-        <p:txBody>
-          <a:bodyPr wrap="square">
-            <a:spAutoFit/>
-          </a:bodyPr>
-          <a:lstStyle/>
-          <a:p>
-            <a:pPr>
-              <a:spcAft>
-                <a:spcPts val="800"/>
-              </a:spcAft>
+            <a:off x="11018520" y="6446520"/>
+            <a:ext cx="594360" cy="274320"/>
+          </a:xfrm>
+          <a:prstGeom prst="rect">
+            <a:avLst/>
+          </a:prstGeom>
+          <a:noFill/>
+        </p:spPr>
+        <p:txBody>
+          <a:bodyPr wrap="square">
+            <a:spAutoFit/>
+          </a:bodyPr>
+          <a:lstStyle/>
+          <a:p>
+            <a:pPr>
               <a:defRPr sz="1000" b="0">
                 <a:solidFill>
-                  <a:srgbClr val="506074"/>
+                  <a:srgbClr val="62727B"/>
                 </a:solidFill>
                 <a:latin typeface="Yu Gothic"/>
               </a:defRPr>
@@ -5496,7 +4941,7 @@
     <p:bg>
       <p:bgPr>
         <a:solidFill>
-          <a:srgbClr val="F8FAFD"/>
+          <a:srgbClr val="F8FAF8"/>
         </a:solidFill>
         <a:effectLst/>
       </p:bgPr>
@@ -5510,44 +4955,37 @@
       <p:grpSpPr/>
       <p:sp>
         <p:nvSpPr>
-          <p:cNvPr id="2" name="Rectangle 1"/>
-          <p:cNvSpPr/>
-          <p:nvPr/>
-        </p:nvSpPr>
-        <p:spPr>
-          <a:xfrm>
-            <a:off x="0" y="0"/>
-            <a:ext cx="12191695" cy="91440"/>
-          </a:xfrm>
-          <a:prstGeom prst="rect">
-            <a:avLst/>
-          </a:prstGeom>
-          <a:solidFill>
-            <a:srgbClr val="1F5FD1"/>
-          </a:solidFill>
-          <a:ln>
-            <a:noFill/>
-          </a:ln>
-        </p:spPr>
-        <p:style>
-          <a:lnRef idx="1">
-            <a:schemeClr val="accent1"/>
-          </a:lnRef>
-          <a:fillRef idx="3">
-            <a:schemeClr val="accent1"/>
-          </a:fillRef>
-          <a:effectRef idx="2">
-            <a:schemeClr val="accent1"/>
-          </a:effectRef>
-          <a:fontRef idx="minor">
-            <a:schemeClr val="lt1"/>
-          </a:fontRef>
-        </p:style>
-        <p:txBody>
-          <a:bodyPr rtlCol="0" anchor="ctr"/>
-          <a:lstStyle/>
-          <a:p>
-            <a:pPr algn="ctr"/>
+          <p:cNvPr id="2" name="TextBox 1"/>
+          <p:cNvSpPr txBox="1"/>
+          <p:nvPr/>
+        </p:nvSpPr>
+        <p:spPr>
+          <a:xfrm>
+            <a:off x="594360" y="320040"/>
+            <a:ext cx="10972800" cy="457200"/>
+          </a:xfrm>
+          <a:prstGeom prst="rect">
+            <a:avLst/>
+          </a:prstGeom>
+          <a:noFill/>
+        </p:spPr>
+        <p:txBody>
+          <a:bodyPr wrap="square">
+            <a:spAutoFit/>
+          </a:bodyPr>
+          <a:lstStyle/>
+          <a:p>
+            <a:pPr>
+              <a:defRPr sz="1200" b="1">
+                <a:solidFill>
+                  <a:srgbClr val="167663"/>
+                </a:solidFill>
+                <a:latin typeface="Yu Gothic"/>
+              </a:defRPr>
+            </a:pPr>
+            <a:r>
+              <a:t>IKS / FIELD DX × CONSTRUCTION NETWORK</a:t>
+            </a:r>
           </a:p>
         </p:txBody>
       </p:sp>
@@ -5559,33 +4997,30 @@
         </p:nvSpPr>
         <p:spPr>
           <a:xfrm>
-            <a:off x="594360" y="320040"/>
-            <a:ext cx="10972800" cy="320040"/>
-          </a:xfrm>
-          <a:prstGeom prst="rect">
-            <a:avLst/>
-          </a:prstGeom>
-          <a:noFill/>
-        </p:spPr>
-        <p:txBody>
-          <a:bodyPr wrap="square">
-            <a:spAutoFit/>
-          </a:bodyPr>
-          <a:lstStyle/>
-          <a:p>
-            <a:pPr>
-              <a:spcAft>
-                <a:spcPts val="800"/>
-              </a:spcAft>
-              <a:defRPr sz="1200" b="1">
-                <a:solidFill>
-                  <a:srgbClr val="1F5FD1"/>
-                </a:solidFill>
-                <a:latin typeface="Yu Gothic"/>
-              </a:defRPr>
-            </a:pPr>
-            <a:r>
-              <a:t>IKS  /  FIELD DX &amp; CONSTRUCTION NETWORK</a:t>
+            <a:off x="594360" y="914400"/>
+            <a:ext cx="10972800" cy="1143000"/>
+          </a:xfrm>
+          <a:prstGeom prst="rect">
+            <a:avLst/>
+          </a:prstGeom>
+          <a:noFill/>
+        </p:spPr>
+        <p:txBody>
+          <a:bodyPr wrap="square">
+            <a:spAutoFit/>
+          </a:bodyPr>
+          <a:lstStyle/>
+          <a:p>
+            <a:pPr>
+              <a:defRPr sz="2700" b="1">
+                <a:solidFill>
+                  <a:srgbClr val="152D39"/>
+                </a:solidFill>
+                <a:latin typeface="Yu Gothic"/>
+              </a:defRPr>
+            </a:pPr>
+            <a:r>
+              <a:t>05｜デジタルと施工力を融合する。</a:t>
             </a:r>
           </a:p>
         </p:txBody>
@@ -5598,33 +5033,30 @@
         </p:nvSpPr>
         <p:spPr>
           <a:xfrm>
-            <a:off x="594360" y="868680"/>
-            <a:ext cx="10972800" cy="960120"/>
-          </a:xfrm>
-          <a:prstGeom prst="rect">
-            <a:avLst/>
-          </a:prstGeom>
-          <a:noFill/>
-        </p:spPr>
-        <p:txBody>
-          <a:bodyPr wrap="square">
-            <a:spAutoFit/>
-          </a:bodyPr>
-          <a:lstStyle/>
-          <a:p>
-            <a:pPr>
-              <a:spcAft>
-                <a:spcPts val="800"/>
-              </a:spcAft>
-              <a:defRPr sz="2900" b="1">
-                <a:solidFill>
-                  <a:srgbClr val="13213D"/>
-                </a:solidFill>
-                <a:latin typeface="Yu Gothic"/>
-              </a:defRPr>
-            </a:pPr>
-            <a:r>
-              <a:t>05｜まずは、福岡の現場調査で検証する</a:t>
+            <a:off x="594360" y="2103120"/>
+            <a:ext cx="10972800" cy="548640"/>
+          </a:xfrm>
+          <a:prstGeom prst="rect">
+            <a:avLst/>
+          </a:prstGeom>
+          <a:noFill/>
+        </p:spPr>
+        <p:txBody>
+          <a:bodyPr wrap="square">
+            <a:spAutoFit/>
+          </a:bodyPr>
+          <a:lstStyle/>
+          <a:p>
+            <a:pPr>
+              <a:defRPr sz="1800" b="1">
+                <a:solidFill>
+                  <a:srgbClr val="167663"/>
+                </a:solidFill>
+                <a:latin typeface="Yu Gothic"/>
+              </a:defRPr>
+            </a:pPr>
+            <a:r>
+              <a:t>現場DX × 全国施工ネットワーク</a:t>
             </a:r>
           </a:p>
         </p:txBody>
@@ -5637,33 +5069,30 @@
         </p:nvSpPr>
         <p:spPr>
           <a:xfrm>
-            <a:off x="594360" y="1847088"/>
-            <a:ext cx="10972800" cy="548640"/>
-          </a:xfrm>
-          <a:prstGeom prst="rect">
-            <a:avLst/>
-          </a:prstGeom>
-          <a:noFill/>
-        </p:spPr>
-        <p:txBody>
-          <a:bodyPr wrap="square">
-            <a:spAutoFit/>
-          </a:bodyPr>
-          <a:lstStyle/>
-          <a:p>
-            <a:pPr>
-              <a:spcAft>
-                <a:spcPts val="800"/>
-              </a:spcAft>
-              <a:defRPr sz="1900" b="1">
-                <a:solidFill>
-                  <a:srgbClr val="1F5FD1"/>
-                </a:solidFill>
-                <a:latin typeface="Yu Gothic"/>
-              </a:defRPr>
-            </a:pPr>
-            <a:r>
-              <a:t>現地でしかできない作業と、遠隔でできる作業を分ける</a:t>
+            <a:off x="731520" y="2852928"/>
+            <a:ext cx="10789920" cy="749808"/>
+          </a:xfrm>
+          <a:prstGeom prst="rect">
+            <a:avLst/>
+          </a:prstGeom>
+          <a:noFill/>
+        </p:spPr>
+        <p:txBody>
+          <a:bodyPr wrap="square">
+            <a:spAutoFit/>
+          </a:bodyPr>
+          <a:lstStyle/>
+          <a:p>
+            <a:pPr>
+              <a:defRPr sz="1800" b="0">
+                <a:solidFill>
+                  <a:srgbClr val="152D39"/>
+                </a:solidFill>
+                <a:latin typeface="Yu Gothic"/>
+              </a:defRPr>
+            </a:pPr>
+            <a:r>
+              <a:t>• 現場DX：現場調査・写真・安全書類・施工管理・情報共有。</a:t>
             </a:r>
           </a:p>
         </p:txBody>
@@ -5676,33 +5105,30 @@
         </p:nvSpPr>
         <p:spPr>
           <a:xfrm>
-            <a:off x="731520" y="2651760"/>
-            <a:ext cx="10789920" cy="694944"/>
-          </a:xfrm>
-          <a:prstGeom prst="rect">
-            <a:avLst/>
-          </a:prstGeom>
-          <a:noFill/>
-        </p:spPr>
-        <p:txBody>
-          <a:bodyPr wrap="square">
-            <a:spAutoFit/>
-          </a:bodyPr>
-          <a:lstStyle/>
-          <a:p>
-            <a:pPr>
-              <a:spcAft>
-                <a:spcPts val="800"/>
-              </a:spcAft>
-              <a:defRPr sz="1900" b="0">
-                <a:solidFill>
-                  <a:srgbClr val="13213D"/>
-                </a:solidFill>
-                <a:latin typeface="Yu Gothic"/>
-              </a:defRPr>
-            </a:pPr>
-            <a:r>
-              <a:t>• ① 依頼企業と経験者が、対象商材・調査項目・完了基準を決める。</a:t>
+            <a:off x="731520" y="3657600"/>
+            <a:ext cx="10789920" cy="749808"/>
+          </a:xfrm>
+          <a:prstGeom prst="rect">
+            <a:avLst/>
+          </a:prstGeom>
+          <a:noFill/>
+        </p:spPr>
+        <p:txBody>
+          <a:bodyPr wrap="square">
+            <a:spAutoFit/>
+          </a:bodyPr>
+          <a:lstStyle/>
+          <a:p>
+            <a:pPr>
+              <a:defRPr sz="1800" b="0">
+                <a:solidFill>
+                  <a:srgbClr val="152D39"/>
+                </a:solidFill>
+                <a:latin typeface="Yu Gothic"/>
+              </a:defRPr>
+            </a:pPr>
+            <a:r>
+              <a:t>• 全国施工ネットワーク：地域の施工会社・技術者・メーカー・商社。</a:t>
             </a:r>
           </a:p>
         </p:txBody>
@@ -5715,33 +5141,30 @@
         </p:nvSpPr>
         <p:spPr>
           <a:xfrm>
-            <a:off x="731520" y="3401568"/>
-            <a:ext cx="10789920" cy="694944"/>
-          </a:xfrm>
-          <a:prstGeom prst="rect">
-            <a:avLst/>
-          </a:prstGeom>
-          <a:noFill/>
-        </p:spPr>
-        <p:txBody>
-          <a:bodyPr wrap="square">
-            <a:spAutoFit/>
-          </a:bodyPr>
-          <a:lstStyle/>
-          <a:p>
-            <a:pPr>
-              <a:spcAft>
-                <a:spcPts val="800"/>
-              </a:spcAft>
-              <a:defRPr sz="1900" b="0">
-                <a:solidFill>
-                  <a:srgbClr val="13213D"/>
-                </a:solidFill>
-                <a:latin typeface="Yu Gothic"/>
-              </a:defRPr>
-            </a:pPr>
-            <a:r>
-              <a:t>• ② 福岡の協力会社が現地で撮影・測定・記録する。</a:t>
+            <a:off x="731520" y="4462272"/>
+            <a:ext cx="10789920" cy="749808"/>
+          </a:xfrm>
+          <a:prstGeom prst="rect">
+            <a:avLst/>
+          </a:prstGeom>
+          <a:noFill/>
+        </p:spPr>
+        <p:txBody>
+          <a:bodyPr wrap="square">
+            <a:spAutoFit/>
+          </a:bodyPr>
+          <a:lstStyle/>
+          <a:p>
+            <a:pPr>
+              <a:defRPr sz="1800" b="0">
+                <a:solidFill>
+                  <a:srgbClr val="152D39"/>
+                </a:solidFill>
+                <a:latin typeface="Yu Gothic"/>
+              </a:defRPr>
+            </a:pPr>
+            <a:r>
+              <a:t>• 想定する流れ：案件依頼 → 現地対応 → 情報共有 → 遠隔確認 → 施工・管理。</a:t>
             </a:r>
           </a:p>
         </p:txBody>
@@ -5754,33 +5177,30 @@
         </p:nvSpPr>
         <p:spPr>
           <a:xfrm>
-            <a:off x="731520" y="4151376"/>
-            <a:ext cx="10789920" cy="694944"/>
-          </a:xfrm>
-          <a:prstGeom prst="rect">
-            <a:avLst/>
-          </a:prstGeom>
-          <a:noFill/>
-        </p:spPr>
-        <p:txBody>
-          <a:bodyPr wrap="square">
-            <a:spAutoFit/>
-          </a:bodyPr>
-          <a:lstStyle/>
-          <a:p>
-            <a:pPr>
-              <a:spcAft>
-                <a:spcPts val="800"/>
-              </a:spcAft>
-              <a:defRPr sz="1900" b="0">
-                <a:solidFill>
-                  <a:srgbClr val="13213D"/>
-                </a:solidFill>
-                <a:latin typeface="Yu Gothic"/>
-              </a:defRPr>
-            </a:pPr>
-            <a:r>
-              <a:t>• ③ 大阪の経験者が情報を確認し、追加調査や対応可否を判断する。</a:t>
+            <a:off x="594360" y="5806440"/>
+            <a:ext cx="10789920" cy="594360"/>
+          </a:xfrm>
+          <a:prstGeom prst="rect">
+            <a:avLst/>
+          </a:prstGeom>
+          <a:noFill/>
+        </p:spPr>
+        <p:txBody>
+          <a:bodyPr wrap="square">
+            <a:spAutoFit/>
+          </a:bodyPr>
+          <a:lstStyle/>
+          <a:p>
+            <a:pPr>
+              <a:defRPr sz="1100" b="0">
+                <a:solidFill>
+                  <a:srgbClr val="62727B"/>
+                </a:solidFill>
+                <a:latin typeface="Yu Gothic"/>
+              </a:defRPr>
+            </a:pPr>
+            <a:r>
+              <a:t>情報・人・技術・仕事をつなぐ共通基盤を段階的に構築する。対応地域・体制・各機能は実証を通じて整備。</a:t>
             </a:r>
           </a:p>
         </p:txBody>
@@ -5793,105 +5213,24 @@
         </p:nvSpPr>
         <p:spPr>
           <a:xfrm>
-            <a:off x="731520" y="4901184"/>
-            <a:ext cx="10789920" cy="694944"/>
-          </a:xfrm>
-          <a:prstGeom prst="rect">
-            <a:avLst/>
-          </a:prstGeom>
-          <a:noFill/>
-        </p:spPr>
-        <p:txBody>
-          <a:bodyPr wrap="square">
-            <a:spAutoFit/>
-          </a:bodyPr>
-          <a:lstStyle/>
-          <a:p>
-            <a:pPr>
-              <a:spcAft>
-                <a:spcPts val="800"/>
-              </a:spcAft>
-              <a:defRPr sz="1900" b="0">
-                <a:solidFill>
-                  <a:srgbClr val="13213D"/>
-                </a:solidFill>
-                <a:latin typeface="Yu Gothic"/>
-              </a:defRPr>
-            </a:pPr>
-            <a:r>
-              <a:t>• ④ 承認済みの情報を、見積・施工準備・報告に引き継ぐ。</a:t>
-            </a:r>
-          </a:p>
-        </p:txBody>
-      </p:sp>
-      <p:sp>
-        <p:nvSpPr>
-          <p:cNvPr id="10" name="TextBox 9"/>
-          <p:cNvSpPr txBox="1"/>
-          <p:nvPr/>
-        </p:nvSpPr>
-        <p:spPr>
-          <a:xfrm>
-            <a:off x="594360" y="6062472"/>
-            <a:ext cx="10789920" cy="502920"/>
-          </a:xfrm>
-          <a:prstGeom prst="rect">
-            <a:avLst/>
-          </a:prstGeom>
-          <a:noFill/>
-        </p:spPr>
-        <p:txBody>
-          <a:bodyPr wrap="square">
-            <a:spAutoFit/>
-          </a:bodyPr>
-          <a:lstStyle/>
-          <a:p>
-            <a:pPr>
-              <a:spcAft>
-                <a:spcPts val="800"/>
-              </a:spcAft>
-              <a:defRPr sz="1100" b="0">
-                <a:solidFill>
-                  <a:srgbClr val="506074"/>
-                </a:solidFill>
-                <a:latin typeface="Yu Gothic"/>
-              </a:defRPr>
-            </a:pPr>
-            <a:r>
-              <a:t>遠隔で完結できない案件は現地対応へ切り替える。施工依頼への展開は調査実証後に判断する。</a:t>
-            </a:r>
-          </a:p>
-        </p:txBody>
-      </p:sp>
-      <p:sp>
-        <p:nvSpPr>
-          <p:cNvPr id="11" name="TextBox 10"/>
-          <p:cNvSpPr txBox="1"/>
-          <p:nvPr/>
-        </p:nvSpPr>
-        <p:spPr>
-          <a:xfrm>
-            <a:off x="11064240" y="6455664"/>
-            <a:ext cx="548640" cy="228600"/>
-          </a:xfrm>
-          <a:prstGeom prst="rect">
-            <a:avLst/>
-          </a:prstGeom>
-          <a:noFill/>
-        </p:spPr>
-        <p:txBody>
-          <a:bodyPr wrap="square">
-            <a:spAutoFit/>
-          </a:bodyPr>
-          <a:lstStyle/>
-          <a:p>
-            <a:pPr>
-              <a:spcAft>
-                <a:spcPts val="800"/>
-              </a:spcAft>
+            <a:off x="11018520" y="6446520"/>
+            <a:ext cx="594360" cy="274320"/>
+          </a:xfrm>
+          <a:prstGeom prst="rect">
+            <a:avLst/>
+          </a:prstGeom>
+          <a:noFill/>
+        </p:spPr>
+        <p:txBody>
+          <a:bodyPr wrap="square">
+            <a:spAutoFit/>
+          </a:bodyPr>
+          <a:lstStyle/>
+          <a:p>
+            <a:pPr>
               <a:defRPr sz="1000" b="0">
                 <a:solidFill>
-                  <a:srgbClr val="506074"/>
+                  <a:srgbClr val="62727B"/>
                 </a:solidFill>
                 <a:latin typeface="Yu Gothic"/>
               </a:defRPr>
@@ -5916,7 +5255,7 @@
     <p:bg>
       <p:bgPr>
         <a:solidFill>
-          <a:srgbClr val="F8FAFD"/>
+          <a:srgbClr val="F8FAF8"/>
         </a:solidFill>
         <a:effectLst/>
       </p:bgPr>
@@ -5930,44 +5269,37 @@
       <p:grpSpPr/>
       <p:sp>
         <p:nvSpPr>
-          <p:cNvPr id="2" name="Rectangle 1"/>
-          <p:cNvSpPr/>
-          <p:nvPr/>
-        </p:nvSpPr>
-        <p:spPr>
-          <a:xfrm>
-            <a:off x="0" y="0"/>
-            <a:ext cx="12191695" cy="91440"/>
-          </a:xfrm>
-          <a:prstGeom prst="rect">
-            <a:avLst/>
-          </a:prstGeom>
-          <a:solidFill>
-            <a:srgbClr val="1F5FD1"/>
-          </a:solidFill>
-          <a:ln>
-            <a:noFill/>
-          </a:ln>
-        </p:spPr>
-        <p:style>
-          <a:lnRef idx="1">
-            <a:schemeClr val="accent1"/>
-          </a:lnRef>
-          <a:fillRef idx="3">
-            <a:schemeClr val="accent1"/>
-          </a:fillRef>
-          <a:effectRef idx="2">
-            <a:schemeClr val="accent1"/>
-          </a:effectRef>
-          <a:fontRef idx="minor">
-            <a:schemeClr val="lt1"/>
-          </a:fontRef>
-        </p:style>
-        <p:txBody>
-          <a:bodyPr rtlCol="0" anchor="ctr"/>
-          <a:lstStyle/>
-          <a:p>
-            <a:pPr algn="ctr"/>
+          <p:cNvPr id="2" name="TextBox 1"/>
+          <p:cNvSpPr txBox="1"/>
+          <p:nvPr/>
+        </p:nvSpPr>
+        <p:spPr>
+          <a:xfrm>
+            <a:off x="594360" y="320040"/>
+            <a:ext cx="10972800" cy="457200"/>
+          </a:xfrm>
+          <a:prstGeom prst="rect">
+            <a:avLst/>
+          </a:prstGeom>
+          <a:noFill/>
+        </p:spPr>
+        <p:txBody>
+          <a:bodyPr wrap="square">
+            <a:spAutoFit/>
+          </a:bodyPr>
+          <a:lstStyle/>
+          <a:p>
+            <a:pPr>
+              <a:defRPr sz="1200" b="1">
+                <a:solidFill>
+                  <a:srgbClr val="167663"/>
+                </a:solidFill>
+                <a:latin typeface="Yu Gothic"/>
+              </a:defRPr>
+            </a:pPr>
+            <a:r>
+              <a:t>IKS / FIELD DX × CONSTRUCTION NETWORK</a:t>
+            </a:r>
           </a:p>
         </p:txBody>
       </p:sp>
@@ -5979,33 +5311,30 @@
         </p:nvSpPr>
         <p:spPr>
           <a:xfrm>
-            <a:off x="594360" y="320040"/>
-            <a:ext cx="10972800" cy="320040"/>
-          </a:xfrm>
-          <a:prstGeom prst="rect">
-            <a:avLst/>
-          </a:prstGeom>
-          <a:noFill/>
-        </p:spPr>
-        <p:txBody>
-          <a:bodyPr wrap="square">
-            <a:spAutoFit/>
-          </a:bodyPr>
-          <a:lstStyle/>
-          <a:p>
-            <a:pPr>
-              <a:spcAft>
-                <a:spcPts val="800"/>
-              </a:spcAft>
-              <a:defRPr sz="1200" b="1">
-                <a:solidFill>
-                  <a:srgbClr val="1F5FD1"/>
-                </a:solidFill>
-                <a:latin typeface="Yu Gothic"/>
-              </a:defRPr>
-            </a:pPr>
-            <a:r>
-              <a:t>IKS  /  FIELD DX &amp; CONSTRUCTION NETWORK</a:t>
+            <a:off x="594360" y="914400"/>
+            <a:ext cx="10972800" cy="1143000"/>
+          </a:xfrm>
+          <a:prstGeom prst="rect">
+            <a:avLst/>
+          </a:prstGeom>
+          <a:noFill/>
+        </p:spPr>
+        <p:txBody>
+          <a:bodyPr wrap="square">
+            <a:spAutoFit/>
+          </a:bodyPr>
+          <a:lstStyle/>
+          <a:p>
+            <a:pPr>
+              <a:defRPr sz="2700" b="1">
+                <a:solidFill>
+                  <a:srgbClr val="152D39"/>
+                </a:solidFill>
+                <a:latin typeface="Yu Gothic"/>
+              </a:defRPr>
+            </a:pPr>
+            <a:r>
+              <a:t>06｜発注側にも施工側にも、新たな可能性を。</a:t>
             </a:r>
           </a:p>
         </p:txBody>
@@ -6018,33 +5347,30 @@
         </p:nvSpPr>
         <p:spPr>
           <a:xfrm>
-            <a:off x="594360" y="868680"/>
-            <a:ext cx="10972800" cy="960120"/>
-          </a:xfrm>
-          <a:prstGeom prst="rect">
-            <a:avLst/>
-          </a:prstGeom>
-          <a:noFill/>
-        </p:spPr>
-        <p:txBody>
-          <a:bodyPr wrap="square">
-            <a:spAutoFit/>
-          </a:bodyPr>
-          <a:lstStyle/>
-          <a:p>
-            <a:pPr>
-              <a:spcAft>
-                <a:spcPts val="800"/>
-              </a:spcAft>
-              <a:defRPr sz="2900" b="1">
-                <a:solidFill>
-                  <a:srgbClr val="13213D"/>
-                </a:solidFill>
-                <a:latin typeface="Yu Gothic"/>
-              </a:defRPr>
-            </a:pPr>
-            <a:r>
-              <a:t>06｜任せられるネットワークに必要な条件</a:t>
+            <a:off x="594360" y="2103120"/>
+            <a:ext cx="10972800" cy="548640"/>
+          </a:xfrm>
+          <a:prstGeom prst="rect">
+            <a:avLst/>
+          </a:prstGeom>
+          <a:noFill/>
+        </p:spPr>
+        <p:txBody>
+          <a:bodyPr wrap="square">
+            <a:spAutoFit/>
+          </a:bodyPr>
+          <a:lstStyle/>
+          <a:p>
+            <a:pPr>
+              <a:defRPr sz="1800" b="1">
+                <a:solidFill>
+                  <a:srgbClr val="167663"/>
+                </a:solidFill>
+                <a:latin typeface="Yu Gothic"/>
+              </a:defRPr>
+            </a:pPr>
+            <a:r>
+              <a:t>この事業で生み出したい価値</a:t>
             </a:r>
           </a:p>
         </p:txBody>
@@ -6057,33 +5383,30 @@
         </p:nvSpPr>
         <p:spPr>
           <a:xfrm>
-            <a:off x="594360" y="1847088"/>
-            <a:ext cx="10972800" cy="548640"/>
-          </a:xfrm>
-          <a:prstGeom prst="rect">
-            <a:avLst/>
-          </a:prstGeom>
-          <a:noFill/>
-        </p:spPr>
-        <p:txBody>
-          <a:bodyPr wrap="square">
-            <a:spAutoFit/>
-          </a:bodyPr>
-          <a:lstStyle/>
-          <a:p>
-            <a:pPr>
-              <a:spcAft>
-                <a:spcPts val="800"/>
-              </a:spcAft>
-              <a:defRPr sz="1900" b="1">
-                <a:solidFill>
-                  <a:srgbClr val="1F5FD1"/>
-                </a:solidFill>
-                <a:latin typeface="Yu Gothic"/>
-              </a:defRPr>
-            </a:pPr>
-            <a:r>
-              <a:t>紹介だけでなく、手順・技術・責任を揃える</a:t>
+            <a:off x="731520" y="2852928"/>
+            <a:ext cx="10789920" cy="749808"/>
+          </a:xfrm>
+          <a:prstGeom prst="rect">
+            <a:avLst/>
+          </a:prstGeom>
+          <a:noFill/>
+        </p:spPr>
+        <p:txBody>
+          <a:bodyPr wrap="square">
+            <a:spAutoFit/>
+          </a:bodyPr>
+          <a:lstStyle/>
+          <a:p>
+            <a:pPr>
+              <a:defRPr sz="1800" b="0">
+                <a:solidFill>
+                  <a:srgbClr val="152D39"/>
+                </a:solidFill>
+                <a:latin typeface="Yu Gothic"/>
+              </a:defRPr>
+            </a:pPr>
+            <a:r>
+              <a:t>• メーカー・商社・発注企業：遠隔地の現場対応力を高め、営業エリア拡大と受注機会の創出を目指す。</a:t>
             </a:r>
           </a:p>
         </p:txBody>
@@ -6096,33 +5419,30 @@
         </p:nvSpPr>
         <p:spPr>
           <a:xfrm>
-            <a:off x="731520" y="2651760"/>
-            <a:ext cx="10789920" cy="694944"/>
-          </a:xfrm>
-          <a:prstGeom prst="rect">
-            <a:avLst/>
-          </a:prstGeom>
-          <a:noFill/>
-        </p:spPr>
-        <p:txBody>
-          <a:bodyPr wrap="square">
-            <a:spAutoFit/>
-          </a:bodyPr>
-          <a:lstStyle/>
-          <a:p>
-            <a:pPr>
-              <a:spcAft>
-                <a:spcPts val="800"/>
-              </a:spcAft>
-              <a:defRPr sz="1900" b="0">
-                <a:solidFill>
-                  <a:srgbClr val="13213D"/>
-                </a:solidFill>
-                <a:latin typeface="Yu Gothic"/>
-              </a:defRPr>
-            </a:pPr>
-            <a:r>
-              <a:t>• 調査品質：商材別の確認項目、撮影・測定基準、報告形式、承認条件を標準化。</a:t>
+            <a:off x="731520" y="3657600"/>
+            <a:ext cx="10789920" cy="749808"/>
+          </a:xfrm>
+          <a:prstGeom prst="rect">
+            <a:avLst/>
+          </a:prstGeom>
+          <a:noFill/>
+        </p:spPr>
+        <p:txBody>
+          <a:bodyPr wrap="square">
+            <a:spAutoFit/>
+          </a:bodyPr>
+          <a:lstStyle/>
+          <a:p>
+            <a:pPr>
+              <a:defRPr sz="1800" b="0">
+                <a:solidFill>
+                  <a:srgbClr val="152D39"/>
+                </a:solidFill>
+                <a:latin typeface="Yu Gothic"/>
+              </a:defRPr>
+            </a:pPr>
+            <a:r>
+              <a:t>• 地域の施工会社：全国の企業とつながり、新たな案件・継続的な取引機会を目指す。</a:t>
             </a:r>
           </a:p>
         </p:txBody>
@@ -6135,33 +5455,30 @@
         </p:nvSpPr>
         <p:spPr>
           <a:xfrm>
-            <a:off x="731520" y="3401568"/>
-            <a:ext cx="10789920" cy="694944"/>
-          </a:xfrm>
-          <a:prstGeom prst="rect">
-            <a:avLst/>
-          </a:prstGeom>
-          <a:noFill/>
-        </p:spPr>
-        <p:txBody>
-          <a:bodyPr wrap="square">
-            <a:spAutoFit/>
-          </a:bodyPr>
-          <a:lstStyle/>
-          <a:p>
-            <a:pPr>
-              <a:spcAft>
-                <a:spcPts val="800"/>
-              </a:spcAft>
-              <a:defRPr sz="1900" b="0">
-                <a:solidFill>
-                  <a:srgbClr val="13213D"/>
-                </a:solidFill>
-                <a:latin typeface="Yu Gothic"/>
-              </a:defRPr>
-            </a:pPr>
-            <a:r>
-              <a:t>• 対応者の確認：経験、技能、資格、対応地域を確認し、教育と試行を行う。</a:t>
+            <a:off x="731520" y="4462272"/>
+            <a:ext cx="10789920" cy="749808"/>
+          </a:xfrm>
+          <a:prstGeom prst="rect">
+            <a:avLst/>
+          </a:prstGeom>
+          <a:noFill/>
+        </p:spPr>
+        <p:txBody>
+          <a:bodyPr wrap="square">
+            <a:spAutoFit/>
+          </a:bodyPr>
+          <a:lstStyle/>
+          <a:p>
+            <a:pPr>
+              <a:defRPr sz="1800" b="0">
+                <a:solidFill>
+                  <a:srgbClr val="152D39"/>
+                </a:solidFill>
+                <a:latin typeface="Yu Gothic"/>
+              </a:defRPr>
+            </a:pPr>
+            <a:r>
+              <a:t>• 建設業界全体：限られた人材や技術を活かし、地域を超えて仕事を支え合う。</a:t>
             </a:r>
           </a:p>
         </p:txBody>
@@ -6174,33 +5491,30 @@
         </p:nvSpPr>
         <p:spPr>
           <a:xfrm>
-            <a:off x="731520" y="4151376"/>
-            <a:ext cx="10789920" cy="694944"/>
-          </a:xfrm>
-          <a:prstGeom prst="rect">
-            <a:avLst/>
-          </a:prstGeom>
-          <a:noFill/>
-        </p:spPr>
-        <p:txBody>
-          <a:bodyPr wrap="square">
-            <a:spAutoFit/>
-          </a:bodyPr>
-          <a:lstStyle/>
-          <a:p>
-            <a:pPr>
-              <a:spcAft>
-                <a:spcPts val="800"/>
-              </a:spcAft>
-              <a:defRPr sz="1900" b="0">
-                <a:solidFill>
-                  <a:srgbClr val="13213D"/>
-                </a:solidFill>
-                <a:latin typeface="Yu Gothic"/>
-              </a:defRPr>
-            </a:pPr>
-            <a:r>
-              <a:t>• 責任分担：依頼・調査・判断・施工・再対応の担当と費用負担を明確化。</a:t>
+            <a:off x="594360" y="5806440"/>
+            <a:ext cx="10789920" cy="594360"/>
+          </a:xfrm>
+          <a:prstGeom prst="rect">
+            <a:avLst/>
+          </a:prstGeom>
+          <a:noFill/>
+        </p:spPr>
+        <p:txBody>
+          <a:bodyPr wrap="square">
+            <a:spAutoFit/>
+          </a:bodyPr>
+          <a:lstStyle/>
+          <a:p>
+            <a:pPr>
+              <a:defRPr sz="1100" b="0">
+                <a:solidFill>
+                  <a:srgbClr val="62727B"/>
+                </a:solidFill>
+                <a:latin typeface="Yu Gothic"/>
+              </a:defRPr>
+            </a:pPr>
+            <a:r>
+              <a:t>期待する価値であり、売上や案件数の増加を保証しない。</a:t>
             </a:r>
           </a:p>
         </p:txBody>
@@ -6213,105 +5527,24 @@
         </p:nvSpPr>
         <p:spPr>
           <a:xfrm>
-            <a:off x="731520" y="4901184"/>
-            <a:ext cx="10789920" cy="694944"/>
-          </a:xfrm>
-          <a:prstGeom prst="rect">
-            <a:avLst/>
-          </a:prstGeom>
-          <a:noFill/>
-        </p:spPr>
-        <p:txBody>
-          <a:bodyPr wrap="square">
-            <a:spAutoFit/>
-          </a:bodyPr>
-          <a:lstStyle/>
-          <a:p>
-            <a:pPr>
-              <a:spcAft>
-                <a:spcPts val="800"/>
-              </a:spcAft>
-              <a:defRPr sz="1900" b="0">
-                <a:solidFill>
-                  <a:srgbClr val="13213D"/>
-                </a:solidFill>
-                <a:latin typeface="Yu Gothic"/>
-              </a:defRPr>
-            </a:pPr>
-            <a:r>
-              <a:t>• 安全・情報管理：現地責任者、必要な資格・手順、閲覧権限、記録の保管を整理。</a:t>
-            </a:r>
-          </a:p>
-        </p:txBody>
-      </p:sp>
-      <p:sp>
-        <p:nvSpPr>
-          <p:cNvPr id="10" name="TextBox 9"/>
-          <p:cNvSpPr txBox="1"/>
-          <p:nvPr/>
-        </p:nvSpPr>
-        <p:spPr>
-          <a:xfrm>
-            <a:off x="594360" y="6062472"/>
-            <a:ext cx="10789920" cy="502920"/>
-          </a:xfrm>
-          <a:prstGeom prst="rect">
-            <a:avLst/>
-          </a:prstGeom>
-          <a:noFill/>
-        </p:spPr>
-        <p:txBody>
-          <a:bodyPr wrap="square">
-            <a:spAutoFit/>
-          </a:bodyPr>
-          <a:lstStyle/>
-          <a:p>
-            <a:pPr>
-              <a:spcAft>
-                <a:spcPts val="800"/>
-              </a:spcAft>
-              <a:defRPr sz="1100" b="0">
-                <a:solidFill>
-                  <a:srgbClr val="506074"/>
-                </a:solidFill>
-                <a:latin typeface="Yu Gothic"/>
-              </a:defRPr>
-            </a:pPr>
-            <a:r>
-              <a:t>資格者による現地確認など、必要な作業をアプリが代替できるとはしない。</a:t>
-            </a:r>
-          </a:p>
-        </p:txBody>
-      </p:sp>
-      <p:sp>
-        <p:nvSpPr>
-          <p:cNvPr id="11" name="TextBox 10"/>
-          <p:cNvSpPr txBox="1"/>
-          <p:nvPr/>
-        </p:nvSpPr>
-        <p:spPr>
-          <a:xfrm>
-            <a:off x="11064240" y="6455664"/>
-            <a:ext cx="548640" cy="228600"/>
-          </a:xfrm>
-          <a:prstGeom prst="rect">
-            <a:avLst/>
-          </a:prstGeom>
-          <a:noFill/>
-        </p:spPr>
-        <p:txBody>
-          <a:bodyPr wrap="square">
-            <a:spAutoFit/>
-          </a:bodyPr>
-          <a:lstStyle/>
-          <a:p>
-            <a:pPr>
-              <a:spcAft>
-                <a:spcPts val="800"/>
-              </a:spcAft>
+            <a:off x="11018520" y="6446520"/>
+            <a:ext cx="594360" cy="274320"/>
+          </a:xfrm>
+          <a:prstGeom prst="rect">
+            <a:avLst/>
+          </a:prstGeom>
+          <a:noFill/>
+        </p:spPr>
+        <p:txBody>
+          <a:bodyPr wrap="square">
+            <a:spAutoFit/>
+          </a:bodyPr>
+          <a:lstStyle/>
+          <a:p>
+            <a:pPr>
               <a:defRPr sz="1000" b="0">
                 <a:solidFill>
-                  <a:srgbClr val="506074"/>
+                  <a:srgbClr val="62727B"/>
                 </a:solidFill>
                 <a:latin typeface="Yu Gothic"/>
               </a:defRPr>
@@ -6336,7 +5569,7 @@
     <p:bg>
       <p:bgPr>
         <a:solidFill>
-          <a:srgbClr val="F8FAFD"/>
+          <a:srgbClr val="F8FAF8"/>
         </a:solidFill>
         <a:effectLst/>
       </p:bgPr>
@@ -6350,44 +5583,37 @@
       <p:grpSpPr/>
       <p:sp>
         <p:nvSpPr>
-          <p:cNvPr id="2" name="Rectangle 1"/>
-          <p:cNvSpPr/>
-          <p:nvPr/>
-        </p:nvSpPr>
-        <p:spPr>
-          <a:xfrm>
-            <a:off x="0" y="0"/>
-            <a:ext cx="12191695" cy="91440"/>
-          </a:xfrm>
-          <a:prstGeom prst="rect">
-            <a:avLst/>
-          </a:prstGeom>
-          <a:solidFill>
-            <a:srgbClr val="1F5FD1"/>
-          </a:solidFill>
-          <a:ln>
-            <a:noFill/>
-          </a:ln>
-        </p:spPr>
-        <p:style>
-          <a:lnRef idx="1">
-            <a:schemeClr val="accent1"/>
-          </a:lnRef>
-          <a:fillRef idx="3">
-            <a:schemeClr val="accent1"/>
-          </a:fillRef>
-          <a:effectRef idx="2">
-            <a:schemeClr val="accent1"/>
-          </a:effectRef>
-          <a:fontRef idx="minor">
-            <a:schemeClr val="lt1"/>
-          </a:fontRef>
-        </p:style>
-        <p:txBody>
-          <a:bodyPr rtlCol="0" anchor="ctr"/>
-          <a:lstStyle/>
-          <a:p>
-            <a:pPr algn="ctr"/>
+          <p:cNvPr id="2" name="TextBox 1"/>
+          <p:cNvSpPr txBox="1"/>
+          <p:nvPr/>
+        </p:nvSpPr>
+        <p:spPr>
+          <a:xfrm>
+            <a:off x="594360" y="320040"/>
+            <a:ext cx="10972800" cy="457200"/>
+          </a:xfrm>
+          <a:prstGeom prst="rect">
+            <a:avLst/>
+          </a:prstGeom>
+          <a:noFill/>
+        </p:spPr>
+        <p:txBody>
+          <a:bodyPr wrap="square">
+            <a:spAutoFit/>
+          </a:bodyPr>
+          <a:lstStyle/>
+          <a:p>
+            <a:pPr>
+              <a:defRPr sz="1200" b="1">
+                <a:solidFill>
+                  <a:srgbClr val="167663"/>
+                </a:solidFill>
+                <a:latin typeface="Yu Gothic"/>
+              </a:defRPr>
+            </a:pPr>
+            <a:r>
+              <a:t>IKS / FIELD DX × CONSTRUCTION NETWORK</a:t>
+            </a:r>
           </a:p>
         </p:txBody>
       </p:sp>
@@ -6399,33 +5625,30 @@
         </p:nvSpPr>
         <p:spPr>
           <a:xfrm>
-            <a:off x="594360" y="320040"/>
-            <a:ext cx="10972800" cy="320040"/>
-          </a:xfrm>
-          <a:prstGeom prst="rect">
-            <a:avLst/>
-          </a:prstGeom>
-          <a:noFill/>
-        </p:spPr>
-        <p:txBody>
-          <a:bodyPr wrap="square">
-            <a:spAutoFit/>
-          </a:bodyPr>
-          <a:lstStyle/>
-          <a:p>
-            <a:pPr>
-              <a:spcAft>
-                <a:spcPts val="800"/>
-              </a:spcAft>
-              <a:defRPr sz="1200" b="1">
-                <a:solidFill>
-                  <a:srgbClr val="1F5FD1"/>
-                </a:solidFill>
-                <a:latin typeface="Yu Gothic"/>
-              </a:defRPr>
-            </a:pPr>
-            <a:r>
-              <a:t>IKS  /  FIELD DX &amp; CONSTRUCTION NETWORK</a:t>
+            <a:off x="594360" y="914400"/>
+            <a:ext cx="10972800" cy="1143000"/>
+          </a:xfrm>
+          <a:prstGeom prst="rect">
+            <a:avLst/>
+          </a:prstGeom>
+          <a:noFill/>
+        </p:spPr>
+        <p:txBody>
+          <a:bodyPr wrap="square">
+            <a:spAutoFit/>
+          </a:bodyPr>
+          <a:lstStyle/>
+          <a:p>
+            <a:pPr>
+              <a:defRPr sz="2700" b="1">
+                <a:solidFill>
+                  <a:srgbClr val="152D39"/>
+                </a:solidFill>
+                <a:latin typeface="Yu Gothic"/>
+              </a:defRPr>
+            </a:pPr>
+            <a:r>
+              <a:t>07｜紹介だけでなく、任せられる仕組みを。</a:t>
             </a:r>
           </a:p>
         </p:txBody>
@@ -6438,33 +5661,30 @@
         </p:nvSpPr>
         <p:spPr>
           <a:xfrm>
-            <a:off x="594360" y="868680"/>
-            <a:ext cx="10972800" cy="960120"/>
-          </a:xfrm>
-          <a:prstGeom prst="rect">
-            <a:avLst/>
-          </a:prstGeom>
-          <a:noFill/>
-        </p:spPr>
-        <p:txBody>
-          <a:bodyPr wrap="square">
-            <a:spAutoFit/>
-          </a:bodyPr>
-          <a:lstStyle/>
-          <a:p>
-            <a:pPr>
-              <a:spcAft>
-                <a:spcPts val="800"/>
-              </a:spcAft>
-              <a:defRPr sz="2900" b="1">
-                <a:solidFill>
-                  <a:srgbClr val="13213D"/>
-                </a:solidFill>
-                <a:latin typeface="Yu Gothic"/>
-              </a:defRPr>
-            </a:pPr>
-            <a:r>
-              <a:t>07｜期待する価値と、実証で測ること</a:t>
+            <a:off x="594360" y="2103120"/>
+            <a:ext cx="10972800" cy="548640"/>
+          </a:xfrm>
+          <a:prstGeom prst="rect">
+            <a:avLst/>
+          </a:prstGeom>
+          <a:noFill/>
+        </p:spPr>
+        <p:txBody>
+          <a:bodyPr wrap="square">
+            <a:spAutoFit/>
+          </a:bodyPr>
+          <a:lstStyle/>
+          <a:p>
+            <a:pPr>
+              <a:defRPr sz="1800" b="1">
+                <a:solidFill>
+                  <a:srgbClr val="167663"/>
+                </a:solidFill>
+                <a:latin typeface="Yu Gothic"/>
+              </a:defRPr>
+            </a:pPr>
+            <a:r>
+              <a:t>品質・技術・責任・安全を揃える</a:t>
             </a:r>
           </a:p>
         </p:txBody>
@@ -6477,33 +5697,30 @@
         </p:nvSpPr>
         <p:spPr>
           <a:xfrm>
-            <a:off x="594360" y="1847088"/>
-            <a:ext cx="10972800" cy="548640"/>
-          </a:xfrm>
-          <a:prstGeom prst="rect">
-            <a:avLst/>
-          </a:prstGeom>
-          <a:noFill/>
-        </p:spPr>
-        <p:txBody>
-          <a:bodyPr wrap="square">
-            <a:spAutoFit/>
-          </a:bodyPr>
-          <a:lstStyle/>
-          <a:p>
-            <a:pPr>
-              <a:spcAft>
-                <a:spcPts val="800"/>
-              </a:spcAft>
-              <a:defRPr sz="1900" b="1">
-                <a:solidFill>
-                  <a:srgbClr val="1F5FD1"/>
-                </a:solidFill>
-                <a:latin typeface="Yu Gothic"/>
-              </a:defRPr>
-            </a:pPr>
-            <a:r>
-              <a:t>減らした出張だけでなく、増えた負担も測定する</a:t>
+            <a:off x="731520" y="2852928"/>
+            <a:ext cx="10789920" cy="749808"/>
+          </a:xfrm>
+          <a:prstGeom prst="rect">
+            <a:avLst/>
+          </a:prstGeom>
+          <a:noFill/>
+        </p:spPr>
+        <p:txBody>
+          <a:bodyPr wrap="square">
+            <a:spAutoFit/>
+          </a:bodyPr>
+          <a:lstStyle/>
+          <a:p>
+            <a:pPr>
+              <a:defRPr sz="1800" b="0">
+                <a:solidFill>
+                  <a:srgbClr val="152D39"/>
+                </a:solidFill>
+                <a:latin typeface="Yu Gothic"/>
+              </a:defRPr>
+            </a:pPr>
+            <a:r>
+              <a:t>• 調査項目、撮影・測定方法、報告形式、完了・承認基準を標準化。</a:t>
             </a:r>
           </a:p>
         </p:txBody>
@@ -6516,33 +5733,30 @@
         </p:nvSpPr>
         <p:spPr>
           <a:xfrm>
-            <a:off x="731520" y="2651760"/>
-            <a:ext cx="10789920" cy="694944"/>
-          </a:xfrm>
-          <a:prstGeom prst="rect">
-            <a:avLst/>
-          </a:prstGeom>
-          <a:noFill/>
-        </p:spPr>
-        <p:txBody>
-          <a:bodyPr wrap="square">
-            <a:spAutoFit/>
-          </a:bodyPr>
-          <a:lstStyle/>
-          <a:p>
-            <a:pPr>
-              <a:spcAft>
-                <a:spcPts val="800"/>
-              </a:spcAft>
-              <a:defRPr sz="1900" b="0">
-                <a:solidFill>
-                  <a:srgbClr val="13213D"/>
-                </a:solidFill>
-                <a:latin typeface="Yu Gothic"/>
-              </a:defRPr>
-            </a:pPr>
-            <a:r>
-              <a:t>• 依頼企業：遠方の案件に対応しやすくなる可能性。対応期間・案件数・成約状況で評価。</a:t>
+            <a:off x="731520" y="3657600"/>
+            <a:ext cx="10789920" cy="749808"/>
+          </a:xfrm>
+          <a:prstGeom prst="rect">
+            <a:avLst/>
+          </a:prstGeom>
+          <a:noFill/>
+        </p:spPr>
+        <p:txBody>
+          <a:bodyPr wrap="square">
+            <a:spAutoFit/>
+          </a:bodyPr>
+          <a:lstStyle/>
+          <a:p>
+            <a:pPr>
+              <a:defRPr sz="1800" b="0">
+                <a:solidFill>
+                  <a:srgbClr val="152D39"/>
+                </a:solidFill>
+                <a:latin typeface="Yu Gothic"/>
+              </a:defRPr>
+            </a:pPr>
+            <a:r>
+              <a:t>• 対応者の技能・経験・資格を確認し、教育と試行を実施。</a:t>
             </a:r>
           </a:p>
         </p:txBody>
@@ -6555,33 +5769,30 @@
         </p:nvSpPr>
         <p:spPr>
           <a:xfrm>
-            <a:off x="731520" y="3401568"/>
-            <a:ext cx="10789920" cy="694944"/>
-          </a:xfrm>
-          <a:prstGeom prst="rect">
-            <a:avLst/>
-          </a:prstGeom>
-          <a:noFill/>
-        </p:spPr>
-        <p:txBody>
-          <a:bodyPr wrap="square">
-            <a:spAutoFit/>
-          </a:bodyPr>
-          <a:lstStyle/>
-          <a:p>
-            <a:pPr>
-              <a:spcAft>
-                <a:spcPts val="800"/>
-              </a:spcAft>
-              <a:defRPr sz="1900" b="0">
-                <a:solidFill>
-                  <a:srgbClr val="13213D"/>
-                </a:solidFill>
-                <a:latin typeface="Yu Gothic"/>
-              </a:defRPr>
-            </a:pPr>
-            <a:r>
-              <a:t>• 地域の協力会社：新しい業務機会。案件数、報酬、必要工数、再対応率で評価。</a:t>
+            <a:off x="731520" y="4462272"/>
+            <a:ext cx="10789920" cy="749808"/>
+          </a:xfrm>
+          <a:prstGeom prst="rect">
+            <a:avLst/>
+          </a:prstGeom>
+          <a:noFill/>
+        </p:spPr>
+        <p:txBody>
+          <a:bodyPr wrap="square">
+            <a:spAutoFit/>
+          </a:bodyPr>
+          <a:lstStyle/>
+          <a:p>
+            <a:pPr>
+              <a:defRPr sz="1800" b="0">
+                <a:solidFill>
+                  <a:srgbClr val="152D39"/>
+                </a:solidFill>
+                <a:latin typeface="Yu Gothic"/>
+              </a:defRPr>
+            </a:pPr>
+            <a:r>
+              <a:t>• 調査・判断・施工・再対応の責任、費用負担、情報権限を明確化。</a:t>
             </a:r>
           </a:p>
         </p:txBody>
@@ -6594,33 +5805,30 @@
         </p:nvSpPr>
         <p:spPr>
           <a:xfrm>
-            <a:off x="731520" y="4151376"/>
-            <a:ext cx="10789920" cy="694944"/>
-          </a:xfrm>
-          <a:prstGeom prst="rect">
-            <a:avLst/>
-          </a:prstGeom>
-          <a:noFill/>
-        </p:spPr>
-        <p:txBody>
-          <a:bodyPr wrap="square">
-            <a:spAutoFit/>
-          </a:bodyPr>
-          <a:lstStyle/>
-          <a:p>
-            <a:pPr>
-              <a:spcAft>
-                <a:spcPts val="800"/>
-              </a:spcAft>
-              <a:defRPr sz="1900" b="0">
-                <a:solidFill>
-                  <a:srgbClr val="13213D"/>
-                </a:solidFill>
-                <a:latin typeface="Yu Gothic"/>
-              </a:defRPr>
-            </a:pPr>
-            <a:r>
-              <a:t>• 経験者：移動負担を減らし、複数案件の確認に時間を振り向ける。拘束時間で評価。</a:t>
+            <a:off x="594360" y="5806440"/>
+            <a:ext cx="10789920" cy="594360"/>
+          </a:xfrm>
+          <a:prstGeom prst="rect">
+            <a:avLst/>
+          </a:prstGeom>
+          <a:noFill/>
+        </p:spPr>
+        <p:txBody>
+          <a:bodyPr wrap="square">
+            <a:spAutoFit/>
+          </a:bodyPr>
+          <a:lstStyle/>
+          <a:p>
+            <a:pPr>
+              <a:defRPr sz="1100" b="0">
+                <a:solidFill>
+                  <a:srgbClr val="62727B"/>
+                </a:solidFill>
+                <a:latin typeface="Yu Gothic"/>
+              </a:defRPr>
+            </a:pPr>
+            <a:r>
+              <a:t>資格者による現地確認や法令上の手順を、アプリが不要にするとはしない。</a:t>
             </a:r>
           </a:p>
         </p:txBody>
@@ -6633,105 +5841,24 @@
         </p:nvSpPr>
         <p:spPr>
           <a:xfrm>
-            <a:off x="731520" y="4901184"/>
-            <a:ext cx="10789920" cy="694944"/>
-          </a:xfrm>
-          <a:prstGeom prst="rect">
-            <a:avLst/>
-          </a:prstGeom>
-          <a:noFill/>
-        </p:spPr>
-        <p:txBody>
-          <a:bodyPr wrap="square">
-            <a:spAutoFit/>
-          </a:bodyPr>
-          <a:lstStyle/>
-          <a:p>
-            <a:pPr>
-              <a:spcAft>
-                <a:spcPts val="800"/>
-              </a:spcAft>
-              <a:defRPr sz="1900" b="0">
-                <a:solidFill>
-                  <a:srgbClr val="13213D"/>
-                </a:solidFill>
-                <a:latin typeface="Yu Gothic"/>
-              </a:defRPr>
-            </a:pPr>
-            <a:r>
-              <a:t>• 品質：情報不足、誤記、再訪、承認までの時間を導入前後で比較。</a:t>
-            </a:r>
-          </a:p>
-        </p:txBody>
-      </p:sp>
-      <p:sp>
-        <p:nvSpPr>
-          <p:cNvPr id="10" name="TextBox 9"/>
-          <p:cNvSpPr txBox="1"/>
-          <p:nvPr/>
-        </p:nvSpPr>
-        <p:spPr>
-          <a:xfrm>
-            <a:off x="594360" y="6062472"/>
-            <a:ext cx="10789920" cy="502920"/>
-          </a:xfrm>
-          <a:prstGeom prst="rect">
-            <a:avLst/>
-          </a:prstGeom>
-          <a:noFill/>
-        </p:spPr>
-        <p:txBody>
-          <a:bodyPr wrap="square">
-            <a:spAutoFit/>
-          </a:bodyPr>
-          <a:lstStyle/>
-          <a:p>
-            <a:pPr>
-              <a:spcAft>
-                <a:spcPts val="800"/>
-              </a:spcAft>
-              <a:defRPr sz="1100" b="0">
-                <a:solidFill>
-                  <a:srgbClr val="506074"/>
-                </a:solidFill>
-                <a:latin typeface="Yu Gothic"/>
-              </a:defRPr>
-            </a:pPr>
-            <a:r>
-              <a:t>直接費差額＝減らせた出張経費−地域対応・遠隔確認の追加経費−利用・運用費。初期費用は別途評価。</a:t>
-            </a:r>
-          </a:p>
-        </p:txBody>
-      </p:sp>
-      <p:sp>
-        <p:nvSpPr>
-          <p:cNvPr id="11" name="TextBox 10"/>
-          <p:cNvSpPr txBox="1"/>
-          <p:nvPr/>
-        </p:nvSpPr>
-        <p:spPr>
-          <a:xfrm>
-            <a:off x="11064240" y="6455664"/>
-            <a:ext cx="548640" cy="228600"/>
-          </a:xfrm>
-          <a:prstGeom prst="rect">
-            <a:avLst/>
-          </a:prstGeom>
-          <a:noFill/>
-        </p:spPr>
-        <p:txBody>
-          <a:bodyPr wrap="square">
-            <a:spAutoFit/>
-          </a:bodyPr>
-          <a:lstStyle/>
-          <a:p>
-            <a:pPr>
-              <a:spcAft>
-                <a:spcPts val="800"/>
-              </a:spcAft>
+            <a:off x="11018520" y="6446520"/>
+            <a:ext cx="594360" cy="274320"/>
+          </a:xfrm>
+          <a:prstGeom prst="rect">
+            <a:avLst/>
+          </a:prstGeom>
+          <a:noFill/>
+        </p:spPr>
+        <p:txBody>
+          <a:bodyPr wrap="square">
+            <a:spAutoFit/>
+          </a:bodyPr>
+          <a:lstStyle/>
+          <a:p>
+            <a:pPr>
               <a:defRPr sz="1000" b="0">
                 <a:solidFill>
-                  <a:srgbClr val="506074"/>
+                  <a:srgbClr val="62727B"/>
                 </a:solidFill>
                 <a:latin typeface="Yu Gothic"/>
               </a:defRPr>
@@ -6756,7 +5883,7 @@
     <p:bg>
       <p:bgPr>
         <a:solidFill>
-          <a:srgbClr val="F8FAFD"/>
+          <a:srgbClr val="F8FAF8"/>
         </a:solidFill>
         <a:effectLst/>
       </p:bgPr>
@@ -6770,44 +5897,37 @@
       <p:grpSpPr/>
       <p:sp>
         <p:nvSpPr>
-          <p:cNvPr id="2" name="Rectangle 1"/>
-          <p:cNvSpPr/>
-          <p:nvPr/>
-        </p:nvSpPr>
-        <p:spPr>
-          <a:xfrm>
-            <a:off x="0" y="0"/>
-            <a:ext cx="12191695" cy="91440"/>
-          </a:xfrm>
-          <a:prstGeom prst="rect">
-            <a:avLst/>
-          </a:prstGeom>
-          <a:solidFill>
-            <a:srgbClr val="1F5FD1"/>
-          </a:solidFill>
-          <a:ln>
-            <a:noFill/>
-          </a:ln>
-        </p:spPr>
-        <p:style>
-          <a:lnRef idx="1">
-            <a:schemeClr val="accent1"/>
-          </a:lnRef>
-          <a:fillRef idx="3">
-            <a:schemeClr val="accent1"/>
-          </a:fillRef>
-          <a:effectRef idx="2">
-            <a:schemeClr val="accent1"/>
-          </a:effectRef>
-          <a:fontRef idx="minor">
-            <a:schemeClr val="lt1"/>
-          </a:fontRef>
-        </p:style>
-        <p:txBody>
-          <a:bodyPr rtlCol="0" anchor="ctr"/>
-          <a:lstStyle/>
-          <a:p>
-            <a:pPr algn="ctr"/>
+          <p:cNvPr id="2" name="TextBox 1"/>
+          <p:cNvSpPr txBox="1"/>
+          <p:nvPr/>
+        </p:nvSpPr>
+        <p:spPr>
+          <a:xfrm>
+            <a:off x="594360" y="320040"/>
+            <a:ext cx="10972800" cy="457200"/>
+          </a:xfrm>
+          <a:prstGeom prst="rect">
+            <a:avLst/>
+          </a:prstGeom>
+          <a:noFill/>
+        </p:spPr>
+        <p:txBody>
+          <a:bodyPr wrap="square">
+            <a:spAutoFit/>
+          </a:bodyPr>
+          <a:lstStyle/>
+          <a:p>
+            <a:pPr>
+              <a:defRPr sz="1200" b="1">
+                <a:solidFill>
+                  <a:srgbClr val="167663"/>
+                </a:solidFill>
+                <a:latin typeface="Yu Gothic"/>
+              </a:defRPr>
+            </a:pPr>
+            <a:r>
+              <a:t>IKS / FIELD DX × CONSTRUCTION NETWORK</a:t>
+            </a:r>
           </a:p>
         </p:txBody>
       </p:sp>
@@ -6819,33 +5939,30 @@
         </p:nvSpPr>
         <p:spPr>
           <a:xfrm>
-            <a:off x="594360" y="320040"/>
-            <a:ext cx="10972800" cy="320040"/>
-          </a:xfrm>
-          <a:prstGeom prst="rect">
-            <a:avLst/>
-          </a:prstGeom>
-          <a:noFill/>
-        </p:spPr>
-        <p:txBody>
-          <a:bodyPr wrap="square">
-            <a:spAutoFit/>
-          </a:bodyPr>
-          <a:lstStyle/>
-          <a:p>
-            <a:pPr>
-              <a:spcAft>
-                <a:spcPts val="800"/>
-              </a:spcAft>
-              <a:defRPr sz="1200" b="1">
-                <a:solidFill>
-                  <a:srgbClr val="1F5FD1"/>
-                </a:solidFill>
-                <a:latin typeface="Yu Gothic"/>
-              </a:defRPr>
-            </a:pPr>
-            <a:r>
-              <a:t>IKS  /  FIELD DX &amp; CONSTRUCTION NETWORK</a:t>
+            <a:off x="594360" y="914400"/>
+            <a:ext cx="10972800" cy="1143000"/>
+          </a:xfrm>
+          <a:prstGeom prst="rect">
+            <a:avLst/>
+          </a:prstGeom>
+          <a:noFill/>
+        </p:spPr>
+        <p:txBody>
+          <a:bodyPr wrap="square">
+            <a:spAutoFit/>
+          </a:bodyPr>
+          <a:lstStyle/>
+          <a:p>
+            <a:pPr>
+              <a:defRPr sz="2700" b="1">
+                <a:solidFill>
+                  <a:srgbClr val="152D39"/>
+                </a:solidFill>
+                <a:latin typeface="Yu Gothic"/>
+              </a:defRPr>
+            </a:pPr>
+            <a:r>
+              <a:t>08｜一社・一地域・一業務で、効果を確かめる。</a:t>
             </a:r>
           </a:p>
         </p:txBody>
@@ -6858,33 +5975,30 @@
         </p:nvSpPr>
         <p:spPr>
           <a:xfrm>
-            <a:off x="594360" y="868680"/>
-            <a:ext cx="10972800" cy="960120"/>
-          </a:xfrm>
-          <a:prstGeom prst="rect">
-            <a:avLst/>
-          </a:prstGeom>
-          <a:noFill/>
-        </p:spPr>
-        <p:txBody>
-          <a:bodyPr wrap="square">
-            <a:spAutoFit/>
-          </a:bodyPr>
-          <a:lstStyle/>
-          <a:p>
-            <a:pPr>
-              <a:spcAft>
-                <a:spcPts val="800"/>
-              </a:spcAft>
-              <a:defRPr sz="2900" b="1">
-                <a:solidFill>
-                  <a:srgbClr val="13213D"/>
-                </a:solidFill>
-                <a:latin typeface="Yu Gothic"/>
-              </a:defRPr>
-            </a:pPr>
-            <a:r>
-              <a:t>08｜実証から、再利用できる事業基盤へ</a:t>
+            <a:off x="594360" y="2103120"/>
+            <a:ext cx="10972800" cy="548640"/>
+          </a:xfrm>
+          <a:prstGeom prst="rect">
+            <a:avLst/>
+          </a:prstGeom>
+          <a:noFill/>
+        </p:spPr>
+        <p:txBody>
+          <a:bodyPr wrap="square">
+            <a:spAutoFit/>
+          </a:bodyPr>
+          <a:lstStyle/>
+          <a:p>
+            <a:pPr>
+              <a:defRPr sz="1800" b="1">
+                <a:solidFill>
+                  <a:srgbClr val="167663"/>
+                </a:solidFill>
+                <a:latin typeface="Yu Gothic"/>
+              </a:defRPr>
+            </a:pPr>
+            <a:r>
+              <a:t>実証から、再利用できる事業基盤へ</a:t>
             </a:r>
           </a:p>
         </p:txBody>
@@ -6897,33 +6011,30 @@
         </p:nvSpPr>
         <p:spPr>
           <a:xfrm>
-            <a:off x="594360" y="1847088"/>
-            <a:ext cx="10972800" cy="548640"/>
-          </a:xfrm>
-          <a:prstGeom prst="rect">
-            <a:avLst/>
-          </a:prstGeom>
-          <a:noFill/>
-        </p:spPr>
-        <p:txBody>
-          <a:bodyPr wrap="square">
-            <a:spAutoFit/>
-          </a:bodyPr>
-          <a:lstStyle/>
-          <a:p>
-            <a:pPr>
-              <a:spcAft>
-                <a:spcPts val="800"/>
-              </a:spcAft>
-              <a:defRPr sz="1900" b="1">
-                <a:solidFill>
-                  <a:srgbClr val="1F5FD1"/>
-                </a:solidFill>
-                <a:latin typeface="Yu Gothic"/>
-              </a:defRPr>
-            </a:pPr>
-            <a:r>
-              <a:t>一社・一地域・一業務から始め、条件を揃えて拡張する</a:t>
+            <a:off x="731520" y="2852928"/>
+            <a:ext cx="10789920" cy="749808"/>
+          </a:xfrm>
+          <a:prstGeom prst="rect">
+            <a:avLst/>
+          </a:prstGeom>
+          <a:noFill/>
+        </p:spPr>
+        <p:txBody>
+          <a:bodyPr wrap="square">
+            <a:spAutoFit/>
+          </a:bodyPr>
+          <a:lstStyle/>
+          <a:p>
+            <a:pPr>
+              <a:defRPr sz="1800" b="0">
+                <a:solidFill>
+                  <a:srgbClr val="152D39"/>
+                </a:solidFill>
+                <a:latin typeface="Yu Gothic"/>
+              </a:defRPr>
+            </a:pPr>
+            <a:r>
+              <a:t>• 対象業務と協力会社を選び、現状の費用・工数・品質を記録。</a:t>
             </a:r>
           </a:p>
         </p:txBody>
@@ -6936,33 +6047,30 @@
         </p:nvSpPr>
         <p:spPr>
           <a:xfrm>
-            <a:off x="731520" y="2651760"/>
-            <a:ext cx="10789920" cy="694944"/>
-          </a:xfrm>
-          <a:prstGeom prst="rect">
-            <a:avLst/>
-          </a:prstGeom>
-          <a:noFill/>
-        </p:spPr>
-        <p:txBody>
-          <a:bodyPr wrap="square">
-            <a:spAutoFit/>
-          </a:bodyPr>
-          <a:lstStyle/>
-          <a:p>
-            <a:pPr>
-              <a:spcAft>
-                <a:spcPts val="800"/>
-              </a:spcAft>
-              <a:defRPr sz="1900" b="0">
-                <a:solidFill>
-                  <a:srgbClr val="13213D"/>
-                </a:solidFill>
-                <a:latin typeface="Yu Gothic"/>
-              </a:defRPr>
-            </a:pPr>
-            <a:r>
-              <a:t>• 段階1：対象業務・協力会社・完了基準を決定し、現状の費用と時間を計測。</a:t>
+            <a:off x="731520" y="3657600"/>
+            <a:ext cx="10789920" cy="749808"/>
+          </a:xfrm>
+          <a:prstGeom prst="rect">
+            <a:avLst/>
+          </a:prstGeom>
+          <a:noFill/>
+        </p:spPr>
+        <p:txBody>
+          <a:bodyPr wrap="square">
+            <a:spAutoFit/>
+          </a:bodyPr>
+          <a:lstStyle/>
+          <a:p>
+            <a:pPr>
+              <a:defRPr sz="1800" b="0">
+                <a:solidFill>
+                  <a:srgbClr val="152D39"/>
+                </a:solidFill>
+                <a:latin typeface="Yu Gothic"/>
+              </a:defRPr>
+            </a:pPr>
+            <a:r>
+              <a:t>• 地域の現地対応と遠隔確認を試行。出張回数、拘束時間、再訪、確認完了時間を比較。</a:t>
             </a:r>
           </a:p>
         </p:txBody>
@@ -6975,33 +6083,30 @@
         </p:nvSpPr>
         <p:spPr>
           <a:xfrm>
-            <a:off x="731520" y="3401568"/>
-            <a:ext cx="10789920" cy="694944"/>
-          </a:xfrm>
-          <a:prstGeom prst="rect">
-            <a:avLst/>
-          </a:prstGeom>
-          <a:noFill/>
-        </p:spPr>
-        <p:txBody>
-          <a:bodyPr wrap="square">
-            <a:spAutoFit/>
-          </a:bodyPr>
-          <a:lstStyle/>
-          <a:p>
-            <a:pPr>
-              <a:spcAft>
-                <a:spcPts val="800"/>
-              </a:spcAft>
-              <a:defRPr sz="1900" b="0">
-                <a:solidFill>
-                  <a:srgbClr val="13213D"/>
-                </a:solidFill>
-                <a:latin typeface="Yu Gothic"/>
-              </a:defRPr>
-            </a:pPr>
-            <a:r>
-              <a:t>• 段階2：同種案件で現地記録と遠隔確認を試行し、品質・負担・費用を検証。</a:t>
+            <a:off x="731520" y="4462272"/>
+            <a:ext cx="10789920" cy="749808"/>
+          </a:xfrm>
+          <a:prstGeom prst="rect">
+            <a:avLst/>
+          </a:prstGeom>
+          <a:noFill/>
+        </p:spPr>
+        <p:txBody>
+          <a:bodyPr wrap="square">
+            <a:spAutoFit/>
+          </a:bodyPr>
+          <a:lstStyle/>
+          <a:p>
+            <a:pPr>
+              <a:defRPr sz="1800" b="0">
+                <a:solidFill>
+                  <a:srgbClr val="152D39"/>
+                </a:solidFill>
+                <a:latin typeface="Yu Gothic"/>
+              </a:defRPr>
+            </a:pPr>
+            <a:r>
+              <a:t>• 減らした出張経費だけでなく、現地対応費・遠隔確認工数・利用運用費を評価。</a:t>
             </a:r>
           </a:p>
         </p:txBody>
@@ -7014,33 +6119,30 @@
         </p:nvSpPr>
         <p:spPr>
           <a:xfrm>
-            <a:off x="731520" y="4151376"/>
-            <a:ext cx="10789920" cy="694944"/>
-          </a:xfrm>
-          <a:prstGeom prst="rect">
-            <a:avLst/>
-          </a:prstGeom>
-          <a:noFill/>
-        </p:spPr>
-        <p:txBody>
-          <a:bodyPr wrap="square">
-            <a:spAutoFit/>
-          </a:bodyPr>
-          <a:lstStyle/>
-          <a:p>
-            <a:pPr>
-              <a:spcAft>
-                <a:spcPts val="800"/>
-              </a:spcAft>
-              <a:defRPr sz="1900" b="0">
-                <a:solidFill>
-                  <a:srgbClr val="13213D"/>
-                </a:solidFill>
-                <a:latin typeface="Yu Gothic"/>
-              </a:defRPr>
-            </a:pPr>
-            <a:r>
-              <a:t>• 段階3：有効性を確認した手順を標準化し、対応地域・商材・施工業務へ展開。</a:t>
+            <a:off x="594360" y="5806440"/>
+            <a:ext cx="10789920" cy="594360"/>
+          </a:xfrm>
+          <a:prstGeom prst="rect">
+            <a:avLst/>
+          </a:prstGeom>
+          <a:noFill/>
+        </p:spPr>
+        <p:txBody>
+          <a:bodyPr wrap="square">
+            <a:spAutoFit/>
+          </a:bodyPr>
+          <a:lstStyle/>
+          <a:p>
+            <a:pPr>
+              <a:defRPr sz="1100" b="0">
+                <a:solidFill>
+                  <a:srgbClr val="62727B"/>
+                </a:solidFill>
+                <a:latin typeface="Yu Gothic"/>
+              </a:defRPr>
+            </a:pPr>
+            <a:r>
+              <a:t>成果を確認した手順を標準化し、対応地域・商材・施工業務へ展開。料金・契約方式・期間は協議して決定。</a:t>
             </a:r>
           </a:p>
         </p:txBody>
@@ -7053,105 +6155,24 @@
         </p:nvSpPr>
         <p:spPr>
           <a:xfrm>
-            <a:off x="731520" y="4901184"/>
-            <a:ext cx="10789920" cy="694944"/>
-          </a:xfrm>
-          <a:prstGeom prst="rect">
-            <a:avLst/>
-          </a:prstGeom>
-          <a:noFill/>
-        </p:spPr>
-        <p:txBody>
-          <a:bodyPr wrap="square">
-            <a:spAutoFit/>
-          </a:bodyPr>
-          <a:lstStyle/>
-          <a:p>
-            <a:pPr>
-              <a:spcAft>
-                <a:spcPts val="800"/>
-              </a:spcAft>
-              <a:defRPr sz="1900" b="0">
-                <a:solidFill>
-                  <a:srgbClr val="13213D"/>
-                </a:solidFill>
-                <a:latin typeface="Yu Gothic"/>
-              </a:defRPr>
-            </a:pPr>
-            <a:r>
-              <a:t>• 収益モデル候補：基盤利用料、導入・教育支援費、案件運営の対価。料金・契約主体は未決定。</a:t>
-            </a:r>
-          </a:p>
-        </p:txBody>
-      </p:sp>
-      <p:sp>
-        <p:nvSpPr>
-          <p:cNvPr id="10" name="TextBox 9"/>
-          <p:cNvSpPr txBox="1"/>
-          <p:nvPr/>
-        </p:nvSpPr>
-        <p:spPr>
-          <a:xfrm>
-            <a:off x="594360" y="6062472"/>
-            <a:ext cx="10789920" cy="502920"/>
-          </a:xfrm>
-          <a:prstGeom prst="rect">
-            <a:avLst/>
-          </a:prstGeom>
-          <a:noFill/>
-        </p:spPr>
-        <p:txBody>
-          <a:bodyPr wrap="square">
-            <a:spAutoFit/>
-          </a:bodyPr>
-          <a:lstStyle/>
-          <a:p>
-            <a:pPr>
-              <a:spcAft>
-                <a:spcPts val="800"/>
-              </a:spcAft>
-              <a:defRPr sz="1100" b="0">
-                <a:solidFill>
-                  <a:srgbClr val="506074"/>
-                </a:solidFill>
-                <a:latin typeface="Yu Gothic"/>
-              </a:defRPr>
-            </a:pPr>
-            <a:r>
-              <a:t>個別開発は共通基盤を育てるための手段。企業が遠方で仕事を進められる現場対応力を価値とする。</a:t>
-            </a:r>
-          </a:p>
-        </p:txBody>
-      </p:sp>
-      <p:sp>
-        <p:nvSpPr>
-          <p:cNvPr id="11" name="TextBox 10"/>
-          <p:cNvSpPr txBox="1"/>
-          <p:nvPr/>
-        </p:nvSpPr>
-        <p:spPr>
-          <a:xfrm>
-            <a:off x="11064240" y="6455664"/>
-            <a:ext cx="548640" cy="228600"/>
-          </a:xfrm>
-          <a:prstGeom prst="rect">
-            <a:avLst/>
-          </a:prstGeom>
-          <a:noFill/>
-        </p:spPr>
-        <p:txBody>
-          <a:bodyPr wrap="square">
-            <a:spAutoFit/>
-          </a:bodyPr>
-          <a:lstStyle/>
-          <a:p>
-            <a:pPr>
-              <a:spcAft>
-                <a:spcPts val="800"/>
-              </a:spcAft>
+            <a:off x="11018520" y="6446520"/>
+            <a:ext cx="594360" cy="274320"/>
+          </a:xfrm>
+          <a:prstGeom prst="rect">
+            <a:avLst/>
+          </a:prstGeom>
+          <a:noFill/>
+        </p:spPr>
+        <p:txBody>
+          <a:bodyPr wrap="square">
+            <a:spAutoFit/>
+          </a:bodyPr>
+          <a:lstStyle/>
+          <a:p>
+            <a:pPr>
               <a:defRPr sz="1000" b="0">
                 <a:solidFill>
-                  <a:srgbClr val="506074"/>
+                  <a:srgbClr val="62727B"/>
                 </a:solidFill>
                 <a:latin typeface="Yu Gothic"/>
               </a:defRPr>

--- a/proposal.pptx
+++ b/proposal.pptx
@@ -3113,22 +3113,22 @@
         </p:nvSpPr>
         <p:spPr>
           <a:xfrm>
-            <a:off x="594360" y="320040"/>
-            <a:ext cx="10972800" cy="457200"/>
-          </a:xfrm>
-          <a:prstGeom prst="rect">
-            <a:avLst/>
-          </a:prstGeom>
-          <a:noFill/>
-        </p:spPr>
-        <p:txBody>
-          <a:bodyPr wrap="square">
-            <a:spAutoFit/>
-          </a:bodyPr>
-          <a:lstStyle/>
-          <a:p>
-            <a:pPr>
-              <a:defRPr sz="1200" b="1">
+            <a:off x="594360" y="246888"/>
+            <a:ext cx="10972800" cy="274320"/>
+          </a:xfrm>
+          <a:prstGeom prst="rect">
+            <a:avLst/>
+          </a:prstGeom>
+          <a:noFill/>
+        </p:spPr>
+        <p:txBody>
+          <a:bodyPr wrap="square">
+            <a:spAutoFit/>
+          </a:bodyPr>
+          <a:lstStyle/>
+          <a:p>
+            <a:pPr>
+              <a:defRPr sz="1100" b="1">
                 <a:solidFill>
                   <a:srgbClr val="167663"/>
                 </a:solidFill>
@@ -3136,7 +3136,7 @@
               </a:defRPr>
             </a:pPr>
             <a:r>
-              <a:t>IKS / FIELD DX × CONSTRUCTION NETWORK</a:t>
+              <a:t>IKS / VISUAL BUSINESS PROPOSAL</a:t>
             </a:r>
           </a:p>
         </p:txBody>
@@ -3149,22 +3149,22 @@
         </p:nvSpPr>
         <p:spPr>
           <a:xfrm>
-            <a:off x="594360" y="914400"/>
-            <a:ext cx="10972800" cy="1143000"/>
-          </a:xfrm>
-          <a:prstGeom prst="rect">
-            <a:avLst/>
-          </a:prstGeom>
-          <a:noFill/>
-        </p:spPr>
-        <p:txBody>
-          <a:bodyPr wrap="square">
-            <a:spAutoFit/>
-          </a:bodyPr>
-          <a:lstStyle/>
-          <a:p>
-            <a:pPr>
-              <a:defRPr sz="2700" b="1">
+            <a:off x="594360" y="731520"/>
+            <a:ext cx="10972800" cy="914400"/>
+          </a:xfrm>
+          <a:prstGeom prst="rect">
+            <a:avLst/>
+          </a:prstGeom>
+          <a:noFill/>
+        </p:spPr>
+        <p:txBody>
+          <a:bodyPr wrap="square">
+            <a:spAutoFit/>
+          </a:bodyPr>
+          <a:lstStyle/>
+          <a:p>
+            <a:pPr>
+              <a:defRPr sz="2600" b="1">
                 <a:solidFill>
                   <a:srgbClr val="152D39"/>
                 </a:solidFill>
@@ -3185,22 +3185,22 @@
         </p:nvSpPr>
         <p:spPr>
           <a:xfrm>
-            <a:off x="594360" y="2103120"/>
-            <a:ext cx="10972800" cy="548640"/>
-          </a:xfrm>
-          <a:prstGeom prst="rect">
-            <a:avLst/>
-          </a:prstGeom>
-          <a:noFill/>
-        </p:spPr>
-        <p:txBody>
-          <a:bodyPr wrap="square">
-            <a:spAutoFit/>
-          </a:bodyPr>
-          <a:lstStyle/>
-          <a:p>
-            <a:pPr>
-              <a:defRPr sz="1800" b="1">
+            <a:off x="594360" y="1737360"/>
+            <a:ext cx="10972800" cy="502920"/>
+          </a:xfrm>
+          <a:prstGeom prst="rect">
+            <a:avLst/>
+          </a:prstGeom>
+          <a:noFill/>
+        </p:spPr>
+        <p:txBody>
+          <a:bodyPr wrap="square">
+            <a:spAutoFit/>
+          </a:bodyPr>
+          <a:lstStyle/>
+          <a:p>
+            <a:pPr>
+              <a:defRPr sz="1500" b="0">
                 <a:solidFill>
                   <a:srgbClr val="167663"/>
                 </a:solidFill>
@@ -3221,22 +3221,150 @@
         </p:nvSpPr>
         <p:spPr>
           <a:xfrm>
-            <a:off x="731520" y="2852928"/>
-            <a:ext cx="10789920" cy="749808"/>
-          </a:xfrm>
-          <a:prstGeom prst="rect">
-            <a:avLst/>
-          </a:prstGeom>
-          <a:noFill/>
-        </p:spPr>
-        <p:txBody>
-          <a:bodyPr wrap="square">
-            <a:spAutoFit/>
-          </a:bodyPr>
-          <a:lstStyle/>
-          <a:p>
-            <a:pPr>
-              <a:defRPr sz="1800" b="0">
+            <a:off x="731520" y="2514600"/>
+            <a:ext cx="10698480" cy="1234440"/>
+          </a:xfrm>
+          <a:prstGeom prst="rect">
+            <a:avLst/>
+          </a:prstGeom>
+          <a:noFill/>
+        </p:spPr>
+        <p:txBody>
+          <a:bodyPr wrap="square">
+            <a:spAutoFit/>
+          </a:bodyPr>
+          <a:lstStyle/>
+          <a:p>
+            <a:pPr>
+              <a:defRPr sz="3000" b="1">
+                <a:solidFill>
+                  <a:srgbClr val="167663"/>
+                </a:solidFill>
+                <a:latin typeface="Yu Gothic"/>
+              </a:defRPr>
+            </a:pPr>
+            <a:r>
+              <a:t>企業と地域の施工会社をつなぎ、</a:t>
+            </a:r>
+          </a:p>
+          <a:p>
+            <a:pPr>
+              <a:defRPr sz="3000" b="1">
+                <a:solidFill>
+                  <a:srgbClr val="167663"/>
+                </a:solidFill>
+                <a:latin typeface="Yu Gothic"/>
+              </a:defRPr>
+            </a:pPr>
+            <a:r>
+              <a:t>新しい取引の形を目指す。</a:t>
+            </a:r>
+          </a:p>
+        </p:txBody>
+      </p:sp>
+      <p:sp>
+        <p:nvSpPr>
+          <p:cNvPr id="6" name="Rounded Rectangle 5"/>
+          <p:cNvSpPr/>
+          <p:nvPr/>
+        </p:nvSpPr>
+        <p:spPr>
+          <a:xfrm>
+            <a:off x="640080" y="3886200"/>
+            <a:ext cx="3401568" cy="1920240"/>
+          </a:xfrm>
+          <a:prstGeom prst="roundRect">
+            <a:avLst/>
+          </a:prstGeom>
+          <a:solidFill>
+            <a:srgbClr val="EDF4EE"/>
+          </a:solidFill>
+          <a:ln>
+            <a:noFill/>
+          </a:ln>
+        </p:spPr>
+        <p:style>
+          <a:lnRef idx="1">
+            <a:schemeClr val="accent1"/>
+          </a:lnRef>
+          <a:fillRef idx="3">
+            <a:schemeClr val="accent1"/>
+          </a:fillRef>
+          <a:effectRef idx="2">
+            <a:schemeClr val="accent1"/>
+          </a:effectRef>
+          <a:fontRef idx="minor">
+            <a:schemeClr val="lt1"/>
+          </a:fontRef>
+        </p:style>
+        <p:txBody>
+          <a:bodyPr rtlCol="0" anchor="ctr"/>
+          <a:lstStyle/>
+          <a:p>
+            <a:pPr algn="ctr"/>
+          </a:p>
+        </p:txBody>
+      </p:sp>
+      <p:sp>
+        <p:nvSpPr>
+          <p:cNvPr id="7" name="TextBox 6"/>
+          <p:cNvSpPr txBox="1"/>
+          <p:nvPr/>
+        </p:nvSpPr>
+        <p:spPr>
+          <a:xfrm>
+            <a:off x="804671" y="4014215"/>
+            <a:ext cx="3108960" cy="365760"/>
+          </a:xfrm>
+          <a:prstGeom prst="rect">
+            <a:avLst/>
+          </a:prstGeom>
+          <a:noFill/>
+        </p:spPr>
+        <p:txBody>
+          <a:bodyPr wrap="square">
+            <a:spAutoFit/>
+          </a:bodyPr>
+          <a:lstStyle/>
+          <a:p>
+            <a:pPr>
+              <a:defRPr sz="1200" b="0">
+                <a:solidFill>
+                  <a:srgbClr val="167663"/>
+                </a:solidFill>
+                <a:latin typeface="Yu Gothic"/>
+              </a:defRPr>
+            </a:pPr>
+            <a:r>
+              <a:t>企業</a:t>
+            </a:r>
+          </a:p>
+        </p:txBody>
+      </p:sp>
+      <p:sp>
+        <p:nvSpPr>
+          <p:cNvPr id="8" name="TextBox 7"/>
+          <p:cNvSpPr txBox="1"/>
+          <p:nvPr/>
+        </p:nvSpPr>
+        <p:spPr>
+          <a:xfrm>
+            <a:off x="804671" y="4480560"/>
+            <a:ext cx="3108960" cy="731520"/>
+          </a:xfrm>
+          <a:prstGeom prst="rect">
+            <a:avLst/>
+          </a:prstGeom>
+          <a:noFill/>
+        </p:spPr>
+        <p:txBody>
+          <a:bodyPr wrap="square">
+            <a:spAutoFit/>
+          </a:bodyPr>
+          <a:lstStyle/>
+          <a:p>
+            <a:pPr>
+              <a:defRPr sz="2500" b="1">
                 <a:solidFill>
                   <a:srgbClr val="152D39"/>
                 </a:solidFill>
@@ -3244,35 +3372,150 @@
               </a:defRPr>
             </a:pPr>
             <a:r>
-              <a:t>• 遠いから現場に行けない。時間とコストがかかる。対応できる人材が限られる。こうした建設業界の当たり前を変えたい。</a:t>
-            </a:r>
-          </a:p>
-        </p:txBody>
-      </p:sp>
-      <p:sp>
-        <p:nvSpPr>
-          <p:cNvPr id="6" name="TextBox 5"/>
-          <p:cNvSpPr txBox="1"/>
-          <p:nvPr/>
-        </p:nvSpPr>
-        <p:spPr>
-          <a:xfrm>
-            <a:off x="731520" y="3657600"/>
-            <a:ext cx="10789920" cy="749808"/>
-          </a:xfrm>
-          <a:prstGeom prst="rect">
-            <a:avLst/>
-          </a:prstGeom>
-          <a:noFill/>
-        </p:spPr>
-        <p:txBody>
-          <a:bodyPr wrap="square">
-            <a:spAutoFit/>
-          </a:bodyPr>
-          <a:lstStyle/>
-          <a:p>
-            <a:pPr>
-              <a:defRPr sz="1800" b="0">
+              <a:t>依頼</a:t>
+            </a:r>
+          </a:p>
+        </p:txBody>
+      </p:sp>
+      <p:sp>
+        <p:nvSpPr>
+          <p:cNvPr id="9" name="TextBox 8"/>
+          <p:cNvSpPr txBox="1"/>
+          <p:nvPr/>
+        </p:nvSpPr>
+        <p:spPr>
+          <a:xfrm>
+            <a:off x="804671" y="5303520"/>
+            <a:ext cx="3108960" cy="411480"/>
+          </a:xfrm>
+          <a:prstGeom prst="rect">
+            <a:avLst/>
+          </a:prstGeom>
+          <a:noFill/>
+        </p:spPr>
+        <p:txBody>
+          <a:bodyPr wrap="square">
+            <a:spAutoFit/>
+          </a:bodyPr>
+          <a:lstStyle/>
+          <a:p>
+            <a:pPr>
+              <a:defRPr sz="1300" b="0">
+                <a:solidFill>
+                  <a:srgbClr val="62727B"/>
+                </a:solidFill>
+                <a:latin typeface="Yu Gothic"/>
+              </a:defRPr>
+            </a:pPr>
+            <a:r>
+              <a:t>遠方の案件へ</a:t>
+            </a:r>
+          </a:p>
+        </p:txBody>
+      </p:sp>
+      <p:sp>
+        <p:nvSpPr>
+          <p:cNvPr id="10" name="Rounded Rectangle 9"/>
+          <p:cNvSpPr/>
+          <p:nvPr/>
+        </p:nvSpPr>
+        <p:spPr>
+          <a:xfrm>
+            <a:off x="4206240" y="3886200"/>
+            <a:ext cx="3401568" cy="1920240"/>
+          </a:xfrm>
+          <a:prstGeom prst="roundRect">
+            <a:avLst/>
+          </a:prstGeom>
+          <a:solidFill>
+            <a:srgbClr val="EDF4EE"/>
+          </a:solidFill>
+          <a:ln>
+            <a:noFill/>
+          </a:ln>
+        </p:spPr>
+        <p:style>
+          <a:lnRef idx="1">
+            <a:schemeClr val="accent1"/>
+          </a:lnRef>
+          <a:fillRef idx="3">
+            <a:schemeClr val="accent1"/>
+          </a:fillRef>
+          <a:effectRef idx="2">
+            <a:schemeClr val="accent1"/>
+          </a:effectRef>
+          <a:fontRef idx="minor">
+            <a:schemeClr val="lt1"/>
+          </a:fontRef>
+        </p:style>
+        <p:txBody>
+          <a:bodyPr rtlCol="0" anchor="ctr"/>
+          <a:lstStyle/>
+          <a:p>
+            <a:pPr algn="ctr"/>
+          </a:p>
+        </p:txBody>
+      </p:sp>
+      <p:sp>
+        <p:nvSpPr>
+          <p:cNvPr id="11" name="TextBox 10"/>
+          <p:cNvSpPr txBox="1"/>
+          <p:nvPr/>
+        </p:nvSpPr>
+        <p:spPr>
+          <a:xfrm>
+            <a:off x="4370831" y="4014215"/>
+            <a:ext cx="3108960" cy="365760"/>
+          </a:xfrm>
+          <a:prstGeom prst="rect">
+            <a:avLst/>
+          </a:prstGeom>
+          <a:noFill/>
+        </p:spPr>
+        <p:txBody>
+          <a:bodyPr wrap="square">
+            <a:spAutoFit/>
+          </a:bodyPr>
+          <a:lstStyle/>
+          <a:p>
+            <a:pPr>
+              <a:defRPr sz="1200" b="0">
+                <a:solidFill>
+                  <a:srgbClr val="167663"/>
+                </a:solidFill>
+                <a:latin typeface="Yu Gothic"/>
+              </a:defRPr>
+            </a:pPr>
+            <a:r>
+              <a:t>共通基盤</a:t>
+            </a:r>
+          </a:p>
+        </p:txBody>
+      </p:sp>
+      <p:sp>
+        <p:nvSpPr>
+          <p:cNvPr id="12" name="TextBox 11"/>
+          <p:cNvSpPr txBox="1"/>
+          <p:nvPr/>
+        </p:nvSpPr>
+        <p:spPr>
+          <a:xfrm>
+            <a:off x="4370831" y="4480560"/>
+            <a:ext cx="3108960" cy="731520"/>
+          </a:xfrm>
+          <a:prstGeom prst="rect">
+            <a:avLst/>
+          </a:prstGeom>
+          <a:noFill/>
+        </p:spPr>
+        <p:txBody>
+          <a:bodyPr wrap="square">
+            <a:spAutoFit/>
+          </a:bodyPr>
+          <a:lstStyle/>
+          <a:p>
+            <a:pPr>
+              <a:defRPr sz="2500" b="1">
                 <a:solidFill>
                   <a:srgbClr val="152D39"/>
                 </a:solidFill>
@@ -3280,35 +3523,35 @@
               </a:defRPr>
             </a:pPr>
             <a:r>
-              <a:t>• 現場調査、施工、管理をデジタルでつなぎ、全国の企業と地域の施工会社が連携できる仕組みを目指す。</a:t>
-            </a:r>
-          </a:p>
-        </p:txBody>
-      </p:sp>
-      <p:sp>
-        <p:nvSpPr>
-          <p:cNvPr id="7" name="TextBox 6"/>
-          <p:cNvSpPr txBox="1"/>
-          <p:nvPr/>
-        </p:nvSpPr>
-        <p:spPr>
-          <a:xfrm>
-            <a:off x="594360" y="5806440"/>
-            <a:ext cx="10789920" cy="594360"/>
-          </a:xfrm>
-          <a:prstGeom prst="rect">
-            <a:avLst/>
-          </a:prstGeom>
-          <a:noFill/>
-        </p:spPr>
-        <p:txBody>
-          <a:bodyPr wrap="square">
-            <a:spAutoFit/>
-          </a:bodyPr>
-          <a:lstStyle/>
-          <a:p>
-            <a:pPr>
-              <a:defRPr sz="1100" b="0">
+              <a:t>共有・確認</a:t>
+            </a:r>
+          </a:p>
+        </p:txBody>
+      </p:sp>
+      <p:sp>
+        <p:nvSpPr>
+          <p:cNvPr id="13" name="TextBox 12"/>
+          <p:cNvSpPr txBox="1"/>
+          <p:nvPr/>
+        </p:nvSpPr>
+        <p:spPr>
+          <a:xfrm>
+            <a:off x="4370831" y="5303520"/>
+            <a:ext cx="3108960" cy="411480"/>
+          </a:xfrm>
+          <a:prstGeom prst="rect">
+            <a:avLst/>
+          </a:prstGeom>
+          <a:noFill/>
+        </p:spPr>
+        <p:txBody>
+          <a:bodyPr wrap="square">
+            <a:spAutoFit/>
+          </a:bodyPr>
+          <a:lstStyle/>
+          <a:p>
+            <a:pPr>
+              <a:defRPr sz="1300" b="0">
                 <a:solidFill>
                   <a:srgbClr val="62727B"/>
                 </a:solidFill>
@@ -3316,6 +3559,193 @@
               </a:defRPr>
             </a:pPr>
             <a:r>
+              <a:t>情報と手順を揃える</a:t>
+            </a:r>
+          </a:p>
+        </p:txBody>
+      </p:sp>
+      <p:sp>
+        <p:nvSpPr>
+          <p:cNvPr id="14" name="Rounded Rectangle 13"/>
+          <p:cNvSpPr/>
+          <p:nvPr/>
+        </p:nvSpPr>
+        <p:spPr>
+          <a:xfrm>
+            <a:off x="7772400" y="3886200"/>
+            <a:ext cx="3401568" cy="1920240"/>
+          </a:xfrm>
+          <a:prstGeom prst="roundRect">
+            <a:avLst/>
+          </a:prstGeom>
+          <a:solidFill>
+            <a:srgbClr val="EDF4EE"/>
+          </a:solidFill>
+          <a:ln>
+            <a:noFill/>
+          </a:ln>
+        </p:spPr>
+        <p:style>
+          <a:lnRef idx="1">
+            <a:schemeClr val="accent1"/>
+          </a:lnRef>
+          <a:fillRef idx="3">
+            <a:schemeClr val="accent1"/>
+          </a:fillRef>
+          <a:effectRef idx="2">
+            <a:schemeClr val="accent1"/>
+          </a:effectRef>
+          <a:fontRef idx="minor">
+            <a:schemeClr val="lt1"/>
+          </a:fontRef>
+        </p:style>
+        <p:txBody>
+          <a:bodyPr rtlCol="0" anchor="ctr"/>
+          <a:lstStyle/>
+          <a:p>
+            <a:pPr algn="ctr"/>
+          </a:p>
+        </p:txBody>
+      </p:sp>
+      <p:sp>
+        <p:nvSpPr>
+          <p:cNvPr id="15" name="TextBox 14"/>
+          <p:cNvSpPr txBox="1"/>
+          <p:nvPr/>
+        </p:nvSpPr>
+        <p:spPr>
+          <a:xfrm>
+            <a:off x="7936992" y="4014215"/>
+            <a:ext cx="3108960" cy="365760"/>
+          </a:xfrm>
+          <a:prstGeom prst="rect">
+            <a:avLst/>
+          </a:prstGeom>
+          <a:noFill/>
+        </p:spPr>
+        <p:txBody>
+          <a:bodyPr wrap="square">
+            <a:spAutoFit/>
+          </a:bodyPr>
+          <a:lstStyle/>
+          <a:p>
+            <a:pPr>
+              <a:defRPr sz="1200" b="0">
+                <a:solidFill>
+                  <a:srgbClr val="167663"/>
+                </a:solidFill>
+                <a:latin typeface="Yu Gothic"/>
+              </a:defRPr>
+            </a:pPr>
+            <a:r>
+              <a:t>地域の施工会社</a:t>
+            </a:r>
+          </a:p>
+        </p:txBody>
+      </p:sp>
+      <p:sp>
+        <p:nvSpPr>
+          <p:cNvPr id="16" name="TextBox 15"/>
+          <p:cNvSpPr txBox="1"/>
+          <p:nvPr/>
+        </p:nvSpPr>
+        <p:spPr>
+          <a:xfrm>
+            <a:off x="7936992" y="4480560"/>
+            <a:ext cx="3108960" cy="731520"/>
+          </a:xfrm>
+          <a:prstGeom prst="rect">
+            <a:avLst/>
+          </a:prstGeom>
+          <a:noFill/>
+        </p:spPr>
+        <p:txBody>
+          <a:bodyPr wrap="square">
+            <a:spAutoFit/>
+          </a:bodyPr>
+          <a:lstStyle/>
+          <a:p>
+            <a:pPr>
+              <a:defRPr sz="2500" b="1">
+                <a:solidFill>
+                  <a:srgbClr val="152D39"/>
+                </a:solidFill>
+                <a:latin typeface="Yu Gothic"/>
+              </a:defRPr>
+            </a:pPr>
+            <a:r>
+              <a:t>現地対応</a:t>
+            </a:r>
+          </a:p>
+        </p:txBody>
+      </p:sp>
+      <p:sp>
+        <p:nvSpPr>
+          <p:cNvPr id="17" name="TextBox 16"/>
+          <p:cNvSpPr txBox="1"/>
+          <p:nvPr/>
+        </p:nvSpPr>
+        <p:spPr>
+          <a:xfrm>
+            <a:off x="7936992" y="5303520"/>
+            <a:ext cx="3108960" cy="411480"/>
+          </a:xfrm>
+          <a:prstGeom prst="rect">
+            <a:avLst/>
+          </a:prstGeom>
+          <a:noFill/>
+        </p:spPr>
+        <p:txBody>
+          <a:bodyPr wrap="square">
+            <a:spAutoFit/>
+          </a:bodyPr>
+          <a:lstStyle/>
+          <a:p>
+            <a:pPr>
+              <a:defRPr sz="1300" b="0">
+                <a:solidFill>
+                  <a:srgbClr val="62727B"/>
+                </a:solidFill>
+                <a:latin typeface="Yu Gothic"/>
+              </a:defRPr>
+            </a:pPr>
+            <a:r>
+              <a:t>地域の技術を活かす</a:t>
+            </a:r>
+          </a:p>
+        </p:txBody>
+      </p:sp>
+      <p:sp>
+        <p:nvSpPr>
+          <p:cNvPr id="18" name="TextBox 17"/>
+          <p:cNvSpPr txBox="1"/>
+          <p:nvPr/>
+        </p:nvSpPr>
+        <p:spPr>
+          <a:xfrm>
+            <a:off x="594360" y="6080760"/>
+            <a:ext cx="10789920" cy="548640"/>
+          </a:xfrm>
+          <a:prstGeom prst="rect">
+            <a:avLst/>
+          </a:prstGeom>
+          <a:noFill/>
+        </p:spPr>
+        <p:txBody>
+          <a:bodyPr wrap="square">
+            <a:spAutoFit/>
+          </a:bodyPr>
+          <a:lstStyle/>
+          <a:p>
+            <a:pPr>
+              <a:defRPr sz="1000" b="0">
+                <a:solidFill>
+                  <a:srgbClr val="62727B"/>
+                </a:solidFill>
+                <a:latin typeface="Yu Gothic"/>
+              </a:defRPr>
+            </a:pPr>
+            <a:r>
               <a:t>全国対応が完成していることを示すものではなく、実証を通じて段階的に構築する事業構想。</a:t>
             </a:r>
           </a:p>
@@ -3323,14 +3753,14 @@
       </p:sp>
       <p:sp>
         <p:nvSpPr>
-          <p:cNvPr id="8" name="TextBox 7"/>
-          <p:cNvSpPr txBox="1"/>
-          <p:nvPr/>
-        </p:nvSpPr>
-        <p:spPr>
-          <a:xfrm>
-            <a:off x="11018520" y="6446520"/>
-            <a:ext cx="594360" cy="274320"/>
+          <p:cNvPr id="19" name="TextBox 18"/>
+          <p:cNvSpPr txBox="1"/>
+          <p:nvPr/>
+        </p:nvSpPr>
+        <p:spPr>
+          <a:xfrm>
+            <a:off x="11201400" y="6446520"/>
+            <a:ext cx="457200" cy="228600"/>
           </a:xfrm>
           <a:prstGeom prst="rect">
             <a:avLst/>
@@ -3391,22 +3821,22 @@
         </p:nvSpPr>
         <p:spPr>
           <a:xfrm>
-            <a:off x="594360" y="320040"/>
-            <a:ext cx="10972800" cy="457200"/>
-          </a:xfrm>
-          <a:prstGeom prst="rect">
-            <a:avLst/>
-          </a:prstGeom>
-          <a:noFill/>
-        </p:spPr>
-        <p:txBody>
-          <a:bodyPr wrap="square">
-            <a:spAutoFit/>
-          </a:bodyPr>
-          <a:lstStyle/>
-          <a:p>
-            <a:pPr>
-              <a:defRPr sz="1200" b="1">
+            <a:off x="594360" y="246888"/>
+            <a:ext cx="10972800" cy="274320"/>
+          </a:xfrm>
+          <a:prstGeom prst="rect">
+            <a:avLst/>
+          </a:prstGeom>
+          <a:noFill/>
+        </p:spPr>
+        <p:txBody>
+          <a:bodyPr wrap="square">
+            <a:spAutoFit/>
+          </a:bodyPr>
+          <a:lstStyle/>
+          <a:p>
+            <a:pPr>
+              <a:defRPr sz="1100" b="1">
                 <a:solidFill>
                   <a:srgbClr val="167663"/>
                 </a:solidFill>
@@ -3414,7 +3844,7 @@
               </a:defRPr>
             </a:pPr>
             <a:r>
-              <a:t>IKS / FIELD DX × CONSTRUCTION NETWORK</a:t>
+              <a:t>IKS / VISUAL BUSINESS PROPOSAL</a:t>
             </a:r>
           </a:p>
         </p:txBody>
@@ -3427,22 +3857,22 @@
         </p:nvSpPr>
         <p:spPr>
           <a:xfrm>
-            <a:off x="594360" y="914400"/>
-            <a:ext cx="10972800" cy="1143000"/>
-          </a:xfrm>
-          <a:prstGeom prst="rect">
-            <a:avLst/>
-          </a:prstGeom>
-          <a:noFill/>
-        </p:spPr>
-        <p:txBody>
-          <a:bodyPr wrap="square">
-            <a:spAutoFit/>
-          </a:bodyPr>
-          <a:lstStyle/>
-          <a:p>
-            <a:pPr>
-              <a:defRPr sz="2700" b="1">
+            <a:off x="594360" y="731520"/>
+            <a:ext cx="10972800" cy="914400"/>
+          </a:xfrm>
+          <a:prstGeom prst="rect">
+            <a:avLst/>
+          </a:prstGeom>
+          <a:noFill/>
+        </p:spPr>
+        <p:txBody>
+          <a:bodyPr wrap="square">
+            <a:spAutoFit/>
+          </a:bodyPr>
+          <a:lstStyle/>
+          <a:p>
+            <a:pPr>
+              <a:defRPr sz="2600" b="1">
                 <a:solidFill>
                   <a:srgbClr val="152D39"/>
                 </a:solidFill>
@@ -3463,22 +3893,22 @@
         </p:nvSpPr>
         <p:spPr>
           <a:xfrm>
-            <a:off x="594360" y="2103120"/>
-            <a:ext cx="10972800" cy="548640"/>
-          </a:xfrm>
-          <a:prstGeom prst="rect">
-            <a:avLst/>
-          </a:prstGeom>
-          <a:noFill/>
-        </p:spPr>
-        <p:txBody>
-          <a:bodyPr wrap="square">
-            <a:spAutoFit/>
-          </a:bodyPr>
-          <a:lstStyle/>
-          <a:p>
-            <a:pPr>
-              <a:defRPr sz="1800" b="1">
+            <a:off x="594360" y="1737360"/>
+            <a:ext cx="10972800" cy="502920"/>
+          </a:xfrm>
+          <a:prstGeom prst="rect">
+            <a:avLst/>
+          </a:prstGeom>
+          <a:noFill/>
+        </p:spPr>
+        <p:txBody>
+          <a:bodyPr wrap="square">
+            <a:spAutoFit/>
+          </a:bodyPr>
+          <a:lstStyle/>
+          <a:p>
+            <a:pPr>
+              <a:defRPr sz="1500" b="0">
                 <a:solidFill>
                   <a:srgbClr val="167663"/>
                 </a:solidFill>
@@ -3493,28 +3923,107 @@
       </p:sp>
       <p:sp>
         <p:nvSpPr>
-          <p:cNvPr id="5" name="TextBox 4"/>
-          <p:cNvSpPr txBox="1"/>
-          <p:nvPr/>
-        </p:nvSpPr>
-        <p:spPr>
-          <a:xfrm>
-            <a:off x="731520" y="2852928"/>
-            <a:ext cx="10789920" cy="749808"/>
-          </a:xfrm>
-          <a:prstGeom prst="rect">
-            <a:avLst/>
-          </a:prstGeom>
-          <a:noFill/>
-        </p:spPr>
-        <p:txBody>
-          <a:bodyPr wrap="square">
-            <a:spAutoFit/>
-          </a:bodyPr>
-          <a:lstStyle/>
-          <a:p>
-            <a:pPr>
-              <a:defRPr sz="1800" b="0">
+          <p:cNvPr id="5" name="Rounded Rectangle 4"/>
+          <p:cNvSpPr/>
+          <p:nvPr/>
+        </p:nvSpPr>
+        <p:spPr>
+          <a:xfrm>
+            <a:off x="640080" y="2834640"/>
+            <a:ext cx="3401568" cy="1920240"/>
+          </a:xfrm>
+          <a:prstGeom prst="roundRect">
+            <a:avLst/>
+          </a:prstGeom>
+          <a:solidFill>
+            <a:srgbClr val="EDF4EE"/>
+          </a:solidFill>
+          <a:ln>
+            <a:noFill/>
+          </a:ln>
+        </p:spPr>
+        <p:style>
+          <a:lnRef idx="1">
+            <a:schemeClr val="accent1"/>
+          </a:lnRef>
+          <a:fillRef idx="3">
+            <a:schemeClr val="accent1"/>
+          </a:fillRef>
+          <a:effectRef idx="2">
+            <a:schemeClr val="accent1"/>
+          </a:effectRef>
+          <a:fontRef idx="minor">
+            <a:schemeClr val="lt1"/>
+          </a:fontRef>
+        </p:style>
+        <p:txBody>
+          <a:bodyPr rtlCol="0" anchor="ctr"/>
+          <a:lstStyle/>
+          <a:p>
+            <a:pPr algn="ctr"/>
+          </a:p>
+        </p:txBody>
+      </p:sp>
+      <p:sp>
+        <p:nvSpPr>
+          <p:cNvPr id="6" name="TextBox 5"/>
+          <p:cNvSpPr txBox="1"/>
+          <p:nvPr/>
+        </p:nvSpPr>
+        <p:spPr>
+          <a:xfrm>
+            <a:off x="804671" y="2962656"/>
+            <a:ext cx="3108960" cy="365760"/>
+          </a:xfrm>
+          <a:prstGeom prst="rect">
+            <a:avLst/>
+          </a:prstGeom>
+          <a:noFill/>
+        </p:spPr>
+        <p:txBody>
+          <a:bodyPr wrap="square">
+            <a:spAutoFit/>
+          </a:bodyPr>
+          <a:lstStyle/>
+          <a:p>
+            <a:pPr>
+              <a:defRPr sz="1200" b="0">
+                <a:solidFill>
+                  <a:srgbClr val="167663"/>
+                </a:solidFill>
+                <a:latin typeface="Yu Gothic"/>
+              </a:defRPr>
+            </a:pPr>
+            <a:r>
+              <a:t>実証協力</a:t>
+            </a:r>
+          </a:p>
+        </p:txBody>
+      </p:sp>
+      <p:sp>
+        <p:nvSpPr>
+          <p:cNvPr id="7" name="TextBox 6"/>
+          <p:cNvSpPr txBox="1"/>
+          <p:nvPr/>
+        </p:nvSpPr>
+        <p:spPr>
+          <a:xfrm>
+            <a:off x="804671" y="3429000"/>
+            <a:ext cx="3108960" cy="731520"/>
+          </a:xfrm>
+          <a:prstGeom prst="rect">
+            <a:avLst/>
+          </a:prstGeom>
+          <a:noFill/>
+        </p:spPr>
+        <p:txBody>
+          <a:bodyPr wrap="square">
+            <a:spAutoFit/>
+          </a:bodyPr>
+          <a:lstStyle/>
+          <a:p>
+            <a:pPr>
+              <a:defRPr sz="2500" b="1">
                 <a:solidFill>
                   <a:srgbClr val="152D39"/>
                 </a:solidFill>
@@ -3522,35 +4031,150 @@
               </a:defRPr>
             </a:pPr>
             <a:r>
-              <a:t>• 一社だけで完成する構想ではない。各社の経験と強みをつなぎ、仕事に地域の限界をつくらない未来へ。</a:t>
-            </a:r>
-          </a:p>
-        </p:txBody>
-      </p:sp>
-      <p:sp>
-        <p:nvSpPr>
-          <p:cNvPr id="6" name="TextBox 5"/>
-          <p:cNvSpPr txBox="1"/>
-          <p:nvPr/>
-        </p:nvSpPr>
-        <p:spPr>
-          <a:xfrm>
-            <a:off x="731520" y="3657600"/>
-            <a:ext cx="10789920" cy="749808"/>
-          </a:xfrm>
-          <a:prstGeom prst="rect">
-            <a:avLst/>
-          </a:prstGeom>
-          <a:noFill/>
-        </p:spPr>
-        <p:txBody>
-          <a:bodyPr wrap="square">
-            <a:spAutoFit/>
-          </a:bodyPr>
-          <a:lstStyle/>
-          <a:p>
-            <a:pPr>
-              <a:defRPr sz="1800" b="0">
+              <a:t>依頼企業</a:t>
+            </a:r>
+          </a:p>
+        </p:txBody>
+      </p:sp>
+      <p:sp>
+        <p:nvSpPr>
+          <p:cNvPr id="8" name="TextBox 7"/>
+          <p:cNvSpPr txBox="1"/>
+          <p:nvPr/>
+        </p:nvSpPr>
+        <p:spPr>
+          <a:xfrm>
+            <a:off x="804671" y="4251960"/>
+            <a:ext cx="3108960" cy="411480"/>
+          </a:xfrm>
+          <a:prstGeom prst="rect">
+            <a:avLst/>
+          </a:prstGeom>
+          <a:noFill/>
+        </p:spPr>
+        <p:txBody>
+          <a:bodyPr wrap="square">
+            <a:spAutoFit/>
+          </a:bodyPr>
+          <a:lstStyle/>
+          <a:p>
+            <a:pPr>
+              <a:defRPr sz="1300" b="0">
+                <a:solidFill>
+                  <a:srgbClr val="62727B"/>
+                </a:solidFill>
+                <a:latin typeface="Yu Gothic"/>
+              </a:defRPr>
+            </a:pPr>
+            <a:r>
+              <a:t>案件・手順・費用</a:t>
+            </a:r>
+          </a:p>
+        </p:txBody>
+      </p:sp>
+      <p:sp>
+        <p:nvSpPr>
+          <p:cNvPr id="9" name="Rounded Rectangle 8"/>
+          <p:cNvSpPr/>
+          <p:nvPr/>
+        </p:nvSpPr>
+        <p:spPr>
+          <a:xfrm>
+            <a:off x="4206240" y="2834640"/>
+            <a:ext cx="3401568" cy="1920240"/>
+          </a:xfrm>
+          <a:prstGeom prst="roundRect">
+            <a:avLst/>
+          </a:prstGeom>
+          <a:solidFill>
+            <a:srgbClr val="EDF4EE"/>
+          </a:solidFill>
+          <a:ln>
+            <a:noFill/>
+          </a:ln>
+        </p:spPr>
+        <p:style>
+          <a:lnRef idx="1">
+            <a:schemeClr val="accent1"/>
+          </a:lnRef>
+          <a:fillRef idx="3">
+            <a:schemeClr val="accent1"/>
+          </a:fillRef>
+          <a:effectRef idx="2">
+            <a:schemeClr val="accent1"/>
+          </a:effectRef>
+          <a:fontRef idx="minor">
+            <a:schemeClr val="lt1"/>
+          </a:fontRef>
+        </p:style>
+        <p:txBody>
+          <a:bodyPr rtlCol="0" anchor="ctr"/>
+          <a:lstStyle/>
+          <a:p>
+            <a:pPr algn="ctr"/>
+          </a:p>
+        </p:txBody>
+      </p:sp>
+      <p:sp>
+        <p:nvSpPr>
+          <p:cNvPr id="10" name="TextBox 9"/>
+          <p:cNvSpPr txBox="1"/>
+          <p:nvPr/>
+        </p:nvSpPr>
+        <p:spPr>
+          <a:xfrm>
+            <a:off x="4370831" y="2962656"/>
+            <a:ext cx="3108960" cy="365760"/>
+          </a:xfrm>
+          <a:prstGeom prst="rect">
+            <a:avLst/>
+          </a:prstGeom>
+          <a:noFill/>
+        </p:spPr>
+        <p:txBody>
+          <a:bodyPr wrap="square">
+            <a:spAutoFit/>
+          </a:bodyPr>
+          <a:lstStyle/>
+          <a:p>
+            <a:pPr>
+              <a:defRPr sz="1200" b="0">
+                <a:solidFill>
+                  <a:srgbClr val="167663"/>
+                </a:solidFill>
+                <a:latin typeface="Yu Gothic"/>
+              </a:defRPr>
+            </a:pPr>
+            <a:r>
+              <a:t>地域の対応力</a:t>
+            </a:r>
+          </a:p>
+        </p:txBody>
+      </p:sp>
+      <p:sp>
+        <p:nvSpPr>
+          <p:cNvPr id="11" name="TextBox 10"/>
+          <p:cNvSpPr txBox="1"/>
+          <p:nvPr/>
+        </p:nvSpPr>
+        <p:spPr>
+          <a:xfrm>
+            <a:off x="4370831" y="3429000"/>
+            <a:ext cx="3108960" cy="731520"/>
+          </a:xfrm>
+          <a:prstGeom prst="rect">
+            <a:avLst/>
+          </a:prstGeom>
+          <a:noFill/>
+        </p:spPr>
+        <p:txBody>
+          <a:bodyPr wrap="square">
+            <a:spAutoFit/>
+          </a:bodyPr>
+          <a:lstStyle/>
+          <a:p>
+            <a:pPr>
+              <a:defRPr sz="2500" b="1">
                 <a:solidFill>
                   <a:srgbClr val="152D39"/>
                 </a:solidFill>
@@ -3558,35 +4182,150 @@
               </a:defRPr>
             </a:pPr>
             <a:r>
-              <a:t>• 実証への協力：対象案件の選定、調査手順・帳票の共有、実費・工数の確認、現地・遠隔担当者の選定。</a:t>
-            </a:r>
-          </a:p>
-        </p:txBody>
-      </p:sp>
-      <p:sp>
-        <p:nvSpPr>
-          <p:cNvPr id="7" name="TextBox 6"/>
-          <p:cNvSpPr txBox="1"/>
-          <p:nvPr/>
-        </p:nvSpPr>
-        <p:spPr>
-          <a:xfrm>
-            <a:off x="731520" y="4462272"/>
-            <a:ext cx="10789920" cy="749808"/>
-          </a:xfrm>
-          <a:prstGeom prst="rect">
-            <a:avLst/>
-          </a:prstGeom>
-          <a:noFill/>
-        </p:spPr>
-        <p:txBody>
-          <a:bodyPr wrap="square">
-            <a:spAutoFit/>
-          </a:bodyPr>
-          <a:lstStyle/>
-          <a:p>
-            <a:pPr>
-              <a:defRPr sz="1800" b="0">
+              <a:t>施工会社</a:t>
+            </a:r>
+          </a:p>
+        </p:txBody>
+      </p:sp>
+      <p:sp>
+        <p:nvSpPr>
+          <p:cNvPr id="12" name="TextBox 11"/>
+          <p:cNvSpPr txBox="1"/>
+          <p:nvPr/>
+        </p:nvSpPr>
+        <p:spPr>
+          <a:xfrm>
+            <a:off x="4370831" y="4251960"/>
+            <a:ext cx="3108960" cy="411480"/>
+          </a:xfrm>
+          <a:prstGeom prst="rect">
+            <a:avLst/>
+          </a:prstGeom>
+          <a:noFill/>
+        </p:spPr>
+        <p:txBody>
+          <a:bodyPr wrap="square">
+            <a:spAutoFit/>
+          </a:bodyPr>
+          <a:lstStyle/>
+          <a:p>
+            <a:pPr>
+              <a:defRPr sz="1300" b="0">
+                <a:solidFill>
+                  <a:srgbClr val="62727B"/>
+                </a:solidFill>
+                <a:latin typeface="Yu Gothic"/>
+              </a:defRPr>
+            </a:pPr>
+            <a:r>
+              <a:t>技能・経験・地域</a:t>
+            </a:r>
+          </a:p>
+        </p:txBody>
+      </p:sp>
+      <p:sp>
+        <p:nvSpPr>
+          <p:cNvPr id="13" name="Rounded Rectangle 12"/>
+          <p:cNvSpPr/>
+          <p:nvPr/>
+        </p:nvSpPr>
+        <p:spPr>
+          <a:xfrm>
+            <a:off x="7772400" y="2834640"/>
+            <a:ext cx="3401568" cy="1920240"/>
+          </a:xfrm>
+          <a:prstGeom prst="roundRect">
+            <a:avLst/>
+          </a:prstGeom>
+          <a:solidFill>
+            <a:srgbClr val="EDF4EE"/>
+          </a:solidFill>
+          <a:ln>
+            <a:noFill/>
+          </a:ln>
+        </p:spPr>
+        <p:style>
+          <a:lnRef idx="1">
+            <a:schemeClr val="accent1"/>
+          </a:lnRef>
+          <a:fillRef idx="3">
+            <a:schemeClr val="accent1"/>
+          </a:fillRef>
+          <a:effectRef idx="2">
+            <a:schemeClr val="accent1"/>
+          </a:effectRef>
+          <a:fontRef idx="minor">
+            <a:schemeClr val="lt1"/>
+          </a:fontRef>
+        </p:style>
+        <p:txBody>
+          <a:bodyPr rtlCol="0" anchor="ctr"/>
+          <a:lstStyle/>
+          <a:p>
+            <a:pPr algn="ctr"/>
+          </a:p>
+        </p:txBody>
+      </p:sp>
+      <p:sp>
+        <p:nvSpPr>
+          <p:cNvPr id="14" name="TextBox 13"/>
+          <p:cNvSpPr txBox="1"/>
+          <p:nvPr/>
+        </p:nvSpPr>
+        <p:spPr>
+          <a:xfrm>
+            <a:off x="7936992" y="2962656"/>
+            <a:ext cx="3108960" cy="365760"/>
+          </a:xfrm>
+          <a:prstGeom prst="rect">
+            <a:avLst/>
+          </a:prstGeom>
+          <a:noFill/>
+        </p:spPr>
+        <p:txBody>
+          <a:bodyPr wrap="square">
+            <a:spAutoFit/>
+          </a:bodyPr>
+          <a:lstStyle/>
+          <a:p>
+            <a:pPr>
+              <a:defRPr sz="1200" b="0">
+                <a:solidFill>
+                  <a:srgbClr val="167663"/>
+                </a:solidFill>
+                <a:latin typeface="Yu Gothic"/>
+              </a:defRPr>
+            </a:pPr>
+            <a:r>
+              <a:t>共同で決める</a:t>
+            </a:r>
+          </a:p>
+        </p:txBody>
+      </p:sp>
+      <p:sp>
+        <p:nvSpPr>
+          <p:cNvPr id="15" name="TextBox 14"/>
+          <p:cNvSpPr txBox="1"/>
+          <p:nvPr/>
+        </p:nvSpPr>
+        <p:spPr>
+          <a:xfrm>
+            <a:off x="7936992" y="3429000"/>
+            <a:ext cx="3108960" cy="731520"/>
+          </a:xfrm>
+          <a:prstGeom prst="rect">
+            <a:avLst/>
+          </a:prstGeom>
+          <a:noFill/>
+        </p:spPr>
+        <p:txBody>
+          <a:bodyPr wrap="square">
+            <a:spAutoFit/>
+          </a:bodyPr>
+          <a:lstStyle/>
+          <a:p>
+            <a:pPr>
+              <a:defRPr sz="2500" b="1">
                 <a:solidFill>
                   <a:srgbClr val="152D39"/>
                 </a:solidFill>
@@ -3594,35 +4333,35 @@
               </a:defRPr>
             </a:pPr>
             <a:r>
-              <a:t>• 共同で決めること：責任分担、実証期間、費用負担、情報の取り扱い。</a:t>
-            </a:r>
-          </a:p>
-        </p:txBody>
-      </p:sp>
-      <p:sp>
-        <p:nvSpPr>
-          <p:cNvPr id="8" name="TextBox 7"/>
-          <p:cNvSpPr txBox="1"/>
-          <p:nvPr/>
-        </p:nvSpPr>
-        <p:spPr>
-          <a:xfrm>
-            <a:off x="594360" y="5806440"/>
-            <a:ext cx="10789920" cy="594360"/>
-          </a:xfrm>
-          <a:prstGeom prst="rect">
-            <a:avLst/>
-          </a:prstGeom>
-          <a:noFill/>
-        </p:spPr>
-        <p:txBody>
-          <a:bodyPr wrap="square">
-            <a:spAutoFit/>
-          </a:bodyPr>
-          <a:lstStyle/>
-          <a:p>
-            <a:pPr>
-              <a:defRPr sz="1100" b="0">
+              <a:t>役割と条件</a:t>
+            </a:r>
+          </a:p>
+        </p:txBody>
+      </p:sp>
+      <p:sp>
+        <p:nvSpPr>
+          <p:cNvPr id="16" name="TextBox 15"/>
+          <p:cNvSpPr txBox="1"/>
+          <p:nvPr/>
+        </p:nvSpPr>
+        <p:spPr>
+          <a:xfrm>
+            <a:off x="7936992" y="4251960"/>
+            <a:ext cx="3108960" cy="411480"/>
+          </a:xfrm>
+          <a:prstGeom prst="rect">
+            <a:avLst/>
+          </a:prstGeom>
+          <a:noFill/>
+        </p:spPr>
+        <p:txBody>
+          <a:bodyPr wrap="square">
+            <a:spAutoFit/>
+          </a:bodyPr>
+          <a:lstStyle/>
+          <a:p>
+            <a:pPr>
+              <a:defRPr sz="1300" b="0">
                 <a:solidFill>
                   <a:srgbClr val="62727B"/>
                 </a:solidFill>
@@ -3630,6 +4369,78 @@
               </a:defRPr>
             </a:pPr>
             <a:r>
+              <a:t>責任・期間・情報</a:t>
+            </a:r>
+          </a:p>
+        </p:txBody>
+      </p:sp>
+      <p:sp>
+        <p:nvSpPr>
+          <p:cNvPr id="17" name="TextBox 16"/>
+          <p:cNvSpPr txBox="1"/>
+          <p:nvPr/>
+        </p:nvSpPr>
+        <p:spPr>
+          <a:xfrm>
+            <a:off x="777240" y="5120640"/>
+            <a:ext cx="10698480" cy="502920"/>
+          </a:xfrm>
+          <a:prstGeom prst="rect">
+            <a:avLst/>
+          </a:prstGeom>
+          <a:noFill/>
+        </p:spPr>
+        <p:txBody>
+          <a:bodyPr wrap="square">
+            <a:spAutoFit/>
+          </a:bodyPr>
+          <a:lstStyle/>
+          <a:p>
+            <a:pPr>
+              <a:defRPr sz="1600" b="0">
+                <a:solidFill>
+                  <a:srgbClr val="62727B"/>
+                </a:solidFill>
+                <a:latin typeface="Yu Gothic"/>
+              </a:defRPr>
+            </a:pPr>
+            <a:r>
+              <a:t>一社だけで完成する構想ではない。各社の経験と強みをつなぎ、仕事に地域の限界をつくらない未来へ。</a:t>
+            </a:r>
+          </a:p>
+        </p:txBody>
+      </p:sp>
+      <p:sp>
+        <p:nvSpPr>
+          <p:cNvPr id="18" name="TextBox 17"/>
+          <p:cNvSpPr txBox="1"/>
+          <p:nvPr/>
+        </p:nvSpPr>
+        <p:spPr>
+          <a:xfrm>
+            <a:off x="594360" y="6080760"/>
+            <a:ext cx="10789920" cy="548640"/>
+          </a:xfrm>
+          <a:prstGeom prst="rect">
+            <a:avLst/>
+          </a:prstGeom>
+          <a:noFill/>
+        </p:spPr>
+        <p:txBody>
+          <a:bodyPr wrap="square">
+            <a:spAutoFit/>
+          </a:bodyPr>
+          <a:lstStyle/>
+          <a:p>
+            <a:pPr>
+              <a:defRPr sz="1000" b="0">
+                <a:solidFill>
+                  <a:srgbClr val="62727B"/>
+                </a:solidFill>
+                <a:latin typeface="Yu Gothic"/>
+              </a:defRPr>
+            </a:pPr>
+            <a:r>
               <a:t>お問い合わせ窓口は準備中。連絡先の確定後に掲載。</a:t>
             </a:r>
           </a:p>
@@ -3637,14 +4448,14 @@
       </p:sp>
       <p:sp>
         <p:nvSpPr>
-          <p:cNvPr id="9" name="TextBox 8"/>
-          <p:cNvSpPr txBox="1"/>
-          <p:nvPr/>
-        </p:nvSpPr>
-        <p:spPr>
-          <a:xfrm>
-            <a:off x="11018520" y="6446520"/>
-            <a:ext cx="594360" cy="274320"/>
+          <p:cNvPr id="19" name="TextBox 18"/>
+          <p:cNvSpPr txBox="1"/>
+          <p:nvPr/>
+        </p:nvSpPr>
+        <p:spPr>
+          <a:xfrm>
+            <a:off x="11201400" y="6446520"/>
+            <a:ext cx="457200" cy="228600"/>
           </a:xfrm>
           <a:prstGeom prst="rect">
             <a:avLst/>
@@ -3705,22 +4516,22 @@
         </p:nvSpPr>
         <p:spPr>
           <a:xfrm>
-            <a:off x="594360" y="320040"/>
-            <a:ext cx="10972800" cy="457200"/>
-          </a:xfrm>
-          <a:prstGeom prst="rect">
-            <a:avLst/>
-          </a:prstGeom>
-          <a:noFill/>
-        </p:spPr>
-        <p:txBody>
-          <a:bodyPr wrap="square">
-            <a:spAutoFit/>
-          </a:bodyPr>
-          <a:lstStyle/>
-          <a:p>
-            <a:pPr>
-              <a:defRPr sz="1200" b="1">
+            <a:off x="594360" y="246888"/>
+            <a:ext cx="10972800" cy="274320"/>
+          </a:xfrm>
+          <a:prstGeom prst="rect">
+            <a:avLst/>
+          </a:prstGeom>
+          <a:noFill/>
+        </p:spPr>
+        <p:txBody>
+          <a:bodyPr wrap="square">
+            <a:spAutoFit/>
+          </a:bodyPr>
+          <a:lstStyle/>
+          <a:p>
+            <a:pPr>
+              <a:defRPr sz="1100" b="1">
                 <a:solidFill>
                   <a:srgbClr val="167663"/>
                 </a:solidFill>
@@ -3728,7 +4539,7 @@
               </a:defRPr>
             </a:pPr>
             <a:r>
-              <a:t>IKS / FIELD DX × CONSTRUCTION NETWORK</a:t>
+              <a:t>IKS / VISUAL BUSINESS PROPOSAL</a:t>
             </a:r>
           </a:p>
         </p:txBody>
@@ -3741,22 +4552,22 @@
         </p:nvSpPr>
         <p:spPr>
           <a:xfrm>
-            <a:off x="594360" y="914400"/>
-            <a:ext cx="10972800" cy="1143000"/>
-          </a:xfrm>
-          <a:prstGeom prst="rect">
-            <a:avLst/>
-          </a:prstGeom>
-          <a:noFill/>
-        </p:spPr>
-        <p:txBody>
-          <a:bodyPr wrap="square">
-            <a:spAutoFit/>
-          </a:bodyPr>
-          <a:lstStyle/>
-          <a:p>
-            <a:pPr>
-              <a:defRPr sz="2700" b="1">
+            <a:off x="594360" y="731520"/>
+            <a:ext cx="10972800" cy="914400"/>
+          </a:xfrm>
+          <a:prstGeom prst="rect">
+            <a:avLst/>
+          </a:prstGeom>
+          <a:noFill/>
+        </p:spPr>
+        <p:txBody>
+          <a:bodyPr wrap="square">
+            <a:spAutoFit/>
+          </a:bodyPr>
+          <a:lstStyle/>
+          <a:p>
+            <a:pPr>
+              <a:defRPr sz="2600" b="1">
                 <a:solidFill>
                   <a:srgbClr val="152D39"/>
                 </a:solidFill>
@@ -3777,22 +4588,22 @@
         </p:nvSpPr>
         <p:spPr>
           <a:xfrm>
-            <a:off x="594360" y="2103120"/>
-            <a:ext cx="10972800" cy="548640"/>
-          </a:xfrm>
-          <a:prstGeom prst="rect">
-            <a:avLst/>
-          </a:prstGeom>
-          <a:noFill/>
-        </p:spPr>
-        <p:txBody>
-          <a:bodyPr wrap="square">
-            <a:spAutoFit/>
-          </a:bodyPr>
-          <a:lstStyle/>
-          <a:p>
-            <a:pPr>
-              <a:defRPr sz="1800" b="1">
+            <a:off x="594360" y="1737360"/>
+            <a:ext cx="10972800" cy="502920"/>
+          </a:xfrm>
+          <a:prstGeom prst="rect">
+            <a:avLst/>
+          </a:prstGeom>
+          <a:noFill/>
+        </p:spPr>
+        <p:txBody>
+          <a:bodyPr wrap="square">
+            <a:spAutoFit/>
+          </a:bodyPr>
+          <a:lstStyle/>
+          <a:p>
+            <a:pPr>
+              <a:defRPr sz="1500" b="0">
                 <a:solidFill>
                   <a:srgbClr val="167663"/>
                 </a:solidFill>
@@ -3807,28 +4618,107 @@
       </p:sp>
       <p:sp>
         <p:nvSpPr>
-          <p:cNvPr id="5" name="TextBox 4"/>
-          <p:cNvSpPr txBox="1"/>
-          <p:nvPr/>
-        </p:nvSpPr>
-        <p:spPr>
-          <a:xfrm>
-            <a:off x="731520" y="2852928"/>
-            <a:ext cx="10789920" cy="749808"/>
-          </a:xfrm>
-          <a:prstGeom prst="rect">
-            <a:avLst/>
-          </a:prstGeom>
-          <a:noFill/>
-        </p:spPr>
-        <p:txBody>
-          <a:bodyPr wrap="square">
-            <a:spAutoFit/>
-          </a:bodyPr>
-          <a:lstStyle/>
-          <a:p>
-            <a:pPr>
-              <a:defRPr sz="1800" b="0">
+          <p:cNvPr id="5" name="Rounded Rectangle 4"/>
+          <p:cNvSpPr/>
+          <p:nvPr/>
+        </p:nvSpPr>
+        <p:spPr>
+          <a:xfrm>
+            <a:off x="640080" y="2834640"/>
+            <a:ext cx="3401568" cy="1920240"/>
+          </a:xfrm>
+          <a:prstGeom prst="roundRect">
+            <a:avLst/>
+          </a:prstGeom>
+          <a:solidFill>
+            <a:srgbClr val="EDF4EE"/>
+          </a:solidFill>
+          <a:ln>
+            <a:noFill/>
+          </a:ln>
+        </p:spPr>
+        <p:style>
+          <a:lnRef idx="1">
+            <a:schemeClr val="accent1"/>
+          </a:lnRef>
+          <a:fillRef idx="3">
+            <a:schemeClr val="accent1"/>
+          </a:fillRef>
+          <a:effectRef idx="2">
+            <a:schemeClr val="accent1"/>
+          </a:effectRef>
+          <a:fontRef idx="minor">
+            <a:schemeClr val="lt1"/>
+          </a:fontRef>
+        </p:style>
+        <p:txBody>
+          <a:bodyPr rtlCol="0" anchor="ctr"/>
+          <a:lstStyle/>
+          <a:p>
+            <a:pPr algn="ctr"/>
+          </a:p>
+        </p:txBody>
+      </p:sp>
+      <p:sp>
+        <p:nvSpPr>
+          <p:cNvPr id="6" name="TextBox 5"/>
+          <p:cNvSpPr txBox="1"/>
+          <p:nvPr/>
+        </p:nvSpPr>
+        <p:spPr>
+          <a:xfrm>
+            <a:off x="804671" y="2962656"/>
+            <a:ext cx="3108960" cy="365760"/>
+          </a:xfrm>
+          <a:prstGeom prst="rect">
+            <a:avLst/>
+          </a:prstGeom>
+          <a:noFill/>
+        </p:spPr>
+        <p:txBody>
+          <a:bodyPr wrap="square">
+            <a:spAutoFit/>
+          </a:bodyPr>
+          <a:lstStyle/>
+          <a:p>
+            <a:pPr>
+              <a:defRPr sz="1200" b="0">
+                <a:solidFill>
+                  <a:srgbClr val="167663"/>
+                </a:solidFill>
+                <a:latin typeface="Yu Gothic"/>
+              </a:defRPr>
+            </a:pPr>
+            <a:r>
+              <a:t>1997年</a:t>
+            </a:r>
+          </a:p>
+        </p:txBody>
+      </p:sp>
+      <p:sp>
+        <p:nvSpPr>
+          <p:cNvPr id="7" name="TextBox 6"/>
+          <p:cNvSpPr txBox="1"/>
+          <p:nvPr/>
+        </p:nvSpPr>
+        <p:spPr>
+          <a:xfrm>
+            <a:off x="804671" y="3429000"/>
+            <a:ext cx="3108960" cy="731520"/>
+          </a:xfrm>
+          <a:prstGeom prst="rect">
+            <a:avLst/>
+          </a:prstGeom>
+          <a:noFill/>
+        </p:spPr>
+        <p:txBody>
+          <a:bodyPr wrap="square">
+            <a:spAutoFit/>
+          </a:bodyPr>
+          <a:lstStyle/>
+          <a:p>
+            <a:pPr>
+              <a:defRPr sz="2500" b="1">
                 <a:solidFill>
                   <a:srgbClr val="152D39"/>
                 </a:solidFill>
@@ -3836,35 +4726,150 @@
               </a:defRPr>
             </a:pPr>
             <a:r>
-              <a:t>• 建設業就業者：1997年685万人 → 2024年477万人。約208万人減、約30％減（計算値30.4％）。</a:t>
-            </a:r>
-          </a:p>
-        </p:txBody>
-      </p:sp>
-      <p:sp>
-        <p:nvSpPr>
-          <p:cNvPr id="6" name="TextBox 5"/>
-          <p:cNvSpPr txBox="1"/>
-          <p:nvPr/>
-        </p:nvSpPr>
-        <p:spPr>
-          <a:xfrm>
-            <a:off x="731520" y="3657600"/>
-            <a:ext cx="10789920" cy="749808"/>
-          </a:xfrm>
-          <a:prstGeom prst="rect">
-            <a:avLst/>
-          </a:prstGeom>
-          <a:noFill/>
-        </p:spPr>
-        <p:txBody>
-          <a:bodyPr wrap="square">
-            <a:spAutoFit/>
-          </a:bodyPr>
-          <a:lstStyle/>
-          <a:p>
-            <a:pPr>
-              <a:defRPr sz="1800" b="0">
+              <a:t>685万人</a:t>
+            </a:r>
+          </a:p>
+        </p:txBody>
+      </p:sp>
+      <p:sp>
+        <p:nvSpPr>
+          <p:cNvPr id="8" name="TextBox 7"/>
+          <p:cNvSpPr txBox="1"/>
+          <p:nvPr/>
+        </p:nvSpPr>
+        <p:spPr>
+          <a:xfrm>
+            <a:off x="804671" y="4251960"/>
+            <a:ext cx="3108960" cy="411480"/>
+          </a:xfrm>
+          <a:prstGeom prst="rect">
+            <a:avLst/>
+          </a:prstGeom>
+          <a:noFill/>
+        </p:spPr>
+        <p:txBody>
+          <a:bodyPr wrap="square">
+            <a:spAutoFit/>
+          </a:bodyPr>
+          <a:lstStyle/>
+          <a:p>
+            <a:pPr>
+              <a:defRPr sz="1300" b="0">
+                <a:solidFill>
+                  <a:srgbClr val="62727B"/>
+                </a:solidFill>
+                <a:latin typeface="Yu Gothic"/>
+              </a:defRPr>
+            </a:pPr>
+            <a:r>
+              <a:t>建設業就業者</a:t>
+            </a:r>
+          </a:p>
+        </p:txBody>
+      </p:sp>
+      <p:sp>
+        <p:nvSpPr>
+          <p:cNvPr id="9" name="Rounded Rectangle 8"/>
+          <p:cNvSpPr/>
+          <p:nvPr/>
+        </p:nvSpPr>
+        <p:spPr>
+          <a:xfrm>
+            <a:off x="4206240" y="2834640"/>
+            <a:ext cx="3401568" cy="1920240"/>
+          </a:xfrm>
+          <a:prstGeom prst="roundRect">
+            <a:avLst/>
+          </a:prstGeom>
+          <a:solidFill>
+            <a:srgbClr val="EDF4EE"/>
+          </a:solidFill>
+          <a:ln>
+            <a:noFill/>
+          </a:ln>
+        </p:spPr>
+        <p:style>
+          <a:lnRef idx="1">
+            <a:schemeClr val="accent1"/>
+          </a:lnRef>
+          <a:fillRef idx="3">
+            <a:schemeClr val="accent1"/>
+          </a:fillRef>
+          <a:effectRef idx="2">
+            <a:schemeClr val="accent1"/>
+          </a:effectRef>
+          <a:fontRef idx="minor">
+            <a:schemeClr val="lt1"/>
+          </a:fontRef>
+        </p:style>
+        <p:txBody>
+          <a:bodyPr rtlCol="0" anchor="ctr"/>
+          <a:lstStyle/>
+          <a:p>
+            <a:pPr algn="ctr"/>
+          </a:p>
+        </p:txBody>
+      </p:sp>
+      <p:sp>
+        <p:nvSpPr>
+          <p:cNvPr id="10" name="TextBox 9"/>
+          <p:cNvSpPr txBox="1"/>
+          <p:nvPr/>
+        </p:nvSpPr>
+        <p:spPr>
+          <a:xfrm>
+            <a:off x="4370831" y="2962656"/>
+            <a:ext cx="3108960" cy="365760"/>
+          </a:xfrm>
+          <a:prstGeom prst="rect">
+            <a:avLst/>
+          </a:prstGeom>
+          <a:noFill/>
+        </p:spPr>
+        <p:txBody>
+          <a:bodyPr wrap="square">
+            <a:spAutoFit/>
+          </a:bodyPr>
+          <a:lstStyle/>
+          <a:p>
+            <a:pPr>
+              <a:defRPr sz="1200" b="0">
+                <a:solidFill>
+                  <a:srgbClr val="167663"/>
+                </a:solidFill>
+                <a:latin typeface="Yu Gothic"/>
+              </a:defRPr>
+            </a:pPr>
+            <a:r>
+              <a:t>2024年</a:t>
+            </a:r>
+          </a:p>
+        </p:txBody>
+      </p:sp>
+      <p:sp>
+        <p:nvSpPr>
+          <p:cNvPr id="11" name="TextBox 10"/>
+          <p:cNvSpPr txBox="1"/>
+          <p:nvPr/>
+        </p:nvSpPr>
+        <p:spPr>
+          <a:xfrm>
+            <a:off x="4370831" y="3429000"/>
+            <a:ext cx="3108960" cy="731520"/>
+          </a:xfrm>
+          <a:prstGeom prst="rect">
+            <a:avLst/>
+          </a:prstGeom>
+          <a:noFill/>
+        </p:spPr>
+        <p:txBody>
+          <a:bodyPr wrap="square">
+            <a:spAutoFit/>
+          </a:bodyPr>
+          <a:lstStyle/>
+          <a:p>
+            <a:pPr>
+              <a:defRPr sz="2500" b="1">
                 <a:solidFill>
                   <a:srgbClr val="152D39"/>
                 </a:solidFill>
@@ -3872,35 +4877,150 @@
               </a:defRPr>
             </a:pPr>
             <a:r>
-              <a:t>• 限られた人材で仕事に対応するために、知識・技術を地域を越えて活かす。</a:t>
-            </a:r>
-          </a:p>
-        </p:txBody>
-      </p:sp>
-      <p:sp>
-        <p:nvSpPr>
-          <p:cNvPr id="7" name="TextBox 6"/>
-          <p:cNvSpPr txBox="1"/>
-          <p:nvPr/>
-        </p:nvSpPr>
-        <p:spPr>
-          <a:xfrm>
-            <a:off x="731520" y="4462272"/>
-            <a:ext cx="10789920" cy="749808"/>
-          </a:xfrm>
-          <a:prstGeom prst="rect">
-            <a:avLst/>
-          </a:prstGeom>
-          <a:noFill/>
-        </p:spPr>
-        <p:txBody>
-          <a:bodyPr wrap="square">
-            <a:spAutoFit/>
-          </a:bodyPr>
-          <a:lstStyle/>
-          <a:p>
-            <a:pPr>
-              <a:defRPr sz="1800" b="0">
+              <a:t>477万人</a:t>
+            </a:r>
+          </a:p>
+        </p:txBody>
+      </p:sp>
+      <p:sp>
+        <p:nvSpPr>
+          <p:cNvPr id="12" name="TextBox 11"/>
+          <p:cNvSpPr txBox="1"/>
+          <p:nvPr/>
+        </p:nvSpPr>
+        <p:spPr>
+          <a:xfrm>
+            <a:off x="4370831" y="4251960"/>
+            <a:ext cx="3108960" cy="411480"/>
+          </a:xfrm>
+          <a:prstGeom prst="rect">
+            <a:avLst/>
+          </a:prstGeom>
+          <a:noFill/>
+        </p:spPr>
+        <p:txBody>
+          <a:bodyPr wrap="square">
+            <a:spAutoFit/>
+          </a:bodyPr>
+          <a:lstStyle/>
+          <a:p>
+            <a:pPr>
+              <a:defRPr sz="1300" b="0">
+                <a:solidFill>
+                  <a:srgbClr val="62727B"/>
+                </a:solidFill>
+                <a:latin typeface="Yu Gothic"/>
+              </a:defRPr>
+            </a:pPr>
+            <a:r>
+              <a:t>建設業就業者</a:t>
+            </a:r>
+          </a:p>
+        </p:txBody>
+      </p:sp>
+      <p:sp>
+        <p:nvSpPr>
+          <p:cNvPr id="13" name="Rounded Rectangle 12"/>
+          <p:cNvSpPr/>
+          <p:nvPr/>
+        </p:nvSpPr>
+        <p:spPr>
+          <a:xfrm>
+            <a:off x="7772400" y="2834640"/>
+            <a:ext cx="3401568" cy="1920240"/>
+          </a:xfrm>
+          <a:prstGeom prst="roundRect">
+            <a:avLst/>
+          </a:prstGeom>
+          <a:solidFill>
+            <a:srgbClr val="EDF4EE"/>
+          </a:solidFill>
+          <a:ln>
+            <a:noFill/>
+          </a:ln>
+        </p:spPr>
+        <p:style>
+          <a:lnRef idx="1">
+            <a:schemeClr val="accent1"/>
+          </a:lnRef>
+          <a:fillRef idx="3">
+            <a:schemeClr val="accent1"/>
+          </a:fillRef>
+          <a:effectRef idx="2">
+            <a:schemeClr val="accent1"/>
+          </a:effectRef>
+          <a:fontRef idx="minor">
+            <a:schemeClr val="lt1"/>
+          </a:fontRef>
+        </p:style>
+        <p:txBody>
+          <a:bodyPr rtlCol="0" anchor="ctr"/>
+          <a:lstStyle/>
+          <a:p>
+            <a:pPr algn="ctr"/>
+          </a:p>
+        </p:txBody>
+      </p:sp>
+      <p:sp>
+        <p:nvSpPr>
+          <p:cNvPr id="14" name="TextBox 13"/>
+          <p:cNvSpPr txBox="1"/>
+          <p:nvPr/>
+        </p:nvSpPr>
+        <p:spPr>
+          <a:xfrm>
+            <a:off x="7936992" y="2962656"/>
+            <a:ext cx="3108960" cy="365760"/>
+          </a:xfrm>
+          <a:prstGeom prst="rect">
+            <a:avLst/>
+          </a:prstGeom>
+          <a:noFill/>
+        </p:spPr>
+        <p:txBody>
+          <a:bodyPr wrap="square">
+            <a:spAutoFit/>
+          </a:bodyPr>
+          <a:lstStyle/>
+          <a:p>
+            <a:pPr>
+              <a:defRPr sz="1200" b="0">
+                <a:solidFill>
+                  <a:srgbClr val="167663"/>
+                </a:solidFill>
+                <a:latin typeface="Yu Gothic"/>
+              </a:defRPr>
+            </a:pPr>
+            <a:r>
+              <a:t>約27年間</a:t>
+            </a:r>
+          </a:p>
+        </p:txBody>
+      </p:sp>
+      <p:sp>
+        <p:nvSpPr>
+          <p:cNvPr id="15" name="TextBox 14"/>
+          <p:cNvSpPr txBox="1"/>
+          <p:nvPr/>
+        </p:nvSpPr>
+        <p:spPr>
+          <a:xfrm>
+            <a:off x="7936992" y="3429000"/>
+            <a:ext cx="3108960" cy="731520"/>
+          </a:xfrm>
+          <a:prstGeom prst="rect">
+            <a:avLst/>
+          </a:prstGeom>
+          <a:noFill/>
+        </p:spPr>
+        <p:txBody>
+          <a:bodyPr wrap="square">
+            <a:spAutoFit/>
+          </a:bodyPr>
+          <a:lstStyle/>
+          <a:p>
+            <a:pPr>
+              <a:defRPr sz="2500" b="1">
                 <a:solidFill>
                   <a:srgbClr val="152D39"/>
                 </a:solidFill>
@@ -3908,35 +5028,35 @@
               </a:defRPr>
             </a:pPr>
             <a:r>
-              <a:t>• 単なる業務効率化に留めず、遠方の取引にも対応できる環境を目指す。</a:t>
-            </a:r>
-          </a:p>
-        </p:txBody>
-      </p:sp>
-      <p:sp>
-        <p:nvSpPr>
-          <p:cNvPr id="8" name="TextBox 7"/>
-          <p:cNvSpPr txBox="1"/>
-          <p:nvPr/>
-        </p:nvSpPr>
-        <p:spPr>
-          <a:xfrm>
-            <a:off x="594360" y="5806440"/>
-            <a:ext cx="10789920" cy="594360"/>
-          </a:xfrm>
-          <a:prstGeom prst="rect">
-            <a:avLst/>
-          </a:prstGeom>
-          <a:noFill/>
-        </p:spPr>
-        <p:txBody>
-          <a:bodyPr wrap="square">
-            <a:spAutoFit/>
-          </a:bodyPr>
-          <a:lstStyle/>
-          <a:p>
-            <a:pPr>
-              <a:defRPr sz="1100" b="0">
+              <a:t>約30％減</a:t>
+            </a:r>
+          </a:p>
+        </p:txBody>
+      </p:sp>
+      <p:sp>
+        <p:nvSpPr>
+          <p:cNvPr id="16" name="TextBox 15"/>
+          <p:cNvSpPr txBox="1"/>
+          <p:nvPr/>
+        </p:nvSpPr>
+        <p:spPr>
+          <a:xfrm>
+            <a:off x="7936992" y="4251960"/>
+            <a:ext cx="3108960" cy="411480"/>
+          </a:xfrm>
+          <a:prstGeom prst="rect">
+            <a:avLst/>
+          </a:prstGeom>
+          <a:noFill/>
+        </p:spPr>
+        <p:txBody>
+          <a:bodyPr wrap="square">
+            <a:spAutoFit/>
+          </a:bodyPr>
+          <a:lstStyle/>
+          <a:p>
+            <a:pPr>
+              <a:defRPr sz="1300" b="0">
                 <a:solidFill>
                   <a:srgbClr val="62727B"/>
                 </a:solidFill>
@@ -3944,6 +5064,78 @@
               </a:defRPr>
             </a:pPr>
             <a:r>
+              <a:t>208万人減少</a:t>
+            </a:r>
+          </a:p>
+        </p:txBody>
+      </p:sp>
+      <p:sp>
+        <p:nvSpPr>
+          <p:cNvPr id="17" name="TextBox 16"/>
+          <p:cNvSpPr txBox="1"/>
+          <p:nvPr/>
+        </p:nvSpPr>
+        <p:spPr>
+          <a:xfrm>
+            <a:off x="777240" y="5166360"/>
+            <a:ext cx="10698480" cy="411480"/>
+          </a:xfrm>
+          <a:prstGeom prst="rect">
+            <a:avLst/>
+          </a:prstGeom>
+          <a:noFill/>
+        </p:spPr>
+        <p:txBody>
+          <a:bodyPr wrap="square">
+            <a:spAutoFit/>
+          </a:bodyPr>
+          <a:lstStyle/>
+          <a:p>
+            <a:pPr>
+              <a:defRPr sz="2300" b="1">
+                <a:solidFill>
+                  <a:srgbClr val="167663"/>
+                </a:solidFill>
+                <a:latin typeface="Yu Gothic"/>
+              </a:defRPr>
+            </a:pPr>
+            <a:r>
+              <a:t>人を増やすだけでなく、情報と仕事をつなぐ。</a:t>
+            </a:r>
+          </a:p>
+        </p:txBody>
+      </p:sp>
+      <p:sp>
+        <p:nvSpPr>
+          <p:cNvPr id="18" name="TextBox 17"/>
+          <p:cNvSpPr txBox="1"/>
+          <p:nvPr/>
+        </p:nvSpPr>
+        <p:spPr>
+          <a:xfrm>
+            <a:off x="594360" y="6080760"/>
+            <a:ext cx="10789920" cy="548640"/>
+          </a:xfrm>
+          <a:prstGeom prst="rect">
+            <a:avLst/>
+          </a:prstGeom>
+          <a:noFill/>
+        </p:spPr>
+        <p:txBody>
+          <a:bodyPr wrap="square">
+            <a:spAutoFit/>
+          </a:bodyPr>
+          <a:lstStyle/>
+          <a:p>
+            <a:pPr>
+              <a:defRPr sz="1000" b="0">
+                <a:solidFill>
+                  <a:srgbClr val="62727B"/>
+                </a:solidFill>
+                <a:latin typeface="Yu Gothic"/>
+              </a:defRPr>
+            </a:pPr>
+            <a:r>
               <a:t>参考値・原資料照合前：総務省「労働力調査」に基づく国土交通省資料を出典とする提供情報。数値は概数。2024年値であり最新値とは断定しない。</a:t>
             </a:r>
           </a:p>
@@ -3951,14 +5143,14 @@
       </p:sp>
       <p:sp>
         <p:nvSpPr>
-          <p:cNvPr id="9" name="TextBox 8"/>
-          <p:cNvSpPr txBox="1"/>
-          <p:nvPr/>
-        </p:nvSpPr>
-        <p:spPr>
-          <a:xfrm>
-            <a:off x="11018520" y="6446520"/>
-            <a:ext cx="594360" cy="274320"/>
+          <p:cNvPr id="19" name="TextBox 18"/>
+          <p:cNvSpPr txBox="1"/>
+          <p:nvPr/>
+        </p:nvSpPr>
+        <p:spPr>
+          <a:xfrm>
+            <a:off x="11201400" y="6446520"/>
+            <a:ext cx="457200" cy="228600"/>
           </a:xfrm>
           <a:prstGeom prst="rect">
             <a:avLst/>
@@ -4019,22 +5211,22 @@
         </p:nvSpPr>
         <p:spPr>
           <a:xfrm>
-            <a:off x="594360" y="320040"/>
-            <a:ext cx="10972800" cy="457200"/>
-          </a:xfrm>
-          <a:prstGeom prst="rect">
-            <a:avLst/>
-          </a:prstGeom>
-          <a:noFill/>
-        </p:spPr>
-        <p:txBody>
-          <a:bodyPr wrap="square">
-            <a:spAutoFit/>
-          </a:bodyPr>
-          <a:lstStyle/>
-          <a:p>
-            <a:pPr>
-              <a:defRPr sz="1200" b="1">
+            <a:off x="594360" y="246888"/>
+            <a:ext cx="10972800" cy="274320"/>
+          </a:xfrm>
+          <a:prstGeom prst="rect">
+            <a:avLst/>
+          </a:prstGeom>
+          <a:noFill/>
+        </p:spPr>
+        <p:txBody>
+          <a:bodyPr wrap="square">
+            <a:spAutoFit/>
+          </a:bodyPr>
+          <a:lstStyle/>
+          <a:p>
+            <a:pPr>
+              <a:defRPr sz="1100" b="1">
                 <a:solidFill>
                   <a:srgbClr val="167663"/>
                 </a:solidFill>
@@ -4042,7 +5234,7 @@
               </a:defRPr>
             </a:pPr>
             <a:r>
-              <a:t>IKS / FIELD DX × CONSTRUCTION NETWORK</a:t>
+              <a:t>IKS / VISUAL BUSINESS PROPOSAL</a:t>
             </a:r>
           </a:p>
         </p:txBody>
@@ -4055,22 +5247,22 @@
         </p:nvSpPr>
         <p:spPr>
           <a:xfrm>
-            <a:off x="594360" y="914400"/>
-            <a:ext cx="10972800" cy="1143000"/>
-          </a:xfrm>
-          <a:prstGeom prst="rect">
-            <a:avLst/>
-          </a:prstGeom>
-          <a:noFill/>
-        </p:spPr>
-        <p:txBody>
-          <a:bodyPr wrap="square">
-            <a:spAutoFit/>
-          </a:bodyPr>
-          <a:lstStyle/>
-          <a:p>
-            <a:pPr>
-              <a:defRPr sz="2700" b="1">
+            <a:off x="594360" y="731520"/>
+            <a:ext cx="10972800" cy="914400"/>
+          </a:xfrm>
+          <a:prstGeom prst="rect">
+            <a:avLst/>
+          </a:prstGeom>
+          <a:noFill/>
+        </p:spPr>
+        <p:txBody>
+          <a:bodyPr wrap="square">
+            <a:spAutoFit/>
+          </a:bodyPr>
+          <a:lstStyle/>
+          <a:p>
+            <a:pPr>
+              <a:defRPr sz="2600" b="1">
                 <a:solidFill>
                   <a:srgbClr val="152D39"/>
                 </a:solidFill>
@@ -4091,22 +5283,22 @@
         </p:nvSpPr>
         <p:spPr>
           <a:xfrm>
-            <a:off x="594360" y="2103120"/>
-            <a:ext cx="10972800" cy="548640"/>
-          </a:xfrm>
-          <a:prstGeom prst="rect">
-            <a:avLst/>
-          </a:prstGeom>
-          <a:noFill/>
-        </p:spPr>
-        <p:txBody>
-          <a:bodyPr wrap="square">
-            <a:spAutoFit/>
-          </a:bodyPr>
-          <a:lstStyle/>
-          <a:p>
-            <a:pPr>
-              <a:defRPr sz="1800" b="1">
+            <a:off x="594360" y="1737360"/>
+            <a:ext cx="10972800" cy="502920"/>
+          </a:xfrm>
+          <a:prstGeom prst="rect">
+            <a:avLst/>
+          </a:prstGeom>
+          <a:noFill/>
+        </p:spPr>
+        <p:txBody>
+          <a:bodyPr wrap="square">
+            <a:spAutoFit/>
+          </a:bodyPr>
+          <a:lstStyle/>
+          <a:p>
+            <a:pPr>
+              <a:defRPr sz="1500" b="0">
                 <a:solidFill>
                   <a:srgbClr val="167663"/>
                 </a:solidFill>
@@ -4121,28 +5313,107 @@
       </p:sp>
       <p:sp>
         <p:nvSpPr>
-          <p:cNvPr id="5" name="TextBox 4"/>
-          <p:cNvSpPr txBox="1"/>
-          <p:nvPr/>
-        </p:nvSpPr>
-        <p:spPr>
-          <a:xfrm>
-            <a:off x="731520" y="2852928"/>
-            <a:ext cx="10789920" cy="749808"/>
-          </a:xfrm>
-          <a:prstGeom prst="rect">
-            <a:avLst/>
-          </a:prstGeom>
-          <a:noFill/>
-        </p:spPr>
-        <p:txBody>
-          <a:bodyPr wrap="square">
-            <a:spAutoFit/>
-          </a:bodyPr>
-          <a:lstStyle/>
-          <a:p>
-            <a:pPr>
-              <a:defRPr sz="1800" b="0">
+          <p:cNvPr id="5" name="Rounded Rectangle 4"/>
+          <p:cNvSpPr/>
+          <p:nvPr/>
+        </p:nvSpPr>
+        <p:spPr>
+          <a:xfrm>
+            <a:off x="640080" y="2834640"/>
+            <a:ext cx="3401568" cy="1920240"/>
+          </a:xfrm>
+          <a:prstGeom prst="roundRect">
+            <a:avLst/>
+          </a:prstGeom>
+          <a:solidFill>
+            <a:srgbClr val="EDF4EE"/>
+          </a:solidFill>
+          <a:ln>
+            <a:noFill/>
+          </a:ln>
+        </p:spPr>
+        <p:style>
+          <a:lnRef idx="1">
+            <a:schemeClr val="accent1"/>
+          </a:lnRef>
+          <a:fillRef idx="3">
+            <a:schemeClr val="accent1"/>
+          </a:fillRef>
+          <a:effectRef idx="2">
+            <a:schemeClr val="accent1"/>
+          </a:effectRef>
+          <a:fontRef idx="minor">
+            <a:schemeClr val="lt1"/>
+          </a:fontRef>
+        </p:style>
+        <p:txBody>
+          <a:bodyPr rtlCol="0" anchor="ctr"/>
+          <a:lstStyle/>
+          <a:p>
+            <a:pPr algn="ctr"/>
+          </a:p>
+        </p:txBody>
+      </p:sp>
+      <p:sp>
+        <p:nvSpPr>
+          <p:cNvPr id="6" name="TextBox 5"/>
+          <p:cNvSpPr txBox="1"/>
+          <p:nvPr/>
+        </p:nvSpPr>
+        <p:spPr>
+          <a:xfrm>
+            <a:off x="804671" y="2962656"/>
+            <a:ext cx="3108960" cy="365760"/>
+          </a:xfrm>
+          <a:prstGeom prst="rect">
+            <a:avLst/>
+          </a:prstGeom>
+          <a:noFill/>
+        </p:spPr>
+        <p:txBody>
+          <a:bodyPr wrap="square">
+            <a:spAutoFit/>
+          </a:bodyPr>
+          <a:lstStyle/>
+          <a:p>
+            <a:pPr>
+              <a:defRPr sz="1200" b="0">
+                <a:solidFill>
+                  <a:srgbClr val="167663"/>
+                </a:solidFill>
+                <a:latin typeface="Yu Gothic"/>
+              </a:defRPr>
+            </a:pPr>
+            <a:r>
+              <a:t>費用</a:t>
+            </a:r>
+          </a:p>
+        </p:txBody>
+      </p:sp>
+      <p:sp>
+        <p:nvSpPr>
+          <p:cNvPr id="7" name="TextBox 6"/>
+          <p:cNvSpPr txBox="1"/>
+          <p:nvPr/>
+        </p:nvSpPr>
+        <p:spPr>
+          <a:xfrm>
+            <a:off x="804671" y="3429000"/>
+            <a:ext cx="3108960" cy="731520"/>
+          </a:xfrm>
+          <a:prstGeom prst="rect">
+            <a:avLst/>
+          </a:prstGeom>
+          <a:noFill/>
+        </p:spPr>
+        <p:txBody>
+          <a:bodyPr wrap="square">
+            <a:spAutoFit/>
+          </a:bodyPr>
+          <a:lstStyle/>
+          <a:p>
+            <a:pPr>
+              <a:defRPr sz="2500" b="1">
                 <a:solidFill>
                   <a:srgbClr val="152D39"/>
                 </a:solidFill>
@@ -4150,35 +5421,150 @@
               </a:defRPr>
             </a:pPr>
             <a:r>
-              <a:t>• 大阪の企業が福岡の案件に対応する際、現場調査、打ち合わせ、施工確認のために何度も現地へ足を運ぶ場合がある。</a:t>
-            </a:r>
-          </a:p>
-        </p:txBody>
-      </p:sp>
-      <p:sp>
-        <p:nvSpPr>
-          <p:cNvPr id="6" name="TextBox 5"/>
-          <p:cNvSpPr txBox="1"/>
-          <p:nvPr/>
-        </p:nvSpPr>
-        <p:spPr>
-          <a:xfrm>
-            <a:off x="731520" y="3657600"/>
-            <a:ext cx="10789920" cy="749808"/>
-          </a:xfrm>
-          <a:prstGeom prst="rect">
-            <a:avLst/>
-          </a:prstGeom>
-          <a:noFill/>
-        </p:spPr>
-        <p:txBody>
-          <a:bodyPr wrap="square">
-            <a:spAutoFit/>
-          </a:bodyPr>
-          <a:lstStyle/>
-          <a:p>
-            <a:pPr>
-              <a:defRPr sz="1800" b="0">
+              <a:t>移動コスト</a:t>
+            </a:r>
+          </a:p>
+        </p:txBody>
+      </p:sp>
+      <p:sp>
+        <p:nvSpPr>
+          <p:cNvPr id="8" name="TextBox 7"/>
+          <p:cNvSpPr txBox="1"/>
+          <p:nvPr/>
+        </p:nvSpPr>
+        <p:spPr>
+          <a:xfrm>
+            <a:off x="804671" y="4251960"/>
+            <a:ext cx="3108960" cy="411480"/>
+          </a:xfrm>
+          <a:prstGeom prst="rect">
+            <a:avLst/>
+          </a:prstGeom>
+          <a:noFill/>
+        </p:spPr>
+        <p:txBody>
+          <a:bodyPr wrap="square">
+            <a:spAutoFit/>
+          </a:bodyPr>
+          <a:lstStyle/>
+          <a:p>
+            <a:pPr>
+              <a:defRPr sz="1300" b="0">
+                <a:solidFill>
+                  <a:srgbClr val="62727B"/>
+                </a:solidFill>
+                <a:latin typeface="Yu Gothic"/>
+              </a:defRPr>
+            </a:pPr>
+            <a:r>
+              <a:t>交通費・対応費</a:t>
+            </a:r>
+          </a:p>
+        </p:txBody>
+      </p:sp>
+      <p:sp>
+        <p:nvSpPr>
+          <p:cNvPr id="9" name="Rounded Rectangle 8"/>
+          <p:cNvSpPr/>
+          <p:nvPr/>
+        </p:nvSpPr>
+        <p:spPr>
+          <a:xfrm>
+            <a:off x="4206240" y="2834640"/>
+            <a:ext cx="3401568" cy="1920240"/>
+          </a:xfrm>
+          <a:prstGeom prst="roundRect">
+            <a:avLst/>
+          </a:prstGeom>
+          <a:solidFill>
+            <a:srgbClr val="EDF4EE"/>
+          </a:solidFill>
+          <a:ln>
+            <a:noFill/>
+          </a:ln>
+        </p:spPr>
+        <p:style>
+          <a:lnRef idx="1">
+            <a:schemeClr val="accent1"/>
+          </a:lnRef>
+          <a:fillRef idx="3">
+            <a:schemeClr val="accent1"/>
+          </a:fillRef>
+          <a:effectRef idx="2">
+            <a:schemeClr val="accent1"/>
+          </a:effectRef>
+          <a:fontRef idx="minor">
+            <a:schemeClr val="lt1"/>
+          </a:fontRef>
+        </p:style>
+        <p:txBody>
+          <a:bodyPr rtlCol="0" anchor="ctr"/>
+          <a:lstStyle/>
+          <a:p>
+            <a:pPr algn="ctr"/>
+          </a:p>
+        </p:txBody>
+      </p:sp>
+      <p:sp>
+        <p:nvSpPr>
+          <p:cNvPr id="10" name="TextBox 9"/>
+          <p:cNvSpPr txBox="1"/>
+          <p:nvPr/>
+        </p:nvSpPr>
+        <p:spPr>
+          <a:xfrm>
+            <a:off x="4370831" y="2962656"/>
+            <a:ext cx="3108960" cy="365760"/>
+          </a:xfrm>
+          <a:prstGeom prst="rect">
+            <a:avLst/>
+          </a:prstGeom>
+          <a:noFill/>
+        </p:spPr>
+        <p:txBody>
+          <a:bodyPr wrap="square">
+            <a:spAutoFit/>
+          </a:bodyPr>
+          <a:lstStyle/>
+          <a:p>
+            <a:pPr>
+              <a:defRPr sz="1200" b="0">
+                <a:solidFill>
+                  <a:srgbClr val="167663"/>
+                </a:solidFill>
+                <a:latin typeface="Yu Gothic"/>
+              </a:defRPr>
+            </a:pPr>
+            <a:r>
+              <a:t>時間</a:t>
+            </a:r>
+          </a:p>
+        </p:txBody>
+      </p:sp>
+      <p:sp>
+        <p:nvSpPr>
+          <p:cNvPr id="11" name="TextBox 10"/>
+          <p:cNvSpPr txBox="1"/>
+          <p:nvPr/>
+        </p:nvSpPr>
+        <p:spPr>
+          <a:xfrm>
+            <a:off x="4370831" y="3429000"/>
+            <a:ext cx="3108960" cy="731520"/>
+          </a:xfrm>
+          <a:prstGeom prst="rect">
+            <a:avLst/>
+          </a:prstGeom>
+          <a:noFill/>
+        </p:spPr>
+        <p:txBody>
+          <a:bodyPr wrap="square">
+            <a:spAutoFit/>
+          </a:bodyPr>
+          <a:lstStyle/>
+          <a:p>
+            <a:pPr>
+              <a:defRPr sz="2500" b="1">
                 <a:solidFill>
                   <a:srgbClr val="152D39"/>
                 </a:solidFill>
@@ -4186,35 +5572,150 @@
               </a:defRPr>
             </a:pPr>
             <a:r>
-              <a:t>• 移動費だけでなく、移動時間や担当者の拘束が対応できる案件数を制約する。</a:t>
-            </a:r>
-          </a:p>
-        </p:txBody>
-      </p:sp>
-      <p:sp>
-        <p:nvSpPr>
-          <p:cNvPr id="7" name="TextBox 6"/>
-          <p:cNvSpPr txBox="1"/>
-          <p:nvPr/>
-        </p:nvSpPr>
-        <p:spPr>
-          <a:xfrm>
-            <a:off x="731520" y="4462272"/>
-            <a:ext cx="10789920" cy="749808"/>
-          </a:xfrm>
-          <a:prstGeom prst="rect">
-            <a:avLst/>
-          </a:prstGeom>
-          <a:noFill/>
-        </p:spPr>
-        <p:txBody>
-          <a:bodyPr wrap="square">
-            <a:spAutoFit/>
-          </a:bodyPr>
-          <a:lstStyle/>
-          <a:p>
-            <a:pPr>
-              <a:defRPr sz="1800" b="0">
+              <a:t>担当者の拘束</a:t>
+            </a:r>
+          </a:p>
+        </p:txBody>
+      </p:sp>
+      <p:sp>
+        <p:nvSpPr>
+          <p:cNvPr id="12" name="TextBox 11"/>
+          <p:cNvSpPr txBox="1"/>
+          <p:nvPr/>
+        </p:nvSpPr>
+        <p:spPr>
+          <a:xfrm>
+            <a:off x="4370831" y="4251960"/>
+            <a:ext cx="3108960" cy="411480"/>
+          </a:xfrm>
+          <a:prstGeom prst="rect">
+            <a:avLst/>
+          </a:prstGeom>
+          <a:noFill/>
+        </p:spPr>
+        <p:txBody>
+          <a:bodyPr wrap="square">
+            <a:spAutoFit/>
+          </a:bodyPr>
+          <a:lstStyle/>
+          <a:p>
+            <a:pPr>
+              <a:defRPr sz="1300" b="0">
+                <a:solidFill>
+                  <a:srgbClr val="62727B"/>
+                </a:solidFill>
+                <a:latin typeface="Yu Gothic"/>
+              </a:defRPr>
+            </a:pPr>
+            <a:r>
+              <a:t>現場への往復</a:t>
+            </a:r>
+          </a:p>
+        </p:txBody>
+      </p:sp>
+      <p:sp>
+        <p:nvSpPr>
+          <p:cNvPr id="13" name="Rounded Rectangle 12"/>
+          <p:cNvSpPr/>
+          <p:nvPr/>
+        </p:nvSpPr>
+        <p:spPr>
+          <a:xfrm>
+            <a:off x="7772400" y="2834640"/>
+            <a:ext cx="3401568" cy="1920240"/>
+          </a:xfrm>
+          <a:prstGeom prst="roundRect">
+            <a:avLst/>
+          </a:prstGeom>
+          <a:solidFill>
+            <a:srgbClr val="EDF4EE"/>
+          </a:solidFill>
+          <a:ln>
+            <a:noFill/>
+          </a:ln>
+        </p:spPr>
+        <p:style>
+          <a:lnRef idx="1">
+            <a:schemeClr val="accent1"/>
+          </a:lnRef>
+          <a:fillRef idx="3">
+            <a:schemeClr val="accent1"/>
+          </a:fillRef>
+          <a:effectRef idx="2">
+            <a:schemeClr val="accent1"/>
+          </a:effectRef>
+          <a:fontRef idx="minor">
+            <a:schemeClr val="lt1"/>
+          </a:fontRef>
+        </p:style>
+        <p:txBody>
+          <a:bodyPr rtlCol="0" anchor="ctr"/>
+          <a:lstStyle/>
+          <a:p>
+            <a:pPr algn="ctr"/>
+          </a:p>
+        </p:txBody>
+      </p:sp>
+      <p:sp>
+        <p:nvSpPr>
+          <p:cNvPr id="14" name="TextBox 13"/>
+          <p:cNvSpPr txBox="1"/>
+          <p:nvPr/>
+        </p:nvSpPr>
+        <p:spPr>
+          <a:xfrm>
+            <a:off x="7936992" y="2962656"/>
+            <a:ext cx="3108960" cy="365760"/>
+          </a:xfrm>
+          <a:prstGeom prst="rect">
+            <a:avLst/>
+          </a:prstGeom>
+          <a:noFill/>
+        </p:spPr>
+        <p:txBody>
+          <a:bodyPr wrap="square">
+            <a:spAutoFit/>
+          </a:bodyPr>
+          <a:lstStyle/>
+          <a:p>
+            <a:pPr>
+              <a:defRPr sz="1200" b="0">
+                <a:solidFill>
+                  <a:srgbClr val="167663"/>
+                </a:solidFill>
+                <a:latin typeface="Yu Gothic"/>
+              </a:defRPr>
+            </a:pPr>
+            <a:r>
+              <a:t>機会</a:t>
+            </a:r>
+          </a:p>
+        </p:txBody>
+      </p:sp>
+      <p:sp>
+        <p:nvSpPr>
+          <p:cNvPr id="15" name="TextBox 14"/>
+          <p:cNvSpPr txBox="1"/>
+          <p:nvPr/>
+        </p:nvSpPr>
+        <p:spPr>
+          <a:xfrm>
+            <a:off x="7936992" y="3429000"/>
+            <a:ext cx="3108960" cy="731520"/>
+          </a:xfrm>
+          <a:prstGeom prst="rect">
+            <a:avLst/>
+          </a:prstGeom>
+          <a:noFill/>
+        </p:spPr>
+        <p:txBody>
+          <a:bodyPr wrap="square">
+            <a:spAutoFit/>
+          </a:bodyPr>
+          <a:lstStyle/>
+          <a:p>
+            <a:pPr>
+              <a:defRPr sz="2500" b="1">
                 <a:solidFill>
                   <a:srgbClr val="152D39"/>
                 </a:solidFill>
@@ -4222,35 +5723,35 @@
               </a:defRPr>
             </a:pPr>
             <a:r>
-              <a:t>• 現地対応の体制がないために、営業範囲や受注機会を広げにくい可能性がある。</a:t>
-            </a:r>
-          </a:p>
-        </p:txBody>
-      </p:sp>
-      <p:sp>
-        <p:nvSpPr>
-          <p:cNvPr id="8" name="TextBox 7"/>
-          <p:cNvSpPr txBox="1"/>
-          <p:nvPr/>
-        </p:nvSpPr>
-        <p:spPr>
-          <a:xfrm>
-            <a:off x="594360" y="5806440"/>
-            <a:ext cx="10789920" cy="594360"/>
-          </a:xfrm>
-          <a:prstGeom prst="rect">
-            <a:avLst/>
-          </a:prstGeom>
-          <a:noFill/>
-        </p:spPr>
-        <p:txBody>
-          <a:bodyPr wrap="square">
-            <a:spAutoFit/>
-          </a:bodyPr>
-          <a:lstStyle/>
-          <a:p>
-            <a:pPr>
-              <a:defRPr sz="1100" b="0">
+              <a:t>営業範囲</a:t>
+            </a:r>
+          </a:p>
+        </p:txBody>
+      </p:sp>
+      <p:sp>
+        <p:nvSpPr>
+          <p:cNvPr id="16" name="TextBox 15"/>
+          <p:cNvSpPr txBox="1"/>
+          <p:nvPr/>
+        </p:nvSpPr>
+        <p:spPr>
+          <a:xfrm>
+            <a:off x="7936992" y="4251960"/>
+            <a:ext cx="3108960" cy="411480"/>
+          </a:xfrm>
+          <a:prstGeom prst="rect">
+            <a:avLst/>
+          </a:prstGeom>
+          <a:noFill/>
+        </p:spPr>
+        <p:txBody>
+          <a:bodyPr wrap="square">
+            <a:spAutoFit/>
+          </a:bodyPr>
+          <a:lstStyle/>
+          <a:p>
+            <a:pPr>
+              <a:defRPr sz="1300" b="0">
                 <a:solidFill>
                   <a:srgbClr val="62727B"/>
                 </a:solidFill>
@@ -4258,6 +5759,78 @@
               </a:defRPr>
             </a:pPr>
             <a:r>
+              <a:t>対応できる案件数</a:t>
+            </a:r>
+          </a:p>
+        </p:txBody>
+      </p:sp>
+      <p:sp>
+        <p:nvSpPr>
+          <p:cNvPr id="17" name="TextBox 16"/>
+          <p:cNvSpPr txBox="1"/>
+          <p:nvPr/>
+        </p:nvSpPr>
+        <p:spPr>
+          <a:xfrm>
+            <a:off x="777240" y="5120640"/>
+            <a:ext cx="10698480" cy="502920"/>
+          </a:xfrm>
+          <a:prstGeom prst="rect">
+            <a:avLst/>
+          </a:prstGeom>
+          <a:noFill/>
+        </p:spPr>
+        <p:txBody>
+          <a:bodyPr wrap="square">
+            <a:spAutoFit/>
+          </a:bodyPr>
+          <a:lstStyle/>
+          <a:p>
+            <a:pPr>
+              <a:defRPr sz="1600" b="0">
+                <a:solidFill>
+                  <a:srgbClr val="62727B"/>
+                </a:solidFill>
+                <a:latin typeface="Yu Gothic"/>
+              </a:defRPr>
+            </a:pPr>
+            <a:r>
+              <a:t>大阪の企業が福岡の案件に対応する際、現場調査、打ち合わせ、施工確認のために何度も現地へ足を運ぶ場合がある。</a:t>
+            </a:r>
+          </a:p>
+        </p:txBody>
+      </p:sp>
+      <p:sp>
+        <p:nvSpPr>
+          <p:cNvPr id="18" name="TextBox 17"/>
+          <p:cNvSpPr txBox="1"/>
+          <p:nvPr/>
+        </p:nvSpPr>
+        <p:spPr>
+          <a:xfrm>
+            <a:off x="594360" y="6080760"/>
+            <a:ext cx="10789920" cy="548640"/>
+          </a:xfrm>
+          <a:prstGeom prst="rect">
+            <a:avLst/>
+          </a:prstGeom>
+          <a:noFill/>
+        </p:spPr>
+        <p:txBody>
+          <a:bodyPr wrap="square">
+            <a:spAutoFit/>
+          </a:bodyPr>
+          <a:lstStyle/>
+          <a:p>
+            <a:pPr>
+              <a:defRPr sz="1000" b="0">
+                <a:solidFill>
+                  <a:srgbClr val="62727B"/>
+                </a:solidFill>
+                <a:latin typeface="Yu Gothic"/>
+              </a:defRPr>
+            </a:pPr>
+            <a:r>
               <a:t>説明用の想定例。特定企業の失注実績や実測効果を示すものではない。</a:t>
             </a:r>
           </a:p>
@@ -4265,14 +5838,14 @@
       </p:sp>
       <p:sp>
         <p:nvSpPr>
-          <p:cNvPr id="9" name="TextBox 8"/>
-          <p:cNvSpPr txBox="1"/>
-          <p:nvPr/>
-        </p:nvSpPr>
-        <p:spPr>
-          <a:xfrm>
-            <a:off x="11018520" y="6446520"/>
-            <a:ext cx="594360" cy="274320"/>
+          <p:cNvPr id="19" name="TextBox 18"/>
+          <p:cNvSpPr txBox="1"/>
+          <p:nvPr/>
+        </p:nvSpPr>
+        <p:spPr>
+          <a:xfrm>
+            <a:off x="11201400" y="6446520"/>
+            <a:ext cx="457200" cy="228600"/>
           </a:xfrm>
           <a:prstGeom prst="rect">
             <a:avLst/>
@@ -4333,22 +5906,22 @@
         </p:nvSpPr>
         <p:spPr>
           <a:xfrm>
-            <a:off x="594360" y="320040"/>
-            <a:ext cx="10972800" cy="457200"/>
-          </a:xfrm>
-          <a:prstGeom prst="rect">
-            <a:avLst/>
-          </a:prstGeom>
-          <a:noFill/>
-        </p:spPr>
-        <p:txBody>
-          <a:bodyPr wrap="square">
-            <a:spAutoFit/>
-          </a:bodyPr>
-          <a:lstStyle/>
-          <a:p>
-            <a:pPr>
-              <a:defRPr sz="1200" b="1">
+            <a:off x="594360" y="246888"/>
+            <a:ext cx="10972800" cy="274320"/>
+          </a:xfrm>
+          <a:prstGeom prst="rect">
+            <a:avLst/>
+          </a:prstGeom>
+          <a:noFill/>
+        </p:spPr>
+        <p:txBody>
+          <a:bodyPr wrap="square">
+            <a:spAutoFit/>
+          </a:bodyPr>
+          <a:lstStyle/>
+          <a:p>
+            <a:pPr>
+              <a:defRPr sz="1100" b="1">
                 <a:solidFill>
                   <a:srgbClr val="167663"/>
                 </a:solidFill>
@@ -4356,7 +5929,7 @@
               </a:defRPr>
             </a:pPr>
             <a:r>
-              <a:t>IKS / FIELD DX × CONSTRUCTION NETWORK</a:t>
+              <a:t>IKS / VISUAL BUSINESS PROPOSAL</a:t>
             </a:r>
           </a:p>
         </p:txBody>
@@ -4369,22 +5942,22 @@
         </p:nvSpPr>
         <p:spPr>
           <a:xfrm>
-            <a:off x="594360" y="914400"/>
-            <a:ext cx="10972800" cy="1143000"/>
-          </a:xfrm>
-          <a:prstGeom prst="rect">
-            <a:avLst/>
-          </a:prstGeom>
-          <a:noFill/>
-        </p:spPr>
-        <p:txBody>
-          <a:bodyPr wrap="square">
-            <a:spAutoFit/>
-          </a:bodyPr>
-          <a:lstStyle/>
-          <a:p>
-            <a:pPr>
-              <a:defRPr sz="2700" b="1">
+            <a:off x="594360" y="731520"/>
+            <a:ext cx="10972800" cy="914400"/>
+          </a:xfrm>
+          <a:prstGeom prst="rect">
+            <a:avLst/>
+          </a:prstGeom>
+          <a:noFill/>
+        </p:spPr>
+        <p:txBody>
+          <a:bodyPr wrap="square">
+            <a:spAutoFit/>
+          </a:bodyPr>
+          <a:lstStyle/>
+          <a:p>
+            <a:pPr>
+              <a:defRPr sz="2600" b="1">
                 <a:solidFill>
                   <a:srgbClr val="152D39"/>
                 </a:solidFill>
@@ -4392,7 +5965,7 @@
               </a:defRPr>
             </a:pPr>
             <a:r>
-              <a:t>03｜出張1回の負担を、費用と時間で見る。</a:t>
+              <a:t>03｜出張は1人あたり月1回でも、人数で積み上がる。</a:t>
             </a:r>
           </a:p>
         </p:txBody>
@@ -4405,22 +5978,22 @@
         </p:nvSpPr>
         <p:spPr>
           <a:xfrm>
-            <a:off x="594360" y="2103120"/>
-            <a:ext cx="10972800" cy="548640"/>
-          </a:xfrm>
-          <a:prstGeom prst="rect">
-            <a:avLst/>
-          </a:prstGeom>
-          <a:noFill/>
-        </p:spPr>
-        <p:txBody>
-          <a:bodyPr wrap="square">
-            <a:spAutoFit/>
-          </a:bodyPr>
-          <a:lstStyle/>
-          <a:p>
-            <a:pPr>
-              <a:defRPr sz="1800" b="1">
+            <a:off x="594360" y="1737360"/>
+            <a:ext cx="10972800" cy="502920"/>
+          </a:xfrm>
+          <a:prstGeom prst="rect">
+            <a:avLst/>
+          </a:prstGeom>
+          <a:noFill/>
+        </p:spPr>
+        <p:txBody>
+          <a:bodyPr wrap="square">
+            <a:spAutoFit/>
+          </a:bodyPr>
+          <a:lstStyle/>
+          <a:p>
+            <a:pPr>
+              <a:defRPr sz="1500" b="0">
                 <a:solidFill>
                   <a:srgbClr val="167663"/>
                 </a:solidFill>
@@ -4428,44 +6001,51 @@
               </a:defRPr>
             </a:pPr>
             <a:r>
-              <a:t>大阪―福岡／新幹線・日帰り・1名の仮定</a:t>
-            </a:r>
-          </a:p>
-        </p:txBody>
-      </p:sp>
-      <p:sp>
-        <p:nvSpPr>
-          <p:cNvPr id="5" name="TextBox 4"/>
-          <p:cNvSpPr txBox="1"/>
-          <p:nvPr/>
-        </p:nvSpPr>
-        <p:spPr>
-          <a:xfrm>
-            <a:off x="731520" y="2852928"/>
-            <a:ext cx="10789920" cy="749808"/>
-          </a:xfrm>
-          <a:prstGeom prst="rect">
-            <a:avLst/>
-          </a:prstGeom>
-          <a:noFill/>
-        </p:spPr>
-        <p:txBody>
-          <a:bodyPr wrap="square">
-            <a:spAutoFit/>
-          </a:bodyPr>
-          <a:lstStyle/>
-          <a:p>
-            <a:pPr>
-              <a:defRPr sz="1800" b="0">
-                <a:solidFill>
-                  <a:srgbClr val="152D39"/>
-                </a:solidFill>
-                <a:latin typeface="Yu Gothic"/>
-              </a:defRPr>
-            </a:pPr>
-            <a:r>
-              <a:t>• 新幹線往復30,000円 ＋ 現地交通費5,000円 ＝ 直接経費35,000円／回。</a:t>
-            </a:r>
+              <a:t>大阪―福岡／日帰り・1名・月1回の仮定</a:t>
+            </a:r>
+          </a:p>
+        </p:txBody>
+      </p:sp>
+      <p:sp>
+        <p:nvSpPr>
+          <p:cNvPr id="5" name="Rounded Rectangle 4"/>
+          <p:cNvSpPr/>
+          <p:nvPr/>
+        </p:nvSpPr>
+        <p:spPr>
+          <a:xfrm>
+            <a:off x="640080" y="2560320"/>
+            <a:ext cx="4023360" cy="2560320"/>
+          </a:xfrm>
+          <a:prstGeom prst="roundRect">
+            <a:avLst/>
+          </a:prstGeom>
+          <a:solidFill>
+            <a:srgbClr val="167663"/>
+          </a:solidFill>
+          <a:ln>
+            <a:noFill/>
+          </a:ln>
+        </p:spPr>
+        <p:style>
+          <a:lnRef idx="1">
+            <a:schemeClr val="accent1"/>
+          </a:lnRef>
+          <a:fillRef idx="3">
+            <a:schemeClr val="accent1"/>
+          </a:fillRef>
+          <a:effectRef idx="2">
+            <a:schemeClr val="accent1"/>
+          </a:effectRef>
+          <a:fontRef idx="minor">
+            <a:schemeClr val="lt1"/>
+          </a:fontRef>
+        </p:style>
+        <p:txBody>
+          <a:bodyPr rtlCol="0" anchor="ctr"/>
+          <a:lstStyle/>
+          <a:p>
+            <a:pPr algn="ctr"/>
           </a:p>
         </p:txBody>
       </p:sp>
@@ -4477,30 +6057,30 @@
         </p:nvSpPr>
         <p:spPr>
           <a:xfrm>
-            <a:off x="731520" y="3657600"/>
-            <a:ext cx="10789920" cy="749808"/>
-          </a:xfrm>
-          <a:prstGeom prst="rect">
-            <a:avLst/>
-          </a:prstGeom>
-          <a:noFill/>
-        </p:spPr>
-        <p:txBody>
-          <a:bodyPr wrap="square">
-            <a:spAutoFit/>
-          </a:bodyPr>
-          <a:lstStyle/>
-          <a:p>
-            <a:pPr>
-              <a:defRPr sz="1800" b="0">
-                <a:solidFill>
-                  <a:srgbClr val="152D39"/>
-                </a:solidFill>
-                <a:latin typeface="Yu Gothic"/>
-              </a:defRPr>
-            </a:pPr>
-            <a:r>
-              <a:t>• 人件費相当30,000円／日を含めた総コスト相当：65,000円／回。</a:t>
+            <a:off x="868680" y="2788920"/>
+            <a:ext cx="3657600" cy="365760"/>
+          </a:xfrm>
+          <a:prstGeom prst="rect">
+            <a:avLst/>
+          </a:prstGeom>
+          <a:noFill/>
+        </p:spPr>
+        <p:txBody>
+          <a:bodyPr wrap="square">
+            <a:spAutoFit/>
+          </a:bodyPr>
+          <a:lstStyle/>
+          <a:p>
+            <a:pPr>
+              <a:defRPr sz="1600" b="0">
+                <a:solidFill>
+                  <a:srgbClr val="FFFFFF"/>
+                </a:solidFill>
+                <a:latin typeface="Yu Gothic"/>
+              </a:defRPr>
+            </a:pPr>
+            <a:r>
+              <a:t>1人 × 月1回</a:t>
             </a:r>
           </a:p>
         </p:txBody>
@@ -4513,30 +6093,30 @@
         </p:nvSpPr>
         <p:spPr>
           <a:xfrm>
-            <a:off x="731520" y="4462272"/>
-            <a:ext cx="10789920" cy="749808"/>
-          </a:xfrm>
-          <a:prstGeom prst="rect">
-            <a:avLst/>
-          </a:prstGeom>
-          <a:noFill/>
-        </p:spPr>
-        <p:txBody>
-          <a:bodyPr wrap="square">
-            <a:spAutoFit/>
-          </a:bodyPr>
-          <a:lstStyle/>
-          <a:p>
-            <a:pPr>
-              <a:defRPr sz="1800" b="0">
-                <a:solidFill>
-                  <a:srgbClr val="152D39"/>
-                </a:solidFill>
-                <a:latin typeface="Yu Gothic"/>
-              </a:defRPr>
-            </a:pPr>
-            <a:r>
-              <a:t>• 月10回：直接経費35万円／総コスト相当65万円。年間120回：420万円／780万円。</a:t>
+            <a:off x="868680" y="3337560"/>
+            <a:ext cx="3657600" cy="731520"/>
+          </a:xfrm>
+          <a:prstGeom prst="rect">
+            <a:avLst/>
+          </a:prstGeom>
+          <a:noFill/>
+        </p:spPr>
+        <p:txBody>
+          <a:bodyPr wrap="square">
+            <a:spAutoFit/>
+          </a:bodyPr>
+          <a:lstStyle/>
+          <a:p>
+            <a:pPr>
+              <a:defRPr sz="3400" b="1">
+                <a:solidFill>
+                  <a:srgbClr val="FFFFFF"/>
+                </a:solidFill>
+                <a:latin typeface="Yu Gothic"/>
+              </a:defRPr>
+            </a:pPr>
+            <a:r>
+              <a:t>6.5万円／月</a:t>
             </a:r>
           </a:p>
         </p:txBody>
@@ -4549,22 +6129,417 @@
         </p:nvSpPr>
         <p:spPr>
           <a:xfrm>
-            <a:off x="594360" y="5806440"/>
-            <a:ext cx="10789920" cy="594360"/>
-          </a:xfrm>
-          <a:prstGeom prst="rect">
-            <a:avLst/>
-          </a:prstGeom>
-          <a:noFill/>
-        </p:spPr>
-        <p:txBody>
-          <a:bodyPr wrap="square">
-            <a:spAutoFit/>
-          </a:bodyPr>
-          <a:lstStyle/>
-          <a:p>
-            <a:pPr>
-              <a:defRPr sz="1100" b="0">
+            <a:off x="868680" y="4251960"/>
+            <a:ext cx="3657600" cy="502920"/>
+          </a:xfrm>
+          <a:prstGeom prst="rect">
+            <a:avLst/>
+          </a:prstGeom>
+          <a:noFill/>
+        </p:spPr>
+        <p:txBody>
+          <a:bodyPr wrap="square">
+            <a:spAutoFit/>
+          </a:bodyPr>
+          <a:lstStyle/>
+          <a:p>
+            <a:pPr>
+              <a:defRPr sz="2500" b="1">
+                <a:solidFill>
+                  <a:srgbClr val="FFFFFF"/>
+                </a:solidFill>
+                <a:latin typeface="Yu Gothic"/>
+              </a:defRPr>
+            </a:pPr>
+            <a:r>
+              <a:t>年間78万円／人</a:t>
+            </a:r>
+          </a:p>
+        </p:txBody>
+      </p:sp>
+      <p:graphicFrame>
+        <p:nvGraphicFramePr>
+          <p:cNvPr id="9" name="Table 8"/>
+          <p:cNvGraphicFramePr>
+            <a:graphicFrameLocks noGrp="1"/>
+          </p:cNvGraphicFramePr>
+          <p:nvPr/>
+        </p:nvGraphicFramePr>
+        <p:xfrm>
+          <a:off x="5029200" y="2606040"/>
+          <a:ext cx="6400800" cy="2468880"/>
+        </p:xfrm>
+        <a:graphic>
+          <a:graphicData uri="http://schemas.openxmlformats.org/drawingml/2006/table">
+            <a:tbl>
+              <a:tblPr firstRow="1" bandRow="1">
+                <a:tableStyleId>{5C22544A-7EE6-4342-B048-85BDC9FD1C3A}</a:tableStyleId>
+              </a:tblPr>
+              <a:tblGrid>
+                <a:gridCol w="2133600"/>
+                <a:gridCol w="2133600"/>
+                <a:gridCol w="2133600"/>
+              </a:tblGrid>
+              <a:tr h="617220">
+                <a:tc>
+                  <a:txBody>
+                    <a:bodyPr/>
+                    <a:lstStyle/>
+                    <a:p>
+                      <a:pPr>
+                        <a:defRPr sz="1600">
+                          <a:solidFill>
+                            <a:srgbClr val="FFFFFF"/>
+                          </a:solidFill>
+                          <a:latin typeface="Yu Gothic"/>
+                        </a:defRPr>
+                      </a:pPr>
+                      <a:r>
+                        <a:t>人数</a:t>
+                      </a:r>
+                    </a:p>
+                  </a:txBody>
+                  <a:tcPr>
+                    <a:solidFill>
+                      <a:srgbClr val="167663"/>
+                    </a:solidFill>
+                  </a:tcPr>
+                </a:tc>
+                <a:tc>
+                  <a:txBody>
+                    <a:bodyPr/>
+                    <a:lstStyle/>
+                    <a:p>
+                      <a:pPr>
+                        <a:defRPr sz="1600">
+                          <a:solidFill>
+                            <a:srgbClr val="FFFFFF"/>
+                          </a:solidFill>
+                          <a:latin typeface="Yu Gothic"/>
+                        </a:defRPr>
+                      </a:pPr>
+                      <a:r>
+                        <a:t>直接経費／年</a:t>
+                      </a:r>
+                    </a:p>
+                  </a:txBody>
+                  <a:tcPr>
+                    <a:solidFill>
+                      <a:srgbClr val="167663"/>
+                    </a:solidFill>
+                  </a:tcPr>
+                </a:tc>
+                <a:tc>
+                  <a:txBody>
+                    <a:bodyPr/>
+                    <a:lstStyle/>
+                    <a:p>
+                      <a:pPr>
+                        <a:defRPr sz="1600">
+                          <a:solidFill>
+                            <a:srgbClr val="FFFFFF"/>
+                          </a:solidFill>
+                          <a:latin typeface="Yu Gothic"/>
+                        </a:defRPr>
+                      </a:pPr>
+                      <a:r>
+                        <a:t>総コスト相当／年</a:t>
+                      </a:r>
+                    </a:p>
+                  </a:txBody>
+                  <a:tcPr>
+                    <a:solidFill>
+                      <a:srgbClr val="167663"/>
+                    </a:solidFill>
+                  </a:tcPr>
+                </a:tc>
+              </a:tr>
+              <a:tr h="617220">
+                <a:tc>
+                  <a:txBody>
+                    <a:bodyPr/>
+                    <a:lstStyle/>
+                    <a:p>
+                      <a:pPr>
+                        <a:defRPr sz="1600">
+                          <a:solidFill>
+                            <a:srgbClr val="152D39"/>
+                          </a:solidFill>
+                          <a:latin typeface="Yu Gothic"/>
+                        </a:defRPr>
+                      </a:pPr>
+                      <a:r>
+                        <a:t>1人</a:t>
+                      </a:r>
+                    </a:p>
+                  </a:txBody>
+                  <a:tcPr>
+                    <a:solidFill>
+                      <a:srgbClr val="EDF4EE"/>
+                    </a:solidFill>
+                  </a:tcPr>
+                </a:tc>
+                <a:tc>
+                  <a:txBody>
+                    <a:bodyPr/>
+                    <a:lstStyle/>
+                    <a:p>
+                      <a:pPr>
+                        <a:defRPr sz="1600">
+                          <a:solidFill>
+                            <a:srgbClr val="152D39"/>
+                          </a:solidFill>
+                          <a:latin typeface="Yu Gothic"/>
+                        </a:defRPr>
+                      </a:pPr>
+                      <a:r>
+                        <a:t>42万円</a:t>
+                      </a:r>
+                    </a:p>
+                  </a:txBody>
+                  <a:tcPr>
+                    <a:solidFill>
+                      <a:srgbClr val="EDF4EE"/>
+                    </a:solidFill>
+                  </a:tcPr>
+                </a:tc>
+                <a:tc>
+                  <a:txBody>
+                    <a:bodyPr/>
+                    <a:lstStyle/>
+                    <a:p>
+                      <a:pPr>
+                        <a:defRPr sz="1600">
+                          <a:solidFill>
+                            <a:srgbClr val="152D39"/>
+                          </a:solidFill>
+                          <a:latin typeface="Yu Gothic"/>
+                        </a:defRPr>
+                      </a:pPr>
+                      <a:r>
+                        <a:t>78万円</a:t>
+                      </a:r>
+                    </a:p>
+                  </a:txBody>
+                  <a:tcPr>
+                    <a:solidFill>
+                      <a:srgbClr val="EDF4EE"/>
+                    </a:solidFill>
+                  </a:tcPr>
+                </a:tc>
+              </a:tr>
+              <a:tr h="617220">
+                <a:tc>
+                  <a:txBody>
+                    <a:bodyPr/>
+                    <a:lstStyle/>
+                    <a:p>
+                      <a:pPr>
+                        <a:defRPr sz="1600">
+                          <a:solidFill>
+                            <a:srgbClr val="152D39"/>
+                          </a:solidFill>
+                          <a:latin typeface="Yu Gothic"/>
+                        </a:defRPr>
+                      </a:pPr>
+                      <a:r>
+                        <a:t>5人</a:t>
+                      </a:r>
+                    </a:p>
+                  </a:txBody>
+                  <a:tcPr>
+                    <a:solidFill>
+                      <a:srgbClr val="EDF4EE"/>
+                    </a:solidFill>
+                  </a:tcPr>
+                </a:tc>
+                <a:tc>
+                  <a:txBody>
+                    <a:bodyPr/>
+                    <a:lstStyle/>
+                    <a:p>
+                      <a:pPr>
+                        <a:defRPr sz="1600">
+                          <a:solidFill>
+                            <a:srgbClr val="152D39"/>
+                          </a:solidFill>
+                          <a:latin typeface="Yu Gothic"/>
+                        </a:defRPr>
+                      </a:pPr>
+                      <a:r>
+                        <a:t>210万円</a:t>
+                      </a:r>
+                    </a:p>
+                  </a:txBody>
+                  <a:tcPr>
+                    <a:solidFill>
+                      <a:srgbClr val="EDF4EE"/>
+                    </a:solidFill>
+                  </a:tcPr>
+                </a:tc>
+                <a:tc>
+                  <a:txBody>
+                    <a:bodyPr/>
+                    <a:lstStyle/>
+                    <a:p>
+                      <a:pPr>
+                        <a:defRPr sz="1600">
+                          <a:solidFill>
+                            <a:srgbClr val="152D39"/>
+                          </a:solidFill>
+                          <a:latin typeface="Yu Gothic"/>
+                        </a:defRPr>
+                      </a:pPr>
+                      <a:r>
+                        <a:t>390万円</a:t>
+                      </a:r>
+                    </a:p>
+                  </a:txBody>
+                  <a:tcPr>
+                    <a:solidFill>
+                      <a:srgbClr val="EDF4EE"/>
+                    </a:solidFill>
+                  </a:tcPr>
+                </a:tc>
+              </a:tr>
+              <a:tr h="617220">
+                <a:tc>
+                  <a:txBody>
+                    <a:bodyPr/>
+                    <a:lstStyle/>
+                    <a:p>
+                      <a:pPr>
+                        <a:defRPr sz="1600">
+                          <a:solidFill>
+                            <a:srgbClr val="152D39"/>
+                          </a:solidFill>
+                          <a:latin typeface="Yu Gothic"/>
+                        </a:defRPr>
+                      </a:pPr>
+                      <a:r>
+                        <a:t>10人</a:t>
+                      </a:r>
+                    </a:p>
+                  </a:txBody>
+                  <a:tcPr>
+                    <a:solidFill>
+                      <a:srgbClr val="EDF4EE"/>
+                    </a:solidFill>
+                  </a:tcPr>
+                </a:tc>
+                <a:tc>
+                  <a:txBody>
+                    <a:bodyPr/>
+                    <a:lstStyle/>
+                    <a:p>
+                      <a:pPr>
+                        <a:defRPr sz="1600">
+                          <a:solidFill>
+                            <a:srgbClr val="152D39"/>
+                          </a:solidFill>
+                          <a:latin typeface="Yu Gothic"/>
+                        </a:defRPr>
+                      </a:pPr>
+                      <a:r>
+                        <a:t>420万円</a:t>
+                      </a:r>
+                    </a:p>
+                  </a:txBody>
+                  <a:tcPr>
+                    <a:solidFill>
+                      <a:srgbClr val="EDF4EE"/>
+                    </a:solidFill>
+                  </a:tcPr>
+                </a:tc>
+                <a:tc>
+                  <a:txBody>
+                    <a:bodyPr/>
+                    <a:lstStyle/>
+                    <a:p>
+                      <a:pPr>
+                        <a:defRPr sz="1600">
+                          <a:solidFill>
+                            <a:srgbClr val="152D39"/>
+                          </a:solidFill>
+                          <a:latin typeface="Yu Gothic"/>
+                        </a:defRPr>
+                      </a:pPr>
+                      <a:r>
+                        <a:t>780万円</a:t>
+                      </a:r>
+                    </a:p>
+                  </a:txBody>
+                  <a:tcPr>
+                    <a:solidFill>
+                      <a:srgbClr val="EDF4EE"/>
+                    </a:solidFill>
+                  </a:tcPr>
+                </a:tc>
+              </a:tr>
+            </a:tbl>
+          </a:graphicData>
+        </a:graphic>
+      </p:graphicFrame>
+      <p:sp>
+        <p:nvSpPr>
+          <p:cNvPr id="10" name="TextBox 9"/>
+          <p:cNvSpPr txBox="1"/>
+          <p:nvPr/>
+        </p:nvSpPr>
+        <p:spPr>
+          <a:xfrm>
+            <a:off x="731520" y="5303520"/>
+            <a:ext cx="10698480" cy="320040"/>
+          </a:xfrm>
+          <a:prstGeom prst="rect">
+            <a:avLst/>
+          </a:prstGeom>
+          <a:noFill/>
+        </p:spPr>
+        <p:txBody>
+          <a:bodyPr wrap="square">
+            <a:spAutoFit/>
+          </a:bodyPr>
+          <a:lstStyle/>
+          <a:p>
+            <a:pPr>
+              <a:defRPr sz="1500" b="1">
+                <a:solidFill>
+                  <a:srgbClr val="167663"/>
+                </a:solidFill>
+                <a:latin typeface="Yu Gothic"/>
+              </a:defRPr>
+            </a:pPr>
+            <a:r>
+              <a:t>総コスト相当＝6.5万円 × 12か月 × 人数（全員が同じ条件の仮定）</a:t>
+            </a:r>
+          </a:p>
+        </p:txBody>
+      </p:sp>
+      <p:sp>
+        <p:nvSpPr>
+          <p:cNvPr id="11" name="TextBox 10"/>
+          <p:cNvSpPr txBox="1"/>
+          <p:nvPr/>
+        </p:nvSpPr>
+        <p:spPr>
+          <a:xfrm>
+            <a:off x="594360" y="6080760"/>
+            <a:ext cx="10789920" cy="548640"/>
+          </a:xfrm>
+          <a:prstGeom prst="rect">
+            <a:avLst/>
+          </a:prstGeom>
+          <a:noFill/>
+        </p:spPr>
+        <p:txBody>
+          <a:bodyPr wrap="square">
+            <a:spAutoFit/>
+          </a:bodyPr>
+          <a:lstStyle/>
+          <a:p>
+            <a:pPr>
+              <a:defRPr sz="1000" b="0">
                 <a:solidFill>
                   <a:srgbClr val="62727B"/>
                 </a:solidFill>
@@ -4572,21 +6547,21 @@
               </a:defRPr>
             </a:pPr>
             <a:r>
-              <a:t>仮定による試算。実際の交通費・人件費ではない。人件費相当は追加の現金支出ではなく、全額が削減できることを示さない。現地作業を含む1日分に移動時間を二重計上しない。</a:t>
-            </a:r>
-          </a:p>
-        </p:txBody>
-      </p:sp>
-      <p:sp>
-        <p:nvSpPr>
-          <p:cNvPr id="9" name="TextBox 8"/>
-          <p:cNvSpPr txBox="1"/>
-          <p:nvPr/>
-        </p:nvSpPr>
-        <p:spPr>
-          <a:xfrm>
-            <a:off x="11018520" y="6446520"/>
-            <a:ext cx="594360" cy="274320"/>
+              <a:t>説明用の仮定。人件費相当は追加の現金支出ではなく、削減額を示さない。1人の直接経費は年間42万円。人数が増えても同条件が成立するとは限らない。</a:t>
+            </a:r>
+          </a:p>
+        </p:txBody>
+      </p:sp>
+      <p:sp>
+        <p:nvSpPr>
+          <p:cNvPr id="12" name="TextBox 11"/>
+          <p:cNvSpPr txBox="1"/>
+          <p:nvPr/>
+        </p:nvSpPr>
+        <p:spPr>
+          <a:xfrm>
+            <a:off x="11201400" y="6446520"/>
+            <a:ext cx="457200" cy="228600"/>
           </a:xfrm>
           <a:prstGeom prst="rect">
             <a:avLst/>
@@ -4647,22 +6622,22 @@
         </p:nvSpPr>
         <p:spPr>
           <a:xfrm>
-            <a:off x="594360" y="320040"/>
-            <a:ext cx="10972800" cy="457200"/>
-          </a:xfrm>
-          <a:prstGeom prst="rect">
-            <a:avLst/>
-          </a:prstGeom>
-          <a:noFill/>
-        </p:spPr>
-        <p:txBody>
-          <a:bodyPr wrap="square">
-            <a:spAutoFit/>
-          </a:bodyPr>
-          <a:lstStyle/>
-          <a:p>
-            <a:pPr>
-              <a:defRPr sz="1200" b="1">
+            <a:off x="594360" y="246888"/>
+            <a:ext cx="10972800" cy="274320"/>
+          </a:xfrm>
+          <a:prstGeom prst="rect">
+            <a:avLst/>
+          </a:prstGeom>
+          <a:noFill/>
+        </p:spPr>
+        <p:txBody>
+          <a:bodyPr wrap="square">
+            <a:spAutoFit/>
+          </a:bodyPr>
+          <a:lstStyle/>
+          <a:p>
+            <a:pPr>
+              <a:defRPr sz="1100" b="1">
                 <a:solidFill>
                   <a:srgbClr val="167663"/>
                 </a:solidFill>
@@ -4670,7 +6645,7 @@
               </a:defRPr>
             </a:pPr>
             <a:r>
-              <a:t>IKS / FIELD DX × CONSTRUCTION NETWORK</a:t>
+              <a:t>IKS / VISUAL BUSINESS PROPOSAL</a:t>
             </a:r>
           </a:p>
         </p:txBody>
@@ -4683,8 +6658,80 @@
         </p:nvSpPr>
         <p:spPr>
           <a:xfrm>
-            <a:off x="594360" y="914400"/>
-            <a:ext cx="10972800" cy="1143000"/>
+            <a:off x="594360" y="731520"/>
+            <a:ext cx="10972800" cy="914400"/>
+          </a:xfrm>
+          <a:prstGeom prst="rect">
+            <a:avLst/>
+          </a:prstGeom>
+          <a:noFill/>
+        </p:spPr>
+        <p:txBody>
+          <a:bodyPr wrap="square">
+            <a:spAutoFit/>
+          </a:bodyPr>
+          <a:lstStyle/>
+          <a:p>
+            <a:pPr>
+              <a:defRPr sz="2600" b="1">
+                <a:solidFill>
+                  <a:srgbClr val="152D39"/>
+                </a:solidFill>
+                <a:latin typeface="Yu Gothic"/>
+              </a:defRPr>
+            </a:pPr>
+            <a:r>
+              <a:t>04｜全国の現場をつなぎ、仕事の可能性を広げる。</a:t>
+            </a:r>
+          </a:p>
+        </p:txBody>
+      </p:sp>
+      <p:sp>
+        <p:nvSpPr>
+          <p:cNvPr id="4" name="TextBox 3"/>
+          <p:cNvSpPr txBox="1"/>
+          <p:nvPr/>
+        </p:nvSpPr>
+        <p:spPr>
+          <a:xfrm>
+            <a:off x="594360" y="1737360"/>
+            <a:ext cx="10972800" cy="502920"/>
+          </a:xfrm>
+          <a:prstGeom prst="rect">
+            <a:avLst/>
+          </a:prstGeom>
+          <a:noFill/>
+        </p:spPr>
+        <p:txBody>
+          <a:bodyPr wrap="square">
+            <a:spAutoFit/>
+          </a:bodyPr>
+          <a:lstStyle/>
+          <a:p>
+            <a:pPr>
+              <a:defRPr sz="1500" b="0">
+                <a:solidFill>
+                  <a:srgbClr val="167663"/>
+                </a:solidFill>
+                <a:latin typeface="Yu Gothic"/>
+              </a:defRPr>
+            </a:pPr>
+            <a:r>
+              <a:t>OUR VISION｜「遠いから対応できない」を「仕事につながる」へ</a:t>
+            </a:r>
+          </a:p>
+        </p:txBody>
+      </p:sp>
+      <p:sp>
+        <p:nvSpPr>
+          <p:cNvPr id="5" name="TextBox 4"/>
+          <p:cNvSpPr txBox="1"/>
+          <p:nvPr/>
+        </p:nvSpPr>
+        <p:spPr>
+          <a:xfrm>
+            <a:off x="731520" y="2514600"/>
+            <a:ext cx="10698480" cy="640080"/>
           </a:xfrm>
           <a:prstGeom prst="rect">
             <a:avLst/>
@@ -4700,41 +6747,235 @@
             <a:pPr>
               <a:defRPr sz="2700" b="1">
                 <a:solidFill>
+                  <a:srgbClr val="167663"/>
+                </a:solidFill>
+                <a:latin typeface="Yu Gothic"/>
+              </a:defRPr>
+            </a:pPr>
+            <a:r>
+              <a:t>「遠いから対応できない」を「仕事につながる」へ。</a:t>
+            </a:r>
+          </a:p>
+        </p:txBody>
+      </p:sp>
+      <p:sp>
+        <p:nvSpPr>
+          <p:cNvPr id="6" name="Rounded Rectangle 5"/>
+          <p:cNvSpPr/>
+          <p:nvPr/>
+        </p:nvSpPr>
+        <p:spPr>
+          <a:xfrm>
+            <a:off x="640080" y="3429000"/>
+            <a:ext cx="5184648" cy="1920240"/>
+          </a:xfrm>
+          <a:prstGeom prst="roundRect">
+            <a:avLst/>
+          </a:prstGeom>
+          <a:solidFill>
+            <a:srgbClr val="EDF4EE"/>
+          </a:solidFill>
+          <a:ln>
+            <a:noFill/>
+          </a:ln>
+        </p:spPr>
+        <p:style>
+          <a:lnRef idx="1">
+            <a:schemeClr val="accent1"/>
+          </a:lnRef>
+          <a:fillRef idx="3">
+            <a:schemeClr val="accent1"/>
+          </a:fillRef>
+          <a:effectRef idx="2">
+            <a:schemeClr val="accent1"/>
+          </a:effectRef>
+          <a:fontRef idx="minor">
+            <a:schemeClr val="lt1"/>
+          </a:fontRef>
+        </p:style>
+        <p:txBody>
+          <a:bodyPr rtlCol="0" anchor="ctr"/>
+          <a:lstStyle/>
+          <a:p>
+            <a:pPr algn="ctr"/>
+          </a:p>
+        </p:txBody>
+      </p:sp>
+      <p:sp>
+        <p:nvSpPr>
+          <p:cNvPr id="7" name="TextBox 6"/>
+          <p:cNvSpPr txBox="1"/>
+          <p:nvPr/>
+        </p:nvSpPr>
+        <p:spPr>
+          <a:xfrm>
+            <a:off x="804671" y="3557016"/>
+            <a:ext cx="4892040" cy="365760"/>
+          </a:xfrm>
+          <a:prstGeom prst="rect">
+            <a:avLst/>
+          </a:prstGeom>
+          <a:noFill/>
+        </p:spPr>
+        <p:txBody>
+          <a:bodyPr wrap="square">
+            <a:spAutoFit/>
+          </a:bodyPr>
+          <a:lstStyle/>
+          <a:p>
+            <a:pPr>
+              <a:defRPr sz="1200" b="0">
+                <a:solidFill>
+                  <a:srgbClr val="167663"/>
+                </a:solidFill>
+                <a:latin typeface="Yu Gothic"/>
+              </a:defRPr>
+            </a:pPr>
+            <a:r>
+              <a:t>将来イメージ</a:t>
+            </a:r>
+          </a:p>
+        </p:txBody>
+      </p:sp>
+      <p:sp>
+        <p:nvSpPr>
+          <p:cNvPr id="8" name="TextBox 7"/>
+          <p:cNvSpPr txBox="1"/>
+          <p:nvPr/>
+        </p:nvSpPr>
+        <p:spPr>
+          <a:xfrm>
+            <a:off x="804671" y="4023360"/>
+            <a:ext cx="4892040" cy="731520"/>
+          </a:xfrm>
+          <a:prstGeom prst="rect">
+            <a:avLst/>
+          </a:prstGeom>
+          <a:noFill/>
+        </p:spPr>
+        <p:txBody>
+          <a:bodyPr wrap="square">
+            <a:spAutoFit/>
+          </a:bodyPr>
+          <a:lstStyle/>
+          <a:p>
+            <a:pPr>
+              <a:defRPr sz="2500" b="1">
+                <a:solidFill>
                   <a:srgbClr val="152D39"/>
                 </a:solidFill>
                 <a:latin typeface="Yu Gothic"/>
               </a:defRPr>
             </a:pPr>
             <a:r>
-              <a:t>04｜全国の現場をつなぎ、仕事の可能性を広げる。</a:t>
-            </a:r>
-          </a:p>
-        </p:txBody>
-      </p:sp>
-      <p:sp>
-        <p:nvSpPr>
-          <p:cNvPr id="4" name="TextBox 3"/>
-          <p:cNvSpPr txBox="1"/>
-          <p:nvPr/>
-        </p:nvSpPr>
-        <p:spPr>
-          <a:xfrm>
-            <a:off x="594360" y="2103120"/>
-            <a:ext cx="10972800" cy="548640"/>
-          </a:xfrm>
-          <a:prstGeom prst="rect">
-            <a:avLst/>
-          </a:prstGeom>
-          <a:noFill/>
-        </p:spPr>
-        <p:txBody>
-          <a:bodyPr wrap="square">
-            <a:spAutoFit/>
-          </a:bodyPr>
-          <a:lstStyle/>
-          <a:p>
-            <a:pPr>
-              <a:defRPr sz="1800" b="1">
+              <a:t>大阪 → 北海道</a:t>
+            </a:r>
+          </a:p>
+        </p:txBody>
+      </p:sp>
+      <p:sp>
+        <p:nvSpPr>
+          <p:cNvPr id="9" name="TextBox 8"/>
+          <p:cNvSpPr txBox="1"/>
+          <p:nvPr/>
+        </p:nvSpPr>
+        <p:spPr>
+          <a:xfrm>
+            <a:off x="804671" y="4846320"/>
+            <a:ext cx="4892040" cy="411480"/>
+          </a:xfrm>
+          <a:prstGeom prst="rect">
+            <a:avLst/>
+          </a:prstGeom>
+          <a:noFill/>
+        </p:spPr>
+        <p:txBody>
+          <a:bodyPr wrap="square">
+            <a:spAutoFit/>
+          </a:bodyPr>
+          <a:lstStyle/>
+          <a:p>
+            <a:pPr>
+              <a:defRPr sz="1300" b="0">
+                <a:solidFill>
+                  <a:srgbClr val="62727B"/>
+                </a:solidFill>
+                <a:latin typeface="Yu Gothic"/>
+              </a:defRPr>
+            </a:pPr>
+            <a:r>
+              <a:t>企業が遠方の現場を受注</a:t>
+            </a:r>
+          </a:p>
+        </p:txBody>
+      </p:sp>
+      <p:sp>
+        <p:nvSpPr>
+          <p:cNvPr id="10" name="Rounded Rectangle 9"/>
+          <p:cNvSpPr/>
+          <p:nvPr/>
+        </p:nvSpPr>
+        <p:spPr>
+          <a:xfrm>
+            <a:off x="5989320" y="3429000"/>
+            <a:ext cx="5184648" cy="1920240"/>
+          </a:xfrm>
+          <a:prstGeom prst="roundRect">
+            <a:avLst/>
+          </a:prstGeom>
+          <a:solidFill>
+            <a:srgbClr val="EDF4EE"/>
+          </a:solidFill>
+          <a:ln>
+            <a:noFill/>
+          </a:ln>
+        </p:spPr>
+        <p:style>
+          <a:lnRef idx="1">
+            <a:schemeClr val="accent1"/>
+          </a:lnRef>
+          <a:fillRef idx="3">
+            <a:schemeClr val="accent1"/>
+          </a:fillRef>
+          <a:effectRef idx="2">
+            <a:schemeClr val="accent1"/>
+          </a:effectRef>
+          <a:fontRef idx="minor">
+            <a:schemeClr val="lt1"/>
+          </a:fontRef>
+        </p:style>
+        <p:txBody>
+          <a:bodyPr rtlCol="0" anchor="ctr"/>
+          <a:lstStyle/>
+          <a:p>
+            <a:pPr algn="ctr"/>
+          </a:p>
+        </p:txBody>
+      </p:sp>
+      <p:sp>
+        <p:nvSpPr>
+          <p:cNvPr id="11" name="TextBox 10"/>
+          <p:cNvSpPr txBox="1"/>
+          <p:nvPr/>
+        </p:nvSpPr>
+        <p:spPr>
+          <a:xfrm>
+            <a:off x="6153912" y="3557016"/>
+            <a:ext cx="4892040" cy="365760"/>
+          </a:xfrm>
+          <a:prstGeom prst="rect">
+            <a:avLst/>
+          </a:prstGeom>
+          <a:noFill/>
+        </p:spPr>
+        <p:txBody>
+          <a:bodyPr wrap="square">
+            <a:spAutoFit/>
+          </a:bodyPr>
+          <a:lstStyle/>
+          <a:p>
+            <a:pPr>
+              <a:defRPr sz="1200" b="0">
                 <a:solidFill>
                   <a:srgbClr val="167663"/>
                 </a:solidFill>
@@ -4742,35 +6983,35 @@
               </a:defRPr>
             </a:pPr>
             <a:r>
-              <a:t>OUR VISION｜「遠いから対応できない」を「仕事につながる」へ</a:t>
-            </a:r>
-          </a:p>
-        </p:txBody>
-      </p:sp>
-      <p:sp>
-        <p:nvSpPr>
-          <p:cNvPr id="5" name="TextBox 4"/>
-          <p:cNvSpPr txBox="1"/>
-          <p:nvPr/>
-        </p:nvSpPr>
-        <p:spPr>
-          <a:xfrm>
-            <a:off x="731520" y="2852928"/>
-            <a:ext cx="10789920" cy="749808"/>
-          </a:xfrm>
-          <a:prstGeom prst="rect">
-            <a:avLst/>
-          </a:prstGeom>
-          <a:noFill/>
-        </p:spPr>
-        <p:txBody>
-          <a:bodyPr wrap="square">
-            <a:spAutoFit/>
-          </a:bodyPr>
-          <a:lstStyle/>
-          <a:p>
-            <a:pPr>
-              <a:defRPr sz="1800" b="0">
+              <a:t>将来イメージ</a:t>
+            </a:r>
+          </a:p>
+        </p:txBody>
+      </p:sp>
+      <p:sp>
+        <p:nvSpPr>
+          <p:cNvPr id="12" name="TextBox 11"/>
+          <p:cNvSpPr txBox="1"/>
+          <p:nvPr/>
+        </p:nvSpPr>
+        <p:spPr>
+          <a:xfrm>
+            <a:off x="6153912" y="4023360"/>
+            <a:ext cx="4892040" cy="731520"/>
+          </a:xfrm>
+          <a:prstGeom prst="rect">
+            <a:avLst/>
+          </a:prstGeom>
+          <a:noFill/>
+        </p:spPr>
+        <p:txBody>
+          <a:bodyPr wrap="square">
+            <a:spAutoFit/>
+          </a:bodyPr>
+          <a:lstStyle/>
+          <a:p>
+            <a:pPr>
+              <a:defRPr sz="2500" b="1">
                 <a:solidFill>
                   <a:srgbClr val="152D39"/>
                 </a:solidFill>
@@ -4778,107 +7019,35 @@
               </a:defRPr>
             </a:pPr>
             <a:r>
-              <a:t>• 企業が、これまで対応が難しかった地域にも事業を展開できる環境。</a:t>
-            </a:r>
-          </a:p>
-        </p:txBody>
-      </p:sp>
-      <p:sp>
-        <p:nvSpPr>
-          <p:cNvPr id="6" name="TextBox 5"/>
-          <p:cNvSpPr txBox="1"/>
-          <p:nvPr/>
-        </p:nvSpPr>
-        <p:spPr>
-          <a:xfrm>
-            <a:off x="731520" y="3657600"/>
-            <a:ext cx="10789920" cy="749808"/>
-          </a:xfrm>
-          <a:prstGeom prst="rect">
-            <a:avLst/>
-          </a:prstGeom>
-          <a:noFill/>
-        </p:spPr>
-        <p:txBody>
-          <a:bodyPr wrap="square">
-            <a:spAutoFit/>
-          </a:bodyPr>
-          <a:lstStyle/>
-          <a:p>
-            <a:pPr>
-              <a:defRPr sz="1800" b="0">
-                <a:solidFill>
-                  <a:srgbClr val="152D39"/>
-                </a:solidFill>
-                <a:latin typeface="Yu Gothic"/>
-              </a:defRPr>
-            </a:pPr>
-            <a:r>
-              <a:t>• 地域の施工会社が、全国の企業から新たな仕事を受けられる環境。</a:t>
-            </a:r>
-          </a:p>
-        </p:txBody>
-      </p:sp>
-      <p:sp>
-        <p:nvSpPr>
-          <p:cNvPr id="7" name="TextBox 6"/>
-          <p:cNvSpPr txBox="1"/>
-          <p:nvPr/>
-        </p:nvSpPr>
-        <p:spPr>
-          <a:xfrm>
-            <a:off x="731520" y="4462272"/>
-            <a:ext cx="10789920" cy="749808"/>
-          </a:xfrm>
-          <a:prstGeom prst="rect">
-            <a:avLst/>
-          </a:prstGeom>
-          <a:noFill/>
-        </p:spPr>
-        <p:txBody>
-          <a:bodyPr wrap="square">
-            <a:spAutoFit/>
-          </a:bodyPr>
-          <a:lstStyle/>
-          <a:p>
-            <a:pPr>
-              <a:defRPr sz="1800" b="0">
-                <a:solidFill>
-                  <a:srgbClr val="152D39"/>
-                </a:solidFill>
-                <a:latin typeface="Yu Gothic"/>
-              </a:defRPr>
-            </a:pPr>
-            <a:r>
-              <a:t>• 大阪の企業が北海道の現場を受注する。福岡の施工会社が東京のメーカーと仕事をする。</a:t>
-            </a:r>
-          </a:p>
-        </p:txBody>
-      </p:sp>
-      <p:sp>
-        <p:nvSpPr>
-          <p:cNvPr id="8" name="TextBox 7"/>
-          <p:cNvSpPr txBox="1"/>
-          <p:nvPr/>
-        </p:nvSpPr>
-        <p:spPr>
-          <a:xfrm>
-            <a:off x="594360" y="5806440"/>
-            <a:ext cx="10789920" cy="594360"/>
-          </a:xfrm>
-          <a:prstGeom prst="rect">
-            <a:avLst/>
-          </a:prstGeom>
-          <a:noFill/>
-        </p:spPr>
-        <p:txBody>
-          <a:bodyPr wrap="square">
-            <a:spAutoFit/>
-          </a:bodyPr>
-          <a:lstStyle/>
-          <a:p>
-            <a:pPr>
-              <a:defRPr sz="1100" b="0">
+              <a:t>福岡 ↔ 東京</a:t>
+            </a:r>
+          </a:p>
+        </p:txBody>
+      </p:sp>
+      <p:sp>
+        <p:nvSpPr>
+          <p:cNvPr id="13" name="TextBox 12"/>
+          <p:cNvSpPr txBox="1"/>
+          <p:nvPr/>
+        </p:nvSpPr>
+        <p:spPr>
+          <a:xfrm>
+            <a:off x="6153912" y="4846320"/>
+            <a:ext cx="4892040" cy="411480"/>
+          </a:xfrm>
+          <a:prstGeom prst="rect">
+            <a:avLst/>
+          </a:prstGeom>
+          <a:noFill/>
+        </p:spPr>
+        <p:txBody>
+          <a:bodyPr wrap="square">
+            <a:spAutoFit/>
+          </a:bodyPr>
+          <a:lstStyle/>
+          <a:p>
+            <a:pPr>
+              <a:defRPr sz="1300" b="0">
                 <a:solidFill>
                   <a:srgbClr val="62727B"/>
                 </a:solidFill>
@@ -4886,6 +7055,42 @@
               </a:defRPr>
             </a:pPr>
             <a:r>
+              <a:t>施工会社とメーカーが取引</a:t>
+            </a:r>
+          </a:p>
+        </p:txBody>
+      </p:sp>
+      <p:sp>
+        <p:nvSpPr>
+          <p:cNvPr id="14" name="TextBox 13"/>
+          <p:cNvSpPr txBox="1"/>
+          <p:nvPr/>
+        </p:nvSpPr>
+        <p:spPr>
+          <a:xfrm>
+            <a:off x="594360" y="6080760"/>
+            <a:ext cx="10789920" cy="548640"/>
+          </a:xfrm>
+          <a:prstGeom prst="rect">
+            <a:avLst/>
+          </a:prstGeom>
+          <a:noFill/>
+        </p:spPr>
+        <p:txBody>
+          <a:bodyPr wrap="square">
+            <a:spAutoFit/>
+          </a:bodyPr>
+          <a:lstStyle/>
+          <a:p>
+            <a:pPr>
+              <a:defRPr sz="1000" b="0">
+                <a:solidFill>
+                  <a:srgbClr val="62727B"/>
+                </a:solidFill>
+                <a:latin typeface="Yu Gothic"/>
+              </a:defRPr>
+            </a:pPr>
+            <a:r>
               <a:t>将来イメージであり、記載地域での対応実績ではない。紹介だけでなく情報共有・業務標準化・品質管理を一体化する構想。</a:t>
             </a:r>
           </a:p>
@@ -4893,14 +7098,14 @@
       </p:sp>
       <p:sp>
         <p:nvSpPr>
-          <p:cNvPr id="9" name="TextBox 8"/>
-          <p:cNvSpPr txBox="1"/>
-          <p:nvPr/>
-        </p:nvSpPr>
-        <p:spPr>
-          <a:xfrm>
-            <a:off x="11018520" y="6446520"/>
-            <a:ext cx="594360" cy="274320"/>
+          <p:cNvPr id="15" name="TextBox 14"/>
+          <p:cNvSpPr txBox="1"/>
+          <p:nvPr/>
+        </p:nvSpPr>
+        <p:spPr>
+          <a:xfrm>
+            <a:off x="11201400" y="6446520"/>
+            <a:ext cx="457200" cy="228600"/>
           </a:xfrm>
           <a:prstGeom prst="rect">
             <a:avLst/>
@@ -4961,22 +7166,22 @@
         </p:nvSpPr>
         <p:spPr>
           <a:xfrm>
-            <a:off x="594360" y="320040"/>
-            <a:ext cx="10972800" cy="457200"/>
-          </a:xfrm>
-          <a:prstGeom prst="rect">
-            <a:avLst/>
-          </a:prstGeom>
-          <a:noFill/>
-        </p:spPr>
-        <p:txBody>
-          <a:bodyPr wrap="square">
-            <a:spAutoFit/>
-          </a:bodyPr>
-          <a:lstStyle/>
-          <a:p>
-            <a:pPr>
-              <a:defRPr sz="1200" b="1">
+            <a:off x="594360" y="246888"/>
+            <a:ext cx="10972800" cy="274320"/>
+          </a:xfrm>
+          <a:prstGeom prst="rect">
+            <a:avLst/>
+          </a:prstGeom>
+          <a:noFill/>
+        </p:spPr>
+        <p:txBody>
+          <a:bodyPr wrap="square">
+            <a:spAutoFit/>
+          </a:bodyPr>
+          <a:lstStyle/>
+          <a:p>
+            <a:pPr>
+              <a:defRPr sz="1100" b="1">
                 <a:solidFill>
                   <a:srgbClr val="167663"/>
                 </a:solidFill>
@@ -4984,7 +7189,7 @@
               </a:defRPr>
             </a:pPr>
             <a:r>
-              <a:t>IKS / FIELD DX × CONSTRUCTION NETWORK</a:t>
+              <a:t>IKS / VISUAL BUSINESS PROPOSAL</a:t>
             </a:r>
           </a:p>
         </p:txBody>
@@ -4997,22 +7202,22 @@
         </p:nvSpPr>
         <p:spPr>
           <a:xfrm>
-            <a:off x="594360" y="914400"/>
-            <a:ext cx="10972800" cy="1143000"/>
-          </a:xfrm>
-          <a:prstGeom prst="rect">
-            <a:avLst/>
-          </a:prstGeom>
-          <a:noFill/>
-        </p:spPr>
-        <p:txBody>
-          <a:bodyPr wrap="square">
-            <a:spAutoFit/>
-          </a:bodyPr>
-          <a:lstStyle/>
-          <a:p>
-            <a:pPr>
-              <a:defRPr sz="2700" b="1">
+            <a:off x="594360" y="731520"/>
+            <a:ext cx="10972800" cy="914400"/>
+          </a:xfrm>
+          <a:prstGeom prst="rect">
+            <a:avLst/>
+          </a:prstGeom>
+          <a:noFill/>
+        </p:spPr>
+        <p:txBody>
+          <a:bodyPr wrap="square">
+            <a:spAutoFit/>
+          </a:bodyPr>
+          <a:lstStyle/>
+          <a:p>
+            <a:pPr>
+              <a:defRPr sz="2600" b="1">
                 <a:solidFill>
                   <a:srgbClr val="152D39"/>
                 </a:solidFill>
@@ -5033,22 +7238,22 @@
         </p:nvSpPr>
         <p:spPr>
           <a:xfrm>
-            <a:off x="594360" y="2103120"/>
-            <a:ext cx="10972800" cy="548640"/>
-          </a:xfrm>
-          <a:prstGeom prst="rect">
-            <a:avLst/>
-          </a:prstGeom>
-          <a:noFill/>
-        </p:spPr>
-        <p:txBody>
-          <a:bodyPr wrap="square">
-            <a:spAutoFit/>
-          </a:bodyPr>
-          <a:lstStyle/>
-          <a:p>
-            <a:pPr>
-              <a:defRPr sz="1800" b="1">
+            <a:off x="594360" y="1737360"/>
+            <a:ext cx="10972800" cy="502920"/>
+          </a:xfrm>
+          <a:prstGeom prst="rect">
+            <a:avLst/>
+          </a:prstGeom>
+          <a:noFill/>
+        </p:spPr>
+        <p:txBody>
+          <a:bodyPr wrap="square">
+            <a:spAutoFit/>
+          </a:bodyPr>
+          <a:lstStyle/>
+          <a:p>
+            <a:pPr>
+              <a:defRPr sz="1500" b="0">
                 <a:solidFill>
                   <a:srgbClr val="167663"/>
                 </a:solidFill>
@@ -5063,73 +7268,87 @@
       </p:sp>
       <p:sp>
         <p:nvSpPr>
-          <p:cNvPr id="5" name="TextBox 4"/>
-          <p:cNvSpPr txBox="1"/>
-          <p:nvPr/>
-        </p:nvSpPr>
-        <p:spPr>
-          <a:xfrm>
-            <a:off x="731520" y="2852928"/>
-            <a:ext cx="10789920" cy="749808"/>
-          </a:xfrm>
-          <a:prstGeom prst="rect">
-            <a:avLst/>
-          </a:prstGeom>
-          <a:noFill/>
-        </p:spPr>
-        <p:txBody>
-          <a:bodyPr wrap="square">
-            <a:spAutoFit/>
-          </a:bodyPr>
-          <a:lstStyle/>
-          <a:p>
-            <a:pPr>
-              <a:defRPr sz="1800" b="0">
-                <a:solidFill>
-                  <a:srgbClr val="152D39"/>
-                </a:solidFill>
-                <a:latin typeface="Yu Gothic"/>
-              </a:defRPr>
-            </a:pPr>
-            <a:r>
-              <a:t>• 現場DX：現場調査・写真・安全書類・施工管理・情報共有。</a:t>
-            </a:r>
-          </a:p>
-        </p:txBody>
-      </p:sp>
-      <p:sp>
-        <p:nvSpPr>
-          <p:cNvPr id="6" name="TextBox 5"/>
-          <p:cNvSpPr txBox="1"/>
-          <p:nvPr/>
-        </p:nvSpPr>
-        <p:spPr>
-          <a:xfrm>
-            <a:off x="731520" y="3657600"/>
-            <a:ext cx="10789920" cy="749808"/>
-          </a:xfrm>
-          <a:prstGeom prst="rect">
-            <a:avLst/>
-          </a:prstGeom>
-          <a:noFill/>
-        </p:spPr>
-        <p:txBody>
-          <a:bodyPr wrap="square">
-            <a:spAutoFit/>
-          </a:bodyPr>
-          <a:lstStyle/>
-          <a:p>
-            <a:pPr>
-              <a:defRPr sz="1800" b="0">
-                <a:solidFill>
-                  <a:srgbClr val="152D39"/>
-                </a:solidFill>
-                <a:latin typeface="Yu Gothic"/>
-              </a:defRPr>
-            </a:pPr>
-            <a:r>
-              <a:t>• 全国施工ネットワーク：地域の施工会社・技術者・メーカー・商社。</a:t>
-            </a:r>
+          <p:cNvPr id="5" name="Rounded Rectangle 4"/>
+          <p:cNvSpPr/>
+          <p:nvPr/>
+        </p:nvSpPr>
+        <p:spPr>
+          <a:xfrm>
+            <a:off x="731520" y="2468880"/>
+            <a:ext cx="5029200" cy="1645920"/>
+          </a:xfrm>
+          <a:prstGeom prst="roundRect">
+            <a:avLst/>
+          </a:prstGeom>
+          <a:solidFill>
+            <a:srgbClr val="EDF4EE"/>
+          </a:solidFill>
+          <a:ln>
+            <a:noFill/>
+          </a:ln>
+        </p:spPr>
+        <p:style>
+          <a:lnRef idx="1">
+            <a:schemeClr val="accent1"/>
+          </a:lnRef>
+          <a:fillRef idx="3">
+            <a:schemeClr val="accent1"/>
+          </a:fillRef>
+          <a:effectRef idx="2">
+            <a:schemeClr val="accent1"/>
+          </a:effectRef>
+          <a:fontRef idx="minor">
+            <a:schemeClr val="lt1"/>
+          </a:fontRef>
+        </p:style>
+        <p:txBody>
+          <a:bodyPr rtlCol="0" anchor="ctr"/>
+          <a:lstStyle/>
+          <a:p>
+            <a:pPr algn="ctr"/>
+          </a:p>
+        </p:txBody>
+      </p:sp>
+      <p:sp>
+        <p:nvSpPr>
+          <p:cNvPr id="6" name="Rounded Rectangle 5"/>
+          <p:cNvSpPr/>
+          <p:nvPr/>
+        </p:nvSpPr>
+        <p:spPr>
+          <a:xfrm>
+            <a:off x="6400800" y="2468880"/>
+            <a:ext cx="5029200" cy="1645920"/>
+          </a:xfrm>
+          <a:prstGeom prst="roundRect">
+            <a:avLst/>
+          </a:prstGeom>
+          <a:solidFill>
+            <a:srgbClr val="EDF4EE"/>
+          </a:solidFill>
+          <a:ln>
+            <a:noFill/>
+          </a:ln>
+        </p:spPr>
+        <p:style>
+          <a:lnRef idx="1">
+            <a:schemeClr val="accent1"/>
+          </a:lnRef>
+          <a:fillRef idx="3">
+            <a:schemeClr val="accent1"/>
+          </a:fillRef>
+          <a:effectRef idx="2">
+            <a:schemeClr val="accent1"/>
+          </a:effectRef>
+          <a:fontRef idx="minor">
+            <a:schemeClr val="lt1"/>
+          </a:fontRef>
+        </p:style>
+        <p:txBody>
+          <a:bodyPr rtlCol="0" anchor="ctr"/>
+          <a:lstStyle/>
+          <a:p>
+            <a:pPr algn="ctr"/>
           </a:p>
         </p:txBody>
       </p:sp>
@@ -5141,30 +7360,30 @@
         </p:nvSpPr>
         <p:spPr>
           <a:xfrm>
-            <a:off x="731520" y="4462272"/>
-            <a:ext cx="10789920" cy="749808"/>
-          </a:xfrm>
-          <a:prstGeom prst="rect">
-            <a:avLst/>
-          </a:prstGeom>
-          <a:noFill/>
-        </p:spPr>
-        <p:txBody>
-          <a:bodyPr wrap="square">
-            <a:spAutoFit/>
-          </a:bodyPr>
-          <a:lstStyle/>
-          <a:p>
-            <a:pPr>
-              <a:defRPr sz="1800" b="0">
-                <a:solidFill>
-                  <a:srgbClr val="152D39"/>
-                </a:solidFill>
-                <a:latin typeface="Yu Gothic"/>
-              </a:defRPr>
-            </a:pPr>
-            <a:r>
-              <a:t>• 想定する流れ：案件依頼 → 現地対応 → 情報共有 → 遠隔確認 → 施工・管理。</a:t>
+            <a:off x="1005840" y="2697480"/>
+            <a:ext cx="4480560" cy="502920"/>
+          </a:xfrm>
+          <a:prstGeom prst="rect">
+            <a:avLst/>
+          </a:prstGeom>
+          <a:noFill/>
+        </p:spPr>
+        <p:txBody>
+          <a:bodyPr wrap="square">
+            <a:spAutoFit/>
+          </a:bodyPr>
+          <a:lstStyle/>
+          <a:p>
+            <a:pPr>
+              <a:defRPr sz="2800" b="1">
+                <a:solidFill>
+                  <a:srgbClr val="167663"/>
+                </a:solidFill>
+                <a:latin typeface="Yu Gothic"/>
+              </a:defRPr>
+            </a:pPr>
+            <a:r>
+              <a:t>現場DX</a:t>
             </a:r>
           </a:p>
         </p:txBody>
@@ -5177,22 +7396,22 @@
         </p:nvSpPr>
         <p:spPr>
           <a:xfrm>
-            <a:off x="594360" y="5806440"/>
-            <a:ext cx="10789920" cy="594360"/>
-          </a:xfrm>
-          <a:prstGeom prst="rect">
-            <a:avLst/>
-          </a:prstGeom>
-          <a:noFill/>
-        </p:spPr>
-        <p:txBody>
-          <a:bodyPr wrap="square">
-            <a:spAutoFit/>
-          </a:bodyPr>
-          <a:lstStyle/>
-          <a:p>
-            <a:pPr>
-              <a:defRPr sz="1100" b="0">
+            <a:off x="1005840" y="3337560"/>
+            <a:ext cx="4480560" cy="502920"/>
+          </a:xfrm>
+          <a:prstGeom prst="rect">
+            <a:avLst/>
+          </a:prstGeom>
+          <a:noFill/>
+        </p:spPr>
+        <p:txBody>
+          <a:bodyPr wrap="square">
+            <a:spAutoFit/>
+          </a:bodyPr>
+          <a:lstStyle/>
+          <a:p>
+            <a:pPr>
+              <a:defRPr sz="1500" b="0">
                 <a:solidFill>
                   <a:srgbClr val="62727B"/>
                 </a:solidFill>
@@ -5200,6 +7419,265 @@
               </a:defRPr>
             </a:pPr>
             <a:r>
+              <a:t>調査・写真・安全書類・施工管理</a:t>
+            </a:r>
+          </a:p>
+        </p:txBody>
+      </p:sp>
+      <p:sp>
+        <p:nvSpPr>
+          <p:cNvPr id="9" name="TextBox 8"/>
+          <p:cNvSpPr txBox="1"/>
+          <p:nvPr/>
+        </p:nvSpPr>
+        <p:spPr>
+          <a:xfrm>
+            <a:off x="6675120" y="2697480"/>
+            <a:ext cx="4480560" cy="502920"/>
+          </a:xfrm>
+          <a:prstGeom prst="rect">
+            <a:avLst/>
+          </a:prstGeom>
+          <a:noFill/>
+        </p:spPr>
+        <p:txBody>
+          <a:bodyPr wrap="square">
+            <a:spAutoFit/>
+          </a:bodyPr>
+          <a:lstStyle/>
+          <a:p>
+            <a:pPr>
+              <a:defRPr sz="2500" b="1">
+                <a:solidFill>
+                  <a:srgbClr val="167663"/>
+                </a:solidFill>
+                <a:latin typeface="Yu Gothic"/>
+              </a:defRPr>
+            </a:pPr>
+            <a:r>
+              <a:t>全国施工ネットワーク</a:t>
+            </a:r>
+          </a:p>
+        </p:txBody>
+      </p:sp>
+      <p:sp>
+        <p:nvSpPr>
+          <p:cNvPr id="10" name="TextBox 9"/>
+          <p:cNvSpPr txBox="1"/>
+          <p:nvPr/>
+        </p:nvSpPr>
+        <p:spPr>
+          <a:xfrm>
+            <a:off x="6675120" y="3337560"/>
+            <a:ext cx="4480560" cy="502920"/>
+          </a:xfrm>
+          <a:prstGeom prst="rect">
+            <a:avLst/>
+          </a:prstGeom>
+          <a:noFill/>
+        </p:spPr>
+        <p:txBody>
+          <a:bodyPr wrap="square">
+            <a:spAutoFit/>
+          </a:bodyPr>
+          <a:lstStyle/>
+          <a:p>
+            <a:pPr>
+              <a:defRPr sz="1500" b="0">
+                <a:solidFill>
+                  <a:srgbClr val="62727B"/>
+                </a:solidFill>
+                <a:latin typeface="Yu Gothic"/>
+              </a:defRPr>
+            </a:pPr>
+            <a:r>
+              <a:t>地域の施工会社・技術者・企業</a:t>
+            </a:r>
+          </a:p>
+        </p:txBody>
+      </p:sp>
+      <p:sp>
+        <p:nvSpPr>
+          <p:cNvPr id="11" name="TextBox 10"/>
+          <p:cNvSpPr txBox="1"/>
+          <p:nvPr/>
+        </p:nvSpPr>
+        <p:spPr>
+          <a:xfrm>
+            <a:off x="5760720" y="2834640"/>
+            <a:ext cx="640080" cy="548640"/>
+          </a:xfrm>
+          <a:prstGeom prst="rect">
+            <a:avLst/>
+          </a:prstGeom>
+          <a:noFill/>
+        </p:spPr>
+        <p:txBody>
+          <a:bodyPr wrap="square">
+            <a:spAutoFit/>
+          </a:bodyPr>
+          <a:lstStyle/>
+          <a:p>
+            <a:pPr>
+              <a:defRPr sz="3200" b="1">
+                <a:solidFill>
+                  <a:srgbClr val="167663"/>
+                </a:solidFill>
+                <a:latin typeface="Yu Gothic"/>
+              </a:defRPr>
+            </a:pPr>
+            <a:r>
+              <a:t>×</a:t>
+            </a:r>
+          </a:p>
+        </p:txBody>
+      </p:sp>
+      <p:sp>
+        <p:nvSpPr>
+          <p:cNvPr id="12" name="TextBox 11"/>
+          <p:cNvSpPr txBox="1"/>
+          <p:nvPr/>
+        </p:nvSpPr>
+        <p:spPr>
+          <a:xfrm>
+            <a:off x="5623560" y="4160520"/>
+            <a:ext cx="914400" cy="457200"/>
+          </a:xfrm>
+          <a:prstGeom prst="rect">
+            <a:avLst/>
+          </a:prstGeom>
+          <a:noFill/>
+        </p:spPr>
+        <p:txBody>
+          <a:bodyPr wrap="square">
+            <a:spAutoFit/>
+          </a:bodyPr>
+          <a:lstStyle/>
+          <a:p>
+            <a:pPr>
+              <a:defRPr sz="2800" b="0">
+                <a:solidFill>
+                  <a:srgbClr val="167663"/>
+                </a:solidFill>
+                <a:latin typeface="Yu Gothic"/>
+              </a:defRPr>
+            </a:pPr>
+            <a:r>
+              <a:t>↓</a:t>
+            </a:r>
+          </a:p>
+        </p:txBody>
+      </p:sp>
+      <p:sp>
+        <p:nvSpPr>
+          <p:cNvPr id="13" name="Rounded Rectangle 12"/>
+          <p:cNvSpPr/>
+          <p:nvPr/>
+        </p:nvSpPr>
+        <p:spPr>
+          <a:xfrm>
+            <a:off x="731520" y="4663440"/>
+            <a:ext cx="10698480" cy="777240"/>
+          </a:xfrm>
+          <a:prstGeom prst="roundRect">
+            <a:avLst/>
+          </a:prstGeom>
+          <a:solidFill>
+            <a:srgbClr val="167663"/>
+          </a:solidFill>
+          <a:ln>
+            <a:noFill/>
+          </a:ln>
+        </p:spPr>
+        <p:style>
+          <a:lnRef idx="1">
+            <a:schemeClr val="accent1"/>
+          </a:lnRef>
+          <a:fillRef idx="3">
+            <a:schemeClr val="accent1"/>
+          </a:fillRef>
+          <a:effectRef idx="2">
+            <a:schemeClr val="accent1"/>
+          </a:effectRef>
+          <a:fontRef idx="minor">
+            <a:schemeClr val="lt1"/>
+          </a:fontRef>
+        </p:style>
+        <p:txBody>
+          <a:bodyPr rtlCol="0" anchor="ctr"/>
+          <a:lstStyle/>
+          <a:p>
+            <a:pPr algn="ctr"/>
+          </a:p>
+        </p:txBody>
+      </p:sp>
+      <p:sp>
+        <p:nvSpPr>
+          <p:cNvPr id="14" name="TextBox 13"/>
+          <p:cNvSpPr txBox="1"/>
+          <p:nvPr/>
+        </p:nvSpPr>
+        <p:spPr>
+          <a:xfrm>
+            <a:off x="914400" y="4828032"/>
+            <a:ext cx="10332720" cy="411480"/>
+          </a:xfrm>
+          <a:prstGeom prst="rect">
+            <a:avLst/>
+          </a:prstGeom>
+          <a:noFill/>
+        </p:spPr>
+        <p:txBody>
+          <a:bodyPr wrap="square">
+            <a:spAutoFit/>
+          </a:bodyPr>
+          <a:lstStyle/>
+          <a:p>
+            <a:pPr>
+              <a:defRPr sz="2400" b="1">
+                <a:solidFill>
+                  <a:srgbClr val="FFFFFF"/>
+                </a:solidFill>
+                <a:latin typeface="Yu Gothic"/>
+              </a:defRPr>
+            </a:pPr>
+            <a:r>
+              <a:t>全国で仕事を受け、全国で対応できる仕組みへ</a:t>
+            </a:r>
+          </a:p>
+        </p:txBody>
+      </p:sp>
+      <p:sp>
+        <p:nvSpPr>
+          <p:cNvPr id="15" name="TextBox 14"/>
+          <p:cNvSpPr txBox="1"/>
+          <p:nvPr/>
+        </p:nvSpPr>
+        <p:spPr>
+          <a:xfrm>
+            <a:off x="594360" y="6080760"/>
+            <a:ext cx="10789920" cy="548640"/>
+          </a:xfrm>
+          <a:prstGeom prst="rect">
+            <a:avLst/>
+          </a:prstGeom>
+          <a:noFill/>
+        </p:spPr>
+        <p:txBody>
+          <a:bodyPr wrap="square">
+            <a:spAutoFit/>
+          </a:bodyPr>
+          <a:lstStyle/>
+          <a:p>
+            <a:pPr>
+              <a:defRPr sz="1000" b="0">
+                <a:solidFill>
+                  <a:srgbClr val="62727B"/>
+                </a:solidFill>
+                <a:latin typeface="Yu Gothic"/>
+              </a:defRPr>
+            </a:pPr>
+            <a:r>
               <a:t>情報・人・技術・仕事をつなぐ共通基盤を段階的に構築する。対応地域・体制・各機能は実証を通じて整備。</a:t>
             </a:r>
           </a:p>
@@ -5207,14 +7685,14 @@
       </p:sp>
       <p:sp>
         <p:nvSpPr>
-          <p:cNvPr id="9" name="TextBox 8"/>
-          <p:cNvSpPr txBox="1"/>
-          <p:nvPr/>
-        </p:nvSpPr>
-        <p:spPr>
-          <a:xfrm>
-            <a:off x="11018520" y="6446520"/>
-            <a:ext cx="594360" cy="274320"/>
+          <p:cNvPr id="16" name="TextBox 15"/>
+          <p:cNvSpPr txBox="1"/>
+          <p:nvPr/>
+        </p:nvSpPr>
+        <p:spPr>
+          <a:xfrm>
+            <a:off x="11201400" y="6446520"/>
+            <a:ext cx="457200" cy="228600"/>
           </a:xfrm>
           <a:prstGeom prst="rect">
             <a:avLst/>
@@ -5275,22 +7753,22 @@
         </p:nvSpPr>
         <p:spPr>
           <a:xfrm>
-            <a:off x="594360" y="320040"/>
-            <a:ext cx="10972800" cy="457200"/>
-          </a:xfrm>
-          <a:prstGeom prst="rect">
-            <a:avLst/>
-          </a:prstGeom>
-          <a:noFill/>
-        </p:spPr>
-        <p:txBody>
-          <a:bodyPr wrap="square">
-            <a:spAutoFit/>
-          </a:bodyPr>
-          <a:lstStyle/>
-          <a:p>
-            <a:pPr>
-              <a:defRPr sz="1200" b="1">
+            <a:off x="594360" y="246888"/>
+            <a:ext cx="10972800" cy="274320"/>
+          </a:xfrm>
+          <a:prstGeom prst="rect">
+            <a:avLst/>
+          </a:prstGeom>
+          <a:noFill/>
+        </p:spPr>
+        <p:txBody>
+          <a:bodyPr wrap="square">
+            <a:spAutoFit/>
+          </a:bodyPr>
+          <a:lstStyle/>
+          <a:p>
+            <a:pPr>
+              <a:defRPr sz="1100" b="1">
                 <a:solidFill>
                   <a:srgbClr val="167663"/>
                 </a:solidFill>
@@ -5298,7 +7776,7 @@
               </a:defRPr>
             </a:pPr>
             <a:r>
-              <a:t>IKS / FIELD DX × CONSTRUCTION NETWORK</a:t>
+              <a:t>IKS / VISUAL BUSINESS PROPOSAL</a:t>
             </a:r>
           </a:p>
         </p:txBody>
@@ -5311,22 +7789,22 @@
         </p:nvSpPr>
         <p:spPr>
           <a:xfrm>
-            <a:off x="594360" y="914400"/>
-            <a:ext cx="10972800" cy="1143000"/>
-          </a:xfrm>
-          <a:prstGeom prst="rect">
-            <a:avLst/>
-          </a:prstGeom>
-          <a:noFill/>
-        </p:spPr>
-        <p:txBody>
-          <a:bodyPr wrap="square">
-            <a:spAutoFit/>
-          </a:bodyPr>
-          <a:lstStyle/>
-          <a:p>
-            <a:pPr>
-              <a:defRPr sz="2700" b="1">
+            <a:off x="594360" y="731520"/>
+            <a:ext cx="10972800" cy="914400"/>
+          </a:xfrm>
+          <a:prstGeom prst="rect">
+            <a:avLst/>
+          </a:prstGeom>
+          <a:noFill/>
+        </p:spPr>
+        <p:txBody>
+          <a:bodyPr wrap="square">
+            <a:spAutoFit/>
+          </a:bodyPr>
+          <a:lstStyle/>
+          <a:p>
+            <a:pPr>
+              <a:defRPr sz="2600" b="1">
                 <a:solidFill>
                   <a:srgbClr val="152D39"/>
                 </a:solidFill>
@@ -5347,22 +7825,22 @@
         </p:nvSpPr>
         <p:spPr>
           <a:xfrm>
-            <a:off x="594360" y="2103120"/>
-            <a:ext cx="10972800" cy="548640"/>
-          </a:xfrm>
-          <a:prstGeom prst="rect">
-            <a:avLst/>
-          </a:prstGeom>
-          <a:noFill/>
-        </p:spPr>
-        <p:txBody>
-          <a:bodyPr wrap="square">
-            <a:spAutoFit/>
-          </a:bodyPr>
-          <a:lstStyle/>
-          <a:p>
-            <a:pPr>
-              <a:defRPr sz="1800" b="1">
+            <a:off x="594360" y="1737360"/>
+            <a:ext cx="10972800" cy="502920"/>
+          </a:xfrm>
+          <a:prstGeom prst="rect">
+            <a:avLst/>
+          </a:prstGeom>
+          <a:noFill/>
+        </p:spPr>
+        <p:txBody>
+          <a:bodyPr wrap="square">
+            <a:spAutoFit/>
+          </a:bodyPr>
+          <a:lstStyle/>
+          <a:p>
+            <a:pPr>
+              <a:defRPr sz="1500" b="0">
                 <a:solidFill>
                   <a:srgbClr val="167663"/>
                 </a:solidFill>
@@ -5377,28 +7855,71 @@
       </p:sp>
       <p:sp>
         <p:nvSpPr>
-          <p:cNvPr id="5" name="TextBox 4"/>
-          <p:cNvSpPr txBox="1"/>
-          <p:nvPr/>
-        </p:nvSpPr>
-        <p:spPr>
-          <a:xfrm>
-            <a:off x="731520" y="2852928"/>
-            <a:ext cx="10789920" cy="749808"/>
-          </a:xfrm>
-          <a:prstGeom prst="rect">
-            <a:avLst/>
-          </a:prstGeom>
-          <a:noFill/>
-        </p:spPr>
-        <p:txBody>
-          <a:bodyPr wrap="square">
-            <a:spAutoFit/>
-          </a:bodyPr>
-          <a:lstStyle/>
-          <a:p>
-            <a:pPr>
-              <a:defRPr sz="1800" b="0">
+          <p:cNvPr id="5" name="Rounded Rectangle 4"/>
+          <p:cNvSpPr/>
+          <p:nvPr/>
+        </p:nvSpPr>
+        <p:spPr>
+          <a:xfrm>
+            <a:off x="731520" y="2423160"/>
+            <a:ext cx="594360" cy="594360"/>
+          </a:xfrm>
+          <a:prstGeom prst="roundRect">
+            <a:avLst/>
+          </a:prstGeom>
+          <a:solidFill>
+            <a:srgbClr val="167663"/>
+          </a:solidFill>
+          <a:ln>
+            <a:noFill/>
+          </a:ln>
+        </p:spPr>
+        <p:style>
+          <a:lnRef idx="1">
+            <a:schemeClr val="accent1"/>
+          </a:lnRef>
+          <a:fillRef idx="3">
+            <a:schemeClr val="accent1"/>
+          </a:fillRef>
+          <a:effectRef idx="2">
+            <a:schemeClr val="accent1"/>
+          </a:effectRef>
+          <a:fontRef idx="minor">
+            <a:schemeClr val="lt1"/>
+          </a:fontRef>
+        </p:style>
+        <p:txBody>
+          <a:bodyPr rtlCol="0" anchor="ctr"/>
+          <a:lstStyle/>
+          <a:p>
+            <a:pPr algn="ctr"/>
+          </a:p>
+        </p:txBody>
+      </p:sp>
+      <p:sp>
+        <p:nvSpPr>
+          <p:cNvPr id="6" name="TextBox 5"/>
+          <p:cNvSpPr txBox="1"/>
+          <p:nvPr/>
+        </p:nvSpPr>
+        <p:spPr>
+          <a:xfrm>
+            <a:off x="1554480" y="2377440"/>
+            <a:ext cx="9692640" cy="365760"/>
+          </a:xfrm>
+          <a:prstGeom prst="rect">
+            <a:avLst/>
+          </a:prstGeom>
+          <a:noFill/>
+        </p:spPr>
+        <p:txBody>
+          <a:bodyPr wrap="square">
+            <a:spAutoFit/>
+          </a:bodyPr>
+          <a:lstStyle/>
+          <a:p>
+            <a:pPr>
+              <a:defRPr sz="2100" b="1">
                 <a:solidFill>
                   <a:srgbClr val="152D39"/>
                 </a:solidFill>
@@ -5406,35 +7927,114 @@
               </a:defRPr>
             </a:pPr>
             <a:r>
-              <a:t>• メーカー・商社・発注企業：遠隔地の現場対応力を高め、営業エリア拡大と受注機会の創出を目指す。</a:t>
-            </a:r>
-          </a:p>
-        </p:txBody>
-      </p:sp>
-      <p:sp>
-        <p:nvSpPr>
-          <p:cNvPr id="6" name="TextBox 5"/>
-          <p:cNvSpPr txBox="1"/>
-          <p:nvPr/>
-        </p:nvSpPr>
-        <p:spPr>
-          <a:xfrm>
-            <a:off x="731520" y="3657600"/>
-            <a:ext cx="10789920" cy="749808"/>
-          </a:xfrm>
-          <a:prstGeom prst="rect">
-            <a:avLst/>
-          </a:prstGeom>
-          <a:noFill/>
-        </p:spPr>
-        <p:txBody>
-          <a:bodyPr wrap="square">
-            <a:spAutoFit/>
-          </a:bodyPr>
-          <a:lstStyle/>
-          <a:p>
-            <a:pPr>
-              <a:defRPr sz="1800" b="0">
+              <a:t>メーカー・商社・発注企業</a:t>
+            </a:r>
+          </a:p>
+        </p:txBody>
+      </p:sp>
+      <p:sp>
+        <p:nvSpPr>
+          <p:cNvPr id="7" name="TextBox 6"/>
+          <p:cNvSpPr txBox="1"/>
+          <p:nvPr/>
+        </p:nvSpPr>
+        <p:spPr>
+          <a:xfrm>
+            <a:off x="1554480" y="2834640"/>
+            <a:ext cx="9692640" cy="457200"/>
+          </a:xfrm>
+          <a:prstGeom prst="rect">
+            <a:avLst/>
+          </a:prstGeom>
+          <a:noFill/>
+        </p:spPr>
+        <p:txBody>
+          <a:bodyPr wrap="square">
+            <a:spAutoFit/>
+          </a:bodyPr>
+          <a:lstStyle/>
+          <a:p>
+            <a:pPr>
+              <a:defRPr sz="1600" b="0">
+                <a:solidFill>
+                  <a:srgbClr val="62727B"/>
+                </a:solidFill>
+                <a:latin typeface="Yu Gothic"/>
+              </a:defRPr>
+            </a:pPr>
+            <a:r>
+              <a:t>遠隔地への対応力を高め、営業エリア・受注機会を広げる。</a:t>
+            </a:r>
+          </a:p>
+        </p:txBody>
+      </p:sp>
+      <p:sp>
+        <p:nvSpPr>
+          <p:cNvPr id="8" name="Rounded Rectangle 7"/>
+          <p:cNvSpPr/>
+          <p:nvPr/>
+        </p:nvSpPr>
+        <p:spPr>
+          <a:xfrm>
+            <a:off x="731520" y="3447288"/>
+            <a:ext cx="594360" cy="594360"/>
+          </a:xfrm>
+          <a:prstGeom prst="roundRect">
+            <a:avLst/>
+          </a:prstGeom>
+          <a:solidFill>
+            <a:srgbClr val="167663"/>
+          </a:solidFill>
+          <a:ln>
+            <a:noFill/>
+          </a:ln>
+        </p:spPr>
+        <p:style>
+          <a:lnRef idx="1">
+            <a:schemeClr val="accent1"/>
+          </a:lnRef>
+          <a:fillRef idx="3">
+            <a:schemeClr val="accent1"/>
+          </a:fillRef>
+          <a:effectRef idx="2">
+            <a:schemeClr val="accent1"/>
+          </a:effectRef>
+          <a:fontRef idx="minor">
+            <a:schemeClr val="lt1"/>
+          </a:fontRef>
+        </p:style>
+        <p:txBody>
+          <a:bodyPr rtlCol="0" anchor="ctr"/>
+          <a:lstStyle/>
+          <a:p>
+            <a:pPr algn="ctr"/>
+          </a:p>
+        </p:txBody>
+      </p:sp>
+      <p:sp>
+        <p:nvSpPr>
+          <p:cNvPr id="9" name="TextBox 8"/>
+          <p:cNvSpPr txBox="1"/>
+          <p:nvPr/>
+        </p:nvSpPr>
+        <p:spPr>
+          <a:xfrm>
+            <a:off x="1554480" y="3401568"/>
+            <a:ext cx="9692640" cy="365760"/>
+          </a:xfrm>
+          <a:prstGeom prst="rect">
+            <a:avLst/>
+          </a:prstGeom>
+          <a:noFill/>
+        </p:spPr>
+        <p:txBody>
+          <a:bodyPr wrap="square">
+            <a:spAutoFit/>
+          </a:bodyPr>
+          <a:lstStyle/>
+          <a:p>
+            <a:pPr>
+              <a:defRPr sz="2100" b="1">
                 <a:solidFill>
                   <a:srgbClr val="152D39"/>
                 </a:solidFill>
@@ -5442,35 +8042,114 @@
               </a:defRPr>
             </a:pPr>
             <a:r>
-              <a:t>• 地域の施工会社：全国の企業とつながり、新たな案件・継続的な取引機会を目指す。</a:t>
-            </a:r>
-          </a:p>
-        </p:txBody>
-      </p:sp>
-      <p:sp>
-        <p:nvSpPr>
-          <p:cNvPr id="7" name="TextBox 6"/>
-          <p:cNvSpPr txBox="1"/>
-          <p:nvPr/>
-        </p:nvSpPr>
-        <p:spPr>
-          <a:xfrm>
-            <a:off x="731520" y="4462272"/>
-            <a:ext cx="10789920" cy="749808"/>
-          </a:xfrm>
-          <a:prstGeom prst="rect">
-            <a:avLst/>
-          </a:prstGeom>
-          <a:noFill/>
-        </p:spPr>
-        <p:txBody>
-          <a:bodyPr wrap="square">
-            <a:spAutoFit/>
-          </a:bodyPr>
-          <a:lstStyle/>
-          <a:p>
-            <a:pPr>
-              <a:defRPr sz="1800" b="0">
+              <a:t>地域の施工会社</a:t>
+            </a:r>
+          </a:p>
+        </p:txBody>
+      </p:sp>
+      <p:sp>
+        <p:nvSpPr>
+          <p:cNvPr id="10" name="TextBox 9"/>
+          <p:cNvSpPr txBox="1"/>
+          <p:nvPr/>
+        </p:nvSpPr>
+        <p:spPr>
+          <a:xfrm>
+            <a:off x="1554480" y="3858768"/>
+            <a:ext cx="9692640" cy="457200"/>
+          </a:xfrm>
+          <a:prstGeom prst="rect">
+            <a:avLst/>
+          </a:prstGeom>
+          <a:noFill/>
+        </p:spPr>
+        <p:txBody>
+          <a:bodyPr wrap="square">
+            <a:spAutoFit/>
+          </a:bodyPr>
+          <a:lstStyle/>
+          <a:p>
+            <a:pPr>
+              <a:defRPr sz="1600" b="0">
+                <a:solidFill>
+                  <a:srgbClr val="62727B"/>
+                </a:solidFill>
+                <a:latin typeface="Yu Gothic"/>
+              </a:defRPr>
+            </a:pPr>
+            <a:r>
+              <a:t>全国の企業とつながり、新たな案件・継続的な取引を目指す。</a:t>
+            </a:r>
+          </a:p>
+        </p:txBody>
+      </p:sp>
+      <p:sp>
+        <p:nvSpPr>
+          <p:cNvPr id="11" name="Rounded Rectangle 10"/>
+          <p:cNvSpPr/>
+          <p:nvPr/>
+        </p:nvSpPr>
+        <p:spPr>
+          <a:xfrm>
+            <a:off x="731520" y="4471416"/>
+            <a:ext cx="594360" cy="594360"/>
+          </a:xfrm>
+          <a:prstGeom prst="roundRect">
+            <a:avLst/>
+          </a:prstGeom>
+          <a:solidFill>
+            <a:srgbClr val="167663"/>
+          </a:solidFill>
+          <a:ln>
+            <a:noFill/>
+          </a:ln>
+        </p:spPr>
+        <p:style>
+          <a:lnRef idx="1">
+            <a:schemeClr val="accent1"/>
+          </a:lnRef>
+          <a:fillRef idx="3">
+            <a:schemeClr val="accent1"/>
+          </a:fillRef>
+          <a:effectRef idx="2">
+            <a:schemeClr val="accent1"/>
+          </a:effectRef>
+          <a:fontRef idx="minor">
+            <a:schemeClr val="lt1"/>
+          </a:fontRef>
+        </p:style>
+        <p:txBody>
+          <a:bodyPr rtlCol="0" anchor="ctr"/>
+          <a:lstStyle/>
+          <a:p>
+            <a:pPr algn="ctr"/>
+          </a:p>
+        </p:txBody>
+      </p:sp>
+      <p:sp>
+        <p:nvSpPr>
+          <p:cNvPr id="12" name="TextBox 11"/>
+          <p:cNvSpPr txBox="1"/>
+          <p:nvPr/>
+        </p:nvSpPr>
+        <p:spPr>
+          <a:xfrm>
+            <a:off x="1554480" y="4425696"/>
+            <a:ext cx="9692640" cy="365760"/>
+          </a:xfrm>
+          <a:prstGeom prst="rect">
+            <a:avLst/>
+          </a:prstGeom>
+          <a:noFill/>
+        </p:spPr>
+        <p:txBody>
+          <a:bodyPr wrap="square">
+            <a:spAutoFit/>
+          </a:bodyPr>
+          <a:lstStyle/>
+          <a:p>
+            <a:pPr>
+              <a:defRPr sz="2100" b="1">
                 <a:solidFill>
                   <a:srgbClr val="152D39"/>
                 </a:solidFill>
@@ -5478,35 +8157,35 @@
               </a:defRPr>
             </a:pPr>
             <a:r>
-              <a:t>• 建設業界全体：限られた人材や技術を活かし、地域を超えて仕事を支え合う。</a:t>
-            </a:r>
-          </a:p>
-        </p:txBody>
-      </p:sp>
-      <p:sp>
-        <p:nvSpPr>
-          <p:cNvPr id="8" name="TextBox 7"/>
-          <p:cNvSpPr txBox="1"/>
-          <p:nvPr/>
-        </p:nvSpPr>
-        <p:spPr>
-          <a:xfrm>
-            <a:off x="594360" y="5806440"/>
-            <a:ext cx="10789920" cy="594360"/>
-          </a:xfrm>
-          <a:prstGeom prst="rect">
-            <a:avLst/>
-          </a:prstGeom>
-          <a:noFill/>
-        </p:spPr>
-        <p:txBody>
-          <a:bodyPr wrap="square">
-            <a:spAutoFit/>
-          </a:bodyPr>
-          <a:lstStyle/>
-          <a:p>
-            <a:pPr>
-              <a:defRPr sz="1100" b="0">
+              <a:t>建設業界全体</a:t>
+            </a:r>
+          </a:p>
+        </p:txBody>
+      </p:sp>
+      <p:sp>
+        <p:nvSpPr>
+          <p:cNvPr id="13" name="TextBox 12"/>
+          <p:cNvSpPr txBox="1"/>
+          <p:nvPr/>
+        </p:nvSpPr>
+        <p:spPr>
+          <a:xfrm>
+            <a:off x="1554480" y="4882896"/>
+            <a:ext cx="9692640" cy="457200"/>
+          </a:xfrm>
+          <a:prstGeom prst="rect">
+            <a:avLst/>
+          </a:prstGeom>
+          <a:noFill/>
+        </p:spPr>
+        <p:txBody>
+          <a:bodyPr wrap="square">
+            <a:spAutoFit/>
+          </a:bodyPr>
+          <a:lstStyle/>
+          <a:p>
+            <a:pPr>
+              <a:defRPr sz="1600" b="0">
                 <a:solidFill>
                   <a:srgbClr val="62727B"/>
                 </a:solidFill>
@@ -5514,6 +8193,42 @@
               </a:defRPr>
             </a:pPr>
             <a:r>
+              <a:t>限られた人材・技術を活かし、地域を超えて仕事を支え合う。</a:t>
+            </a:r>
+          </a:p>
+        </p:txBody>
+      </p:sp>
+      <p:sp>
+        <p:nvSpPr>
+          <p:cNvPr id="14" name="TextBox 13"/>
+          <p:cNvSpPr txBox="1"/>
+          <p:nvPr/>
+        </p:nvSpPr>
+        <p:spPr>
+          <a:xfrm>
+            <a:off x="594360" y="6080760"/>
+            <a:ext cx="10789920" cy="548640"/>
+          </a:xfrm>
+          <a:prstGeom prst="rect">
+            <a:avLst/>
+          </a:prstGeom>
+          <a:noFill/>
+        </p:spPr>
+        <p:txBody>
+          <a:bodyPr wrap="square">
+            <a:spAutoFit/>
+          </a:bodyPr>
+          <a:lstStyle/>
+          <a:p>
+            <a:pPr>
+              <a:defRPr sz="1000" b="0">
+                <a:solidFill>
+                  <a:srgbClr val="62727B"/>
+                </a:solidFill>
+                <a:latin typeface="Yu Gothic"/>
+              </a:defRPr>
+            </a:pPr>
+            <a:r>
               <a:t>期待する価値であり、売上や案件数の増加を保証しない。</a:t>
             </a:r>
           </a:p>
@@ -5521,14 +8236,14 @@
       </p:sp>
       <p:sp>
         <p:nvSpPr>
-          <p:cNvPr id="9" name="TextBox 8"/>
-          <p:cNvSpPr txBox="1"/>
-          <p:nvPr/>
-        </p:nvSpPr>
-        <p:spPr>
-          <a:xfrm>
-            <a:off x="11018520" y="6446520"/>
-            <a:ext cx="594360" cy="274320"/>
+          <p:cNvPr id="15" name="TextBox 14"/>
+          <p:cNvSpPr txBox="1"/>
+          <p:nvPr/>
+        </p:nvSpPr>
+        <p:spPr>
+          <a:xfrm>
+            <a:off x="11201400" y="6446520"/>
+            <a:ext cx="457200" cy="228600"/>
           </a:xfrm>
           <a:prstGeom prst="rect">
             <a:avLst/>
@@ -5589,22 +8304,22 @@
         </p:nvSpPr>
         <p:spPr>
           <a:xfrm>
-            <a:off x="594360" y="320040"/>
-            <a:ext cx="10972800" cy="457200"/>
-          </a:xfrm>
-          <a:prstGeom prst="rect">
-            <a:avLst/>
-          </a:prstGeom>
-          <a:noFill/>
-        </p:spPr>
-        <p:txBody>
-          <a:bodyPr wrap="square">
-            <a:spAutoFit/>
-          </a:bodyPr>
-          <a:lstStyle/>
-          <a:p>
-            <a:pPr>
-              <a:defRPr sz="1200" b="1">
+            <a:off x="594360" y="246888"/>
+            <a:ext cx="10972800" cy="274320"/>
+          </a:xfrm>
+          <a:prstGeom prst="rect">
+            <a:avLst/>
+          </a:prstGeom>
+          <a:noFill/>
+        </p:spPr>
+        <p:txBody>
+          <a:bodyPr wrap="square">
+            <a:spAutoFit/>
+          </a:bodyPr>
+          <a:lstStyle/>
+          <a:p>
+            <a:pPr>
+              <a:defRPr sz="1100" b="1">
                 <a:solidFill>
                   <a:srgbClr val="167663"/>
                 </a:solidFill>
@@ -5612,7 +8327,7 @@
               </a:defRPr>
             </a:pPr>
             <a:r>
-              <a:t>IKS / FIELD DX × CONSTRUCTION NETWORK</a:t>
+              <a:t>IKS / VISUAL BUSINESS PROPOSAL</a:t>
             </a:r>
           </a:p>
         </p:txBody>
@@ -5625,22 +8340,22 @@
         </p:nvSpPr>
         <p:spPr>
           <a:xfrm>
-            <a:off x="594360" y="914400"/>
-            <a:ext cx="10972800" cy="1143000"/>
-          </a:xfrm>
-          <a:prstGeom prst="rect">
-            <a:avLst/>
-          </a:prstGeom>
-          <a:noFill/>
-        </p:spPr>
-        <p:txBody>
-          <a:bodyPr wrap="square">
-            <a:spAutoFit/>
-          </a:bodyPr>
-          <a:lstStyle/>
-          <a:p>
-            <a:pPr>
-              <a:defRPr sz="2700" b="1">
+            <a:off x="594360" y="731520"/>
+            <a:ext cx="10972800" cy="914400"/>
+          </a:xfrm>
+          <a:prstGeom prst="rect">
+            <a:avLst/>
+          </a:prstGeom>
+          <a:noFill/>
+        </p:spPr>
+        <p:txBody>
+          <a:bodyPr wrap="square">
+            <a:spAutoFit/>
+          </a:bodyPr>
+          <a:lstStyle/>
+          <a:p>
+            <a:pPr>
+              <a:defRPr sz="2600" b="1">
                 <a:solidFill>
                   <a:srgbClr val="152D39"/>
                 </a:solidFill>
@@ -5661,22 +8376,22 @@
         </p:nvSpPr>
         <p:spPr>
           <a:xfrm>
-            <a:off x="594360" y="2103120"/>
-            <a:ext cx="10972800" cy="548640"/>
-          </a:xfrm>
-          <a:prstGeom prst="rect">
-            <a:avLst/>
-          </a:prstGeom>
-          <a:noFill/>
-        </p:spPr>
-        <p:txBody>
-          <a:bodyPr wrap="square">
-            <a:spAutoFit/>
-          </a:bodyPr>
-          <a:lstStyle/>
-          <a:p>
-            <a:pPr>
-              <a:defRPr sz="1800" b="1">
+            <a:off x="594360" y="1737360"/>
+            <a:ext cx="10972800" cy="502920"/>
+          </a:xfrm>
+          <a:prstGeom prst="rect">
+            <a:avLst/>
+          </a:prstGeom>
+          <a:noFill/>
+        </p:spPr>
+        <p:txBody>
+          <a:bodyPr wrap="square">
+            <a:spAutoFit/>
+          </a:bodyPr>
+          <a:lstStyle/>
+          <a:p>
+            <a:pPr>
+              <a:defRPr sz="1500" b="0">
                 <a:solidFill>
                   <a:srgbClr val="167663"/>
                 </a:solidFill>
@@ -5691,28 +8406,107 @@
       </p:sp>
       <p:sp>
         <p:nvSpPr>
-          <p:cNvPr id="5" name="TextBox 4"/>
-          <p:cNvSpPr txBox="1"/>
-          <p:nvPr/>
-        </p:nvSpPr>
-        <p:spPr>
-          <a:xfrm>
-            <a:off x="731520" y="2852928"/>
-            <a:ext cx="10789920" cy="749808"/>
-          </a:xfrm>
-          <a:prstGeom prst="rect">
-            <a:avLst/>
-          </a:prstGeom>
-          <a:noFill/>
-        </p:spPr>
-        <p:txBody>
-          <a:bodyPr wrap="square">
-            <a:spAutoFit/>
-          </a:bodyPr>
-          <a:lstStyle/>
-          <a:p>
-            <a:pPr>
-              <a:defRPr sz="1800" b="0">
+          <p:cNvPr id="5" name="Rounded Rectangle 4"/>
+          <p:cNvSpPr/>
+          <p:nvPr/>
+        </p:nvSpPr>
+        <p:spPr>
+          <a:xfrm>
+            <a:off x="640080" y="2834640"/>
+            <a:ext cx="3401568" cy="1920240"/>
+          </a:xfrm>
+          <a:prstGeom prst="roundRect">
+            <a:avLst/>
+          </a:prstGeom>
+          <a:solidFill>
+            <a:srgbClr val="EDF4EE"/>
+          </a:solidFill>
+          <a:ln>
+            <a:noFill/>
+          </a:ln>
+        </p:spPr>
+        <p:style>
+          <a:lnRef idx="1">
+            <a:schemeClr val="accent1"/>
+          </a:lnRef>
+          <a:fillRef idx="3">
+            <a:schemeClr val="accent1"/>
+          </a:fillRef>
+          <a:effectRef idx="2">
+            <a:schemeClr val="accent1"/>
+          </a:effectRef>
+          <a:fontRef idx="minor">
+            <a:schemeClr val="lt1"/>
+          </a:fontRef>
+        </p:style>
+        <p:txBody>
+          <a:bodyPr rtlCol="0" anchor="ctr"/>
+          <a:lstStyle/>
+          <a:p>
+            <a:pPr algn="ctr"/>
+          </a:p>
+        </p:txBody>
+      </p:sp>
+      <p:sp>
+        <p:nvSpPr>
+          <p:cNvPr id="6" name="TextBox 5"/>
+          <p:cNvSpPr txBox="1"/>
+          <p:nvPr/>
+        </p:nvSpPr>
+        <p:spPr>
+          <a:xfrm>
+            <a:off x="804671" y="2962656"/>
+            <a:ext cx="3108960" cy="365760"/>
+          </a:xfrm>
+          <a:prstGeom prst="rect">
+            <a:avLst/>
+          </a:prstGeom>
+          <a:noFill/>
+        </p:spPr>
+        <p:txBody>
+          <a:bodyPr wrap="square">
+            <a:spAutoFit/>
+          </a:bodyPr>
+          <a:lstStyle/>
+          <a:p>
+            <a:pPr>
+              <a:defRPr sz="1200" b="0">
+                <a:solidFill>
+                  <a:srgbClr val="167663"/>
+                </a:solidFill>
+                <a:latin typeface="Yu Gothic"/>
+              </a:defRPr>
+            </a:pPr>
+            <a:r>
+              <a:t>QUALITY</a:t>
+            </a:r>
+          </a:p>
+        </p:txBody>
+      </p:sp>
+      <p:sp>
+        <p:nvSpPr>
+          <p:cNvPr id="7" name="TextBox 6"/>
+          <p:cNvSpPr txBox="1"/>
+          <p:nvPr/>
+        </p:nvSpPr>
+        <p:spPr>
+          <a:xfrm>
+            <a:off x="804671" y="3429000"/>
+            <a:ext cx="3108960" cy="731520"/>
+          </a:xfrm>
+          <a:prstGeom prst="rect">
+            <a:avLst/>
+          </a:prstGeom>
+          <a:noFill/>
+        </p:spPr>
+        <p:txBody>
+          <a:bodyPr wrap="square">
+            <a:spAutoFit/>
+          </a:bodyPr>
+          <a:lstStyle/>
+          <a:p>
+            <a:pPr>
+              <a:defRPr sz="2500" b="1">
                 <a:solidFill>
                   <a:srgbClr val="152D39"/>
                 </a:solidFill>
@@ -5720,35 +8514,150 @@
               </a:defRPr>
             </a:pPr>
             <a:r>
-              <a:t>• 調査項目、撮影・測定方法、報告形式、完了・承認基準を標準化。</a:t>
-            </a:r>
-          </a:p>
-        </p:txBody>
-      </p:sp>
-      <p:sp>
-        <p:nvSpPr>
-          <p:cNvPr id="6" name="TextBox 5"/>
-          <p:cNvSpPr txBox="1"/>
-          <p:nvPr/>
-        </p:nvSpPr>
-        <p:spPr>
-          <a:xfrm>
-            <a:off x="731520" y="3657600"/>
-            <a:ext cx="10789920" cy="749808"/>
-          </a:xfrm>
-          <a:prstGeom prst="rect">
-            <a:avLst/>
-          </a:prstGeom>
-          <a:noFill/>
-        </p:spPr>
-        <p:txBody>
-          <a:bodyPr wrap="square">
-            <a:spAutoFit/>
-          </a:bodyPr>
-          <a:lstStyle/>
-          <a:p>
-            <a:pPr>
-              <a:defRPr sz="1800" b="0">
+              <a:t>共通の基準</a:t>
+            </a:r>
+          </a:p>
+        </p:txBody>
+      </p:sp>
+      <p:sp>
+        <p:nvSpPr>
+          <p:cNvPr id="8" name="TextBox 7"/>
+          <p:cNvSpPr txBox="1"/>
+          <p:nvPr/>
+        </p:nvSpPr>
+        <p:spPr>
+          <a:xfrm>
+            <a:off x="804671" y="4251960"/>
+            <a:ext cx="3108960" cy="411480"/>
+          </a:xfrm>
+          <a:prstGeom prst="rect">
+            <a:avLst/>
+          </a:prstGeom>
+          <a:noFill/>
+        </p:spPr>
+        <p:txBody>
+          <a:bodyPr wrap="square">
+            <a:spAutoFit/>
+          </a:bodyPr>
+          <a:lstStyle/>
+          <a:p>
+            <a:pPr>
+              <a:defRPr sz="1300" b="0">
+                <a:solidFill>
+                  <a:srgbClr val="62727B"/>
+                </a:solidFill>
+                <a:latin typeface="Yu Gothic"/>
+              </a:defRPr>
+            </a:pPr>
+            <a:r>
+              <a:t>調査・撮影・承認</a:t>
+            </a:r>
+          </a:p>
+        </p:txBody>
+      </p:sp>
+      <p:sp>
+        <p:nvSpPr>
+          <p:cNvPr id="9" name="Rounded Rectangle 8"/>
+          <p:cNvSpPr/>
+          <p:nvPr/>
+        </p:nvSpPr>
+        <p:spPr>
+          <a:xfrm>
+            <a:off x="4206240" y="2834640"/>
+            <a:ext cx="3401568" cy="1920240"/>
+          </a:xfrm>
+          <a:prstGeom prst="roundRect">
+            <a:avLst/>
+          </a:prstGeom>
+          <a:solidFill>
+            <a:srgbClr val="EDF4EE"/>
+          </a:solidFill>
+          <a:ln>
+            <a:noFill/>
+          </a:ln>
+        </p:spPr>
+        <p:style>
+          <a:lnRef idx="1">
+            <a:schemeClr val="accent1"/>
+          </a:lnRef>
+          <a:fillRef idx="3">
+            <a:schemeClr val="accent1"/>
+          </a:fillRef>
+          <a:effectRef idx="2">
+            <a:schemeClr val="accent1"/>
+          </a:effectRef>
+          <a:fontRef idx="minor">
+            <a:schemeClr val="lt1"/>
+          </a:fontRef>
+        </p:style>
+        <p:txBody>
+          <a:bodyPr rtlCol="0" anchor="ctr"/>
+          <a:lstStyle/>
+          <a:p>
+            <a:pPr algn="ctr"/>
+          </a:p>
+        </p:txBody>
+      </p:sp>
+      <p:sp>
+        <p:nvSpPr>
+          <p:cNvPr id="10" name="TextBox 9"/>
+          <p:cNvSpPr txBox="1"/>
+          <p:nvPr/>
+        </p:nvSpPr>
+        <p:spPr>
+          <a:xfrm>
+            <a:off x="4370831" y="2962656"/>
+            <a:ext cx="3108960" cy="365760"/>
+          </a:xfrm>
+          <a:prstGeom prst="rect">
+            <a:avLst/>
+          </a:prstGeom>
+          <a:noFill/>
+        </p:spPr>
+        <p:txBody>
+          <a:bodyPr wrap="square">
+            <a:spAutoFit/>
+          </a:bodyPr>
+          <a:lstStyle/>
+          <a:p>
+            <a:pPr>
+              <a:defRPr sz="1200" b="0">
+                <a:solidFill>
+                  <a:srgbClr val="167663"/>
+                </a:solidFill>
+                <a:latin typeface="Yu Gothic"/>
+              </a:defRPr>
+            </a:pPr>
+            <a:r>
+              <a:t>SKILL</a:t>
+            </a:r>
+          </a:p>
+        </p:txBody>
+      </p:sp>
+      <p:sp>
+        <p:nvSpPr>
+          <p:cNvPr id="11" name="TextBox 10"/>
+          <p:cNvSpPr txBox="1"/>
+          <p:nvPr/>
+        </p:nvSpPr>
+        <p:spPr>
+          <a:xfrm>
+            <a:off x="4370831" y="3429000"/>
+            <a:ext cx="3108960" cy="731520"/>
+          </a:xfrm>
+          <a:prstGeom prst="rect">
+            <a:avLst/>
+          </a:prstGeom>
+          <a:noFill/>
+        </p:spPr>
+        <p:txBody>
+          <a:bodyPr wrap="square">
+            <a:spAutoFit/>
+          </a:bodyPr>
+          <a:lstStyle/>
+          <a:p>
+            <a:pPr>
+              <a:defRPr sz="2500" b="1">
                 <a:solidFill>
                   <a:srgbClr val="152D39"/>
                 </a:solidFill>
@@ -5756,35 +8665,150 @@
               </a:defRPr>
             </a:pPr>
             <a:r>
-              <a:t>• 対応者の技能・経験・資格を確認し、教育と試行を実施。</a:t>
-            </a:r>
-          </a:p>
-        </p:txBody>
-      </p:sp>
-      <p:sp>
-        <p:nvSpPr>
-          <p:cNvPr id="7" name="TextBox 6"/>
-          <p:cNvSpPr txBox="1"/>
-          <p:nvPr/>
-        </p:nvSpPr>
-        <p:spPr>
-          <a:xfrm>
-            <a:off x="731520" y="4462272"/>
-            <a:ext cx="10789920" cy="749808"/>
-          </a:xfrm>
-          <a:prstGeom prst="rect">
-            <a:avLst/>
-          </a:prstGeom>
-          <a:noFill/>
-        </p:spPr>
-        <p:txBody>
-          <a:bodyPr wrap="square">
-            <a:spAutoFit/>
-          </a:bodyPr>
-          <a:lstStyle/>
-          <a:p>
-            <a:pPr>
-              <a:defRPr sz="1800" b="0">
+              <a:t>技術確認</a:t>
+            </a:r>
+          </a:p>
+        </p:txBody>
+      </p:sp>
+      <p:sp>
+        <p:nvSpPr>
+          <p:cNvPr id="12" name="TextBox 11"/>
+          <p:cNvSpPr txBox="1"/>
+          <p:nvPr/>
+        </p:nvSpPr>
+        <p:spPr>
+          <a:xfrm>
+            <a:off x="4370831" y="4251960"/>
+            <a:ext cx="3108960" cy="411480"/>
+          </a:xfrm>
+          <a:prstGeom prst="rect">
+            <a:avLst/>
+          </a:prstGeom>
+          <a:noFill/>
+        </p:spPr>
+        <p:txBody>
+          <a:bodyPr wrap="square">
+            <a:spAutoFit/>
+          </a:bodyPr>
+          <a:lstStyle/>
+          <a:p>
+            <a:pPr>
+              <a:defRPr sz="1300" b="0">
+                <a:solidFill>
+                  <a:srgbClr val="62727B"/>
+                </a:solidFill>
+                <a:latin typeface="Yu Gothic"/>
+              </a:defRPr>
+            </a:pPr>
+            <a:r>
+              <a:t>技能・経験・資格</a:t>
+            </a:r>
+          </a:p>
+        </p:txBody>
+      </p:sp>
+      <p:sp>
+        <p:nvSpPr>
+          <p:cNvPr id="13" name="Rounded Rectangle 12"/>
+          <p:cNvSpPr/>
+          <p:nvPr/>
+        </p:nvSpPr>
+        <p:spPr>
+          <a:xfrm>
+            <a:off x="7772400" y="2834640"/>
+            <a:ext cx="3401568" cy="1920240"/>
+          </a:xfrm>
+          <a:prstGeom prst="roundRect">
+            <a:avLst/>
+          </a:prstGeom>
+          <a:solidFill>
+            <a:srgbClr val="EDF4EE"/>
+          </a:solidFill>
+          <a:ln>
+            <a:noFill/>
+          </a:ln>
+        </p:spPr>
+        <p:style>
+          <a:lnRef idx="1">
+            <a:schemeClr val="accent1"/>
+          </a:lnRef>
+          <a:fillRef idx="3">
+            <a:schemeClr val="accent1"/>
+          </a:fillRef>
+          <a:effectRef idx="2">
+            <a:schemeClr val="accent1"/>
+          </a:effectRef>
+          <a:fontRef idx="minor">
+            <a:schemeClr val="lt1"/>
+          </a:fontRef>
+        </p:style>
+        <p:txBody>
+          <a:bodyPr rtlCol="0" anchor="ctr"/>
+          <a:lstStyle/>
+          <a:p>
+            <a:pPr algn="ctr"/>
+          </a:p>
+        </p:txBody>
+      </p:sp>
+      <p:sp>
+        <p:nvSpPr>
+          <p:cNvPr id="14" name="TextBox 13"/>
+          <p:cNvSpPr txBox="1"/>
+          <p:nvPr/>
+        </p:nvSpPr>
+        <p:spPr>
+          <a:xfrm>
+            <a:off x="7936992" y="2962656"/>
+            <a:ext cx="3108960" cy="365760"/>
+          </a:xfrm>
+          <a:prstGeom prst="rect">
+            <a:avLst/>
+          </a:prstGeom>
+          <a:noFill/>
+        </p:spPr>
+        <p:txBody>
+          <a:bodyPr wrap="square">
+            <a:spAutoFit/>
+          </a:bodyPr>
+          <a:lstStyle/>
+          <a:p>
+            <a:pPr>
+              <a:defRPr sz="1200" b="0">
+                <a:solidFill>
+                  <a:srgbClr val="167663"/>
+                </a:solidFill>
+                <a:latin typeface="Yu Gothic"/>
+              </a:defRPr>
+            </a:pPr>
+            <a:r>
+              <a:t>RESPONSIBILITY</a:t>
+            </a:r>
+          </a:p>
+        </p:txBody>
+      </p:sp>
+      <p:sp>
+        <p:nvSpPr>
+          <p:cNvPr id="15" name="TextBox 14"/>
+          <p:cNvSpPr txBox="1"/>
+          <p:nvPr/>
+        </p:nvSpPr>
+        <p:spPr>
+          <a:xfrm>
+            <a:off x="7936992" y="3429000"/>
+            <a:ext cx="3108960" cy="731520"/>
+          </a:xfrm>
+          <a:prstGeom prst="rect">
+            <a:avLst/>
+          </a:prstGeom>
+          <a:noFill/>
+        </p:spPr>
+        <p:txBody>
+          <a:bodyPr wrap="square">
+            <a:spAutoFit/>
+          </a:bodyPr>
+          <a:lstStyle/>
+          <a:p>
+            <a:pPr>
+              <a:defRPr sz="2500" b="1">
                 <a:solidFill>
                   <a:srgbClr val="152D39"/>
                 </a:solidFill>
@@ -5792,35 +8816,35 @@
               </a:defRPr>
             </a:pPr>
             <a:r>
-              <a:t>• 調査・判断・施工・再対応の責任、費用負担、情報権限を明確化。</a:t>
-            </a:r>
-          </a:p>
-        </p:txBody>
-      </p:sp>
-      <p:sp>
-        <p:nvSpPr>
-          <p:cNvPr id="8" name="TextBox 7"/>
-          <p:cNvSpPr txBox="1"/>
-          <p:nvPr/>
-        </p:nvSpPr>
-        <p:spPr>
-          <a:xfrm>
-            <a:off x="594360" y="5806440"/>
-            <a:ext cx="10789920" cy="594360"/>
-          </a:xfrm>
-          <a:prstGeom prst="rect">
-            <a:avLst/>
-          </a:prstGeom>
-          <a:noFill/>
-        </p:spPr>
-        <p:txBody>
-          <a:bodyPr wrap="square">
-            <a:spAutoFit/>
-          </a:bodyPr>
-          <a:lstStyle/>
-          <a:p>
-            <a:pPr>
-              <a:defRPr sz="1100" b="0">
+              <a:t>責任と安全</a:t>
+            </a:r>
+          </a:p>
+        </p:txBody>
+      </p:sp>
+      <p:sp>
+        <p:nvSpPr>
+          <p:cNvPr id="16" name="TextBox 15"/>
+          <p:cNvSpPr txBox="1"/>
+          <p:nvPr/>
+        </p:nvSpPr>
+        <p:spPr>
+          <a:xfrm>
+            <a:off x="7936992" y="4251960"/>
+            <a:ext cx="3108960" cy="411480"/>
+          </a:xfrm>
+          <a:prstGeom prst="rect">
+            <a:avLst/>
+          </a:prstGeom>
+          <a:noFill/>
+        </p:spPr>
+        <p:txBody>
+          <a:bodyPr wrap="square">
+            <a:spAutoFit/>
+          </a:bodyPr>
+          <a:lstStyle/>
+          <a:p>
+            <a:pPr>
+              <a:defRPr sz="1300" b="0">
                 <a:solidFill>
                   <a:srgbClr val="62727B"/>
                 </a:solidFill>
@@ -5828,6 +8852,78 @@
               </a:defRPr>
             </a:pPr>
             <a:r>
+              <a:t>役割・費用・情報</a:t>
+            </a:r>
+          </a:p>
+        </p:txBody>
+      </p:sp>
+      <p:sp>
+        <p:nvSpPr>
+          <p:cNvPr id="17" name="TextBox 16"/>
+          <p:cNvSpPr txBox="1"/>
+          <p:nvPr/>
+        </p:nvSpPr>
+        <p:spPr>
+          <a:xfrm>
+            <a:off x="777240" y="5120640"/>
+            <a:ext cx="10698480" cy="502920"/>
+          </a:xfrm>
+          <a:prstGeom prst="rect">
+            <a:avLst/>
+          </a:prstGeom>
+          <a:noFill/>
+        </p:spPr>
+        <p:txBody>
+          <a:bodyPr wrap="square">
+            <a:spAutoFit/>
+          </a:bodyPr>
+          <a:lstStyle/>
+          <a:p>
+            <a:pPr>
+              <a:defRPr sz="1600" b="0">
+                <a:solidFill>
+                  <a:srgbClr val="62727B"/>
+                </a:solidFill>
+                <a:latin typeface="Yu Gothic"/>
+              </a:defRPr>
+            </a:pPr>
+            <a:r>
+              <a:t>調査項目、撮影・測定方法、報告形式、完了・承認基準を標準化。</a:t>
+            </a:r>
+          </a:p>
+        </p:txBody>
+      </p:sp>
+      <p:sp>
+        <p:nvSpPr>
+          <p:cNvPr id="18" name="TextBox 17"/>
+          <p:cNvSpPr txBox="1"/>
+          <p:nvPr/>
+        </p:nvSpPr>
+        <p:spPr>
+          <a:xfrm>
+            <a:off x="594360" y="6080760"/>
+            <a:ext cx="10789920" cy="548640"/>
+          </a:xfrm>
+          <a:prstGeom prst="rect">
+            <a:avLst/>
+          </a:prstGeom>
+          <a:noFill/>
+        </p:spPr>
+        <p:txBody>
+          <a:bodyPr wrap="square">
+            <a:spAutoFit/>
+          </a:bodyPr>
+          <a:lstStyle/>
+          <a:p>
+            <a:pPr>
+              <a:defRPr sz="1000" b="0">
+                <a:solidFill>
+                  <a:srgbClr val="62727B"/>
+                </a:solidFill>
+                <a:latin typeface="Yu Gothic"/>
+              </a:defRPr>
+            </a:pPr>
+            <a:r>
               <a:t>資格者による現地確認や法令上の手順を、アプリが不要にするとはしない。</a:t>
             </a:r>
           </a:p>
@@ -5835,14 +8931,14 @@
       </p:sp>
       <p:sp>
         <p:nvSpPr>
-          <p:cNvPr id="9" name="TextBox 8"/>
-          <p:cNvSpPr txBox="1"/>
-          <p:nvPr/>
-        </p:nvSpPr>
-        <p:spPr>
-          <a:xfrm>
-            <a:off x="11018520" y="6446520"/>
-            <a:ext cx="594360" cy="274320"/>
+          <p:cNvPr id="19" name="TextBox 18"/>
+          <p:cNvSpPr txBox="1"/>
+          <p:nvPr/>
+        </p:nvSpPr>
+        <p:spPr>
+          <a:xfrm>
+            <a:off x="11201400" y="6446520"/>
+            <a:ext cx="457200" cy="228600"/>
           </a:xfrm>
           <a:prstGeom prst="rect">
             <a:avLst/>
@@ -5903,22 +8999,22 @@
         </p:nvSpPr>
         <p:spPr>
           <a:xfrm>
-            <a:off x="594360" y="320040"/>
-            <a:ext cx="10972800" cy="457200"/>
-          </a:xfrm>
-          <a:prstGeom prst="rect">
-            <a:avLst/>
-          </a:prstGeom>
-          <a:noFill/>
-        </p:spPr>
-        <p:txBody>
-          <a:bodyPr wrap="square">
-            <a:spAutoFit/>
-          </a:bodyPr>
-          <a:lstStyle/>
-          <a:p>
-            <a:pPr>
-              <a:defRPr sz="1200" b="1">
+            <a:off x="594360" y="246888"/>
+            <a:ext cx="10972800" cy="274320"/>
+          </a:xfrm>
+          <a:prstGeom prst="rect">
+            <a:avLst/>
+          </a:prstGeom>
+          <a:noFill/>
+        </p:spPr>
+        <p:txBody>
+          <a:bodyPr wrap="square">
+            <a:spAutoFit/>
+          </a:bodyPr>
+          <a:lstStyle/>
+          <a:p>
+            <a:pPr>
+              <a:defRPr sz="1100" b="1">
                 <a:solidFill>
                   <a:srgbClr val="167663"/>
                 </a:solidFill>
@@ -5926,7 +9022,7 @@
               </a:defRPr>
             </a:pPr>
             <a:r>
-              <a:t>IKS / FIELD DX × CONSTRUCTION NETWORK</a:t>
+              <a:t>IKS / VISUAL BUSINESS PROPOSAL</a:t>
             </a:r>
           </a:p>
         </p:txBody>
@@ -5939,22 +9035,22 @@
         </p:nvSpPr>
         <p:spPr>
           <a:xfrm>
-            <a:off x="594360" y="914400"/>
-            <a:ext cx="10972800" cy="1143000"/>
-          </a:xfrm>
-          <a:prstGeom prst="rect">
-            <a:avLst/>
-          </a:prstGeom>
-          <a:noFill/>
-        </p:spPr>
-        <p:txBody>
-          <a:bodyPr wrap="square">
-            <a:spAutoFit/>
-          </a:bodyPr>
-          <a:lstStyle/>
-          <a:p>
-            <a:pPr>
-              <a:defRPr sz="2700" b="1">
+            <a:off x="594360" y="731520"/>
+            <a:ext cx="10972800" cy="914400"/>
+          </a:xfrm>
+          <a:prstGeom prst="rect">
+            <a:avLst/>
+          </a:prstGeom>
+          <a:noFill/>
+        </p:spPr>
+        <p:txBody>
+          <a:bodyPr wrap="square">
+            <a:spAutoFit/>
+          </a:bodyPr>
+          <a:lstStyle/>
+          <a:p>
+            <a:pPr>
+              <a:defRPr sz="2600" b="1">
                 <a:solidFill>
                   <a:srgbClr val="152D39"/>
                 </a:solidFill>
@@ -5975,22 +9071,22 @@
         </p:nvSpPr>
         <p:spPr>
           <a:xfrm>
-            <a:off x="594360" y="2103120"/>
-            <a:ext cx="10972800" cy="548640"/>
-          </a:xfrm>
-          <a:prstGeom prst="rect">
-            <a:avLst/>
-          </a:prstGeom>
-          <a:noFill/>
-        </p:spPr>
-        <p:txBody>
-          <a:bodyPr wrap="square">
-            <a:spAutoFit/>
-          </a:bodyPr>
-          <a:lstStyle/>
-          <a:p>
-            <a:pPr>
-              <a:defRPr sz="1800" b="1">
+            <a:off x="594360" y="1737360"/>
+            <a:ext cx="10972800" cy="502920"/>
+          </a:xfrm>
+          <a:prstGeom prst="rect">
+            <a:avLst/>
+          </a:prstGeom>
+          <a:noFill/>
+        </p:spPr>
+        <p:txBody>
+          <a:bodyPr wrap="square">
+            <a:spAutoFit/>
+          </a:bodyPr>
+          <a:lstStyle/>
+          <a:p>
+            <a:pPr>
+              <a:defRPr sz="1500" b="0">
                 <a:solidFill>
                   <a:srgbClr val="167663"/>
                 </a:solidFill>
@@ -6005,28 +9101,107 @@
       </p:sp>
       <p:sp>
         <p:nvSpPr>
-          <p:cNvPr id="5" name="TextBox 4"/>
-          <p:cNvSpPr txBox="1"/>
-          <p:nvPr/>
-        </p:nvSpPr>
-        <p:spPr>
-          <a:xfrm>
-            <a:off x="731520" y="2852928"/>
-            <a:ext cx="10789920" cy="749808"/>
-          </a:xfrm>
-          <a:prstGeom prst="rect">
-            <a:avLst/>
-          </a:prstGeom>
-          <a:noFill/>
-        </p:spPr>
-        <p:txBody>
-          <a:bodyPr wrap="square">
-            <a:spAutoFit/>
-          </a:bodyPr>
-          <a:lstStyle/>
-          <a:p>
-            <a:pPr>
-              <a:defRPr sz="1800" b="0">
+          <p:cNvPr id="5" name="Rounded Rectangle 4"/>
+          <p:cNvSpPr/>
+          <p:nvPr/>
+        </p:nvSpPr>
+        <p:spPr>
+          <a:xfrm>
+            <a:off x="640080" y="2834640"/>
+            <a:ext cx="3401568" cy="1920240"/>
+          </a:xfrm>
+          <a:prstGeom prst="roundRect">
+            <a:avLst/>
+          </a:prstGeom>
+          <a:solidFill>
+            <a:srgbClr val="EDF4EE"/>
+          </a:solidFill>
+          <a:ln>
+            <a:noFill/>
+          </a:ln>
+        </p:spPr>
+        <p:style>
+          <a:lnRef idx="1">
+            <a:schemeClr val="accent1"/>
+          </a:lnRef>
+          <a:fillRef idx="3">
+            <a:schemeClr val="accent1"/>
+          </a:fillRef>
+          <a:effectRef idx="2">
+            <a:schemeClr val="accent1"/>
+          </a:effectRef>
+          <a:fontRef idx="minor">
+            <a:schemeClr val="lt1"/>
+          </a:fontRef>
+        </p:style>
+        <p:txBody>
+          <a:bodyPr rtlCol="0" anchor="ctr"/>
+          <a:lstStyle/>
+          <a:p>
+            <a:pPr algn="ctr"/>
+          </a:p>
+        </p:txBody>
+      </p:sp>
+      <p:sp>
+        <p:nvSpPr>
+          <p:cNvPr id="6" name="TextBox 5"/>
+          <p:cNvSpPr txBox="1"/>
+          <p:nvPr/>
+        </p:nvSpPr>
+        <p:spPr>
+          <a:xfrm>
+            <a:off x="804671" y="2962656"/>
+            <a:ext cx="3108960" cy="365760"/>
+          </a:xfrm>
+          <a:prstGeom prst="rect">
+            <a:avLst/>
+          </a:prstGeom>
+          <a:noFill/>
+        </p:spPr>
+        <p:txBody>
+          <a:bodyPr wrap="square">
+            <a:spAutoFit/>
+          </a:bodyPr>
+          <a:lstStyle/>
+          <a:p>
+            <a:pPr>
+              <a:defRPr sz="1200" b="0">
+                <a:solidFill>
+                  <a:srgbClr val="167663"/>
+                </a:solidFill>
+                <a:latin typeface="Yu Gothic"/>
+              </a:defRPr>
+            </a:pPr>
+            <a:r>
+              <a:t>STEP 1</a:t>
+            </a:r>
+          </a:p>
+        </p:txBody>
+      </p:sp>
+      <p:sp>
+        <p:nvSpPr>
+          <p:cNvPr id="7" name="TextBox 6"/>
+          <p:cNvSpPr txBox="1"/>
+          <p:nvPr/>
+        </p:nvSpPr>
+        <p:spPr>
+          <a:xfrm>
+            <a:off x="804671" y="3429000"/>
+            <a:ext cx="3108960" cy="731520"/>
+          </a:xfrm>
+          <a:prstGeom prst="rect">
+            <a:avLst/>
+          </a:prstGeom>
+          <a:noFill/>
+        </p:spPr>
+        <p:txBody>
+          <a:bodyPr wrap="square">
+            <a:spAutoFit/>
+          </a:bodyPr>
+          <a:lstStyle/>
+          <a:p>
+            <a:pPr>
+              <a:defRPr sz="2500" b="1">
                 <a:solidFill>
                   <a:srgbClr val="152D39"/>
                 </a:solidFill>
@@ -6034,35 +9209,150 @@
               </a:defRPr>
             </a:pPr>
             <a:r>
-              <a:t>• 対象業務と協力会社を選び、現状の費用・工数・品質を記録。</a:t>
-            </a:r>
-          </a:p>
-        </p:txBody>
-      </p:sp>
-      <p:sp>
-        <p:nvSpPr>
-          <p:cNvPr id="6" name="TextBox 5"/>
-          <p:cNvSpPr txBox="1"/>
-          <p:nvPr/>
-        </p:nvSpPr>
-        <p:spPr>
-          <a:xfrm>
-            <a:off x="731520" y="3657600"/>
-            <a:ext cx="10789920" cy="749808"/>
-          </a:xfrm>
-          <a:prstGeom prst="rect">
-            <a:avLst/>
-          </a:prstGeom>
-          <a:noFill/>
-        </p:spPr>
-        <p:txBody>
-          <a:bodyPr wrap="square">
-            <a:spAutoFit/>
-          </a:bodyPr>
-          <a:lstStyle/>
-          <a:p>
-            <a:pPr>
-              <a:defRPr sz="1800" b="0">
+              <a:t>現状を測る</a:t>
+            </a:r>
+          </a:p>
+        </p:txBody>
+      </p:sp>
+      <p:sp>
+        <p:nvSpPr>
+          <p:cNvPr id="8" name="TextBox 7"/>
+          <p:cNvSpPr txBox="1"/>
+          <p:nvPr/>
+        </p:nvSpPr>
+        <p:spPr>
+          <a:xfrm>
+            <a:off x="804671" y="4251960"/>
+            <a:ext cx="3108960" cy="411480"/>
+          </a:xfrm>
+          <a:prstGeom prst="rect">
+            <a:avLst/>
+          </a:prstGeom>
+          <a:noFill/>
+        </p:spPr>
+        <p:txBody>
+          <a:bodyPr wrap="square">
+            <a:spAutoFit/>
+          </a:bodyPr>
+          <a:lstStyle/>
+          <a:p>
+            <a:pPr>
+              <a:defRPr sz="1300" b="0">
+                <a:solidFill>
+                  <a:srgbClr val="62727B"/>
+                </a:solidFill>
+                <a:latin typeface="Yu Gothic"/>
+              </a:defRPr>
+            </a:pPr>
+            <a:r>
+              <a:t>費用・工数・品質</a:t>
+            </a:r>
+          </a:p>
+        </p:txBody>
+      </p:sp>
+      <p:sp>
+        <p:nvSpPr>
+          <p:cNvPr id="9" name="Rounded Rectangle 8"/>
+          <p:cNvSpPr/>
+          <p:nvPr/>
+        </p:nvSpPr>
+        <p:spPr>
+          <a:xfrm>
+            <a:off x="4206240" y="2834640"/>
+            <a:ext cx="3401568" cy="1920240"/>
+          </a:xfrm>
+          <a:prstGeom prst="roundRect">
+            <a:avLst/>
+          </a:prstGeom>
+          <a:solidFill>
+            <a:srgbClr val="EDF4EE"/>
+          </a:solidFill>
+          <a:ln>
+            <a:noFill/>
+          </a:ln>
+        </p:spPr>
+        <p:style>
+          <a:lnRef idx="1">
+            <a:schemeClr val="accent1"/>
+          </a:lnRef>
+          <a:fillRef idx="3">
+            <a:schemeClr val="accent1"/>
+          </a:fillRef>
+          <a:effectRef idx="2">
+            <a:schemeClr val="accent1"/>
+          </a:effectRef>
+          <a:fontRef idx="minor">
+            <a:schemeClr val="lt1"/>
+          </a:fontRef>
+        </p:style>
+        <p:txBody>
+          <a:bodyPr rtlCol="0" anchor="ctr"/>
+          <a:lstStyle/>
+          <a:p>
+            <a:pPr algn="ctr"/>
+          </a:p>
+        </p:txBody>
+      </p:sp>
+      <p:sp>
+        <p:nvSpPr>
+          <p:cNvPr id="10" name="TextBox 9"/>
+          <p:cNvSpPr txBox="1"/>
+          <p:nvPr/>
+        </p:nvSpPr>
+        <p:spPr>
+          <a:xfrm>
+            <a:off x="4370831" y="2962656"/>
+            <a:ext cx="3108960" cy="365760"/>
+          </a:xfrm>
+          <a:prstGeom prst="rect">
+            <a:avLst/>
+          </a:prstGeom>
+          <a:noFill/>
+        </p:spPr>
+        <p:txBody>
+          <a:bodyPr wrap="square">
+            <a:spAutoFit/>
+          </a:bodyPr>
+          <a:lstStyle/>
+          <a:p>
+            <a:pPr>
+              <a:defRPr sz="1200" b="0">
+                <a:solidFill>
+                  <a:srgbClr val="167663"/>
+                </a:solidFill>
+                <a:latin typeface="Yu Gothic"/>
+              </a:defRPr>
+            </a:pPr>
+            <a:r>
+              <a:t>STEP 2</a:t>
+            </a:r>
+          </a:p>
+        </p:txBody>
+      </p:sp>
+      <p:sp>
+        <p:nvSpPr>
+          <p:cNvPr id="11" name="TextBox 10"/>
+          <p:cNvSpPr txBox="1"/>
+          <p:nvPr/>
+        </p:nvSpPr>
+        <p:spPr>
+          <a:xfrm>
+            <a:off x="4370831" y="3429000"/>
+            <a:ext cx="3108960" cy="731520"/>
+          </a:xfrm>
+          <a:prstGeom prst="rect">
+            <a:avLst/>
+          </a:prstGeom>
+          <a:noFill/>
+        </p:spPr>
+        <p:txBody>
+          <a:bodyPr wrap="square">
+            <a:spAutoFit/>
+          </a:bodyPr>
+          <a:lstStyle/>
+          <a:p>
+            <a:pPr>
+              <a:defRPr sz="2500" b="1">
                 <a:solidFill>
                   <a:srgbClr val="152D39"/>
                 </a:solidFill>
@@ -6070,35 +9360,150 @@
               </a:defRPr>
             </a:pPr>
             <a:r>
-              <a:t>• 地域の現地対応と遠隔確認を試行。出張回数、拘束時間、再訪、確認完了時間を比較。</a:t>
-            </a:r>
-          </a:p>
-        </p:txBody>
-      </p:sp>
-      <p:sp>
-        <p:nvSpPr>
-          <p:cNvPr id="7" name="TextBox 6"/>
-          <p:cNvSpPr txBox="1"/>
-          <p:nvPr/>
-        </p:nvSpPr>
-        <p:spPr>
-          <a:xfrm>
-            <a:off x="731520" y="4462272"/>
-            <a:ext cx="10789920" cy="749808"/>
-          </a:xfrm>
-          <a:prstGeom prst="rect">
-            <a:avLst/>
-          </a:prstGeom>
-          <a:noFill/>
-        </p:spPr>
-        <p:txBody>
-          <a:bodyPr wrap="square">
-            <a:spAutoFit/>
-          </a:bodyPr>
-          <a:lstStyle/>
-          <a:p>
-            <a:pPr>
-              <a:defRPr sz="1800" b="0">
+              <a:t>小さく試す</a:t>
+            </a:r>
+          </a:p>
+        </p:txBody>
+      </p:sp>
+      <p:sp>
+        <p:nvSpPr>
+          <p:cNvPr id="12" name="TextBox 11"/>
+          <p:cNvSpPr txBox="1"/>
+          <p:nvPr/>
+        </p:nvSpPr>
+        <p:spPr>
+          <a:xfrm>
+            <a:off x="4370831" y="4251960"/>
+            <a:ext cx="3108960" cy="411480"/>
+          </a:xfrm>
+          <a:prstGeom prst="rect">
+            <a:avLst/>
+          </a:prstGeom>
+          <a:noFill/>
+        </p:spPr>
+        <p:txBody>
+          <a:bodyPr wrap="square">
+            <a:spAutoFit/>
+          </a:bodyPr>
+          <a:lstStyle/>
+          <a:p>
+            <a:pPr>
+              <a:defRPr sz="1300" b="0">
+                <a:solidFill>
+                  <a:srgbClr val="62727B"/>
+                </a:solidFill>
+                <a:latin typeface="Yu Gothic"/>
+              </a:defRPr>
+            </a:pPr>
+            <a:r>
+              <a:t>現地 × 遠隔</a:t>
+            </a:r>
+          </a:p>
+        </p:txBody>
+      </p:sp>
+      <p:sp>
+        <p:nvSpPr>
+          <p:cNvPr id="13" name="Rounded Rectangle 12"/>
+          <p:cNvSpPr/>
+          <p:nvPr/>
+        </p:nvSpPr>
+        <p:spPr>
+          <a:xfrm>
+            <a:off x="7772400" y="2834640"/>
+            <a:ext cx="3401568" cy="1920240"/>
+          </a:xfrm>
+          <a:prstGeom prst="roundRect">
+            <a:avLst/>
+          </a:prstGeom>
+          <a:solidFill>
+            <a:srgbClr val="EDF4EE"/>
+          </a:solidFill>
+          <a:ln>
+            <a:noFill/>
+          </a:ln>
+        </p:spPr>
+        <p:style>
+          <a:lnRef idx="1">
+            <a:schemeClr val="accent1"/>
+          </a:lnRef>
+          <a:fillRef idx="3">
+            <a:schemeClr val="accent1"/>
+          </a:fillRef>
+          <a:effectRef idx="2">
+            <a:schemeClr val="accent1"/>
+          </a:effectRef>
+          <a:fontRef idx="minor">
+            <a:schemeClr val="lt1"/>
+          </a:fontRef>
+        </p:style>
+        <p:txBody>
+          <a:bodyPr rtlCol="0" anchor="ctr"/>
+          <a:lstStyle/>
+          <a:p>
+            <a:pPr algn="ctr"/>
+          </a:p>
+        </p:txBody>
+      </p:sp>
+      <p:sp>
+        <p:nvSpPr>
+          <p:cNvPr id="14" name="TextBox 13"/>
+          <p:cNvSpPr txBox="1"/>
+          <p:nvPr/>
+        </p:nvSpPr>
+        <p:spPr>
+          <a:xfrm>
+            <a:off x="7936992" y="2962656"/>
+            <a:ext cx="3108960" cy="365760"/>
+          </a:xfrm>
+          <a:prstGeom prst="rect">
+            <a:avLst/>
+          </a:prstGeom>
+          <a:noFill/>
+        </p:spPr>
+        <p:txBody>
+          <a:bodyPr wrap="square">
+            <a:spAutoFit/>
+          </a:bodyPr>
+          <a:lstStyle/>
+          <a:p>
+            <a:pPr>
+              <a:defRPr sz="1200" b="0">
+                <a:solidFill>
+                  <a:srgbClr val="167663"/>
+                </a:solidFill>
+                <a:latin typeface="Yu Gothic"/>
+              </a:defRPr>
+            </a:pPr>
+            <a:r>
+              <a:t>STEP 3</a:t>
+            </a:r>
+          </a:p>
+        </p:txBody>
+      </p:sp>
+      <p:sp>
+        <p:nvSpPr>
+          <p:cNvPr id="15" name="TextBox 14"/>
+          <p:cNvSpPr txBox="1"/>
+          <p:nvPr/>
+        </p:nvSpPr>
+        <p:spPr>
+          <a:xfrm>
+            <a:off x="7936992" y="3429000"/>
+            <a:ext cx="3108960" cy="731520"/>
+          </a:xfrm>
+          <a:prstGeom prst="rect">
+            <a:avLst/>
+          </a:prstGeom>
+          <a:noFill/>
+        </p:spPr>
+        <p:txBody>
+          <a:bodyPr wrap="square">
+            <a:spAutoFit/>
+          </a:bodyPr>
+          <a:lstStyle/>
+          <a:p>
+            <a:pPr>
+              <a:defRPr sz="2500" b="1">
                 <a:solidFill>
                   <a:srgbClr val="152D39"/>
                 </a:solidFill>
@@ -6106,35 +9511,35 @@
               </a:defRPr>
             </a:pPr>
             <a:r>
-              <a:t>• 減らした出張経費だけでなく、現地対応費・遠隔確認工数・利用運用費を評価。</a:t>
-            </a:r>
-          </a:p>
-        </p:txBody>
-      </p:sp>
-      <p:sp>
-        <p:nvSpPr>
-          <p:cNvPr id="8" name="TextBox 7"/>
-          <p:cNvSpPr txBox="1"/>
-          <p:nvPr/>
-        </p:nvSpPr>
-        <p:spPr>
-          <a:xfrm>
-            <a:off x="594360" y="5806440"/>
-            <a:ext cx="10789920" cy="594360"/>
-          </a:xfrm>
-          <a:prstGeom prst="rect">
-            <a:avLst/>
-          </a:prstGeom>
-          <a:noFill/>
-        </p:spPr>
-        <p:txBody>
-          <a:bodyPr wrap="square">
-            <a:spAutoFit/>
-          </a:bodyPr>
-          <a:lstStyle/>
-          <a:p>
-            <a:pPr>
-              <a:defRPr sz="1100" b="0">
+              <a:t>検証・展開</a:t>
+            </a:r>
+          </a:p>
+        </p:txBody>
+      </p:sp>
+      <p:sp>
+        <p:nvSpPr>
+          <p:cNvPr id="16" name="TextBox 15"/>
+          <p:cNvSpPr txBox="1"/>
+          <p:nvPr/>
+        </p:nvSpPr>
+        <p:spPr>
+          <a:xfrm>
+            <a:off x="7936992" y="4251960"/>
+            <a:ext cx="3108960" cy="411480"/>
+          </a:xfrm>
+          <a:prstGeom prst="rect">
+            <a:avLst/>
+          </a:prstGeom>
+          <a:noFill/>
+        </p:spPr>
+        <p:txBody>
+          <a:bodyPr wrap="square">
+            <a:spAutoFit/>
+          </a:bodyPr>
+          <a:lstStyle/>
+          <a:p>
+            <a:pPr>
+              <a:defRPr sz="1300" b="0">
                 <a:solidFill>
                   <a:srgbClr val="62727B"/>
                 </a:solidFill>
@@ -6142,6 +9547,78 @@
               </a:defRPr>
             </a:pPr>
             <a:r>
+              <a:t>追加負担も評価</a:t>
+            </a:r>
+          </a:p>
+        </p:txBody>
+      </p:sp>
+      <p:sp>
+        <p:nvSpPr>
+          <p:cNvPr id="17" name="TextBox 16"/>
+          <p:cNvSpPr txBox="1"/>
+          <p:nvPr/>
+        </p:nvSpPr>
+        <p:spPr>
+          <a:xfrm>
+            <a:off x="777240" y="5120640"/>
+            <a:ext cx="10698480" cy="502920"/>
+          </a:xfrm>
+          <a:prstGeom prst="rect">
+            <a:avLst/>
+          </a:prstGeom>
+          <a:noFill/>
+        </p:spPr>
+        <p:txBody>
+          <a:bodyPr wrap="square">
+            <a:spAutoFit/>
+          </a:bodyPr>
+          <a:lstStyle/>
+          <a:p>
+            <a:pPr>
+              <a:defRPr sz="1600" b="0">
+                <a:solidFill>
+                  <a:srgbClr val="62727B"/>
+                </a:solidFill>
+                <a:latin typeface="Yu Gothic"/>
+              </a:defRPr>
+            </a:pPr>
+            <a:r>
+              <a:t>対象業務と協力会社を選び、現状の費用・工数・品質を記録。</a:t>
+            </a:r>
+          </a:p>
+        </p:txBody>
+      </p:sp>
+      <p:sp>
+        <p:nvSpPr>
+          <p:cNvPr id="18" name="TextBox 17"/>
+          <p:cNvSpPr txBox="1"/>
+          <p:nvPr/>
+        </p:nvSpPr>
+        <p:spPr>
+          <a:xfrm>
+            <a:off x="594360" y="6080760"/>
+            <a:ext cx="10789920" cy="548640"/>
+          </a:xfrm>
+          <a:prstGeom prst="rect">
+            <a:avLst/>
+          </a:prstGeom>
+          <a:noFill/>
+        </p:spPr>
+        <p:txBody>
+          <a:bodyPr wrap="square">
+            <a:spAutoFit/>
+          </a:bodyPr>
+          <a:lstStyle/>
+          <a:p>
+            <a:pPr>
+              <a:defRPr sz="1000" b="0">
+                <a:solidFill>
+                  <a:srgbClr val="62727B"/>
+                </a:solidFill>
+                <a:latin typeface="Yu Gothic"/>
+              </a:defRPr>
+            </a:pPr>
+            <a:r>
               <a:t>成果を確認した手順を標準化し、対応地域・商材・施工業務へ展開。料金・契約方式・期間は協議して決定。</a:t>
             </a:r>
           </a:p>
@@ -6149,14 +9626,14 @@
       </p:sp>
       <p:sp>
         <p:nvSpPr>
-          <p:cNvPr id="9" name="TextBox 8"/>
-          <p:cNvSpPr txBox="1"/>
-          <p:nvPr/>
-        </p:nvSpPr>
-        <p:spPr>
-          <a:xfrm>
-            <a:off x="11018520" y="6446520"/>
-            <a:ext cx="594360" cy="274320"/>
+          <p:cNvPr id="19" name="TextBox 18"/>
+          <p:cNvSpPr txBox="1"/>
+          <p:nvPr/>
+        </p:nvSpPr>
+        <p:spPr>
+          <a:xfrm>
+            <a:off x="11201400" y="6446520"/>
+            <a:ext cx="457200" cy="228600"/>
           </a:xfrm>
           <a:prstGeom prst="rect">
             <a:avLst/>
